--- a/docs/public/course-assets/course-pptx/in-003.pptx
+++ b/docs/public/course-assets/course-pptx/in-003.pptx
@@ -2,25 +2,25 @@
 <file path=ppt/presentation.xml><?xml version="1.0" encoding="utf-8"?>
 <p:presentation xmlns:p="http://schemas.openxmlformats.org/presentationml/2006/main">
   <p:sldMasterIdLst>
-    <p:sldMasterId xmlns:r="http://schemas.openxmlformats.org/officeDocument/2006/relationships" id="2147483648" r:id="Rb82309b1b390470e"/>
+    <p:sldMasterId xmlns:r="http://schemas.openxmlformats.org/officeDocument/2006/relationships" id="2147483648" r:id="Ra5af5ef11fa94025"/>
   </p:sldMasterIdLst>
   <p:notesMasterIdLst>
-    <p:notesMasterId xmlns:r="http://schemas.openxmlformats.org/officeDocument/2006/relationships" r:id="R46bf1729d3044ecd"/>
+    <p:notesMasterId xmlns:r="http://schemas.openxmlformats.org/officeDocument/2006/relationships" r:id="Rca6a54f338634d1f"/>
   </p:notesMasterIdLst>
   <p:sldIdLst>
-    <p:sldId xmlns:r="http://schemas.openxmlformats.org/officeDocument/2006/relationships" id="256" r:id="R9e377f33d6864fdc"/>
-    <p:sldId xmlns:r="http://schemas.openxmlformats.org/officeDocument/2006/relationships" id="257" r:id="R974928b2d3a24ab4"/>
-    <p:sldId xmlns:r="http://schemas.openxmlformats.org/officeDocument/2006/relationships" id="258" r:id="R4fa516d14ce643d2"/>
-    <p:sldId xmlns:r="http://schemas.openxmlformats.org/officeDocument/2006/relationships" id="259" r:id="R2c1c646948ea4d82"/>
-    <p:sldId xmlns:r="http://schemas.openxmlformats.org/officeDocument/2006/relationships" id="260" r:id="Ra19b6fc8b9f249d8"/>
-    <p:sldId xmlns:r="http://schemas.openxmlformats.org/officeDocument/2006/relationships" id="261" r:id="R15f7164d37ee41d8"/>
-    <p:sldId xmlns:r="http://schemas.openxmlformats.org/officeDocument/2006/relationships" id="262" r:id="R3f1c5e87317e446b"/>
-    <p:sldId xmlns:r="http://schemas.openxmlformats.org/officeDocument/2006/relationships" id="263" r:id="Rda2999a553984d92"/>
-    <p:sldId xmlns:r="http://schemas.openxmlformats.org/officeDocument/2006/relationships" id="264" r:id="R7f9f997740f84554"/>
-    <p:sldId xmlns:r="http://schemas.openxmlformats.org/officeDocument/2006/relationships" id="265" r:id="R4dab30abda5d48a5"/>
-    <p:sldId xmlns:r="http://schemas.openxmlformats.org/officeDocument/2006/relationships" id="266" r:id="Re6628939f54f4b34"/>
-    <p:sldId xmlns:r="http://schemas.openxmlformats.org/officeDocument/2006/relationships" id="267" r:id="R589903f8379f4474"/>
-    <p:sldId xmlns:r="http://schemas.openxmlformats.org/officeDocument/2006/relationships" id="268" r:id="R1a10cbee7a8a4666"/>
+    <p:sldId xmlns:r="http://schemas.openxmlformats.org/officeDocument/2006/relationships" id="256" r:id="Rd3ca2aa0a8ab4382"/>
+    <p:sldId xmlns:r="http://schemas.openxmlformats.org/officeDocument/2006/relationships" id="257" r:id="Rd5dccd90a7ec4a6d"/>
+    <p:sldId xmlns:r="http://schemas.openxmlformats.org/officeDocument/2006/relationships" id="258" r:id="R369b4e5e676744aa"/>
+    <p:sldId xmlns:r="http://schemas.openxmlformats.org/officeDocument/2006/relationships" id="259" r:id="R10b606af57034958"/>
+    <p:sldId xmlns:r="http://schemas.openxmlformats.org/officeDocument/2006/relationships" id="260" r:id="R8ec38436481846bb"/>
+    <p:sldId xmlns:r="http://schemas.openxmlformats.org/officeDocument/2006/relationships" id="261" r:id="R99456c59fa274a28"/>
+    <p:sldId xmlns:r="http://schemas.openxmlformats.org/officeDocument/2006/relationships" id="262" r:id="Rbef9d66b95fc47ec"/>
+    <p:sldId xmlns:r="http://schemas.openxmlformats.org/officeDocument/2006/relationships" id="263" r:id="R2b4c1520b4c14617"/>
+    <p:sldId xmlns:r="http://schemas.openxmlformats.org/officeDocument/2006/relationships" id="264" r:id="Re103542d15ac49ad"/>
+    <p:sldId xmlns:r="http://schemas.openxmlformats.org/officeDocument/2006/relationships" id="265" r:id="R7d1cedddafb94e87"/>
+    <p:sldId xmlns:r="http://schemas.openxmlformats.org/officeDocument/2006/relationships" id="266" r:id="R3fb6d96949484001"/>
+    <p:sldId xmlns:r="http://schemas.openxmlformats.org/officeDocument/2006/relationships" id="267" r:id="R666fb1879a3842dd"/>
+    <p:sldId xmlns:r="http://schemas.openxmlformats.org/officeDocument/2006/relationships" id="268" r:id="R9d3e60e5665d4b79"/>
   </p:sldIdLst>
   <p:sldSz cx="12192000" cy="6858000"/>
   <p:notesSz cx="6858000" cy="9144000"/>
@@ -1405,7 +1405,7 @@
   </p:cSld>
   <p:clrMap bg1="lt1" tx1="dk1" bg2="lt2" tx2="dk2" accent1="accent1" accent2="accent2" accent3="accent3" accent4="accent4" accent5="accent5" accent6="accent6" hlink="hlink" folHlink="folHlink"/>
   <p:sldLayoutIdLst>
-    <p:sldLayoutId xmlns:r="http://schemas.openxmlformats.org/officeDocument/2006/relationships" id="2147483649" r:id="R5695f4b006f24cde"/>
+    <p:sldLayoutId xmlns:r="http://schemas.openxmlformats.org/officeDocument/2006/relationships" id="2147483649" r:id="Rb0c160685dbc4ee0"/>
   </p:sldLayoutIdLst>
   <p:txStyles>
     <p:titleStyle>
@@ -1956,7 +1956,7 @@
           <p:cNvPr id="1" name="cover-rule">
             <a:extLst xmlns:a="http://schemas.openxmlformats.org/drawingml/2006/main">
               <a:ext uri="{FF2B5EF4-FFF2-40B4-BE49-F238E27FC236}">
-                <a16:creationId xmlns:a16="http://schemas.microsoft.com/office/drawing/2014/main" id="{67B2931A-E331-4469-ABE5-A16E06DF3757}"/>
+                <a16:creationId xmlns:a16="http://schemas.microsoft.com/office/drawing/2014/main" id="{6F6D6D1C-7E1E-407F-A445-491BA4351708}"/>
               </a:ext>
             </a:extLst>
           </p:cNvPr>
@@ -1989,7 +1989,7 @@
           <p:cNvPr id="2" name="cover-ring-1">
             <a:extLst xmlns:a="http://schemas.openxmlformats.org/drawingml/2006/main">
               <a:ext uri="{FF2B5EF4-FFF2-40B4-BE49-F238E27FC236}">
-                <a16:creationId xmlns:a16="http://schemas.microsoft.com/office/drawing/2014/main" id="{AC9E380E-51B5-487C-B2B2-62CDA25D7FFD}"/>
+                <a16:creationId xmlns:a16="http://schemas.microsoft.com/office/drawing/2014/main" id="{D413AC14-F16F-4B1F-ABEF-3A3C0E770917}"/>
               </a:ext>
             </a:extLst>
           </p:cNvPr>
@@ -2020,7 +2020,7 @@
           <p:cNvPr id="3" name="cover-ring-2">
             <a:extLst xmlns:a="http://schemas.openxmlformats.org/drawingml/2006/main">
               <a:ext uri="{FF2B5EF4-FFF2-40B4-BE49-F238E27FC236}">
-                <a16:creationId xmlns:a16="http://schemas.microsoft.com/office/drawing/2014/main" id="{288B9942-67A3-4B1F-AF2B-40D14D76FA03}"/>
+                <a16:creationId xmlns:a16="http://schemas.microsoft.com/office/drawing/2014/main" id="{71775081-54ED-4437-8A70-57D0C3E11CC9}"/>
               </a:ext>
             </a:extLst>
           </p:cNvPr>
@@ -2051,7 +2051,7 @@
           <p:cNvPr id="4" name="cover-core">
             <a:extLst xmlns:a="http://schemas.openxmlformats.org/drawingml/2006/main">
               <a:ext uri="{FF2B5EF4-FFF2-40B4-BE49-F238E27FC236}">
-                <a16:creationId xmlns:a16="http://schemas.microsoft.com/office/drawing/2014/main" id="{E31D6A1C-F65A-4F22-B47A-DD79A507E3E8}"/>
+                <a16:creationId xmlns:a16="http://schemas.microsoft.com/office/drawing/2014/main" id="{DB27FDA3-F9FB-4528-83E3-BB0FB193C178}"/>
               </a:ext>
             </a:extLst>
           </p:cNvPr>
@@ -2084,7 +2084,7 @@
           <p:cNvPr id="5" name="cover-line-1">
             <a:extLst xmlns:a="http://schemas.openxmlformats.org/drawingml/2006/main">
               <a:ext uri="{FF2B5EF4-FFF2-40B4-BE49-F238E27FC236}">
-                <a16:creationId xmlns:a16="http://schemas.microsoft.com/office/drawing/2014/main" id="{234F32BE-667D-4D04-87B1-B73AF1A1CA99}"/>
+                <a16:creationId xmlns:a16="http://schemas.microsoft.com/office/drawing/2014/main" id="{50DA3100-FFA9-4AC5-80C3-DEA56011C439}"/>
               </a:ext>
             </a:extLst>
           </p:cNvPr>
@@ -2115,7 +2115,7 @@
           <p:cNvPr id="6" name="cover-line-2">
             <a:extLst xmlns:a="http://schemas.openxmlformats.org/drawingml/2006/main">
               <a:ext uri="{FF2B5EF4-FFF2-40B4-BE49-F238E27FC236}">
-                <a16:creationId xmlns:a16="http://schemas.microsoft.com/office/drawing/2014/main" id="{2B5589D1-8731-46CC-A83A-EC32EA44D461}"/>
+                <a16:creationId xmlns:a16="http://schemas.microsoft.com/office/drawing/2014/main" id="{F383220A-4EAE-4663-B7C2-BC09C8DE6A9D}"/>
               </a:ext>
             </a:extLst>
           </p:cNvPr>
@@ -2146,7 +2146,7 @@
           <p:cNvPr id="7" name="cover-eyebrow">
             <a:extLst xmlns:a="http://schemas.openxmlformats.org/drawingml/2006/main">
               <a:ext uri="{FF2B5EF4-FFF2-40B4-BE49-F238E27FC236}">
-                <a16:creationId xmlns:a16="http://schemas.microsoft.com/office/drawing/2014/main" id="{38AC3E41-9AE9-4133-91A6-D326A5A86E21}"/>
+                <a16:creationId xmlns:a16="http://schemas.microsoft.com/office/drawing/2014/main" id="{5A6F3B86-5C2A-459F-9381-3D512F24943E}"/>
               </a:ext>
             </a:extLst>
           </p:cNvPr>
@@ -2204,7 +2204,7 @@
           <p:cNvPr id="8" name="cover-title">
             <a:extLst xmlns:a="http://schemas.openxmlformats.org/drawingml/2006/main">
               <a:ext uri="{FF2B5EF4-FFF2-40B4-BE49-F238E27FC236}">
-                <a16:creationId xmlns:a16="http://schemas.microsoft.com/office/drawing/2014/main" id="{ABC49C0F-A95C-4571-BEF0-4037D7F205D5}"/>
+                <a16:creationId xmlns:a16="http://schemas.microsoft.com/office/drawing/2014/main" id="{AE5DFD2C-E711-481E-A966-1C0DDB3D200C}"/>
               </a:ext>
             </a:extLst>
           </p:cNvPr>
@@ -2262,7 +2262,7 @@
           <p:cNvPr id="9" name="cover-subtitle">
             <a:extLst xmlns:a="http://schemas.openxmlformats.org/drawingml/2006/main">
               <a:ext uri="{FF2B5EF4-FFF2-40B4-BE49-F238E27FC236}">
-                <a16:creationId xmlns:a16="http://schemas.microsoft.com/office/drawing/2014/main" id="{3571A456-0BD7-49B7-BC76-0C56BA9836B9}"/>
+                <a16:creationId xmlns:a16="http://schemas.microsoft.com/office/drawing/2014/main" id="{28DD87B0-0FA7-4D0C-B4A1-FB2B73F21346}"/>
               </a:ext>
             </a:extLst>
           </p:cNvPr>
@@ -2324,7 +2324,7 @@
           <p:cNvPr id="10" name="cover-lead">
             <a:extLst xmlns:a="http://schemas.openxmlformats.org/drawingml/2006/main">
               <a:ext uri="{FF2B5EF4-FFF2-40B4-BE49-F238E27FC236}">
-                <a16:creationId xmlns:a16="http://schemas.microsoft.com/office/drawing/2014/main" id="{B65901D8-BF68-4713-A6CE-DA91C51DD6E2}"/>
+                <a16:creationId xmlns:a16="http://schemas.microsoft.com/office/drawing/2014/main" id="{98F6FBF4-88D5-494B-97B4-3799671DEB78}"/>
               </a:ext>
             </a:extLst>
           </p:cNvPr>
@@ -2349,7 +2349,7 @@
         </p:spPr>
         <p:txBody>
           <a:bodyPr xmlns:a="http://schemas.openxmlformats.org/drawingml/2006/main" lIns="0" tIns="0" rIns="0" bIns="0" anchor="t">
-            <a:normAutofit fontScale="80988"/>
+            <a:normAutofit fontScale="89917"/>
           </a:bodyPr>
           <a:lstStyle xmlns:a="http://schemas.openxmlformats.org/drawingml/2006/main"/>
           <a:p xmlns:a="http://schemas.openxmlformats.org/drawingml/2006/main">
@@ -2372,7 +2372,7 @@
                 <a:ea typeface="PingFang SC"/>
                 <a:cs typeface="PingFang SC"/>
               </a:rPr>
-              <a:t>公共服务中的 AI 可能缩短资料查找和群众等待时间，但它面对的不是抽象问题，而是具体的人、地区、政策版本和权益。一次看似细小的适用条件错误，可能让群众错过办理期限；一次过度收集…</a:t>
+              <a:t>公共服务中的 AI 可能缩短资料查找和群众等待时间；但它面对的不是抽象问题；而是具体的人、地区、政策版本和权益；一次看似细小的适用条件错误；可能让群众错过办理期限</a:t>
             </a:r>
           </a:p>
         </p:txBody>
@@ -2382,7 +2382,7 @@
           <p:cNvPr id="11" name="cover-course">
             <a:extLst xmlns:a="http://schemas.openxmlformats.org/drawingml/2006/main">
               <a:ext uri="{FF2B5EF4-FFF2-40B4-BE49-F238E27FC236}">
-                <a16:creationId xmlns:a16="http://schemas.microsoft.com/office/drawing/2014/main" id="{1BD4CB42-5642-46B1-AFBE-82E9AFE58007}"/>
+                <a16:creationId xmlns:a16="http://schemas.microsoft.com/office/drawing/2014/main" id="{31BB7466-CF80-47B6-A82B-279D54033885}"/>
               </a:ext>
             </a:extLst>
           </p:cNvPr>
@@ -2440,7 +2440,7 @@
           <p:cNvPr id="12" name="cover-id">
             <a:extLst xmlns:a="http://schemas.openxmlformats.org/drawingml/2006/main">
               <a:ext uri="{FF2B5EF4-FFF2-40B4-BE49-F238E27FC236}">
-                <a16:creationId xmlns:a16="http://schemas.microsoft.com/office/drawing/2014/main" id="{06A2B32F-B5CE-46F9-B663-22C2787329E5}"/>
+                <a16:creationId xmlns:a16="http://schemas.microsoft.com/office/drawing/2014/main" id="{D877C55E-BB7D-400D-BA92-75BA9D457F59}"/>
               </a:ext>
             </a:extLst>
           </p:cNvPr>
@@ -2496,7 +2496,7 @@
     </p:spTree>
     <p:extLst>
       <p:ext uri="{BB962C8B-B14F-4D97-AF65-F5344CB8AC3E}">
-        <p14:creationId xmlns:p14="http://schemas.microsoft.com/office/powerpoint/2010/main" val="715318838"/>
+        <p14:creationId xmlns:p14="http://schemas.microsoft.com/office/powerpoint/2010/main" val="631022897"/>
       </p:ext>
     </p:extLst>
   </p:cSld>
@@ -2527,7 +2527,7 @@
           <p:cNvPr id="1" name="s10-rule">
             <a:extLst xmlns:a="http://schemas.openxmlformats.org/drawingml/2006/main">
               <a:ext uri="{FF2B5EF4-FFF2-40B4-BE49-F238E27FC236}">
-                <a16:creationId xmlns:a16="http://schemas.microsoft.com/office/drawing/2014/main" id="{E0C38D4B-BF31-4212-90F9-17413570E5DB}"/>
+                <a16:creationId xmlns:a16="http://schemas.microsoft.com/office/drawing/2014/main" id="{8C4F8193-CDC7-4422-98FD-60E8BE475461}"/>
               </a:ext>
             </a:extLst>
           </p:cNvPr>
@@ -2560,7 +2560,7 @@
           <p:cNvPr id="2" name="s10-eyebrow">
             <a:extLst xmlns:a="http://schemas.openxmlformats.org/drawingml/2006/main">
               <a:ext uri="{FF2B5EF4-FFF2-40B4-BE49-F238E27FC236}">
-                <a16:creationId xmlns:a16="http://schemas.microsoft.com/office/drawing/2014/main" id="{C438028F-0065-4536-BA1E-67BCF2AB4D60}"/>
+                <a16:creationId xmlns:a16="http://schemas.microsoft.com/office/drawing/2014/main" id="{2BBB54B7-6EAB-42AA-8003-736E14E0DE1C}"/>
               </a:ext>
             </a:extLst>
           </p:cNvPr>
@@ -2618,7 +2618,7 @@
           <p:cNvPr id="3" name="s10-title">
             <a:extLst xmlns:a="http://schemas.openxmlformats.org/drawingml/2006/main">
               <a:ext uri="{FF2B5EF4-FFF2-40B4-BE49-F238E27FC236}">
-                <a16:creationId xmlns:a16="http://schemas.microsoft.com/office/drawing/2014/main" id="{77E0D867-04BF-4C7B-8326-F2B71B41FDE0}"/>
+                <a16:creationId xmlns:a16="http://schemas.microsoft.com/office/drawing/2014/main" id="{3B473629-BAD8-4BDC-A2F0-11ECA6386865}"/>
               </a:ext>
             </a:extLst>
           </p:cNvPr>
@@ -2666,7 +2666,7 @@
                 <a:ea typeface="PingFang SC"/>
                 <a:cs typeface="PingFang SC"/>
               </a:rPr>
-              <a:t>基层诉求分流必须经过边界验证</a:t>
+              <a:t>诉求分流先保留原始证据，再交责任岗位</a:t>
             </a:r>
           </a:p>
         </p:txBody>
@@ -2676,7 +2676,7 @@
           <p:cNvPr id="4" name="s10-footer">
             <a:extLst xmlns:a="http://schemas.openxmlformats.org/drawingml/2006/main">
               <a:ext uri="{FF2B5EF4-FFF2-40B4-BE49-F238E27FC236}">
-                <a16:creationId xmlns:a16="http://schemas.microsoft.com/office/drawing/2014/main" id="{70AB11F8-06D7-4AE2-97F8-214E5DA3A3C8}"/>
+                <a16:creationId xmlns:a16="http://schemas.microsoft.com/office/drawing/2014/main" id="{C2747FD6-E989-4948-A181-61C279779235}"/>
               </a:ext>
             </a:extLst>
           </p:cNvPr>
@@ -2707,7 +2707,7 @@
           <p:cNvPr id="5" name="s10-identity">
             <a:extLst xmlns:a="http://schemas.openxmlformats.org/drawingml/2006/main">
               <a:ext uri="{FF2B5EF4-FFF2-40B4-BE49-F238E27FC236}">
-                <a16:creationId xmlns:a16="http://schemas.microsoft.com/office/drawing/2014/main" id="{1BFC975C-C69F-4A6E-A0A4-E3A56172C106}"/>
+                <a16:creationId xmlns:a16="http://schemas.microsoft.com/office/drawing/2014/main" id="{CACAF826-6C79-4404-BE78-AD06B03CB0D3}"/>
               </a:ext>
             </a:extLst>
           </p:cNvPr>
@@ -2765,7 +2765,7 @@
           <p:cNvPr id="6" name="case-title">
             <a:extLst xmlns:a="http://schemas.openxmlformats.org/drawingml/2006/main">
               <a:ext uri="{FF2B5EF4-FFF2-40B4-BE49-F238E27FC236}">
-                <a16:creationId xmlns:a16="http://schemas.microsoft.com/office/drawing/2014/main" id="{659FB6B8-B6AA-4343-9619-C72C96295710}"/>
+                <a16:creationId xmlns:a16="http://schemas.microsoft.com/office/drawing/2014/main" id="{730AD3E9-979F-4E43-BD53-F4F7D52EE9C4}"/>
               </a:ext>
             </a:extLst>
           </p:cNvPr>
@@ -2829,23 +2829,23 @@
           <p:cNvPr id="7" name="case-row-0">
             <a:extLst xmlns:a="http://schemas.openxmlformats.org/drawingml/2006/main">
               <a:ext uri="{FF2B5EF4-FFF2-40B4-BE49-F238E27FC236}">
-                <a16:creationId xmlns:a16="http://schemas.microsoft.com/office/drawing/2014/main" id="{B4B4B479-5DAC-41FA-9C59-F3185822EE0E}"/>
-              </a:ext>
-            </a:extLst>
-          </p:cNvPr>
-          <p:cNvSpPr>
-            <a:spLocks xmlns:a="http://schemas.openxmlformats.org/drawingml/2006/main" noGrp="1"/>
-          </p:cNvSpPr>
-          <p:nvPr/>
-        </p:nvSpPr>
-        <p:spPr>
-          <a:xfrm xmlns:a="http://schemas.openxmlformats.org/drawingml/2006/main">
-            <a:off x="4286250" y="2228850"/>
-            <a:ext cx="6534150" cy="1238250"/>
+                <a16:creationId xmlns:a16="http://schemas.microsoft.com/office/drawing/2014/main" id="{682FAE76-5F49-41D1-ACE4-8D9CD2AA812A}"/>
+              </a:ext>
+            </a:extLst>
+          </p:cNvPr>
+          <p:cNvSpPr>
+            <a:spLocks xmlns:a="http://schemas.openxmlformats.org/drawingml/2006/main" noGrp="1"/>
+          </p:cNvSpPr>
+          <p:nvPr/>
+        </p:nvSpPr>
+        <p:spPr>
+          <a:xfrm xmlns:a="http://schemas.openxmlformats.org/drawingml/2006/main">
+            <a:off x="4286250" y="2057400"/>
+            <a:ext cx="6534150" cy="838200"/>
           </a:xfrm>
           <a:prstGeom xmlns:a="http://schemas.openxmlformats.org/drawingml/2006/main" prst="roundRect">
             <a:avLst>
-              <a:gd name="adj" fmla="val 10000"/>
+              <a:gd name="adj" fmla="val 14773"/>
             </a:avLst>
           </a:prstGeom>
           <a:solidFill xmlns:a="http://schemas.openxmlformats.org/drawingml/2006/main">
@@ -2893,23 +2893,87 @@
           <p:cNvPr id="8" name="case-row-1">
             <a:extLst xmlns:a="http://schemas.openxmlformats.org/drawingml/2006/main">
               <a:ext uri="{FF2B5EF4-FFF2-40B4-BE49-F238E27FC236}">
-                <a16:creationId xmlns:a16="http://schemas.microsoft.com/office/drawing/2014/main" id="{C347F1DC-7C87-4ABE-9166-576ADCBE3C68}"/>
-              </a:ext>
-            </a:extLst>
-          </p:cNvPr>
-          <p:cNvSpPr>
-            <a:spLocks xmlns:a="http://schemas.openxmlformats.org/drawingml/2006/main" noGrp="1"/>
-          </p:cNvSpPr>
-          <p:nvPr/>
-        </p:nvSpPr>
-        <p:spPr>
-          <a:xfrm xmlns:a="http://schemas.openxmlformats.org/drawingml/2006/main">
-            <a:off x="4286250" y="3714750"/>
-            <a:ext cx="6534150" cy="1238250"/>
+                <a16:creationId xmlns:a16="http://schemas.microsoft.com/office/drawing/2014/main" id="{BC2BE35F-D7F5-48FF-80EE-F57D17B35269}"/>
+              </a:ext>
+            </a:extLst>
+          </p:cNvPr>
+          <p:cNvSpPr>
+            <a:spLocks xmlns:a="http://schemas.openxmlformats.org/drawingml/2006/main" noGrp="1"/>
+          </p:cNvSpPr>
+          <p:nvPr/>
+        </p:nvSpPr>
+        <p:spPr>
+          <a:xfrm xmlns:a="http://schemas.openxmlformats.org/drawingml/2006/main">
+            <a:off x="4286250" y="3086100"/>
+            <a:ext cx="6534150" cy="838200"/>
           </a:xfrm>
           <a:prstGeom xmlns:a="http://schemas.openxmlformats.org/drawingml/2006/main" prst="roundRect">
             <a:avLst>
-              <a:gd name="adj" fmla="val 10000"/>
+              <a:gd name="adj" fmla="val 14773"/>
+            </a:avLst>
+          </a:prstGeom>
+          <a:solidFill xmlns:a="http://schemas.openxmlformats.org/drawingml/2006/main">
+            <a:srgbClr val="FFFFFF"/>
+          </a:solidFill>
+          <a:ln xmlns:a="http://schemas.openxmlformats.org/drawingml/2006/main" w="9525">
+            <a:solidFill>
+              <a:srgbClr val="D8E0E8"/>
+            </a:solidFill>
+            <a:prstDash val="solid"/>
+          </a:ln>
+        </p:spPr>
+        <p:txBody>
+          <a:bodyPr xmlns:a="http://schemas.openxmlformats.org/drawingml/2006/main" lIns="152400" tIns="133350" rIns="152400" bIns="133350" anchor="ctr">
+            <a:normAutofit fontScale="100000"/>
+          </a:bodyPr>
+          <a:lstStyle xmlns:a="http://schemas.openxmlformats.org/drawingml/2006/main"/>
+          <a:p xmlns:a="http://schemas.openxmlformats.org/drawingml/2006/main">
+            <a:pPr algn="l">
+              <a:defRPr sz="1575" b="0">
+                <a:solidFill>
+                  <a:srgbClr val="10233F"/>
+                </a:solidFill>
+                <a:latin typeface="PingFang SC"/>
+                <a:ea typeface="PingFang SC"/>
+                <a:cs typeface="PingFang SC"/>
+              </a:defRPr>
+            </a:pPr>
+            <a:r>
+              <a:rPr sz="1575" b="0">
+                <a:solidFill>
+                  <a:srgbClr val="10233F"/>
+                </a:solidFill>
+                <a:latin typeface="PingFang SC"/>
+                <a:ea typeface="PingFang SC"/>
+                <a:cs typeface="PingFang SC"/>
+              </a:rPr>
+              <a:t>流程｜系统提取事项、地点和紧急程度，隐藏不必要的个人信息，将摘要和原始证据一并送到对应岗位</a:t>
+            </a:r>
+          </a:p>
+        </p:txBody>
+      </p:sp>
+      <p:sp>
+        <p:nvSpPr>
+          <p:cNvPr id="9" name="case-row-2">
+            <a:extLst xmlns:a="http://schemas.openxmlformats.org/drawingml/2006/main">
+              <a:ext uri="{FF2B5EF4-FFF2-40B4-BE49-F238E27FC236}">
+                <a16:creationId xmlns:a16="http://schemas.microsoft.com/office/drawing/2014/main" id="{49236130-2052-42E0-9A39-4BF14644A806}"/>
+              </a:ext>
+            </a:extLst>
+          </p:cNvPr>
+          <p:cNvSpPr>
+            <a:spLocks xmlns:a="http://schemas.openxmlformats.org/drawingml/2006/main" noGrp="1"/>
+          </p:cNvSpPr>
+          <p:nvPr/>
+        </p:nvSpPr>
+        <p:spPr>
+          <a:xfrm xmlns:a="http://schemas.openxmlformats.org/drawingml/2006/main">
+            <a:off x="4286250" y="4114800"/>
+            <a:ext cx="6534150" cy="838200"/>
+          </a:xfrm>
+          <a:prstGeom xmlns:a="http://schemas.openxmlformats.org/drawingml/2006/main" prst="roundRect">
+            <a:avLst>
+              <a:gd name="adj" fmla="val 14773"/>
             </a:avLst>
           </a:prstGeom>
           <a:solidFill xmlns:a="http://schemas.openxmlformats.org/drawingml/2006/main">
@@ -2917,7 +2981,7 @@
           </a:solidFill>
           <a:ln xmlns:a="http://schemas.openxmlformats.org/drawingml/2006/main" w="9525">
             <a:solidFill>
-              <a:srgbClr val="E5783F"/>
+              <a:srgbClr val="9A3F16"/>
             </a:solidFill>
             <a:prstDash val="solid"/>
           </a:ln>
@@ -2947,17 +3011,17 @@
                 <a:ea typeface="PingFang SC"/>
                 <a:cs typeface="PingFang SC"/>
               </a:rPr>
-              <a:t>验证｜验收“基层诉求分流”时，要同时记录适用场景、证据来源、失败条件与人工责任</a:t>
-            </a:r>
-          </a:p>
-        </p:txBody>
-      </p:sp>
-      <p:sp>
-        <p:nvSpPr>
-          <p:cNvPr id="9" name="s10-takeaway-rule">
-            <a:extLst xmlns:a="http://schemas.openxmlformats.org/drawingml/2006/main">
-              <a:ext uri="{FF2B5EF4-FFF2-40B4-BE49-F238E27FC236}">
-                <a16:creationId xmlns:a16="http://schemas.microsoft.com/office/drawing/2014/main" id="{22A3282E-B4D5-49C5-832B-921D5334D3D0}"/>
+              <a:t>责任｜系统不直接认定责任或关闭事项；工作人员核对原始材料、联系当事人并决定处理路径</a:t>
+            </a:r>
+          </a:p>
+        </p:txBody>
+      </p:sp>
+      <p:sp>
+        <p:nvSpPr>
+          <p:cNvPr id="10" name="s10-takeaway-rule">
+            <a:extLst xmlns:a="http://schemas.openxmlformats.org/drawingml/2006/main">
+              <a:ext uri="{FF2B5EF4-FFF2-40B4-BE49-F238E27FC236}">
+                <a16:creationId xmlns:a16="http://schemas.microsoft.com/office/drawing/2014/main" id="{375C1FCF-367E-41C5-84CF-C88081D08AF6}"/>
               </a:ext>
             </a:extLst>
           </p:cNvPr>
@@ -2987,10 +3051,10 @@
       </p:sp>
       <p:sp>
         <p:nvSpPr>
-          <p:cNvPr id="10" name="s10-takeaway">
-            <a:extLst xmlns:a="http://schemas.openxmlformats.org/drawingml/2006/main">
-              <a:ext uri="{FF2B5EF4-FFF2-40B4-BE49-F238E27FC236}">
-                <a16:creationId xmlns:a16="http://schemas.microsoft.com/office/drawing/2014/main" id="{CF7BB160-2F6E-48A9-B466-892B6817B4AA}"/>
+          <p:cNvPr id="11" name="s10-takeaway">
+            <a:extLst xmlns:a="http://schemas.openxmlformats.org/drawingml/2006/main">
+              <a:ext uri="{FF2B5EF4-FFF2-40B4-BE49-F238E27FC236}">
+                <a16:creationId xmlns:a16="http://schemas.microsoft.com/office/drawing/2014/main" id="{2CF4359A-7C28-41E1-B992-947D8FDAEB14}"/>
               </a:ext>
             </a:extLst>
           </p:cNvPr>
@@ -3038,7 +3102,7 @@
                 <a:ea typeface="PingFang SC"/>
                 <a:cs typeface="PingFang SC"/>
               </a:rPr>
-              <a:t>基层诉求分流必须经过边界验证</a:t>
+              <a:t>诉求分流先保留原始证据，再交责任岗位</a:t>
             </a:r>
           </a:p>
         </p:txBody>
@@ -3046,7 +3110,7 @@
     </p:spTree>
     <p:extLst>
       <p:ext uri="{BB962C8B-B14F-4D97-AF65-F5344CB8AC3E}">
-        <p14:creationId xmlns:p14="http://schemas.microsoft.com/office/powerpoint/2010/main" val="620470101"/>
+        <p14:creationId xmlns:p14="http://schemas.microsoft.com/office/powerpoint/2010/main" val="1561037286"/>
       </p:ext>
     </p:extLst>
   </p:cSld>
@@ -3077,7 +3141,7 @@
           <p:cNvPr id="1" name="s11-rule">
             <a:extLst xmlns:a="http://schemas.openxmlformats.org/drawingml/2006/main">
               <a:ext uri="{FF2B5EF4-FFF2-40B4-BE49-F238E27FC236}">
-                <a16:creationId xmlns:a16="http://schemas.microsoft.com/office/drawing/2014/main" id="{5D7E9B57-0C55-4BEE-8D87-578D460421EF}"/>
+                <a16:creationId xmlns:a16="http://schemas.microsoft.com/office/drawing/2014/main" id="{7C0D0E2C-9928-48DD-BD7F-C7B5F9602A27}"/>
               </a:ext>
             </a:extLst>
           </p:cNvPr>
@@ -3110,7 +3174,7 @@
           <p:cNvPr id="2" name="s11-eyebrow">
             <a:extLst xmlns:a="http://schemas.openxmlformats.org/drawingml/2006/main">
               <a:ext uri="{FF2B5EF4-FFF2-40B4-BE49-F238E27FC236}">
-                <a16:creationId xmlns:a16="http://schemas.microsoft.com/office/drawing/2014/main" id="{C4864021-9642-49EA-B49F-7678E417FF03}"/>
+                <a16:creationId xmlns:a16="http://schemas.microsoft.com/office/drawing/2014/main" id="{A9E6C206-5F34-4D70-9075-BE778A279927}"/>
               </a:ext>
             </a:extLst>
           </p:cNvPr>
@@ -3168,7 +3232,7 @@
           <p:cNvPr id="3" name="s11-title">
             <a:extLst xmlns:a="http://schemas.openxmlformats.org/drawingml/2006/main">
               <a:ext uri="{FF2B5EF4-FFF2-40B4-BE49-F238E27FC236}">
-                <a16:creationId xmlns:a16="http://schemas.microsoft.com/office/drawing/2014/main" id="{DBB7C97A-2117-455F-AFA8-BC4B6562A1B7}"/>
+                <a16:creationId xmlns:a16="http://schemas.microsoft.com/office/drawing/2014/main" id="{FECB9136-76F0-4154-98EE-690FAF75E0DA}"/>
               </a:ext>
             </a:extLst>
           </p:cNvPr>
@@ -3216,7 +3280,7 @@
                 <a:ea typeface="PingFang SC"/>
                 <a:cs typeface="PingFang SC"/>
               </a:rPr>
-              <a:t>把方法落实为可验证的行动</a:t>
+              <a:t>政务与乡村振兴：一次可验收练习</a:t>
             </a:r>
           </a:p>
         </p:txBody>
@@ -3226,7 +3290,7 @@
           <p:cNvPr id="4" name="s11-footer">
             <a:extLst xmlns:a="http://schemas.openxmlformats.org/drawingml/2006/main">
               <a:ext uri="{FF2B5EF4-FFF2-40B4-BE49-F238E27FC236}">
-                <a16:creationId xmlns:a16="http://schemas.microsoft.com/office/drawing/2014/main" id="{EF18EAFE-33C1-4458-A7BE-1B15503E4386}"/>
+                <a16:creationId xmlns:a16="http://schemas.microsoft.com/office/drawing/2014/main" id="{F26C1F9B-ACB1-4BEB-B0C8-0D2666D9464B}"/>
               </a:ext>
             </a:extLst>
           </p:cNvPr>
@@ -3257,7 +3321,7 @@
           <p:cNvPr id="5" name="s11-identity">
             <a:extLst xmlns:a="http://schemas.openxmlformats.org/drawingml/2006/main">
               <a:ext uri="{FF2B5EF4-FFF2-40B4-BE49-F238E27FC236}">
-                <a16:creationId xmlns:a16="http://schemas.microsoft.com/office/drawing/2014/main" id="{5B21C36C-6EE6-4E93-A2FA-A27CE45059DA}"/>
+                <a16:creationId xmlns:a16="http://schemas.microsoft.com/office/drawing/2014/main" id="{3203AE69-CEAD-4682-9E09-67D13BFDB8BC}"/>
               </a:ext>
             </a:extLst>
           </p:cNvPr>
@@ -3315,7 +3379,7 @@
           <p:cNvPr id="6" name="practice-circle-0">
             <a:extLst xmlns:a="http://schemas.openxmlformats.org/drawingml/2006/main">
               <a:ext uri="{FF2B5EF4-FFF2-40B4-BE49-F238E27FC236}">
-                <a16:creationId xmlns:a16="http://schemas.microsoft.com/office/drawing/2014/main" id="{3C513C39-409E-4B44-B690-DE4D3D4A0F4B}"/>
+                <a16:creationId xmlns:a16="http://schemas.microsoft.com/office/drawing/2014/main" id="{37ACDAEC-F1AF-4469-A690-AC1DC1B54C76}"/>
               </a:ext>
             </a:extLst>
           </p:cNvPr>
@@ -3348,7 +3412,7 @@
           <p:cNvPr id="7" name="practice-number-0">
             <a:extLst xmlns:a="http://schemas.openxmlformats.org/drawingml/2006/main">
               <a:ext uri="{FF2B5EF4-FFF2-40B4-BE49-F238E27FC236}">
-                <a16:creationId xmlns:a16="http://schemas.microsoft.com/office/drawing/2014/main" id="{8101BEAF-CE24-42AC-8A7B-6AC5D233A171}"/>
+                <a16:creationId xmlns:a16="http://schemas.microsoft.com/office/drawing/2014/main" id="{9763A4E4-2F23-4DBC-98F9-7645CE9537BF}"/>
               </a:ext>
             </a:extLst>
           </p:cNvPr>
@@ -3406,7 +3470,7 @@
           <p:cNvPr id="8" name="practice-item-0">
             <a:extLst xmlns:a="http://schemas.openxmlformats.org/drawingml/2006/main">
               <a:ext uri="{FF2B5EF4-FFF2-40B4-BE49-F238E27FC236}">
-                <a16:creationId xmlns:a16="http://schemas.microsoft.com/office/drawing/2014/main" id="{DDC4712E-C1FB-4795-8D0E-FE65587DCE06}"/>
+                <a16:creationId xmlns:a16="http://schemas.microsoft.com/office/drawing/2014/main" id="{28B939E4-900C-4F73-8F48-E5B4BDE72E29}"/>
               </a:ext>
             </a:extLst>
           </p:cNvPr>
@@ -3470,7 +3534,7 @@
           <p:cNvPr id="9" name="practice-connector-0">
             <a:extLst xmlns:a="http://schemas.openxmlformats.org/drawingml/2006/main">
               <a:ext uri="{FF2B5EF4-FFF2-40B4-BE49-F238E27FC236}">
-                <a16:creationId xmlns:a16="http://schemas.microsoft.com/office/drawing/2014/main" id="{3D021FD7-8D04-4735-9264-FA9FD12FD81F}"/>
+                <a16:creationId xmlns:a16="http://schemas.microsoft.com/office/drawing/2014/main" id="{994E3E98-16C1-4A1E-AA84-11B558A44A18}"/>
               </a:ext>
             </a:extLst>
           </p:cNvPr>
@@ -3490,7 +3554,7 @@
           <a:noFill xmlns:a="http://schemas.openxmlformats.org/drawingml/2006/main"/>
           <a:ln xmlns:a="http://schemas.openxmlformats.org/drawingml/2006/main" w="28575">
             <a:solidFill>
-              <a:srgbClr val="E5783F"/>
+              <a:srgbClr val="9A3F16"/>
             </a:solidFill>
             <a:prstDash val="solid"/>
           </a:ln>
@@ -3501,7 +3565,7 @@
           <p:cNvPr id="10" name="practice-circle-1">
             <a:extLst xmlns:a="http://schemas.openxmlformats.org/drawingml/2006/main">
               <a:ext uri="{FF2B5EF4-FFF2-40B4-BE49-F238E27FC236}">
-                <a16:creationId xmlns:a16="http://schemas.microsoft.com/office/drawing/2014/main" id="{92C97A15-4658-4734-B278-771CA61B22D1}"/>
+                <a16:creationId xmlns:a16="http://schemas.microsoft.com/office/drawing/2014/main" id="{1A9E6A83-30BB-477F-92F2-4E3F94A9CCF6}"/>
               </a:ext>
             </a:extLst>
           </p:cNvPr>
@@ -3534,7 +3598,7 @@
           <p:cNvPr id="11" name="practice-number-1">
             <a:extLst xmlns:a="http://schemas.openxmlformats.org/drawingml/2006/main">
               <a:ext uri="{FF2B5EF4-FFF2-40B4-BE49-F238E27FC236}">
-                <a16:creationId xmlns:a16="http://schemas.microsoft.com/office/drawing/2014/main" id="{47DFF1CD-AE0C-4C8D-AA6E-849153EDBF67}"/>
+                <a16:creationId xmlns:a16="http://schemas.microsoft.com/office/drawing/2014/main" id="{842298DF-8945-4F26-881B-D3FF51EAF470}"/>
               </a:ext>
             </a:extLst>
           </p:cNvPr>
@@ -3592,7 +3656,7 @@
           <p:cNvPr id="12" name="practice-item-1">
             <a:extLst xmlns:a="http://schemas.openxmlformats.org/drawingml/2006/main">
               <a:ext uri="{FF2B5EF4-FFF2-40B4-BE49-F238E27FC236}">
-                <a16:creationId xmlns:a16="http://schemas.microsoft.com/office/drawing/2014/main" id="{8833DAA0-D719-40C9-B067-8CC9352F78A7}"/>
+                <a16:creationId xmlns:a16="http://schemas.microsoft.com/office/drawing/2014/main" id="{9459A153-DFE6-460B-932E-CD24A04AFAB8}"/>
               </a:ext>
             </a:extLst>
           </p:cNvPr>
@@ -3656,7 +3720,7 @@
           <p:cNvPr id="13" name="practice-connector-1">
             <a:extLst xmlns:a="http://schemas.openxmlformats.org/drawingml/2006/main">
               <a:ext uri="{FF2B5EF4-FFF2-40B4-BE49-F238E27FC236}">
-                <a16:creationId xmlns:a16="http://schemas.microsoft.com/office/drawing/2014/main" id="{6D039FAB-D9CF-4E54-8881-26A5135287C0}"/>
+                <a16:creationId xmlns:a16="http://schemas.microsoft.com/office/drawing/2014/main" id="{AFAD9561-C908-459C-BB75-C64F2E397CB6}"/>
               </a:ext>
             </a:extLst>
           </p:cNvPr>
@@ -3676,7 +3740,7 @@
           <a:noFill xmlns:a="http://schemas.openxmlformats.org/drawingml/2006/main"/>
           <a:ln xmlns:a="http://schemas.openxmlformats.org/drawingml/2006/main" w="28575">
             <a:solidFill>
-              <a:srgbClr val="E5783F"/>
+              <a:srgbClr val="9A3F16"/>
             </a:solidFill>
             <a:prstDash val="solid"/>
           </a:ln>
@@ -3687,7 +3751,7 @@
           <p:cNvPr id="14" name="practice-circle-2">
             <a:extLst xmlns:a="http://schemas.openxmlformats.org/drawingml/2006/main">
               <a:ext uri="{FF2B5EF4-FFF2-40B4-BE49-F238E27FC236}">
-                <a16:creationId xmlns:a16="http://schemas.microsoft.com/office/drawing/2014/main" id="{8DE65DB0-0491-4A35-83C2-A4672434CFCD}"/>
+                <a16:creationId xmlns:a16="http://schemas.microsoft.com/office/drawing/2014/main" id="{A3C703CB-32FE-45E5-87D2-CCFE7DA33977}"/>
               </a:ext>
             </a:extLst>
           </p:cNvPr>
@@ -3705,7 +3769,7 @@
             <a:avLst/>
           </a:prstGeom>
           <a:solidFill xmlns:a="http://schemas.openxmlformats.org/drawingml/2006/main">
-            <a:srgbClr val="E5783F"/>
+            <a:srgbClr val="9A3F16"/>
           </a:solidFill>
           <a:ln xmlns:a="http://schemas.openxmlformats.org/drawingml/2006/main" w="28575">
             <a:solidFill>
@@ -3720,7 +3784,7 @@
           <p:cNvPr id="15" name="practice-number-2">
             <a:extLst xmlns:a="http://schemas.openxmlformats.org/drawingml/2006/main">
               <a:ext uri="{FF2B5EF4-FFF2-40B4-BE49-F238E27FC236}">
-                <a16:creationId xmlns:a16="http://schemas.microsoft.com/office/drawing/2014/main" id="{0A74F913-9340-438C-8FAA-CAAEFF1602C3}"/>
+                <a16:creationId xmlns:a16="http://schemas.microsoft.com/office/drawing/2014/main" id="{22E9F71D-F021-452E-8FDD-19AA4E8F0301}"/>
               </a:ext>
             </a:extLst>
           </p:cNvPr>
@@ -3778,7 +3842,7 @@
           <p:cNvPr id="16" name="practice-item-2">
             <a:extLst xmlns:a="http://schemas.openxmlformats.org/drawingml/2006/main">
               <a:ext uri="{FF2B5EF4-FFF2-40B4-BE49-F238E27FC236}">
-                <a16:creationId xmlns:a16="http://schemas.microsoft.com/office/drawing/2014/main" id="{E26595B9-C8ED-48E0-B54F-98287759CE16}"/>
+                <a16:creationId xmlns:a16="http://schemas.microsoft.com/office/drawing/2014/main" id="{43B3B583-5AAB-4754-8417-137D08E61A9E}"/>
               </a:ext>
             </a:extLst>
           </p:cNvPr>
@@ -3802,7 +3866,7 @@
           </a:solidFill>
           <a:ln xmlns:a="http://schemas.openxmlformats.org/drawingml/2006/main" w="19050">
             <a:solidFill>
-              <a:srgbClr val="E5783F"/>
+              <a:srgbClr val="9A3F16"/>
             </a:solidFill>
             <a:prstDash val="solid"/>
           </a:ln>
@@ -3840,7 +3904,7 @@
     </p:spTree>
     <p:extLst>
       <p:ext uri="{BB962C8B-B14F-4D97-AF65-F5344CB8AC3E}">
-        <p14:creationId xmlns:p14="http://schemas.microsoft.com/office/powerpoint/2010/main" val="353234938"/>
+        <p14:creationId xmlns:p14="http://schemas.microsoft.com/office/powerpoint/2010/main" val="1464592716"/>
       </p:ext>
     </p:extLst>
   </p:cSld>
@@ -3871,7 +3935,7 @@
           <p:cNvPr id="1" name="s12-rule">
             <a:extLst xmlns:a="http://schemas.openxmlformats.org/drawingml/2006/main">
               <a:ext uri="{FF2B5EF4-FFF2-40B4-BE49-F238E27FC236}">
-                <a16:creationId xmlns:a16="http://schemas.microsoft.com/office/drawing/2014/main" id="{60E12B9C-CAF3-498C-ACEB-DCBA56020F90}"/>
+                <a16:creationId xmlns:a16="http://schemas.microsoft.com/office/drawing/2014/main" id="{76DCBAE3-7637-496C-918E-F312C2E75E54}"/>
               </a:ext>
             </a:extLst>
           </p:cNvPr>
@@ -3904,7 +3968,7 @@
           <p:cNvPr id="2" name="s12-eyebrow">
             <a:extLst xmlns:a="http://schemas.openxmlformats.org/drawingml/2006/main">
               <a:ext uri="{FF2B5EF4-FFF2-40B4-BE49-F238E27FC236}">
-                <a16:creationId xmlns:a16="http://schemas.microsoft.com/office/drawing/2014/main" id="{4EEEF31A-FFED-40E3-AB84-351E8981CCEE}"/>
+                <a16:creationId xmlns:a16="http://schemas.microsoft.com/office/drawing/2014/main" id="{F1DA37A7-1F61-4D91-9998-25EA799D555F}"/>
               </a:ext>
             </a:extLst>
           </p:cNvPr>
@@ -3962,7 +4026,7 @@
           <p:cNvPr id="3" name="s12-title">
             <a:extLst xmlns:a="http://schemas.openxmlformats.org/drawingml/2006/main">
               <a:ext uri="{FF2B5EF4-FFF2-40B4-BE49-F238E27FC236}">
-                <a16:creationId xmlns:a16="http://schemas.microsoft.com/office/drawing/2014/main" id="{79FC4872-78CB-469B-98BB-DDAEAE1D0C4C}"/>
+                <a16:creationId xmlns:a16="http://schemas.microsoft.com/office/drawing/2014/main" id="{D7B76E76-46BB-4B72-9C46-DAEFC1B178DA}"/>
               </a:ext>
             </a:extLst>
           </p:cNvPr>
@@ -4010,7 +4074,7 @@
                 <a:ea typeface="PingFang SC"/>
                 <a:cs typeface="PingFang SC"/>
               </a:rPr>
-              <a:t>带走三条可复用的判断原则</a:t>
+              <a:t>政务与乡村振兴：判断时先抓住三点</a:t>
             </a:r>
           </a:p>
         </p:txBody>
@@ -4020,7 +4084,7 @@
           <p:cNvPr id="4" name="s12-footer">
             <a:extLst xmlns:a="http://schemas.openxmlformats.org/drawingml/2006/main">
               <a:ext uri="{FF2B5EF4-FFF2-40B4-BE49-F238E27FC236}">
-                <a16:creationId xmlns:a16="http://schemas.microsoft.com/office/drawing/2014/main" id="{F145EE2A-5C2D-4CCC-A8A1-70FC62F941E0}"/>
+                <a16:creationId xmlns:a16="http://schemas.microsoft.com/office/drawing/2014/main" id="{6AC4A730-A4CB-480D-BDD8-4D9BD0B6CDB8}"/>
               </a:ext>
             </a:extLst>
           </p:cNvPr>
@@ -4051,7 +4115,7 @@
           <p:cNvPr id="5" name="s12-identity">
             <a:extLst xmlns:a="http://schemas.openxmlformats.org/drawingml/2006/main">
               <a:ext uri="{FF2B5EF4-FFF2-40B4-BE49-F238E27FC236}">
-                <a16:creationId xmlns:a16="http://schemas.microsoft.com/office/drawing/2014/main" id="{333EC04F-E4F1-408F-AF43-91C0BDD99E8F}"/>
+                <a16:creationId xmlns:a16="http://schemas.microsoft.com/office/drawing/2014/main" id="{A7BBD15A-2FF0-40C0-88AF-8E1A1C1636DE}"/>
               </a:ext>
             </a:extLst>
           </p:cNvPr>
@@ -4109,7 +4173,7 @@
           <p:cNvPr id="6" name="recap-circle-0">
             <a:extLst xmlns:a="http://schemas.openxmlformats.org/drawingml/2006/main">
               <a:ext uri="{FF2B5EF4-FFF2-40B4-BE49-F238E27FC236}">
-                <a16:creationId xmlns:a16="http://schemas.microsoft.com/office/drawing/2014/main" id="{97439AFD-C623-4D72-9E17-E66B95293DB7}"/>
+                <a16:creationId xmlns:a16="http://schemas.microsoft.com/office/drawing/2014/main" id="{6980B21D-6B06-4BE6-9201-8F4724D9CEB7}"/>
               </a:ext>
             </a:extLst>
           </p:cNvPr>
@@ -4142,7 +4206,7 @@
           <p:cNvPr id="7" name="recap-number-0">
             <a:extLst xmlns:a="http://schemas.openxmlformats.org/drawingml/2006/main">
               <a:ext uri="{FF2B5EF4-FFF2-40B4-BE49-F238E27FC236}">
-                <a16:creationId xmlns:a16="http://schemas.microsoft.com/office/drawing/2014/main" id="{9C8D43CC-8385-405D-B894-2DF8D1ED6977}"/>
+                <a16:creationId xmlns:a16="http://schemas.microsoft.com/office/drawing/2014/main" id="{C9F79967-D3B9-484D-876B-DCA58819964B}"/>
               </a:ext>
             </a:extLst>
           </p:cNvPr>
@@ -4200,7 +4264,7 @@
           <p:cNvPr id="8" name="recap-item-0">
             <a:extLst xmlns:a="http://schemas.openxmlformats.org/drawingml/2006/main">
               <a:ext uri="{FF2B5EF4-FFF2-40B4-BE49-F238E27FC236}">
-                <a16:creationId xmlns:a16="http://schemas.microsoft.com/office/drawing/2014/main" id="{3D078641-DAFF-4601-A3D8-D94F6BDFC2BF}"/>
+                <a16:creationId xmlns:a16="http://schemas.microsoft.com/office/drawing/2014/main" id="{C3129829-9FC9-478E-8877-0F0213FD8F11}"/>
               </a:ext>
             </a:extLst>
           </p:cNvPr>
@@ -4264,7 +4328,7 @@
           <p:cNvPr id="9" name="recap-connector-0">
             <a:extLst xmlns:a="http://schemas.openxmlformats.org/drawingml/2006/main">
               <a:ext uri="{FF2B5EF4-FFF2-40B4-BE49-F238E27FC236}">
-                <a16:creationId xmlns:a16="http://schemas.microsoft.com/office/drawing/2014/main" id="{B420FBF3-EAAE-4D52-A163-6F80B2A13BBC}"/>
+                <a16:creationId xmlns:a16="http://schemas.microsoft.com/office/drawing/2014/main" id="{70058150-4F50-407C-8059-A1E73C52E11D}"/>
               </a:ext>
             </a:extLst>
           </p:cNvPr>
@@ -4284,7 +4348,7 @@
           <a:noFill xmlns:a="http://schemas.openxmlformats.org/drawingml/2006/main"/>
           <a:ln xmlns:a="http://schemas.openxmlformats.org/drawingml/2006/main" w="28575">
             <a:solidFill>
-              <a:srgbClr val="E5783F"/>
+              <a:srgbClr val="9A3F16"/>
             </a:solidFill>
             <a:prstDash val="solid"/>
           </a:ln>
@@ -4295,7 +4359,7 @@
           <p:cNvPr id="10" name="recap-circle-1">
             <a:extLst xmlns:a="http://schemas.openxmlformats.org/drawingml/2006/main">
               <a:ext uri="{FF2B5EF4-FFF2-40B4-BE49-F238E27FC236}">
-                <a16:creationId xmlns:a16="http://schemas.microsoft.com/office/drawing/2014/main" id="{56C302F0-E9C3-4821-B771-A569BC921CC6}"/>
+                <a16:creationId xmlns:a16="http://schemas.microsoft.com/office/drawing/2014/main" id="{4F091E61-1DF2-461A-AC9E-A566811FAC97}"/>
               </a:ext>
             </a:extLst>
           </p:cNvPr>
@@ -4328,7 +4392,7 @@
           <p:cNvPr id="11" name="recap-number-1">
             <a:extLst xmlns:a="http://schemas.openxmlformats.org/drawingml/2006/main">
               <a:ext uri="{FF2B5EF4-FFF2-40B4-BE49-F238E27FC236}">
-                <a16:creationId xmlns:a16="http://schemas.microsoft.com/office/drawing/2014/main" id="{F13C0415-D6F0-43C2-94DB-AD209BDF02B2}"/>
+                <a16:creationId xmlns:a16="http://schemas.microsoft.com/office/drawing/2014/main" id="{06206BFD-D020-4EB2-907C-9F09AE26D80F}"/>
               </a:ext>
             </a:extLst>
           </p:cNvPr>
@@ -4386,7 +4450,7 @@
           <p:cNvPr id="12" name="recap-item-1">
             <a:extLst xmlns:a="http://schemas.openxmlformats.org/drawingml/2006/main">
               <a:ext uri="{FF2B5EF4-FFF2-40B4-BE49-F238E27FC236}">
-                <a16:creationId xmlns:a16="http://schemas.microsoft.com/office/drawing/2014/main" id="{9D93A510-96DD-4DAE-B4E7-180E06374131}"/>
+                <a16:creationId xmlns:a16="http://schemas.microsoft.com/office/drawing/2014/main" id="{AC1702C8-D8E1-4863-8352-8CC05FC1DD43}"/>
               </a:ext>
             </a:extLst>
           </p:cNvPr>
@@ -4450,7 +4514,7 @@
           <p:cNvPr id="13" name="recap-connector-1">
             <a:extLst xmlns:a="http://schemas.openxmlformats.org/drawingml/2006/main">
               <a:ext uri="{FF2B5EF4-FFF2-40B4-BE49-F238E27FC236}">
-                <a16:creationId xmlns:a16="http://schemas.microsoft.com/office/drawing/2014/main" id="{F63C789F-3159-464D-A401-F243C0703A75}"/>
+                <a16:creationId xmlns:a16="http://schemas.microsoft.com/office/drawing/2014/main" id="{473BF552-540B-4159-854B-EF27A950646A}"/>
               </a:ext>
             </a:extLst>
           </p:cNvPr>
@@ -4470,7 +4534,7 @@
           <a:noFill xmlns:a="http://schemas.openxmlformats.org/drawingml/2006/main"/>
           <a:ln xmlns:a="http://schemas.openxmlformats.org/drawingml/2006/main" w="28575">
             <a:solidFill>
-              <a:srgbClr val="E5783F"/>
+              <a:srgbClr val="9A3F16"/>
             </a:solidFill>
             <a:prstDash val="solid"/>
           </a:ln>
@@ -4481,7 +4545,7 @@
           <p:cNvPr id="14" name="recap-circle-2">
             <a:extLst xmlns:a="http://schemas.openxmlformats.org/drawingml/2006/main">
               <a:ext uri="{FF2B5EF4-FFF2-40B4-BE49-F238E27FC236}">
-                <a16:creationId xmlns:a16="http://schemas.microsoft.com/office/drawing/2014/main" id="{265FF091-DCB2-41C1-A373-620B97039AC0}"/>
+                <a16:creationId xmlns:a16="http://schemas.microsoft.com/office/drawing/2014/main" id="{A8959990-F359-42EF-964A-A825A1620AF7}"/>
               </a:ext>
             </a:extLst>
           </p:cNvPr>
@@ -4499,7 +4563,7 @@
             <a:avLst/>
           </a:prstGeom>
           <a:solidFill xmlns:a="http://schemas.openxmlformats.org/drawingml/2006/main">
-            <a:srgbClr val="E5783F"/>
+            <a:srgbClr val="9A3F16"/>
           </a:solidFill>
           <a:ln xmlns:a="http://schemas.openxmlformats.org/drawingml/2006/main" w="28575">
             <a:solidFill>
@@ -4514,7 +4578,7 @@
           <p:cNvPr id="15" name="recap-number-2">
             <a:extLst xmlns:a="http://schemas.openxmlformats.org/drawingml/2006/main">
               <a:ext uri="{FF2B5EF4-FFF2-40B4-BE49-F238E27FC236}">
-                <a16:creationId xmlns:a16="http://schemas.microsoft.com/office/drawing/2014/main" id="{94099C91-F315-49AF-B07D-71C223B0BFD3}"/>
+                <a16:creationId xmlns:a16="http://schemas.microsoft.com/office/drawing/2014/main" id="{85F46B4E-4B6F-4402-9FDD-6EC4C7EF3848}"/>
               </a:ext>
             </a:extLst>
           </p:cNvPr>
@@ -4572,7 +4636,7 @@
           <p:cNvPr id="16" name="recap-item-2">
             <a:extLst xmlns:a="http://schemas.openxmlformats.org/drawingml/2006/main">
               <a:ext uri="{FF2B5EF4-FFF2-40B4-BE49-F238E27FC236}">
-                <a16:creationId xmlns:a16="http://schemas.microsoft.com/office/drawing/2014/main" id="{796C263F-D760-440A-8BF5-956B5F14041F}"/>
+                <a16:creationId xmlns:a16="http://schemas.microsoft.com/office/drawing/2014/main" id="{18736C25-73D5-4CC9-873E-FBA187E08C74}"/>
               </a:ext>
             </a:extLst>
           </p:cNvPr>
@@ -4596,7 +4660,7 @@
           </a:solidFill>
           <a:ln xmlns:a="http://schemas.openxmlformats.org/drawingml/2006/main" w="19050">
             <a:solidFill>
-              <a:srgbClr val="E5783F"/>
+              <a:srgbClr val="9A3F16"/>
             </a:solidFill>
             <a:prstDash val="solid"/>
           </a:ln>
@@ -4634,7 +4698,7 @@
     </p:spTree>
     <p:extLst>
       <p:ext uri="{BB962C8B-B14F-4D97-AF65-F5344CB8AC3E}">
-        <p14:creationId xmlns:p14="http://schemas.microsoft.com/office/powerpoint/2010/main" val="1331863997"/>
+        <p14:creationId xmlns:p14="http://schemas.microsoft.com/office/powerpoint/2010/main" val="446621760"/>
       </p:ext>
     </p:extLst>
   </p:cSld>
@@ -4665,7 +4729,7 @@
           <p:cNvPr id="1" name="s13-rule">
             <a:extLst xmlns:a="http://schemas.openxmlformats.org/drawingml/2006/main">
               <a:ext uri="{FF2B5EF4-FFF2-40B4-BE49-F238E27FC236}">
-                <a16:creationId xmlns:a16="http://schemas.microsoft.com/office/drawing/2014/main" id="{E1ED20B9-C772-4871-99A7-E7B6AD853A44}"/>
+                <a16:creationId xmlns:a16="http://schemas.microsoft.com/office/drawing/2014/main" id="{9AFD8C17-C27C-446D-888F-1585EF4B3EC6}"/>
               </a:ext>
             </a:extLst>
           </p:cNvPr>
@@ -4698,7 +4762,7 @@
           <p:cNvPr id="2" name="s13-eyebrow">
             <a:extLst xmlns:a="http://schemas.openxmlformats.org/drawingml/2006/main">
               <a:ext uri="{FF2B5EF4-FFF2-40B4-BE49-F238E27FC236}">
-                <a16:creationId xmlns:a16="http://schemas.microsoft.com/office/drawing/2014/main" id="{636EF265-72EA-48E4-80E1-554D8C3A5507}"/>
+                <a16:creationId xmlns:a16="http://schemas.microsoft.com/office/drawing/2014/main" id="{51583F4F-7164-4C1C-AD9B-5CFC7574A930}"/>
               </a:ext>
             </a:extLst>
           </p:cNvPr>
@@ -4756,7 +4820,7 @@
           <p:cNvPr id="3" name="s13-title">
             <a:extLst xmlns:a="http://schemas.openxmlformats.org/drawingml/2006/main">
               <a:ext uri="{FF2B5EF4-FFF2-40B4-BE49-F238E27FC236}">
-                <a16:creationId xmlns:a16="http://schemas.microsoft.com/office/drawing/2014/main" id="{CC144849-583C-4FC8-AAAC-A7A70AC74451}"/>
+                <a16:creationId xmlns:a16="http://schemas.microsoft.com/office/drawing/2014/main" id="{C5E50EA0-F6BB-411E-8010-CAB7564AC04C}"/>
               </a:ext>
             </a:extLst>
           </p:cNvPr>
@@ -4804,7 +4868,7 @@
                 <a:ea typeface="PingFang SC"/>
                 <a:cs typeface="PingFang SC"/>
               </a:rPr>
-              <a:t>从公开重制课件回到可核对的学习资料</a:t>
+              <a:t>政务与乡村振兴：依据、边界与延伸</a:t>
             </a:r>
           </a:p>
         </p:txBody>
@@ -4814,7 +4878,7 @@
           <p:cNvPr id="4" name="s13-footer">
             <a:extLst xmlns:a="http://schemas.openxmlformats.org/drawingml/2006/main">
               <a:ext uri="{FF2B5EF4-FFF2-40B4-BE49-F238E27FC236}">
-                <a16:creationId xmlns:a16="http://schemas.microsoft.com/office/drawing/2014/main" id="{86D5CD3E-0C67-4D73-892E-ED5E3404FBF9}"/>
+                <a16:creationId xmlns:a16="http://schemas.microsoft.com/office/drawing/2014/main" id="{4AE935B7-CD6C-432A-A74B-914952C40833}"/>
               </a:ext>
             </a:extLst>
           </p:cNvPr>
@@ -4845,7 +4909,7 @@
           <p:cNvPr id="5" name="s13-identity">
             <a:extLst xmlns:a="http://schemas.openxmlformats.org/drawingml/2006/main">
               <a:ext uri="{FF2B5EF4-FFF2-40B4-BE49-F238E27FC236}">
-                <a16:creationId xmlns:a16="http://schemas.microsoft.com/office/drawing/2014/main" id="{797C4058-9F8A-4204-B6AE-CB06D3A39346}"/>
+                <a16:creationId xmlns:a16="http://schemas.microsoft.com/office/drawing/2014/main" id="{29B23F26-27F7-4549-BEDD-9F2D70C1FBD3}"/>
               </a:ext>
             </a:extLst>
           </p:cNvPr>
@@ -4903,7 +4967,7 @@
           <p:cNvPr id="6" name="source-0">
             <a:extLst xmlns:a="http://schemas.openxmlformats.org/drawingml/2006/main">
               <a:ext uri="{FF2B5EF4-FFF2-40B4-BE49-F238E27FC236}">
-                <a16:creationId xmlns:a16="http://schemas.microsoft.com/office/drawing/2014/main" id="{B4D115BB-925D-4667-AE34-8095D23F1671}"/>
+                <a16:creationId xmlns:a16="http://schemas.microsoft.com/office/drawing/2014/main" id="{8200E478-E2C3-44E1-9092-7C5C81208359}"/>
               </a:ext>
             </a:extLst>
           </p:cNvPr>
@@ -4927,7 +4991,7 @@
           </a:solidFill>
           <a:ln xmlns:a="http://schemas.openxmlformats.org/drawingml/2006/main" w="9525">
             <a:solidFill>
-              <a:srgbClr val="E5783F"/>
+              <a:srgbClr val="9A3F16"/>
             </a:solidFill>
             <a:prstDash val="solid"/>
           </a:ln>
@@ -4967,7 +5031,7 @@
           <p:cNvPr id="7" name="source-1">
             <a:extLst xmlns:a="http://schemas.openxmlformats.org/drawingml/2006/main">
               <a:ext uri="{FF2B5EF4-FFF2-40B4-BE49-F238E27FC236}">
-                <a16:creationId xmlns:a16="http://schemas.microsoft.com/office/drawing/2014/main" id="{F8145BFA-B9B8-4495-BF9F-E9C323337A93}"/>
+                <a16:creationId xmlns:a16="http://schemas.microsoft.com/office/drawing/2014/main" id="{84BE1E97-8B8E-41E8-A1AF-DF58C77ED8A8}"/>
               </a:ext>
             </a:extLst>
           </p:cNvPr>
@@ -5031,7 +5095,7 @@
           <p:cNvPr id="8" name="source-2">
             <a:extLst xmlns:a="http://schemas.openxmlformats.org/drawingml/2006/main">
               <a:ext uri="{FF2B5EF4-FFF2-40B4-BE49-F238E27FC236}">
-                <a16:creationId xmlns:a16="http://schemas.microsoft.com/office/drawing/2014/main" id="{547953C8-5AEC-4059-8A77-9A0E8D65C460}"/>
+                <a16:creationId xmlns:a16="http://schemas.microsoft.com/office/drawing/2014/main" id="{81E72562-1C56-40EC-B087-FCC778747BE4}"/>
               </a:ext>
             </a:extLst>
           </p:cNvPr>
@@ -5095,7 +5159,7 @@
           <p:cNvPr id="9" name="source-3">
             <a:extLst xmlns:a="http://schemas.openxmlformats.org/drawingml/2006/main">
               <a:ext uri="{FF2B5EF4-FFF2-40B4-BE49-F238E27FC236}">
-                <a16:creationId xmlns:a16="http://schemas.microsoft.com/office/drawing/2014/main" id="{0EB3709E-C53B-4D56-AEEE-9B1E9623E0EC}"/>
+                <a16:creationId xmlns:a16="http://schemas.microsoft.com/office/drawing/2014/main" id="{6411E286-E0E2-4174-B2FE-023AB187D3A4}"/>
               </a:ext>
             </a:extLst>
           </p:cNvPr>
@@ -5159,7 +5223,7 @@
           <p:cNvPr id="10" name="source-4">
             <a:extLst xmlns:a="http://schemas.openxmlformats.org/drawingml/2006/main">
               <a:ext uri="{FF2B5EF4-FFF2-40B4-BE49-F238E27FC236}">
-                <a16:creationId xmlns:a16="http://schemas.microsoft.com/office/drawing/2014/main" id="{EEF9EAFE-2AA0-46BF-999D-DF9759F74C83}"/>
+                <a16:creationId xmlns:a16="http://schemas.microsoft.com/office/drawing/2014/main" id="{9A17B227-8F1D-4C2A-9E8D-1D6C7419D7CE}"/>
               </a:ext>
             </a:extLst>
           </p:cNvPr>
@@ -5223,7 +5287,7 @@
           <p:cNvPr id="11" name="s13-takeaway-rule">
             <a:extLst xmlns:a="http://schemas.openxmlformats.org/drawingml/2006/main">
               <a:ext uri="{FF2B5EF4-FFF2-40B4-BE49-F238E27FC236}">
-                <a16:creationId xmlns:a16="http://schemas.microsoft.com/office/drawing/2014/main" id="{85DDC6B5-30EA-4009-B847-E626B7284ACA}"/>
+                <a16:creationId xmlns:a16="http://schemas.microsoft.com/office/drawing/2014/main" id="{63A4C1ED-7422-431F-B99F-94185C012C77}"/>
               </a:ext>
             </a:extLst>
           </p:cNvPr>
@@ -5256,7 +5320,7 @@
           <p:cNvPr id="12" name="s13-takeaway">
             <a:extLst xmlns:a="http://schemas.openxmlformats.org/drawingml/2006/main">
               <a:ext uri="{FF2B5EF4-FFF2-40B4-BE49-F238E27FC236}">
-                <a16:creationId xmlns:a16="http://schemas.microsoft.com/office/drawing/2014/main" id="{3169684B-8090-4BF8-9424-7D6D268EE618}"/>
+                <a16:creationId xmlns:a16="http://schemas.microsoft.com/office/drawing/2014/main" id="{E85C5F03-C6E8-48D6-B76E-581C78F02F6A}"/>
               </a:ext>
             </a:extLst>
           </p:cNvPr>
@@ -5312,7 +5376,7 @@
     </p:spTree>
     <p:extLst>
       <p:ext uri="{BB962C8B-B14F-4D97-AF65-F5344CB8AC3E}">
-        <p14:creationId xmlns:p14="http://schemas.microsoft.com/office/powerpoint/2010/main" val="610779307"/>
+        <p14:creationId xmlns:p14="http://schemas.microsoft.com/office/powerpoint/2010/main" val="626310611"/>
       </p:ext>
     </p:extLst>
   </p:cSld>
@@ -5343,7 +5407,7 @@
           <p:cNvPr id="1" name="s2-rule">
             <a:extLst xmlns:a="http://schemas.openxmlformats.org/drawingml/2006/main">
               <a:ext uri="{FF2B5EF4-FFF2-40B4-BE49-F238E27FC236}">
-                <a16:creationId xmlns:a16="http://schemas.microsoft.com/office/drawing/2014/main" id="{6AC10D46-57DC-4F60-BB69-7150ABFEB7A6}"/>
+                <a16:creationId xmlns:a16="http://schemas.microsoft.com/office/drawing/2014/main" id="{774EB95D-3D9E-43F6-A59E-38913FA0CC1E}"/>
               </a:ext>
             </a:extLst>
           </p:cNvPr>
@@ -5376,7 +5440,7 @@
           <p:cNvPr id="2" name="s2-eyebrow">
             <a:extLst xmlns:a="http://schemas.openxmlformats.org/drawingml/2006/main">
               <a:ext uri="{FF2B5EF4-FFF2-40B4-BE49-F238E27FC236}">
-                <a16:creationId xmlns:a16="http://schemas.microsoft.com/office/drawing/2014/main" id="{F3D5DA0A-3DB9-42A1-8023-871F64156A70}"/>
+                <a16:creationId xmlns:a16="http://schemas.microsoft.com/office/drawing/2014/main" id="{B87EF38A-2FD8-40DC-9A38-449130610B50}"/>
               </a:ext>
             </a:extLst>
           </p:cNvPr>
@@ -5434,7 +5498,7 @@
           <p:cNvPr id="3" name="s2-title">
             <a:extLst xmlns:a="http://schemas.openxmlformats.org/drawingml/2006/main">
               <a:ext uri="{FF2B5EF4-FFF2-40B4-BE49-F238E27FC236}">
-                <a16:creationId xmlns:a16="http://schemas.microsoft.com/office/drawing/2014/main" id="{7F5D5CA4-5B64-447E-8C03-1134B4084425}"/>
+                <a16:creationId xmlns:a16="http://schemas.microsoft.com/office/drawing/2014/main" id="{356174DA-D3C2-4D14-ACF6-41B99EF944B6}"/>
               </a:ext>
             </a:extLst>
           </p:cNvPr>
@@ -5482,7 +5546,7 @@
                 <a:ea typeface="PingFang SC"/>
                 <a:cs typeface="PingFang SC"/>
               </a:rPr>
-              <a:t>学完这一节，你能完成这些判断与行动</a:t>
+              <a:t>政务与乡村振兴：4项学习结果</a:t>
             </a:r>
           </a:p>
         </p:txBody>
@@ -5492,7 +5556,7 @@
           <p:cNvPr id="4" name="s2-footer">
             <a:extLst xmlns:a="http://schemas.openxmlformats.org/drawingml/2006/main">
               <a:ext uri="{FF2B5EF4-FFF2-40B4-BE49-F238E27FC236}">
-                <a16:creationId xmlns:a16="http://schemas.microsoft.com/office/drawing/2014/main" id="{90D9A231-2BE3-439D-9948-E5A0F3996E1B}"/>
+                <a16:creationId xmlns:a16="http://schemas.microsoft.com/office/drawing/2014/main" id="{B09571B8-DCDF-4872-A24C-4E9FE2060E00}"/>
               </a:ext>
             </a:extLst>
           </p:cNvPr>
@@ -5523,7 +5587,7 @@
           <p:cNvPr id="5" name="s2-identity">
             <a:extLst xmlns:a="http://schemas.openxmlformats.org/drawingml/2006/main">
               <a:ext uri="{FF2B5EF4-FFF2-40B4-BE49-F238E27FC236}">
-                <a16:creationId xmlns:a16="http://schemas.microsoft.com/office/drawing/2014/main" id="{C8E15140-1B86-4C36-AFE3-A5CC51201C8B}"/>
+                <a16:creationId xmlns:a16="http://schemas.microsoft.com/office/drawing/2014/main" id="{6A55B4DD-E327-423C-811F-EC5E1B8A57FD}"/>
               </a:ext>
             </a:extLst>
           </p:cNvPr>
@@ -5581,7 +5645,7 @@
           <p:cNvPr id="6" name="objective-1">
             <a:extLst xmlns:a="http://schemas.openxmlformats.org/drawingml/2006/main">
               <a:ext uri="{FF2B5EF4-FFF2-40B4-BE49-F238E27FC236}">
-                <a16:creationId xmlns:a16="http://schemas.microsoft.com/office/drawing/2014/main" id="{19630248-F4D4-40BC-A1C3-DECEAF3E367C}"/>
+                <a16:creationId xmlns:a16="http://schemas.microsoft.com/office/drawing/2014/main" id="{CCE82602-26F0-4568-91B7-B97F45591453}"/>
               </a:ext>
             </a:extLst>
           </p:cNvPr>
@@ -5668,7 +5732,7 @@
           <p:cNvPr id="7" name="objective-2">
             <a:extLst xmlns:a="http://schemas.openxmlformats.org/drawingml/2006/main">
               <a:ext uri="{FF2B5EF4-FFF2-40B4-BE49-F238E27FC236}">
-                <a16:creationId xmlns:a16="http://schemas.microsoft.com/office/drawing/2014/main" id="{6C270B88-6C3F-424E-B560-BC7E976CEC92}"/>
+                <a16:creationId xmlns:a16="http://schemas.microsoft.com/office/drawing/2014/main" id="{8061B243-01B0-4A0B-8D54-A6EF28EA7E43}"/>
               </a:ext>
             </a:extLst>
           </p:cNvPr>
@@ -5755,7 +5819,7 @@
           <p:cNvPr id="8" name="objective-3">
             <a:extLst xmlns:a="http://schemas.openxmlformats.org/drawingml/2006/main">
               <a:ext uri="{FF2B5EF4-FFF2-40B4-BE49-F238E27FC236}">
-                <a16:creationId xmlns:a16="http://schemas.microsoft.com/office/drawing/2014/main" id="{C048FCEF-6FCE-461F-8239-7EE6D6E2A869}"/>
+                <a16:creationId xmlns:a16="http://schemas.microsoft.com/office/drawing/2014/main" id="{604D553C-720D-4B4B-AEA5-44127FAAB46A}"/>
               </a:ext>
             </a:extLst>
           </p:cNvPr>
@@ -5842,7 +5906,7 @@
           <p:cNvPr id="9" name="objective-4">
             <a:extLst xmlns:a="http://schemas.openxmlformats.org/drawingml/2006/main">
               <a:ext uri="{FF2B5EF4-FFF2-40B4-BE49-F238E27FC236}">
-                <a16:creationId xmlns:a16="http://schemas.microsoft.com/office/drawing/2014/main" id="{2C92E852-8BB9-4393-8D4B-3D6F496C22E0}"/>
+                <a16:creationId xmlns:a16="http://schemas.microsoft.com/office/drawing/2014/main" id="{28F5E6DC-6099-475B-B54A-0525AE231582}"/>
               </a:ext>
             </a:extLst>
           </p:cNvPr>
@@ -5866,7 +5930,7 @@
           </a:solidFill>
           <a:ln xmlns:a="http://schemas.openxmlformats.org/drawingml/2006/main" w="19050">
             <a:solidFill>
-              <a:srgbClr val="E5783F"/>
+              <a:srgbClr val="9A3F16"/>
             </a:solidFill>
             <a:prstDash val="solid"/>
           </a:ln>
@@ -5927,7 +5991,7 @@
     </p:spTree>
     <p:extLst>
       <p:ext uri="{BB962C8B-B14F-4D97-AF65-F5344CB8AC3E}">
-        <p14:creationId xmlns:p14="http://schemas.microsoft.com/office/powerpoint/2010/main" val="888123640"/>
+        <p14:creationId xmlns:p14="http://schemas.microsoft.com/office/powerpoint/2010/main" val="1543394843"/>
       </p:ext>
     </p:extLst>
   </p:cSld>
@@ -5958,7 +6022,7 @@
           <p:cNvPr id="1" name="s3-rule">
             <a:extLst xmlns:a="http://schemas.openxmlformats.org/drawingml/2006/main">
               <a:ext uri="{FF2B5EF4-FFF2-40B4-BE49-F238E27FC236}">
-                <a16:creationId xmlns:a16="http://schemas.microsoft.com/office/drawing/2014/main" id="{7ED9883F-1B77-41AA-A5B6-B48D09BD65BD}"/>
+                <a16:creationId xmlns:a16="http://schemas.microsoft.com/office/drawing/2014/main" id="{85D1004D-85E2-49E9-995F-BCBA4D307325}"/>
               </a:ext>
             </a:extLst>
           </p:cNvPr>
@@ -5991,7 +6055,7 @@
           <p:cNvPr id="2" name="s3-eyebrow">
             <a:extLst xmlns:a="http://schemas.openxmlformats.org/drawingml/2006/main">
               <a:ext uri="{FF2B5EF4-FFF2-40B4-BE49-F238E27FC236}">
-                <a16:creationId xmlns:a16="http://schemas.microsoft.com/office/drawing/2014/main" id="{566B0D4D-0B15-4F08-8681-67C6984AF72D}"/>
+                <a16:creationId xmlns:a16="http://schemas.microsoft.com/office/drawing/2014/main" id="{227CFCC5-4C26-4A87-B13A-75456CC26C4A}"/>
               </a:ext>
             </a:extLst>
           </p:cNvPr>
@@ -6049,7 +6113,7 @@
           <p:cNvPr id="3" name="s3-title">
             <a:extLst xmlns:a="http://schemas.openxmlformats.org/drawingml/2006/main">
               <a:ext uri="{FF2B5EF4-FFF2-40B4-BE49-F238E27FC236}">
-                <a16:creationId xmlns:a16="http://schemas.microsoft.com/office/drawing/2014/main" id="{98DE0709-230B-498E-8508-1E410420B77C}"/>
+                <a16:creationId xmlns:a16="http://schemas.microsoft.com/office/drawing/2014/main" id="{B7F30B0F-14A0-4980-BCD2-16D8A4A8013C}"/>
               </a:ext>
             </a:extLst>
           </p:cNvPr>
@@ -6107,7 +6171,7 @@
           <p:cNvPr id="4" name="s3-footer">
             <a:extLst xmlns:a="http://schemas.openxmlformats.org/drawingml/2006/main">
               <a:ext uri="{FF2B5EF4-FFF2-40B4-BE49-F238E27FC236}">
-                <a16:creationId xmlns:a16="http://schemas.microsoft.com/office/drawing/2014/main" id="{581BF16E-1478-4BA6-B561-2AF980B6BB1D}"/>
+                <a16:creationId xmlns:a16="http://schemas.microsoft.com/office/drawing/2014/main" id="{5AB4F16E-F891-428C-9D64-6DC4F8854324}"/>
               </a:ext>
             </a:extLst>
           </p:cNvPr>
@@ -6138,7 +6202,7 @@
           <p:cNvPr id="5" name="s3-identity">
             <a:extLst xmlns:a="http://schemas.openxmlformats.org/drawingml/2006/main">
               <a:ext uri="{FF2B5EF4-FFF2-40B4-BE49-F238E27FC236}">
-                <a16:creationId xmlns:a16="http://schemas.microsoft.com/office/drawing/2014/main" id="{AB5B1A8E-F2BF-4BE3-842F-44243A7A9B98}"/>
+                <a16:creationId xmlns:a16="http://schemas.microsoft.com/office/drawing/2014/main" id="{FE25270B-7B76-4573-AA5B-1E9809F5DB93}"/>
               </a:ext>
             </a:extLst>
           </p:cNvPr>
@@ -6196,7 +6260,7 @@
           <p:cNvPr id="6" name="core-no-0">
             <a:extLst xmlns:a="http://schemas.openxmlformats.org/drawingml/2006/main">
               <a:ext uri="{FF2B5EF4-FFF2-40B4-BE49-F238E27FC236}">
-                <a16:creationId xmlns:a16="http://schemas.microsoft.com/office/drawing/2014/main" id="{28B35FA1-ADC0-410B-95D7-F3BEB28FF737}"/>
+                <a16:creationId xmlns:a16="http://schemas.microsoft.com/office/drawing/2014/main" id="{06107D68-B34E-4344-942B-F273226C574A}"/>
               </a:ext>
             </a:extLst>
           </p:cNvPr>
@@ -6228,7 +6292,7 @@
             <a:pPr algn="l">
               <a:defRPr sz="2250" b="1">
                 <a:solidFill>
-                  <a:srgbClr val="E5783F"/>
+                  <a:srgbClr val="9A3F16"/>
                 </a:solidFill>
                 <a:latin typeface="PingFang SC"/>
                 <a:ea typeface="PingFang SC"/>
@@ -6238,7 +6302,7 @@
             <a:r>
               <a:rPr sz="2250" b="1">
                 <a:solidFill>
-                  <a:srgbClr val="E5783F"/>
+                  <a:srgbClr val="9A3F16"/>
                 </a:solidFill>
                 <a:latin typeface="PingFang SC"/>
                 <a:ea typeface="PingFang SC"/>
@@ -6254,7 +6318,7 @@
           <p:cNvPr id="7" name="core-label-0">
             <a:extLst xmlns:a="http://schemas.openxmlformats.org/drawingml/2006/main">
               <a:ext uri="{FF2B5EF4-FFF2-40B4-BE49-F238E27FC236}">
-                <a16:creationId xmlns:a16="http://schemas.microsoft.com/office/drawing/2014/main" id="{8A28954A-9F20-42A8-AE5F-0F68BEFF1BAB}"/>
+                <a16:creationId xmlns:a16="http://schemas.microsoft.com/office/drawing/2014/main" id="{5EC48D9C-6F5D-4251-ADB5-FE0D0F3CADA4}"/>
               </a:ext>
             </a:extLst>
           </p:cNvPr>
@@ -6312,7 +6376,7 @@
           <p:cNvPr id="8" name="core-body-0">
             <a:extLst xmlns:a="http://schemas.openxmlformats.org/drawingml/2006/main">
               <a:ext uri="{FF2B5EF4-FFF2-40B4-BE49-F238E27FC236}">
-                <a16:creationId xmlns:a16="http://schemas.microsoft.com/office/drawing/2014/main" id="{FC0752A5-FB45-452B-A415-F641FC3D4B94}"/>
+                <a16:creationId xmlns:a16="http://schemas.microsoft.com/office/drawing/2014/main" id="{70A9D5AD-7E6F-48EF-A5B5-DD9DC21BB500}"/>
               </a:ext>
             </a:extLst>
           </p:cNvPr>
@@ -6336,7 +6400,7 @@
           </a:solidFill>
           <a:ln xmlns:a="http://schemas.openxmlformats.org/drawingml/2006/main" w="19050">
             <a:solidFill>
-              <a:srgbClr val="E5783F"/>
+              <a:srgbClr val="9A3F16"/>
             </a:solidFill>
             <a:prstDash val="solid"/>
           </a:ln>
@@ -6366,7 +6430,7 @@
                 <a:ea typeface="PingFang SC"/>
                 <a:cs typeface="PingFang SC"/>
               </a:rPr>
-              <a:t>选择一个具体事项，例如政策查询、材料清单说明、农技服务预约或基层诉求分流。先写出现有入口、办理依据、所需材料、承办岗位、时限、例外情形和申诉渠道，再决定 AI 可以辅助哪一步…</a:t>
+              <a:t>选择一个具体事项，例如政策查询、材料清单说明、农技服务预约或基层诉求分流；先写出现有入口、办理依据、所需材料、承办岗位、时限、例外情形和申诉渠道；再决定 AI 可以辅助哪一步</a:t>
             </a:r>
           </a:p>
         </p:txBody>
@@ -6376,7 +6440,7 @@
           <p:cNvPr id="9" name="core-no-1">
             <a:extLst xmlns:a="http://schemas.openxmlformats.org/drawingml/2006/main">
               <a:ext uri="{FF2B5EF4-FFF2-40B4-BE49-F238E27FC236}">
-                <a16:creationId xmlns:a16="http://schemas.microsoft.com/office/drawing/2014/main" id="{35116CCE-856B-4CEC-B3A7-079407A52594}"/>
+                <a16:creationId xmlns:a16="http://schemas.microsoft.com/office/drawing/2014/main" id="{9A2E8DBB-68E8-4D53-804E-AD1F2FAF5EEB}"/>
               </a:ext>
             </a:extLst>
           </p:cNvPr>
@@ -6408,7 +6472,7 @@
             <a:pPr algn="l">
               <a:defRPr sz="2250" b="1">
                 <a:solidFill>
-                  <a:srgbClr val="E5783F"/>
+                  <a:srgbClr val="9A3F16"/>
                 </a:solidFill>
                 <a:latin typeface="PingFang SC"/>
                 <a:ea typeface="PingFang SC"/>
@@ -6418,7 +6482,7 @@
             <a:r>
               <a:rPr sz="2250" b="1">
                 <a:solidFill>
-                  <a:srgbClr val="E5783F"/>
+                  <a:srgbClr val="9A3F16"/>
                 </a:solidFill>
                 <a:latin typeface="PingFang SC"/>
                 <a:ea typeface="PingFang SC"/>
@@ -6434,7 +6498,7 @@
           <p:cNvPr id="10" name="core-body-1">
             <a:extLst xmlns:a="http://schemas.openxmlformats.org/drawingml/2006/main">
               <a:ext uri="{FF2B5EF4-FFF2-40B4-BE49-F238E27FC236}">
-                <a16:creationId xmlns:a16="http://schemas.microsoft.com/office/drawing/2014/main" id="{DE8D87F8-E226-46C4-9D96-DAE26EFFE3F4}"/>
+                <a16:creationId xmlns:a16="http://schemas.microsoft.com/office/drawing/2014/main" id="{57CBEDA1-F70C-47CB-8D78-B3FE44F1779F}"/>
               </a:ext>
             </a:extLst>
           </p:cNvPr>
@@ -6488,7 +6552,7 @@
                 <a:ea typeface="PingFang SC"/>
                 <a:cs typeface="PingFang SC"/>
               </a:rPr>
-              <a:t>一个基础流程可以是：接收问题并识别服务事项；按用户角色检查可访问范围；从现行权威资料中检索；生成带引用的说明或待办清单；依据风险等级自动交付或送人工复核；记录使用的资料版本与最终答复…</a:t>
+              <a:t>一个基础流程可以是；接收问题并识别服务事项；按用户角色检查可访问范围；从现行权威资料中检索；生成带引用的说明或待办清单；依据风险等级自动交付或送人工复核；记录使用的资料版本与最终答复</a:t>
             </a:r>
           </a:p>
         </p:txBody>
@@ -6498,7 +6562,7 @@
           <p:cNvPr id="11" name="s3-takeaway-rule">
             <a:extLst xmlns:a="http://schemas.openxmlformats.org/drawingml/2006/main">
               <a:ext uri="{FF2B5EF4-FFF2-40B4-BE49-F238E27FC236}">
-                <a16:creationId xmlns:a16="http://schemas.microsoft.com/office/drawing/2014/main" id="{F6554D71-9C68-43B6-9871-813A47E6095D}"/>
+                <a16:creationId xmlns:a16="http://schemas.microsoft.com/office/drawing/2014/main" id="{5F0561C7-FB30-48BD-8E6D-6ACCA8DC4D94}"/>
               </a:ext>
             </a:extLst>
           </p:cNvPr>
@@ -6531,7 +6595,7 @@
           <p:cNvPr id="12" name="s3-takeaway">
             <a:extLst xmlns:a="http://schemas.openxmlformats.org/drawingml/2006/main">
               <a:ext uri="{FF2B5EF4-FFF2-40B4-BE49-F238E27FC236}">
-                <a16:creationId xmlns:a16="http://schemas.microsoft.com/office/drawing/2014/main" id="{B30C6592-EF57-4F92-A601-E502E22160F2}"/>
+                <a16:creationId xmlns:a16="http://schemas.microsoft.com/office/drawing/2014/main" id="{7B673C98-24D2-4FD3-B079-F0C46EEB31B8}"/>
               </a:ext>
             </a:extLst>
           </p:cNvPr>
@@ -6587,7 +6651,7 @@
     </p:spTree>
     <p:extLst>
       <p:ext uri="{BB962C8B-B14F-4D97-AF65-F5344CB8AC3E}">
-        <p14:creationId xmlns:p14="http://schemas.microsoft.com/office/powerpoint/2010/main" val="754048322"/>
+        <p14:creationId xmlns:p14="http://schemas.microsoft.com/office/powerpoint/2010/main" val="778093711"/>
       </p:ext>
     </p:extLst>
   </p:cSld>
@@ -6618,7 +6682,7 @@
           <p:cNvPr id="1" name="s4-rule">
             <a:extLst xmlns:a="http://schemas.openxmlformats.org/drawingml/2006/main">
               <a:ext uri="{FF2B5EF4-FFF2-40B4-BE49-F238E27FC236}">
-                <a16:creationId xmlns:a16="http://schemas.microsoft.com/office/drawing/2014/main" id="{C72F6B37-0395-4CCE-878B-1A3486D147BC}"/>
+                <a16:creationId xmlns:a16="http://schemas.microsoft.com/office/drawing/2014/main" id="{B9238FC6-4748-4271-9748-C8A33F39AF21}"/>
               </a:ext>
             </a:extLst>
           </p:cNvPr>
@@ -6651,7 +6715,7 @@
           <p:cNvPr id="2" name="s4-eyebrow">
             <a:extLst xmlns:a="http://schemas.openxmlformats.org/drawingml/2006/main">
               <a:ext uri="{FF2B5EF4-FFF2-40B4-BE49-F238E27FC236}">
-                <a16:creationId xmlns:a16="http://schemas.microsoft.com/office/drawing/2014/main" id="{546C3C48-F61A-4567-98B3-24383CA18C45}"/>
+                <a16:creationId xmlns:a16="http://schemas.microsoft.com/office/drawing/2014/main" id="{33BD6F35-70B8-465E-B874-9615C62F3660}"/>
               </a:ext>
             </a:extLst>
           </p:cNvPr>
@@ -6709,7 +6773,7 @@
           <p:cNvPr id="3" name="s4-title">
             <a:extLst xmlns:a="http://schemas.openxmlformats.org/drawingml/2006/main">
               <a:ext uri="{FF2B5EF4-FFF2-40B4-BE49-F238E27FC236}">
-                <a16:creationId xmlns:a16="http://schemas.microsoft.com/office/drawing/2014/main" id="{6AB757B8-1F2E-4DFE-9814-4EA9E9DCA637}"/>
+                <a16:creationId xmlns:a16="http://schemas.microsoft.com/office/drawing/2014/main" id="{CAD72286-39C2-4707-9141-C4BC99ABC8D9}"/>
               </a:ext>
             </a:extLst>
           </p:cNvPr>
@@ -6734,7 +6798,7 @@
         </p:spPr>
         <p:txBody>
           <a:bodyPr xmlns:a="http://schemas.openxmlformats.org/drawingml/2006/main" lIns="0" tIns="0" rIns="0" bIns="0" anchor="ctr">
-            <a:normAutofit fontScale="75926"/>
+            <a:normAutofit fontScale="100000"/>
           </a:bodyPr>
           <a:lstStyle xmlns:a="http://schemas.openxmlformats.org/drawingml/2006/main"/>
           <a:p xmlns:a="http://schemas.openxmlformats.org/drawingml/2006/main">
@@ -6757,7 +6821,7 @@
                 <a:ea typeface="PingFang SC"/>
                 <a:cs typeface="PingFang SC"/>
               </a:rPr>
-              <a:t>权限设计应同时回答“谁、为了什么、能看哪些字段、能做什么、保存多久”</a:t>
+              <a:t>权限必须同时限定身份、目的、字段与期限</a:t>
             </a:r>
           </a:p>
         </p:txBody>
@@ -6767,7 +6831,7 @@
           <p:cNvPr id="4" name="s4-footer">
             <a:extLst xmlns:a="http://schemas.openxmlformats.org/drawingml/2006/main">
               <a:ext uri="{FF2B5EF4-FFF2-40B4-BE49-F238E27FC236}">
-                <a16:creationId xmlns:a16="http://schemas.microsoft.com/office/drawing/2014/main" id="{99F472BA-4917-41EE-9CF8-234325DA9E90}"/>
+                <a16:creationId xmlns:a16="http://schemas.microsoft.com/office/drawing/2014/main" id="{F59C2DEE-A71F-4852-A4B9-66C9BCAF46BB}"/>
               </a:ext>
             </a:extLst>
           </p:cNvPr>
@@ -6798,7 +6862,7 @@
           <p:cNvPr id="5" name="s4-identity">
             <a:extLst xmlns:a="http://schemas.openxmlformats.org/drawingml/2006/main">
               <a:ext uri="{FF2B5EF4-FFF2-40B4-BE49-F238E27FC236}">
-                <a16:creationId xmlns:a16="http://schemas.microsoft.com/office/drawing/2014/main" id="{74B345CF-3CF6-4779-83A9-6138D479079C}"/>
+                <a16:creationId xmlns:a16="http://schemas.microsoft.com/office/drawing/2014/main" id="{1E44EDDF-9720-4E3B-A192-9819BC12B56A}"/>
               </a:ext>
             </a:extLst>
           </p:cNvPr>
@@ -6856,7 +6920,7 @@
           <p:cNvPr id="6" name="core-no-0">
             <a:extLst xmlns:a="http://schemas.openxmlformats.org/drawingml/2006/main">
               <a:ext uri="{FF2B5EF4-FFF2-40B4-BE49-F238E27FC236}">
-                <a16:creationId xmlns:a16="http://schemas.microsoft.com/office/drawing/2014/main" id="{DE252B5B-EC32-41EF-B4EC-4D0551EF3C4B}"/>
+                <a16:creationId xmlns:a16="http://schemas.microsoft.com/office/drawing/2014/main" id="{44C2F8DF-FDF1-45DA-8107-4813A31EEE80}"/>
               </a:ext>
             </a:extLst>
           </p:cNvPr>
@@ -6888,7 +6952,7 @@
             <a:pPr algn="l">
               <a:defRPr sz="2250" b="1">
                 <a:solidFill>
-                  <a:srgbClr val="E5783F"/>
+                  <a:srgbClr val="9A3F16"/>
                 </a:solidFill>
                 <a:latin typeface="PingFang SC"/>
                 <a:ea typeface="PingFang SC"/>
@@ -6898,7 +6962,7 @@
             <a:r>
               <a:rPr sz="2250" b="1">
                 <a:solidFill>
-                  <a:srgbClr val="E5783F"/>
+                  <a:srgbClr val="9A3F16"/>
                 </a:solidFill>
                 <a:latin typeface="PingFang SC"/>
                 <a:ea typeface="PingFang SC"/>
@@ -6914,7 +6978,7 @@
           <p:cNvPr id="7" name="core-label-0">
             <a:extLst xmlns:a="http://schemas.openxmlformats.org/drawingml/2006/main">
               <a:ext uri="{FF2B5EF4-FFF2-40B4-BE49-F238E27FC236}">
-                <a16:creationId xmlns:a16="http://schemas.microsoft.com/office/drawing/2014/main" id="{388C158A-145E-468D-A090-2288B8B5A7A4}"/>
+                <a16:creationId xmlns:a16="http://schemas.microsoft.com/office/drawing/2014/main" id="{21283EA0-15CC-4DC6-B3AE-6F01B9A04B17}"/>
               </a:ext>
             </a:extLst>
           </p:cNvPr>
@@ -6972,7 +7036,7 @@
           <p:cNvPr id="8" name="core-body-0">
             <a:extLst xmlns:a="http://schemas.openxmlformats.org/drawingml/2006/main">
               <a:ext uri="{FF2B5EF4-FFF2-40B4-BE49-F238E27FC236}">
-                <a16:creationId xmlns:a16="http://schemas.microsoft.com/office/drawing/2014/main" id="{180BAFF0-2699-4932-80B7-091F2B39CDEE}"/>
+                <a16:creationId xmlns:a16="http://schemas.microsoft.com/office/drawing/2014/main" id="{32FD68F4-BD66-47B5-A344-A038D6AF11CF}"/>
               </a:ext>
             </a:extLst>
           </p:cNvPr>
@@ -6996,7 +7060,7 @@
           </a:solidFill>
           <a:ln xmlns:a="http://schemas.openxmlformats.org/drawingml/2006/main" w="19050">
             <a:solidFill>
-              <a:srgbClr val="E5783F"/>
+              <a:srgbClr val="9A3F16"/>
             </a:solidFill>
             <a:prstDash val="solid"/>
           </a:ln>
@@ -7026,7 +7090,7 @@
                 <a:ea typeface="PingFang SC"/>
                 <a:cs typeface="PingFang SC"/>
               </a:rPr>
-              <a:t>权限设计应同时回答“谁、为了什么、能看哪些字段、能做什么、保存多久”。公开政策问答通常不需要身份信息；查询个人办理进度才可能需要认证。即使通过认证，服务人员和系统也只能访问职责所需的数据…</a:t>
+              <a:t>权限设计应同时回答“谁、为了什么、能看哪些字段、能做什么、保存多久”；公开政策问答通常不需要身份信息；查询个人办理进度才可能需要认证；即使通过认证，服务人员和系统也只能访问职责所需的数据</a:t>
             </a:r>
           </a:p>
         </p:txBody>
@@ -7036,7 +7100,7 @@
           <p:cNvPr id="9" name="core-no-1">
             <a:extLst xmlns:a="http://schemas.openxmlformats.org/drawingml/2006/main">
               <a:ext uri="{FF2B5EF4-FFF2-40B4-BE49-F238E27FC236}">
-                <a16:creationId xmlns:a16="http://schemas.microsoft.com/office/drawing/2014/main" id="{2005A3E2-B2CB-494E-A40E-BC26DBCB954C}"/>
+                <a16:creationId xmlns:a16="http://schemas.microsoft.com/office/drawing/2014/main" id="{12A89023-C2FA-413D-8491-8230A038030D}"/>
               </a:ext>
             </a:extLst>
           </p:cNvPr>
@@ -7068,7 +7132,7 @@
             <a:pPr algn="l">
               <a:defRPr sz="2250" b="1">
                 <a:solidFill>
-                  <a:srgbClr val="E5783F"/>
+                  <a:srgbClr val="9A3F16"/>
                 </a:solidFill>
                 <a:latin typeface="PingFang SC"/>
                 <a:ea typeface="PingFang SC"/>
@@ -7078,7 +7142,7 @@
             <a:r>
               <a:rPr sz="2250" b="1">
                 <a:solidFill>
-                  <a:srgbClr val="E5783F"/>
+                  <a:srgbClr val="9A3F16"/>
                 </a:solidFill>
                 <a:latin typeface="PingFang SC"/>
                 <a:ea typeface="PingFang SC"/>
@@ -7094,7 +7158,7 @@
           <p:cNvPr id="10" name="core-body-1">
             <a:extLst xmlns:a="http://schemas.openxmlformats.org/drawingml/2006/main">
               <a:ext uri="{FF2B5EF4-FFF2-40B4-BE49-F238E27FC236}">
-                <a16:creationId xmlns:a16="http://schemas.microsoft.com/office/drawing/2014/main" id="{E6C9B183-103F-4CDE-BE92-83C31AC7C531}"/>
+                <a16:creationId xmlns:a16="http://schemas.microsoft.com/office/drawing/2014/main" id="{64F6EDCA-6433-40CE-B7B7-CE3CB2196BFC}"/>
               </a:ext>
             </a:extLst>
           </p:cNvPr>
@@ -7148,7 +7212,7 @@
                 <a:ea typeface="PingFang SC"/>
                 <a:cs typeface="PingFang SC"/>
               </a:rPr>
-              <a:t>对个人信息、家庭情况、位置、健康、财产和未公开生产经营数据，应采用分级、脱敏、访问审计和期限管理。测试环境不得直接复制真实敏感数据；日志也不能原样保存身份证件、病历或完整对话…</a:t>
+              <a:t>对个人信息、家庭情况、位置、健康、财产和未公开生产经营数据；应采用分级、脱敏、访问审计和期限管理；测试环境不得直接复制真实敏感数据；日志也不能原样保存身份证件、病历或完整对话</a:t>
             </a:r>
           </a:p>
         </p:txBody>
@@ -7158,7 +7222,7 @@
           <p:cNvPr id="11" name="s4-takeaway-rule">
             <a:extLst xmlns:a="http://schemas.openxmlformats.org/drawingml/2006/main">
               <a:ext uri="{FF2B5EF4-FFF2-40B4-BE49-F238E27FC236}">
-                <a16:creationId xmlns:a16="http://schemas.microsoft.com/office/drawing/2014/main" id="{E8B8509C-97A0-48CD-866A-644CA8478DD8}"/>
+                <a16:creationId xmlns:a16="http://schemas.microsoft.com/office/drawing/2014/main" id="{994FA743-99DD-4F7A-9476-409F99EFEA55}"/>
               </a:ext>
             </a:extLst>
           </p:cNvPr>
@@ -7191,7 +7255,7 @@
           <p:cNvPr id="12" name="s4-takeaway">
             <a:extLst xmlns:a="http://schemas.openxmlformats.org/drawingml/2006/main">
               <a:ext uri="{FF2B5EF4-FFF2-40B4-BE49-F238E27FC236}">
-                <a16:creationId xmlns:a16="http://schemas.microsoft.com/office/drawing/2014/main" id="{CBE4F5F8-F7D8-4A2B-8B55-DBEF4DA61CBF}"/>
+                <a16:creationId xmlns:a16="http://schemas.microsoft.com/office/drawing/2014/main" id="{AF9FFC6C-BB7C-40DE-9B38-35F0B82F9858}"/>
               </a:ext>
             </a:extLst>
           </p:cNvPr>
@@ -7239,7 +7303,7 @@
                 <a:ea typeface="PingFang SC"/>
                 <a:cs typeface="PingFang SC"/>
               </a:rPr>
-              <a:t>权限设计应同时回答“谁、为了什么、能看哪些字段、能做什么、保存多久”</a:t>
+              <a:t>权限必须同时限定身份、目的、字段与期限</a:t>
             </a:r>
           </a:p>
         </p:txBody>
@@ -7247,7 +7311,7 @@
     </p:spTree>
     <p:extLst>
       <p:ext uri="{BB962C8B-B14F-4D97-AF65-F5344CB8AC3E}">
-        <p14:creationId xmlns:p14="http://schemas.microsoft.com/office/powerpoint/2010/main" val="441987650"/>
+        <p14:creationId xmlns:p14="http://schemas.microsoft.com/office/powerpoint/2010/main" val="1811688498"/>
       </p:ext>
     </p:extLst>
   </p:cSld>
@@ -7278,7 +7342,7 @@
           <p:cNvPr id="1" name="s5-rule">
             <a:extLst xmlns:a="http://schemas.openxmlformats.org/drawingml/2006/main">
               <a:ext uri="{FF2B5EF4-FFF2-40B4-BE49-F238E27FC236}">
-                <a16:creationId xmlns:a16="http://schemas.microsoft.com/office/drawing/2014/main" id="{4281EA57-23EA-499B-A7CE-1263641C1405}"/>
+                <a16:creationId xmlns:a16="http://schemas.microsoft.com/office/drawing/2014/main" id="{8EC6712B-E6F2-40F3-9038-419E2DB6E93A}"/>
               </a:ext>
             </a:extLst>
           </p:cNvPr>
@@ -7311,7 +7375,7 @@
           <p:cNvPr id="2" name="s5-eyebrow">
             <a:extLst xmlns:a="http://schemas.openxmlformats.org/drawingml/2006/main">
               <a:ext uri="{FF2B5EF4-FFF2-40B4-BE49-F238E27FC236}">
-                <a16:creationId xmlns:a16="http://schemas.microsoft.com/office/drawing/2014/main" id="{4454C630-0095-402A-91D1-6F3B0114C98C}"/>
+                <a16:creationId xmlns:a16="http://schemas.microsoft.com/office/drawing/2014/main" id="{21D2E8A9-605B-426C-9992-97353348E99D}"/>
               </a:ext>
             </a:extLst>
           </p:cNvPr>
@@ -7369,7 +7433,7 @@
           <p:cNvPr id="3" name="s5-title">
             <a:extLst xmlns:a="http://schemas.openxmlformats.org/drawingml/2006/main">
               <a:ext uri="{FF2B5EF4-FFF2-40B4-BE49-F238E27FC236}">
-                <a16:creationId xmlns:a16="http://schemas.microsoft.com/office/drawing/2014/main" id="{E24779E2-98EA-4B64-A140-9633CD15913E}"/>
+                <a16:creationId xmlns:a16="http://schemas.microsoft.com/office/drawing/2014/main" id="{299AE4B7-3F8D-4EE6-9EBE-1D6DA9DFF585}"/>
               </a:ext>
             </a:extLst>
           </p:cNvPr>
@@ -7427,7 +7491,7 @@
           <p:cNvPr id="4" name="s5-footer">
             <a:extLst xmlns:a="http://schemas.openxmlformats.org/drawingml/2006/main">
               <a:ext uri="{FF2B5EF4-FFF2-40B4-BE49-F238E27FC236}">
-                <a16:creationId xmlns:a16="http://schemas.microsoft.com/office/drawing/2014/main" id="{19B554BA-5261-4DB5-B1C6-1BD4EA427AB5}"/>
+                <a16:creationId xmlns:a16="http://schemas.microsoft.com/office/drawing/2014/main" id="{9D63D41D-F3AB-4D83-81C6-580FE77431A3}"/>
               </a:ext>
             </a:extLst>
           </p:cNvPr>
@@ -7458,7 +7522,7 @@
           <p:cNvPr id="5" name="s5-identity">
             <a:extLst xmlns:a="http://schemas.openxmlformats.org/drawingml/2006/main">
               <a:ext uri="{FF2B5EF4-FFF2-40B4-BE49-F238E27FC236}">
-                <a16:creationId xmlns:a16="http://schemas.microsoft.com/office/drawing/2014/main" id="{4DDE81E9-7DB4-4066-B3A0-4B51CEE8C110}"/>
+                <a16:creationId xmlns:a16="http://schemas.microsoft.com/office/drawing/2014/main" id="{C8B89016-B8F8-4A95-BD02-38A99E0FB939}"/>
               </a:ext>
             </a:extLst>
           </p:cNvPr>
@@ -7516,7 +7580,7 @@
           <p:cNvPr id="6" name="core-no-0">
             <a:extLst xmlns:a="http://schemas.openxmlformats.org/drawingml/2006/main">
               <a:ext uri="{FF2B5EF4-FFF2-40B4-BE49-F238E27FC236}">
-                <a16:creationId xmlns:a16="http://schemas.microsoft.com/office/drawing/2014/main" id="{506FEEC4-C195-45A3-B532-EE5922DDE65E}"/>
+                <a16:creationId xmlns:a16="http://schemas.microsoft.com/office/drawing/2014/main" id="{EB4FA9AB-4FE9-4A05-8542-B7FBB16CD0FA}"/>
               </a:ext>
             </a:extLst>
           </p:cNvPr>
@@ -7548,7 +7612,7 @@
             <a:pPr algn="l">
               <a:defRPr sz="2250" b="1">
                 <a:solidFill>
-                  <a:srgbClr val="E5783F"/>
+                  <a:srgbClr val="9A3F16"/>
                 </a:solidFill>
                 <a:latin typeface="PingFang SC"/>
                 <a:ea typeface="PingFang SC"/>
@@ -7558,7 +7622,7 @@
             <a:r>
               <a:rPr sz="2250" b="1">
                 <a:solidFill>
-                  <a:srgbClr val="E5783F"/>
+                  <a:srgbClr val="9A3F16"/>
                 </a:solidFill>
                 <a:latin typeface="PingFang SC"/>
                 <a:ea typeface="PingFang SC"/>
@@ -7574,7 +7638,7 @@
           <p:cNvPr id="7" name="core-label-0">
             <a:extLst xmlns:a="http://schemas.openxmlformats.org/drawingml/2006/main">
               <a:ext uri="{FF2B5EF4-FFF2-40B4-BE49-F238E27FC236}">
-                <a16:creationId xmlns:a16="http://schemas.microsoft.com/office/drawing/2014/main" id="{C01D33E3-9F49-4BA8-B31E-9E2112B7FC9E}"/>
+                <a16:creationId xmlns:a16="http://schemas.microsoft.com/office/drawing/2014/main" id="{3C88987B-DBE7-4B34-99BF-4B4157724164}"/>
               </a:ext>
             </a:extLst>
           </p:cNvPr>
@@ -7632,7 +7696,7 @@
           <p:cNvPr id="8" name="core-body-0">
             <a:extLst xmlns:a="http://schemas.openxmlformats.org/drawingml/2006/main">
               <a:ext uri="{FF2B5EF4-FFF2-40B4-BE49-F238E27FC236}">
-                <a16:creationId xmlns:a16="http://schemas.microsoft.com/office/drawing/2014/main" id="{DAFE6210-C47C-4A8A-A23A-FDAF848960A9}"/>
+                <a16:creationId xmlns:a16="http://schemas.microsoft.com/office/drawing/2014/main" id="{B75E265D-F3BF-4880-8A7B-37D4FEF63621}"/>
               </a:ext>
             </a:extLst>
           </p:cNvPr>
@@ -7656,7 +7720,7 @@
           </a:solidFill>
           <a:ln xmlns:a="http://schemas.openxmlformats.org/drawingml/2006/main" w="19050">
             <a:solidFill>
-              <a:srgbClr val="E5783F"/>
+              <a:srgbClr val="9A3F16"/>
             </a:solidFill>
             <a:prstDash val="solid"/>
           </a:ln>
@@ -7686,7 +7750,7 @@
                 <a:ea typeface="PingFang SC"/>
                 <a:cs typeface="PingFang SC"/>
               </a:rPr>
-              <a:t>每项政策说明至少应标明文件名称、发布机关、文号或可唯一识别的信息、适用地区、生效或失效状态、相关条款位置和检索时间。若不同文件存在冲突，应提示冲突并转承办人员判断…</a:t>
+              <a:t>每项政策说明至少应标明文件名称、发布机关、文号或可唯一识别的信息、适用地区、生效或失效状态、相关条款位置和检索时间；若不同文件存在冲突；应提示冲突并转承办人员判断</a:t>
             </a:r>
           </a:p>
         </p:txBody>
@@ -7696,7 +7760,7 @@
           <p:cNvPr id="9" name="core-no-1">
             <a:extLst xmlns:a="http://schemas.openxmlformats.org/drawingml/2006/main">
               <a:ext uri="{FF2B5EF4-FFF2-40B4-BE49-F238E27FC236}">
-                <a16:creationId xmlns:a16="http://schemas.microsoft.com/office/drawing/2014/main" id="{66A76B2E-E853-412A-9437-A0DDA42B97FB}"/>
+                <a16:creationId xmlns:a16="http://schemas.microsoft.com/office/drawing/2014/main" id="{998E276A-A956-497E-BC9E-465F2C28C57A}"/>
               </a:ext>
             </a:extLst>
           </p:cNvPr>
@@ -7728,7 +7792,7 @@
             <a:pPr algn="l">
               <a:defRPr sz="2250" b="1">
                 <a:solidFill>
-                  <a:srgbClr val="E5783F"/>
+                  <a:srgbClr val="9A3F16"/>
                 </a:solidFill>
                 <a:latin typeface="PingFang SC"/>
                 <a:ea typeface="PingFang SC"/>
@@ -7738,7 +7802,7 @@
             <a:r>
               <a:rPr sz="2250" b="1">
                 <a:solidFill>
-                  <a:srgbClr val="E5783F"/>
+                  <a:srgbClr val="9A3F16"/>
                 </a:solidFill>
                 <a:latin typeface="PingFang SC"/>
                 <a:ea typeface="PingFang SC"/>
@@ -7754,7 +7818,7 @@
           <p:cNvPr id="10" name="core-body-1">
             <a:extLst xmlns:a="http://schemas.openxmlformats.org/drawingml/2006/main">
               <a:ext uri="{FF2B5EF4-FFF2-40B4-BE49-F238E27FC236}">
-                <a16:creationId xmlns:a16="http://schemas.microsoft.com/office/drawing/2014/main" id="{CB7E6E0E-2874-43C6-BDFE-2791E7BA905B}"/>
+                <a16:creationId xmlns:a16="http://schemas.microsoft.com/office/drawing/2014/main" id="{1626484E-C695-4090-842C-12BDA8CBAD95}"/>
               </a:ext>
             </a:extLst>
           </p:cNvPr>
@@ -7818,7 +7882,7 @@
           <p:cNvPr id="11" name="s5-takeaway-rule">
             <a:extLst xmlns:a="http://schemas.openxmlformats.org/drawingml/2006/main">
               <a:ext uri="{FF2B5EF4-FFF2-40B4-BE49-F238E27FC236}">
-                <a16:creationId xmlns:a16="http://schemas.microsoft.com/office/drawing/2014/main" id="{D98BCD74-64A0-4845-AF27-7D156EDEE234}"/>
+                <a16:creationId xmlns:a16="http://schemas.microsoft.com/office/drawing/2014/main" id="{C88C2539-3074-418D-B21D-FE1D766FC206}"/>
               </a:ext>
             </a:extLst>
           </p:cNvPr>
@@ -7851,7 +7915,7 @@
           <p:cNvPr id="12" name="s5-takeaway">
             <a:extLst xmlns:a="http://schemas.openxmlformats.org/drawingml/2006/main">
               <a:ext uri="{FF2B5EF4-FFF2-40B4-BE49-F238E27FC236}">
-                <a16:creationId xmlns:a16="http://schemas.microsoft.com/office/drawing/2014/main" id="{755B2C0F-90C5-4B2F-83E9-AB35BB2FB7A5}"/>
+                <a16:creationId xmlns:a16="http://schemas.microsoft.com/office/drawing/2014/main" id="{8751F8D2-A5AF-4FDA-81B8-A5E29CCE99C6}"/>
               </a:ext>
             </a:extLst>
           </p:cNvPr>
@@ -7907,7 +7971,7 @@
     </p:spTree>
     <p:extLst>
       <p:ext uri="{BB962C8B-B14F-4D97-AF65-F5344CB8AC3E}">
-        <p14:creationId xmlns:p14="http://schemas.microsoft.com/office/powerpoint/2010/main" val="1365160887"/>
+        <p14:creationId xmlns:p14="http://schemas.microsoft.com/office/powerpoint/2010/main" val="914731533"/>
       </p:ext>
     </p:extLst>
   </p:cSld>
@@ -7938,7 +8002,7 @@
           <p:cNvPr id="1" name="s6-rule">
             <a:extLst xmlns:a="http://schemas.openxmlformats.org/drawingml/2006/main">
               <a:ext uri="{FF2B5EF4-FFF2-40B4-BE49-F238E27FC236}">
-                <a16:creationId xmlns:a16="http://schemas.microsoft.com/office/drawing/2014/main" id="{1DC0FCB5-7ECB-4982-BC6D-6F4FC9743D44}"/>
+                <a16:creationId xmlns:a16="http://schemas.microsoft.com/office/drawing/2014/main" id="{0F602AD6-D515-4C7D-A601-0EF7683FBFDF}"/>
               </a:ext>
             </a:extLst>
           </p:cNvPr>
@@ -7971,7 +8035,7 @@
           <p:cNvPr id="2" name="s6-eyebrow">
             <a:extLst xmlns:a="http://schemas.openxmlformats.org/drawingml/2006/main">
               <a:ext uri="{FF2B5EF4-FFF2-40B4-BE49-F238E27FC236}">
-                <a16:creationId xmlns:a16="http://schemas.microsoft.com/office/drawing/2014/main" id="{4E84606B-889B-4E5E-8084-30A76FF665B2}"/>
+                <a16:creationId xmlns:a16="http://schemas.microsoft.com/office/drawing/2014/main" id="{C451E5F4-EDE0-4DDD-AE4D-ACE2D476EEE4}"/>
               </a:ext>
             </a:extLst>
           </p:cNvPr>
@@ -8029,7 +8093,7 @@
           <p:cNvPr id="3" name="s6-title">
             <a:extLst xmlns:a="http://schemas.openxmlformats.org/drawingml/2006/main">
               <a:ext uri="{FF2B5EF4-FFF2-40B4-BE49-F238E27FC236}">
-                <a16:creationId xmlns:a16="http://schemas.microsoft.com/office/drawing/2014/main" id="{04219E90-90FA-4FDA-AEB9-641DD5D06BEC}"/>
+                <a16:creationId xmlns:a16="http://schemas.microsoft.com/office/drawing/2014/main" id="{D538D922-EF85-4C96-861A-A29F32685180}"/>
               </a:ext>
             </a:extLst>
           </p:cNvPr>
@@ -8054,7 +8118,7 @@
         </p:spPr>
         <p:txBody>
           <a:bodyPr xmlns:a="http://schemas.openxmlformats.org/drawingml/2006/main" lIns="0" tIns="0" rIns="0" bIns="0" anchor="ctr">
-            <a:normAutofit fontScale="86983"/>
+            <a:normAutofit fontScale="100000"/>
           </a:bodyPr>
           <a:lstStyle xmlns:a="http://schemas.openxmlformats.org/drawingml/2006/main"/>
           <a:p xmlns:a="http://schemas.openxmlformats.org/drawingml/2006/main">
@@ -8077,7 +8141,7 @@
                 <a:ea typeface="PingFang SC"/>
                 <a:cs typeface="PingFang SC"/>
               </a:rPr>
-              <a:t>低风险信息服务包括办公时间、公开材料下载位置和一般流程说明</a:t>
+              <a:t>低风险服务只提供公开信息与流程说明</a:t>
             </a:r>
           </a:p>
         </p:txBody>
@@ -8087,7 +8151,7 @@
           <p:cNvPr id="4" name="s6-footer">
             <a:extLst xmlns:a="http://schemas.openxmlformats.org/drawingml/2006/main">
               <a:ext uri="{FF2B5EF4-FFF2-40B4-BE49-F238E27FC236}">
-                <a16:creationId xmlns:a16="http://schemas.microsoft.com/office/drawing/2014/main" id="{CD03210E-B8A6-4291-9242-0D4DCE5328D1}"/>
+                <a16:creationId xmlns:a16="http://schemas.microsoft.com/office/drawing/2014/main" id="{0E0B0041-8D6A-4C1F-B21E-0D0E49392E00}"/>
               </a:ext>
             </a:extLst>
           </p:cNvPr>
@@ -8118,7 +8182,7 @@
           <p:cNvPr id="5" name="s6-identity">
             <a:extLst xmlns:a="http://schemas.openxmlformats.org/drawingml/2006/main">
               <a:ext uri="{FF2B5EF4-FFF2-40B4-BE49-F238E27FC236}">
-                <a16:creationId xmlns:a16="http://schemas.microsoft.com/office/drawing/2014/main" id="{4DA0C94A-22DD-4BEF-B07A-2387432A7239}"/>
+                <a16:creationId xmlns:a16="http://schemas.microsoft.com/office/drawing/2014/main" id="{E9E4A791-8B25-4CC9-B74B-41885AA0619D}"/>
               </a:ext>
             </a:extLst>
           </p:cNvPr>
@@ -8176,7 +8240,7 @@
           <p:cNvPr id="6" name="core-no-0">
             <a:extLst xmlns:a="http://schemas.openxmlformats.org/drawingml/2006/main">
               <a:ext uri="{FF2B5EF4-FFF2-40B4-BE49-F238E27FC236}">
-                <a16:creationId xmlns:a16="http://schemas.microsoft.com/office/drawing/2014/main" id="{395FDBE4-C809-4D1F-974A-77715D739DC4}"/>
+                <a16:creationId xmlns:a16="http://schemas.microsoft.com/office/drawing/2014/main" id="{A0237ECC-8BA5-4F38-9853-6066BE439BD2}"/>
               </a:ext>
             </a:extLst>
           </p:cNvPr>
@@ -8208,7 +8272,7 @@
             <a:pPr algn="l">
               <a:defRPr sz="2250" b="1">
                 <a:solidFill>
-                  <a:srgbClr val="E5783F"/>
+                  <a:srgbClr val="9A3F16"/>
                 </a:solidFill>
                 <a:latin typeface="PingFang SC"/>
                 <a:ea typeface="PingFang SC"/>
@@ -8218,7 +8282,7 @@
             <a:r>
               <a:rPr sz="2250" b="1">
                 <a:solidFill>
-                  <a:srgbClr val="E5783F"/>
+                  <a:srgbClr val="9A3F16"/>
                 </a:solidFill>
                 <a:latin typeface="PingFang SC"/>
                 <a:ea typeface="PingFang SC"/>
@@ -8234,7 +8298,7 @@
           <p:cNvPr id="7" name="core-label-0">
             <a:extLst xmlns:a="http://schemas.openxmlformats.org/drawingml/2006/main">
               <a:ext uri="{FF2B5EF4-FFF2-40B4-BE49-F238E27FC236}">
-                <a16:creationId xmlns:a16="http://schemas.microsoft.com/office/drawing/2014/main" id="{76774830-CBBB-4896-B67C-F8186F7CA226}"/>
+                <a16:creationId xmlns:a16="http://schemas.microsoft.com/office/drawing/2014/main" id="{EF36F3B5-A61D-4DDC-9B76-ED6B0F86A1AB}"/>
               </a:ext>
             </a:extLst>
           </p:cNvPr>
@@ -8292,7 +8356,7 @@
           <p:cNvPr id="8" name="core-body-0">
             <a:extLst xmlns:a="http://schemas.openxmlformats.org/drawingml/2006/main">
               <a:ext uri="{FF2B5EF4-FFF2-40B4-BE49-F238E27FC236}">
-                <a16:creationId xmlns:a16="http://schemas.microsoft.com/office/drawing/2014/main" id="{9D999209-2909-4AAF-8CDE-BA0C7B962B27}"/>
+                <a16:creationId xmlns:a16="http://schemas.microsoft.com/office/drawing/2014/main" id="{911D4BD1-0152-4000-AE64-3F65B0DA2905}"/>
               </a:ext>
             </a:extLst>
           </p:cNvPr>
@@ -8316,14 +8380,14 @@
           </a:solidFill>
           <a:ln xmlns:a="http://schemas.openxmlformats.org/drawingml/2006/main" w="19050">
             <a:solidFill>
-              <a:srgbClr val="E5783F"/>
+              <a:srgbClr val="9A3F16"/>
             </a:solidFill>
             <a:prstDash val="solid"/>
           </a:ln>
         </p:spPr>
         <p:txBody>
           <a:bodyPr xmlns:a="http://schemas.openxmlformats.org/drawingml/2006/main" lIns="152400" tIns="133350" rIns="152400" bIns="133350" anchor="ctr">
-            <a:normAutofit fontScale="98233"/>
+            <a:normAutofit fontScale="100000"/>
           </a:bodyPr>
           <a:lstStyle xmlns:a="http://schemas.openxmlformats.org/drawingml/2006/main"/>
           <a:p xmlns:a="http://schemas.openxmlformats.org/drawingml/2006/main">
@@ -8346,7 +8410,7 @@
                 <a:ea typeface="PingFang SC"/>
                 <a:cs typeface="PingFang SC"/>
               </a:rPr>
-              <a:t>低风险信息服务包括办公时间、公开材料下载位置和一般流程说明，可以在来源有效且转人工通畅的前提下自动答复。中等风险任务如资格条件预检查、材料缺项提示，可以帮助准备…</a:t>
+              <a:t>低风险信息服务包括办公时间、公开材料下载位置和一般流程说明；可以在来源有效且转人工通畅的前提下自动答复；中等风险任务如资格条件预检查、材料缺项提示</a:t>
             </a:r>
           </a:p>
         </p:txBody>
@@ -8356,7 +8420,7 @@
           <p:cNvPr id="9" name="core-no-1">
             <a:extLst xmlns:a="http://schemas.openxmlformats.org/drawingml/2006/main">
               <a:ext uri="{FF2B5EF4-FFF2-40B4-BE49-F238E27FC236}">
-                <a16:creationId xmlns:a16="http://schemas.microsoft.com/office/drawing/2014/main" id="{B74D87EA-CCF2-4447-8FB7-6601B99801E0}"/>
+                <a16:creationId xmlns:a16="http://schemas.microsoft.com/office/drawing/2014/main" id="{6DCA8A06-27D0-48F3-96DD-CB0E6B13BAA1}"/>
               </a:ext>
             </a:extLst>
           </p:cNvPr>
@@ -8388,7 +8452,7 @@
             <a:pPr algn="l">
               <a:defRPr sz="2250" b="1">
                 <a:solidFill>
-                  <a:srgbClr val="E5783F"/>
+                  <a:srgbClr val="9A3F16"/>
                 </a:solidFill>
                 <a:latin typeface="PingFang SC"/>
                 <a:ea typeface="PingFang SC"/>
@@ -8398,7 +8462,7 @@
             <a:r>
               <a:rPr sz="2250" b="1">
                 <a:solidFill>
-                  <a:srgbClr val="E5783F"/>
+                  <a:srgbClr val="9A3F16"/>
                 </a:solidFill>
                 <a:latin typeface="PingFang SC"/>
                 <a:ea typeface="PingFang SC"/>
@@ -8414,7 +8478,7 @@
           <p:cNvPr id="10" name="core-body-1">
             <a:extLst xmlns:a="http://schemas.openxmlformats.org/drawingml/2006/main">
               <a:ext uri="{FF2B5EF4-FFF2-40B4-BE49-F238E27FC236}">
-                <a16:creationId xmlns:a16="http://schemas.microsoft.com/office/drawing/2014/main" id="{FF247CA8-D0DC-4C9A-A738-421E4B664D8D}"/>
+                <a16:creationId xmlns:a16="http://schemas.microsoft.com/office/drawing/2014/main" id="{DEDB98A6-45B2-4818-940A-49E47A0F02CC}"/>
               </a:ext>
             </a:extLst>
           </p:cNvPr>
@@ -8468,7 +8532,7 @@
                 <a:ea typeface="PingFang SC"/>
                 <a:cs typeface="PingFang SC"/>
               </a:rPr>
-              <a:t>涉及行政许可、处罚、救助资格、补贴发放、资源分配、信用评价或个人申诉的输出，会影响重要权益，不应由模型独立作出。系统可以整理资料与标记规则，最终判断、告知理由和救济途径由具备权限的工作人员负责…</a:t>
+              <a:t>涉及行政许可、处罚、救助资格、补贴发放、资源分配、信用评价或个人申诉的输出；会影响重要权益，不应由模型独立作出；系统可以整理资料与标记规则；最终判断、告知理由和救济途径由具备权限的工作人员负责</a:t>
             </a:r>
           </a:p>
         </p:txBody>
@@ -8478,7 +8542,7 @@
           <p:cNvPr id="11" name="s6-takeaway-rule">
             <a:extLst xmlns:a="http://schemas.openxmlformats.org/drawingml/2006/main">
               <a:ext uri="{FF2B5EF4-FFF2-40B4-BE49-F238E27FC236}">
-                <a16:creationId xmlns:a16="http://schemas.microsoft.com/office/drawing/2014/main" id="{5C730239-E9B0-46FA-9968-22B37C526AC2}"/>
+                <a16:creationId xmlns:a16="http://schemas.microsoft.com/office/drawing/2014/main" id="{36B1D902-48C1-4A09-91D1-887F90F17B76}"/>
               </a:ext>
             </a:extLst>
           </p:cNvPr>
@@ -8511,7 +8575,7 @@
           <p:cNvPr id="12" name="s6-takeaway">
             <a:extLst xmlns:a="http://schemas.openxmlformats.org/drawingml/2006/main">
               <a:ext uri="{FF2B5EF4-FFF2-40B4-BE49-F238E27FC236}">
-                <a16:creationId xmlns:a16="http://schemas.microsoft.com/office/drawing/2014/main" id="{EA493051-AA71-4E7A-8A9A-5DA6A398CEE6}"/>
+                <a16:creationId xmlns:a16="http://schemas.microsoft.com/office/drawing/2014/main" id="{40212D52-0336-4605-96F4-E53625029E9D}"/>
               </a:ext>
             </a:extLst>
           </p:cNvPr>
@@ -8559,7 +8623,7 @@
                 <a:ea typeface="PingFang SC"/>
                 <a:cs typeface="PingFang SC"/>
               </a:rPr>
-              <a:t>低风险信息服务包括办公时间、公开材料下载位置和一般流程说明</a:t>
+              <a:t>低风险服务只提供公开信息与流程说明</a:t>
             </a:r>
           </a:p>
         </p:txBody>
@@ -8567,7 +8631,7 @@
     </p:spTree>
     <p:extLst>
       <p:ext uri="{BB962C8B-B14F-4D97-AF65-F5344CB8AC3E}">
-        <p14:creationId xmlns:p14="http://schemas.microsoft.com/office/powerpoint/2010/main" val="1220712986"/>
+        <p14:creationId xmlns:p14="http://schemas.microsoft.com/office/powerpoint/2010/main" val="1900964565"/>
       </p:ext>
     </p:extLst>
   </p:cSld>
@@ -8598,7 +8662,7 @@
           <p:cNvPr id="1" name="s7-rule">
             <a:extLst xmlns:a="http://schemas.openxmlformats.org/drawingml/2006/main">
               <a:ext uri="{FF2B5EF4-FFF2-40B4-BE49-F238E27FC236}">
-                <a16:creationId xmlns:a16="http://schemas.microsoft.com/office/drawing/2014/main" id="{701874BA-D897-4AC4-8380-05689D47E1E5}"/>
+                <a16:creationId xmlns:a16="http://schemas.microsoft.com/office/drawing/2014/main" id="{D316B0A7-3A3B-462B-840B-888E1B246EE7}"/>
               </a:ext>
             </a:extLst>
           </p:cNvPr>
@@ -8631,7 +8695,7 @@
           <p:cNvPr id="2" name="s7-eyebrow">
             <a:extLst xmlns:a="http://schemas.openxmlformats.org/drawingml/2006/main">
               <a:ext uri="{FF2B5EF4-FFF2-40B4-BE49-F238E27FC236}">
-                <a16:creationId xmlns:a16="http://schemas.microsoft.com/office/drawing/2014/main" id="{7BF66750-CC06-4828-90B1-92F266389846}"/>
+                <a16:creationId xmlns:a16="http://schemas.microsoft.com/office/drawing/2014/main" id="{838DA2E8-4B60-40A4-A0E0-C8298B3BADD1}"/>
               </a:ext>
             </a:extLst>
           </p:cNvPr>
@@ -8689,7 +8753,7 @@
           <p:cNvPr id="3" name="s7-title">
             <a:extLst xmlns:a="http://schemas.openxmlformats.org/drawingml/2006/main">
               <a:ext uri="{FF2B5EF4-FFF2-40B4-BE49-F238E27FC236}">
-                <a16:creationId xmlns:a16="http://schemas.microsoft.com/office/drawing/2014/main" id="{12E55016-5147-478C-BF53-44124B099F17}"/>
+                <a16:creationId xmlns:a16="http://schemas.microsoft.com/office/drawing/2014/main" id="{044034BB-82BF-408C-A072-DC1D294ED135}"/>
               </a:ext>
             </a:extLst>
           </p:cNvPr>
@@ -8747,7 +8811,7 @@
           <p:cNvPr id="4" name="s7-footer">
             <a:extLst xmlns:a="http://schemas.openxmlformats.org/drawingml/2006/main">
               <a:ext uri="{FF2B5EF4-FFF2-40B4-BE49-F238E27FC236}">
-                <a16:creationId xmlns:a16="http://schemas.microsoft.com/office/drawing/2014/main" id="{E1A273D8-C073-45DD-976B-4C0CCF313174}"/>
+                <a16:creationId xmlns:a16="http://schemas.microsoft.com/office/drawing/2014/main" id="{48A75579-F7A9-45C0-859C-FB1D44F9D501}"/>
               </a:ext>
             </a:extLst>
           </p:cNvPr>
@@ -8778,7 +8842,7 @@
           <p:cNvPr id="5" name="s7-identity">
             <a:extLst xmlns:a="http://schemas.openxmlformats.org/drawingml/2006/main">
               <a:ext uri="{FF2B5EF4-FFF2-40B4-BE49-F238E27FC236}">
-                <a16:creationId xmlns:a16="http://schemas.microsoft.com/office/drawing/2014/main" id="{C6F64DE0-33C1-47EE-8EB8-630972839386}"/>
+                <a16:creationId xmlns:a16="http://schemas.microsoft.com/office/drawing/2014/main" id="{6680F156-733E-4BDB-AEC2-DA8594845350}"/>
               </a:ext>
             </a:extLst>
           </p:cNvPr>
@@ -8836,7 +8900,7 @@
           <p:cNvPr id="6" name="core-no-0">
             <a:extLst xmlns:a="http://schemas.openxmlformats.org/drawingml/2006/main">
               <a:ext uri="{FF2B5EF4-FFF2-40B4-BE49-F238E27FC236}">
-                <a16:creationId xmlns:a16="http://schemas.microsoft.com/office/drawing/2014/main" id="{52B9C13D-EDD0-4532-97C5-9B0CAB8C3F30}"/>
+                <a16:creationId xmlns:a16="http://schemas.microsoft.com/office/drawing/2014/main" id="{AC7DD5D8-C751-4361-AF8A-993F99560D11}"/>
               </a:ext>
             </a:extLst>
           </p:cNvPr>
@@ -8868,7 +8932,7 @@
             <a:pPr algn="l">
               <a:defRPr sz="2250" b="1">
                 <a:solidFill>
-                  <a:srgbClr val="E5783F"/>
+                  <a:srgbClr val="9A3F16"/>
                 </a:solidFill>
                 <a:latin typeface="PingFang SC"/>
                 <a:ea typeface="PingFang SC"/>
@@ -8878,7 +8942,7 @@
             <a:r>
               <a:rPr sz="2250" b="1">
                 <a:solidFill>
-                  <a:srgbClr val="E5783F"/>
+                  <a:srgbClr val="9A3F16"/>
                 </a:solidFill>
                 <a:latin typeface="PingFang SC"/>
                 <a:ea typeface="PingFang SC"/>
@@ -8894,7 +8958,7 @@
           <p:cNvPr id="7" name="core-label-0">
             <a:extLst xmlns:a="http://schemas.openxmlformats.org/drawingml/2006/main">
               <a:ext uri="{FF2B5EF4-FFF2-40B4-BE49-F238E27FC236}">
-                <a16:creationId xmlns:a16="http://schemas.microsoft.com/office/drawing/2014/main" id="{A8101E6C-9ACE-4DB1-9753-4FB054263F5C}"/>
+                <a16:creationId xmlns:a16="http://schemas.microsoft.com/office/drawing/2014/main" id="{2BAC4D84-A5ED-4A5B-8BBF-BA8948984215}"/>
               </a:ext>
             </a:extLst>
           </p:cNvPr>
@@ -8952,7 +9016,7 @@
           <p:cNvPr id="8" name="core-body-0">
             <a:extLst xmlns:a="http://schemas.openxmlformats.org/drawingml/2006/main">
               <a:ext uri="{FF2B5EF4-FFF2-40B4-BE49-F238E27FC236}">
-                <a16:creationId xmlns:a16="http://schemas.microsoft.com/office/drawing/2014/main" id="{0779CF1C-89E0-43D6-98A8-ADD14DF7B9FE}"/>
+                <a16:creationId xmlns:a16="http://schemas.microsoft.com/office/drawing/2014/main" id="{20BDF4F7-5C8F-4EE8-A573-AE1D1674EC98}"/>
               </a:ext>
             </a:extLst>
           </p:cNvPr>
@@ -8976,7 +9040,7 @@
           </a:solidFill>
           <a:ln xmlns:a="http://schemas.openxmlformats.org/drawingml/2006/main" w="19050">
             <a:solidFill>
-              <a:srgbClr val="E5783F"/>
+              <a:srgbClr val="9A3F16"/>
             </a:solidFill>
             <a:prstDash val="solid"/>
           </a:ln>
@@ -9006,7 +9070,7 @@
                 <a:ea typeface="PingFang SC"/>
                 <a:cs typeface="PingFang SC"/>
               </a:rPr>
-              <a:t>乡村场景可以从政策材料准备、农技服务转介、产销信息整理、灾害信息汇总和公共事务通知等任务切入。需要同时考虑网络条件、方言表达、数字能力和线下服务可达性…</a:t>
+              <a:t>乡村场景可以从政策材料准备、农技服务转介、产销信息整理、灾害信息汇总和公共事务通知等任务切入；需要同时考虑网络条件、方言表达、数字能力和线下服务可达性</a:t>
             </a:r>
           </a:p>
         </p:txBody>
@@ -9016,7 +9080,7 @@
           <p:cNvPr id="9" name="core-no-1">
             <a:extLst xmlns:a="http://schemas.openxmlformats.org/drawingml/2006/main">
               <a:ext uri="{FF2B5EF4-FFF2-40B4-BE49-F238E27FC236}">
-                <a16:creationId xmlns:a16="http://schemas.microsoft.com/office/drawing/2014/main" id="{01EDE63E-9B20-40BB-ACE9-558E2069D560}"/>
+                <a16:creationId xmlns:a16="http://schemas.microsoft.com/office/drawing/2014/main" id="{2E579BC1-A923-4FED-AC91-EAB2DC259687}"/>
               </a:ext>
             </a:extLst>
           </p:cNvPr>
@@ -9048,7 +9112,7 @@
             <a:pPr algn="l">
               <a:defRPr sz="2250" b="1">
                 <a:solidFill>
-                  <a:srgbClr val="E5783F"/>
+                  <a:srgbClr val="9A3F16"/>
                 </a:solidFill>
                 <a:latin typeface="PingFang SC"/>
                 <a:ea typeface="PingFang SC"/>
@@ -9058,7 +9122,7 @@
             <a:r>
               <a:rPr sz="2250" b="1">
                 <a:solidFill>
-                  <a:srgbClr val="E5783F"/>
+                  <a:srgbClr val="9A3F16"/>
                 </a:solidFill>
                 <a:latin typeface="PingFang SC"/>
                 <a:ea typeface="PingFang SC"/>
@@ -9074,7 +9138,7 @@
           <p:cNvPr id="10" name="core-body-1">
             <a:extLst xmlns:a="http://schemas.openxmlformats.org/drawingml/2006/main">
               <a:ext uri="{FF2B5EF4-FFF2-40B4-BE49-F238E27FC236}">
-                <a16:creationId xmlns:a16="http://schemas.microsoft.com/office/drawing/2014/main" id="{07E7C00B-E1B5-410B-BCD2-09F7A362E446}"/>
+                <a16:creationId xmlns:a16="http://schemas.microsoft.com/office/drawing/2014/main" id="{2513D5FB-7E8D-4DDC-AB84-DC44AA8376B5}"/>
               </a:ext>
             </a:extLst>
           </p:cNvPr>
@@ -9128,7 +9192,7 @@
                 <a:ea typeface="PingFang SC"/>
                 <a:cs typeface="PingFang SC"/>
               </a:rPr>
-              <a:t>例如，农户上传作物照片时，AI 可以整理症状并检索公开农技资料，但不能把图像识别结果当作确定诊断，更不能自动给出受管制药品用量。更稳妥的流程是提示拍摄要求、给出可能原因和依据…</a:t>
+              <a:t>例如，农户上传作物照片时；AI 可以整理症状并检索公开农技资料；但不能把图像识别结果当作确定诊断；更不能自动给出受管制药品用量</a:t>
             </a:r>
           </a:p>
         </p:txBody>
@@ -9138,7 +9202,7 @@
           <p:cNvPr id="11" name="s7-takeaway-rule">
             <a:extLst xmlns:a="http://schemas.openxmlformats.org/drawingml/2006/main">
               <a:ext uri="{FF2B5EF4-FFF2-40B4-BE49-F238E27FC236}">
-                <a16:creationId xmlns:a16="http://schemas.microsoft.com/office/drawing/2014/main" id="{6F9844A0-34EB-4505-A5F5-1A5CC7FFE551}"/>
+                <a16:creationId xmlns:a16="http://schemas.microsoft.com/office/drawing/2014/main" id="{90135161-CF97-4AE8-AFBC-B726E90D86F8}"/>
               </a:ext>
             </a:extLst>
           </p:cNvPr>
@@ -9171,7 +9235,7 @@
           <p:cNvPr id="12" name="s7-takeaway">
             <a:extLst xmlns:a="http://schemas.openxmlformats.org/drawingml/2006/main">
               <a:ext uri="{FF2B5EF4-FFF2-40B4-BE49-F238E27FC236}">
-                <a16:creationId xmlns:a16="http://schemas.microsoft.com/office/drawing/2014/main" id="{31EC0D50-7CB8-425A-9E31-C1451E231DD9}"/>
+                <a16:creationId xmlns:a16="http://schemas.microsoft.com/office/drawing/2014/main" id="{B5299724-8570-445D-A9EB-6A24853B659D}"/>
               </a:ext>
             </a:extLst>
           </p:cNvPr>
@@ -9227,7 +9291,7 @@
     </p:spTree>
     <p:extLst>
       <p:ext uri="{BB962C8B-B14F-4D97-AF65-F5344CB8AC3E}">
-        <p14:creationId xmlns:p14="http://schemas.microsoft.com/office/powerpoint/2010/main" val="839390058"/>
+        <p14:creationId xmlns:p14="http://schemas.microsoft.com/office/powerpoint/2010/main" val="781455126"/>
       </p:ext>
     </p:extLst>
   </p:cSld>
@@ -9258,7 +9322,7 @@
           <p:cNvPr id="1" name="s8-rule">
             <a:extLst xmlns:a="http://schemas.openxmlformats.org/drawingml/2006/main">
               <a:ext uri="{FF2B5EF4-FFF2-40B4-BE49-F238E27FC236}">
-                <a16:creationId xmlns:a16="http://schemas.microsoft.com/office/drawing/2014/main" id="{935B4752-6EC9-458C-9C0D-0A153DEDDA4F}"/>
+                <a16:creationId xmlns:a16="http://schemas.microsoft.com/office/drawing/2014/main" id="{630F0E54-F287-4EE6-9D31-BEBD44C3EC7B}"/>
               </a:ext>
             </a:extLst>
           </p:cNvPr>
@@ -9291,7 +9355,7 @@
           <p:cNvPr id="2" name="s8-eyebrow">
             <a:extLst xmlns:a="http://schemas.openxmlformats.org/drawingml/2006/main">
               <a:ext uri="{FF2B5EF4-FFF2-40B4-BE49-F238E27FC236}">
-                <a16:creationId xmlns:a16="http://schemas.microsoft.com/office/drawing/2014/main" id="{58220B2E-2E8F-438A-A8F1-78208B07869B}"/>
+                <a16:creationId xmlns:a16="http://schemas.microsoft.com/office/drawing/2014/main" id="{8B050091-9743-4889-B916-03DA1F23E93C}"/>
               </a:ext>
             </a:extLst>
           </p:cNvPr>
@@ -9349,7 +9413,7 @@
           <p:cNvPr id="3" name="s8-title">
             <a:extLst xmlns:a="http://schemas.openxmlformats.org/drawingml/2006/main">
               <a:ext uri="{FF2B5EF4-FFF2-40B4-BE49-F238E27FC236}">
-                <a16:creationId xmlns:a16="http://schemas.microsoft.com/office/drawing/2014/main" id="{E37DCB13-BD9A-41B3-A7A5-E06E0C07F5ED}"/>
+                <a16:creationId xmlns:a16="http://schemas.microsoft.com/office/drawing/2014/main" id="{80328FA4-75D3-4460-ACD2-19918565C367}"/>
               </a:ext>
             </a:extLst>
           </p:cNvPr>
@@ -9407,7 +9471,7 @@
           <p:cNvPr id="4" name="s8-footer">
             <a:extLst xmlns:a="http://schemas.openxmlformats.org/drawingml/2006/main">
               <a:ext uri="{FF2B5EF4-FFF2-40B4-BE49-F238E27FC236}">
-                <a16:creationId xmlns:a16="http://schemas.microsoft.com/office/drawing/2014/main" id="{9023492F-F87F-46AF-BFB1-C0B42EA281A9}"/>
+                <a16:creationId xmlns:a16="http://schemas.microsoft.com/office/drawing/2014/main" id="{57DB8A07-47A8-4DA5-947E-DAB4E8706AF9}"/>
               </a:ext>
             </a:extLst>
           </p:cNvPr>
@@ -9438,7 +9502,7 @@
           <p:cNvPr id="5" name="s8-identity">
             <a:extLst xmlns:a="http://schemas.openxmlformats.org/drawingml/2006/main">
               <a:ext uri="{FF2B5EF4-FFF2-40B4-BE49-F238E27FC236}">
-                <a16:creationId xmlns:a16="http://schemas.microsoft.com/office/drawing/2014/main" id="{4A219EEB-9168-4055-8556-B352468A5296}"/>
+                <a16:creationId xmlns:a16="http://schemas.microsoft.com/office/drawing/2014/main" id="{9D9E9686-9774-4145-87C4-CF424C765820}"/>
               </a:ext>
             </a:extLst>
           </p:cNvPr>
@@ -9496,7 +9560,7 @@
           <p:cNvPr id="6" name="core-no-0">
             <a:extLst xmlns:a="http://schemas.openxmlformats.org/drawingml/2006/main">
               <a:ext uri="{FF2B5EF4-FFF2-40B4-BE49-F238E27FC236}">
-                <a16:creationId xmlns:a16="http://schemas.microsoft.com/office/drawing/2014/main" id="{E5E11536-3D6A-4234-B062-71001F33B1E7}"/>
+                <a16:creationId xmlns:a16="http://schemas.microsoft.com/office/drawing/2014/main" id="{69692317-D098-4B2D-A071-3BC9B9E01527}"/>
               </a:ext>
             </a:extLst>
           </p:cNvPr>
@@ -9528,7 +9592,7 @@
             <a:pPr algn="l">
               <a:defRPr sz="2250" b="1">
                 <a:solidFill>
-                  <a:srgbClr val="E5783F"/>
+                  <a:srgbClr val="9A3F16"/>
                 </a:solidFill>
                 <a:latin typeface="PingFang SC"/>
                 <a:ea typeface="PingFang SC"/>
@@ -9538,7 +9602,7 @@
             <a:r>
               <a:rPr sz="2250" b="1">
                 <a:solidFill>
-                  <a:srgbClr val="E5783F"/>
+                  <a:srgbClr val="9A3F16"/>
                 </a:solidFill>
                 <a:latin typeface="PingFang SC"/>
                 <a:ea typeface="PingFang SC"/>
@@ -9554,7 +9618,7 @@
           <p:cNvPr id="7" name="core-label-0">
             <a:extLst xmlns:a="http://schemas.openxmlformats.org/drawingml/2006/main">
               <a:ext uri="{FF2B5EF4-FFF2-40B4-BE49-F238E27FC236}">
-                <a16:creationId xmlns:a16="http://schemas.microsoft.com/office/drawing/2014/main" id="{C3328ED5-B5AC-4EB1-9287-355BCE80C12D}"/>
+                <a16:creationId xmlns:a16="http://schemas.microsoft.com/office/drawing/2014/main" id="{FF67AF4D-6A4C-4F1C-BA04-D886FF307CB6}"/>
               </a:ext>
             </a:extLst>
           </p:cNvPr>
@@ -9612,7 +9676,7 @@
           <p:cNvPr id="8" name="core-body-0">
             <a:extLst xmlns:a="http://schemas.openxmlformats.org/drawingml/2006/main">
               <a:ext uri="{FF2B5EF4-FFF2-40B4-BE49-F238E27FC236}">
-                <a16:creationId xmlns:a16="http://schemas.microsoft.com/office/drawing/2014/main" id="{B12D4683-6A8E-4E9E-A4E0-6F8C9E98F5C2}"/>
+                <a16:creationId xmlns:a16="http://schemas.microsoft.com/office/drawing/2014/main" id="{CE19A9F1-C141-4B24-B5CB-533E0DC3670B}"/>
               </a:ext>
             </a:extLst>
           </p:cNvPr>
@@ -9636,14 +9700,14 @@
           </a:solidFill>
           <a:ln xmlns:a="http://schemas.openxmlformats.org/drawingml/2006/main" w="19050">
             <a:solidFill>
-              <a:srgbClr val="E5783F"/>
+              <a:srgbClr val="9A3F16"/>
             </a:solidFill>
             <a:prstDash val="solid"/>
           </a:ln>
         </p:spPr>
         <p:txBody>
           <a:bodyPr xmlns:a="http://schemas.openxmlformats.org/drawingml/2006/main" lIns="152400" tIns="133350" rIns="152400" bIns="133350" anchor="ctr">
-            <a:normAutofit fontScale="96510"/>
+            <a:normAutofit fontScale="98233"/>
           </a:bodyPr>
           <a:lstStyle xmlns:a="http://schemas.openxmlformats.org/drawingml/2006/main"/>
           <a:p xmlns:a="http://schemas.openxmlformats.org/drawingml/2006/main">
@@ -9666,7 +9730,7 @@
                 <a:ea typeface="PingFang SC"/>
                 <a:cs typeface="PingFang SC"/>
               </a:rPr>
-              <a:t>政务入口常收到医疗、心理危机、家庭纠纷和法律争议等问题。AI 只能提供公开机构、办理流程、材料和求助渠道等一般信息，不作诊断，不给个案治疗方案，不替代律师解释权利义务，也不预测案件结果…</a:t>
+              <a:t>政务入口常收到医疗、心理危机、家庭纠纷和法律争议等问题；AI 只能提供公开机构、办理流程、材料和求助渠道等一般信息；不作诊断，不给个案治疗方案；不替代律师解释权利义务</a:t>
             </a:r>
           </a:p>
         </p:txBody>
@@ -9676,7 +9740,7 @@
           <p:cNvPr id="9" name="core-no-1">
             <a:extLst xmlns:a="http://schemas.openxmlformats.org/drawingml/2006/main">
               <a:ext uri="{FF2B5EF4-FFF2-40B4-BE49-F238E27FC236}">
-                <a16:creationId xmlns:a16="http://schemas.microsoft.com/office/drawing/2014/main" id="{4D6F8BAB-3B5B-41AF-9A63-818B68E1C892}"/>
+                <a16:creationId xmlns:a16="http://schemas.microsoft.com/office/drawing/2014/main" id="{148373F4-602E-4219-B789-0B3F25F19564}"/>
               </a:ext>
             </a:extLst>
           </p:cNvPr>
@@ -9708,7 +9772,7 @@
             <a:pPr algn="l">
               <a:defRPr sz="2250" b="1">
                 <a:solidFill>
-                  <a:srgbClr val="E5783F"/>
+                  <a:srgbClr val="9A3F16"/>
                 </a:solidFill>
                 <a:latin typeface="PingFang SC"/>
                 <a:ea typeface="PingFang SC"/>
@@ -9718,7 +9782,7 @@
             <a:r>
               <a:rPr sz="2250" b="1">
                 <a:solidFill>
-                  <a:srgbClr val="E5783F"/>
+                  <a:srgbClr val="9A3F16"/>
                 </a:solidFill>
                 <a:latin typeface="PingFang SC"/>
                 <a:ea typeface="PingFang SC"/>
@@ -9734,7 +9798,7 @@
           <p:cNvPr id="10" name="core-body-1">
             <a:extLst xmlns:a="http://schemas.openxmlformats.org/drawingml/2006/main">
               <a:ext uri="{FF2B5EF4-FFF2-40B4-BE49-F238E27FC236}">
-                <a16:creationId xmlns:a16="http://schemas.microsoft.com/office/drawing/2014/main" id="{AD90245D-B9F5-4343-A466-38FF1DB2F603}"/>
+                <a16:creationId xmlns:a16="http://schemas.microsoft.com/office/drawing/2014/main" id="{98A6AFA3-3B75-443B-9DC3-0311445769FC}"/>
               </a:ext>
             </a:extLst>
           </p:cNvPr>
@@ -9798,7 +9862,7 @@
           <p:cNvPr id="11" name="s8-takeaway-rule">
             <a:extLst xmlns:a="http://schemas.openxmlformats.org/drawingml/2006/main">
               <a:ext uri="{FF2B5EF4-FFF2-40B4-BE49-F238E27FC236}">
-                <a16:creationId xmlns:a16="http://schemas.microsoft.com/office/drawing/2014/main" id="{1AD012E3-6B40-4F84-B1E7-11D43FE800E5}"/>
+                <a16:creationId xmlns:a16="http://schemas.microsoft.com/office/drawing/2014/main" id="{4E5297A1-F0AB-4848-8618-773364E4877C}"/>
               </a:ext>
             </a:extLst>
           </p:cNvPr>
@@ -9831,7 +9895,7 @@
           <p:cNvPr id="12" name="s8-takeaway">
             <a:extLst xmlns:a="http://schemas.openxmlformats.org/drawingml/2006/main">
               <a:ext uri="{FF2B5EF4-FFF2-40B4-BE49-F238E27FC236}">
-                <a16:creationId xmlns:a16="http://schemas.microsoft.com/office/drawing/2014/main" id="{4D85FAF7-B4BE-49C1-9C24-53B928A7A996}"/>
+                <a16:creationId xmlns:a16="http://schemas.microsoft.com/office/drawing/2014/main" id="{F12A8253-FB0C-4D7E-AB9B-D11A09FEB86D}"/>
               </a:ext>
             </a:extLst>
           </p:cNvPr>
@@ -9887,7 +9951,7 @@
     </p:spTree>
     <p:extLst>
       <p:ext uri="{BB962C8B-B14F-4D97-AF65-F5344CB8AC3E}">
-        <p14:creationId xmlns:p14="http://schemas.microsoft.com/office/powerpoint/2010/main" val="582591372"/>
+        <p14:creationId xmlns:p14="http://schemas.microsoft.com/office/powerpoint/2010/main" val="200065566"/>
       </p:ext>
     </p:extLst>
   </p:cSld>
@@ -9918,7 +9982,7 @@
           <p:cNvPr id="1" name="s9-rule">
             <a:extLst xmlns:a="http://schemas.openxmlformats.org/drawingml/2006/main">
               <a:ext uri="{FF2B5EF4-FFF2-40B4-BE49-F238E27FC236}">
-                <a16:creationId xmlns:a16="http://schemas.microsoft.com/office/drawing/2014/main" id="{7966575E-0327-4491-8D35-2A80013D6FE3}"/>
+                <a16:creationId xmlns:a16="http://schemas.microsoft.com/office/drawing/2014/main" id="{C056FD4D-38B1-4F0A-BF38-94F2FE796019}"/>
               </a:ext>
             </a:extLst>
           </p:cNvPr>
@@ -9951,7 +10015,7 @@
           <p:cNvPr id="2" name="s9-eyebrow">
             <a:extLst xmlns:a="http://schemas.openxmlformats.org/drawingml/2006/main">
               <a:ext uri="{FF2B5EF4-FFF2-40B4-BE49-F238E27FC236}">
-                <a16:creationId xmlns:a16="http://schemas.microsoft.com/office/drawing/2014/main" id="{621890EE-D452-4552-974C-A965D7936844}"/>
+                <a16:creationId xmlns:a16="http://schemas.microsoft.com/office/drawing/2014/main" id="{A75DBEC2-155B-4E0E-A6FD-6325C067BA56}"/>
               </a:ext>
             </a:extLst>
           </p:cNvPr>
@@ -10009,7 +10073,7 @@
           <p:cNvPr id="3" name="s9-title">
             <a:extLst xmlns:a="http://schemas.openxmlformats.org/drawingml/2006/main">
               <a:ext uri="{FF2B5EF4-FFF2-40B4-BE49-F238E27FC236}">
-                <a16:creationId xmlns:a16="http://schemas.microsoft.com/office/drawing/2014/main" id="{EC31F2FD-FF92-43CF-B1C5-8A8B8DAF55EF}"/>
+                <a16:creationId xmlns:a16="http://schemas.microsoft.com/office/drawing/2014/main" id="{22A99B5F-4B8F-437C-87A6-AD4CD280C240}"/>
               </a:ext>
             </a:extLst>
           </p:cNvPr>
@@ -10057,7 +10121,7 @@
                 <a:ea typeface="PingFang SC"/>
                 <a:cs typeface="PingFang SC"/>
               </a:rPr>
-              <a:t>惠农政策材料助手必须经过边界验证</a:t>
+              <a:t>政策助手只能解释与预检，不能承诺审批</a:t>
             </a:r>
           </a:p>
         </p:txBody>
@@ -10067,7 +10131,7 @@
           <p:cNvPr id="4" name="s9-footer">
             <a:extLst xmlns:a="http://schemas.openxmlformats.org/drawingml/2006/main">
               <a:ext uri="{FF2B5EF4-FFF2-40B4-BE49-F238E27FC236}">
-                <a16:creationId xmlns:a16="http://schemas.microsoft.com/office/drawing/2014/main" id="{DF2A8B69-A447-4A73-A6B1-4256300E045D}"/>
+                <a16:creationId xmlns:a16="http://schemas.microsoft.com/office/drawing/2014/main" id="{0D87FA56-84D8-48C4-B0B2-D2842708277D}"/>
               </a:ext>
             </a:extLst>
           </p:cNvPr>
@@ -10098,7 +10162,7 @@
           <p:cNvPr id="5" name="s9-identity">
             <a:extLst xmlns:a="http://schemas.openxmlformats.org/drawingml/2006/main">
               <a:ext uri="{FF2B5EF4-FFF2-40B4-BE49-F238E27FC236}">
-                <a16:creationId xmlns:a16="http://schemas.microsoft.com/office/drawing/2014/main" id="{5BFB1945-FC60-4AB4-A2AF-4E10A5C7BF2C}"/>
+                <a16:creationId xmlns:a16="http://schemas.microsoft.com/office/drawing/2014/main" id="{BF1A0005-250D-4D66-A513-CF1AB261461B}"/>
               </a:ext>
             </a:extLst>
           </p:cNvPr>
@@ -10156,7 +10220,7 @@
           <p:cNvPr id="6" name="case-title">
             <a:extLst xmlns:a="http://schemas.openxmlformats.org/drawingml/2006/main">
               <a:ext uri="{FF2B5EF4-FFF2-40B4-BE49-F238E27FC236}">
-                <a16:creationId xmlns:a16="http://schemas.microsoft.com/office/drawing/2014/main" id="{1F94BDF0-F40E-44C1-B65A-6089C34F0B20}"/>
+                <a16:creationId xmlns:a16="http://schemas.microsoft.com/office/drawing/2014/main" id="{E9324422-888A-4322-838C-7B877D876BE9}"/>
               </a:ext>
             </a:extLst>
           </p:cNvPr>
@@ -10220,23 +10284,23 @@
           <p:cNvPr id="7" name="case-row-0">
             <a:extLst xmlns:a="http://schemas.openxmlformats.org/drawingml/2006/main">
               <a:ext uri="{FF2B5EF4-FFF2-40B4-BE49-F238E27FC236}">
-                <a16:creationId xmlns:a16="http://schemas.microsoft.com/office/drawing/2014/main" id="{16FAB2D8-AF4A-48C8-8EBF-79832707E380}"/>
-              </a:ext>
-            </a:extLst>
-          </p:cNvPr>
-          <p:cNvSpPr>
-            <a:spLocks xmlns:a="http://schemas.openxmlformats.org/drawingml/2006/main" noGrp="1"/>
-          </p:cNvSpPr>
-          <p:nvPr/>
-        </p:nvSpPr>
-        <p:spPr>
-          <a:xfrm xmlns:a="http://schemas.openxmlformats.org/drawingml/2006/main">
-            <a:off x="4286250" y="2228850"/>
-            <a:ext cx="6534150" cy="1238250"/>
+                <a16:creationId xmlns:a16="http://schemas.microsoft.com/office/drawing/2014/main" id="{AAD0E3CE-984F-40C5-819B-507D0E404D87}"/>
+              </a:ext>
+            </a:extLst>
+          </p:cNvPr>
+          <p:cNvSpPr>
+            <a:spLocks xmlns:a="http://schemas.openxmlformats.org/drawingml/2006/main" noGrp="1"/>
+          </p:cNvSpPr>
+          <p:nvPr/>
+        </p:nvSpPr>
+        <p:spPr>
+          <a:xfrm xmlns:a="http://schemas.openxmlformats.org/drawingml/2006/main">
+            <a:off x="4286250" y="2038350"/>
+            <a:ext cx="6534150" cy="514350"/>
           </a:xfrm>
           <a:prstGeom xmlns:a="http://schemas.openxmlformats.org/drawingml/2006/main" prst="roundRect">
             <a:avLst>
-              <a:gd name="adj" fmla="val 10000"/>
+              <a:gd name="adj" fmla="val 24074"/>
             </a:avLst>
           </a:prstGeom>
           <a:solidFill xmlns:a="http://schemas.openxmlformats.org/drawingml/2006/main">
@@ -10251,7 +10315,7 @@
         </p:spPr>
         <p:txBody>
           <a:bodyPr xmlns:a="http://schemas.openxmlformats.org/drawingml/2006/main" lIns="152400" tIns="133350" rIns="152400" bIns="133350" anchor="ctr">
-            <a:normAutofit fontScale="100000"/>
+            <a:normAutofit fontScale="72956"/>
           </a:bodyPr>
           <a:lstStyle xmlns:a="http://schemas.openxmlformats.org/drawingml/2006/main"/>
           <a:p xmlns:a="http://schemas.openxmlformats.org/drawingml/2006/main">
@@ -10284,23 +10348,151 @@
           <p:cNvPr id="8" name="case-row-1">
             <a:extLst xmlns:a="http://schemas.openxmlformats.org/drawingml/2006/main">
               <a:ext uri="{FF2B5EF4-FFF2-40B4-BE49-F238E27FC236}">
-                <a16:creationId xmlns:a16="http://schemas.microsoft.com/office/drawing/2014/main" id="{183D15EA-8C13-4A15-BC97-2DE73645F406}"/>
-              </a:ext>
-            </a:extLst>
-          </p:cNvPr>
-          <p:cNvSpPr>
-            <a:spLocks xmlns:a="http://schemas.openxmlformats.org/drawingml/2006/main" noGrp="1"/>
-          </p:cNvSpPr>
-          <p:nvPr/>
-        </p:nvSpPr>
-        <p:spPr>
-          <a:xfrm xmlns:a="http://schemas.openxmlformats.org/drawingml/2006/main">
-            <a:off x="4286250" y="3714750"/>
-            <a:ext cx="6534150" cy="1238250"/>
+                <a16:creationId xmlns:a16="http://schemas.microsoft.com/office/drawing/2014/main" id="{83EFF8AF-9E01-49D2-BF8F-866FD93F18A2}"/>
+              </a:ext>
+            </a:extLst>
+          </p:cNvPr>
+          <p:cNvSpPr>
+            <a:spLocks xmlns:a="http://schemas.openxmlformats.org/drawingml/2006/main" noGrp="1"/>
+          </p:cNvSpPr>
+          <p:nvPr/>
+        </p:nvSpPr>
+        <p:spPr>
+          <a:xfrm xmlns:a="http://schemas.openxmlformats.org/drawingml/2006/main">
+            <a:off x="4286250" y="2667000"/>
+            <a:ext cx="6534150" cy="514350"/>
           </a:xfrm>
           <a:prstGeom xmlns:a="http://schemas.openxmlformats.org/drawingml/2006/main" prst="roundRect">
             <a:avLst>
-              <a:gd name="adj" fmla="val 10000"/>
+              <a:gd name="adj" fmla="val 24074"/>
+            </a:avLst>
+          </a:prstGeom>
+          <a:solidFill xmlns:a="http://schemas.openxmlformats.org/drawingml/2006/main">
+            <a:srgbClr val="FFFFFF"/>
+          </a:solidFill>
+          <a:ln xmlns:a="http://schemas.openxmlformats.org/drawingml/2006/main" w="9525">
+            <a:solidFill>
+              <a:srgbClr val="D8E0E8"/>
+            </a:solidFill>
+            <a:prstDash val="solid"/>
+          </a:ln>
+        </p:spPr>
+        <p:txBody>
+          <a:bodyPr xmlns:a="http://schemas.openxmlformats.org/drawingml/2006/main" lIns="152400" tIns="133350" rIns="152400" bIns="133350" anchor="ctr">
+            <a:normAutofit fontScale="68393"/>
+          </a:bodyPr>
+          <a:lstStyle xmlns:a="http://schemas.openxmlformats.org/drawingml/2006/main"/>
+          <a:p xmlns:a="http://schemas.openxmlformats.org/drawingml/2006/main">
+            <a:pPr algn="l">
+              <a:defRPr sz="1575" b="0">
+                <a:solidFill>
+                  <a:srgbClr val="10233F"/>
+                </a:solidFill>
+                <a:latin typeface="PingFang SC"/>
+                <a:ea typeface="PingFang SC"/>
+                <a:cs typeface="PingFang SC"/>
+              </a:defRPr>
+            </a:pPr>
+            <a:r>
+              <a:rPr sz="1575" b="0">
+                <a:solidFill>
+                  <a:srgbClr val="10233F"/>
+                </a:solidFill>
+                <a:latin typeface="PingFang SC"/>
+                <a:ea typeface="PingFang SC"/>
+                <a:cs typeface="PingFang SC"/>
+              </a:rPr>
+              <a:t>边界｜它只做信息说明和材料预检查，不承诺一定通过；存在家庭、土地或经营资格争议时转承办人员</a:t>
+            </a:r>
+          </a:p>
+        </p:txBody>
+      </p:sp>
+      <p:sp>
+        <p:nvSpPr>
+          <p:cNvPr id="9" name="case-row-2">
+            <a:extLst xmlns:a="http://schemas.openxmlformats.org/drawingml/2006/main">
+              <a:ext uri="{FF2B5EF4-FFF2-40B4-BE49-F238E27FC236}">
+                <a16:creationId xmlns:a16="http://schemas.microsoft.com/office/drawing/2014/main" id="{0AC24E08-D18A-4497-A36C-25EB145F573D}"/>
+              </a:ext>
+            </a:extLst>
+          </p:cNvPr>
+          <p:cNvSpPr>
+            <a:spLocks xmlns:a="http://schemas.openxmlformats.org/drawingml/2006/main" noGrp="1"/>
+          </p:cNvSpPr>
+          <p:nvPr/>
+        </p:nvSpPr>
+        <p:spPr>
+          <a:xfrm xmlns:a="http://schemas.openxmlformats.org/drawingml/2006/main">
+            <a:off x="4286250" y="3295650"/>
+            <a:ext cx="6534150" cy="514350"/>
+          </a:xfrm>
+          <a:prstGeom xmlns:a="http://schemas.openxmlformats.org/drawingml/2006/main" prst="roundRect">
+            <a:avLst>
+              <a:gd name="adj" fmla="val 24074"/>
+            </a:avLst>
+          </a:prstGeom>
+          <a:solidFill xmlns:a="http://schemas.openxmlformats.org/drawingml/2006/main">
+            <a:srgbClr val="FFFFFF"/>
+          </a:solidFill>
+          <a:ln xmlns:a="http://schemas.openxmlformats.org/drawingml/2006/main" w="9525">
+            <a:solidFill>
+              <a:srgbClr val="D8E0E8"/>
+            </a:solidFill>
+            <a:prstDash val="solid"/>
+          </a:ln>
+        </p:spPr>
+        <p:txBody>
+          <a:bodyPr xmlns:a="http://schemas.openxmlformats.org/drawingml/2006/main" lIns="152400" tIns="133350" rIns="152400" bIns="133350" anchor="ctr">
+            <a:normAutofit fontScale="62821"/>
+          </a:bodyPr>
+          <a:lstStyle xmlns:a="http://schemas.openxmlformats.org/drawingml/2006/main"/>
+          <a:p xmlns:a="http://schemas.openxmlformats.org/drawingml/2006/main">
+            <a:pPr algn="l">
+              <a:defRPr sz="1575" b="0">
+                <a:solidFill>
+                  <a:srgbClr val="10233F"/>
+                </a:solidFill>
+                <a:latin typeface="PingFang SC"/>
+                <a:ea typeface="PingFang SC"/>
+                <a:cs typeface="PingFang SC"/>
+              </a:defRPr>
+            </a:pPr>
+            <a:r>
+              <a:rPr sz="1575" b="0">
+                <a:solidFill>
+                  <a:srgbClr val="10233F"/>
+                </a:solidFill>
+                <a:latin typeface="PingFang SC"/>
+                <a:ea typeface="PingFang SC"/>
+                <a:cs typeface="PingFang SC"/>
+              </a:rPr>
+              <a:t>流程｜助手先确认事项和地区，不收集无关身份信息；随后检索现行文件，列出原文依据、材料清单和承办窗口</a:t>
+            </a:r>
+          </a:p>
+        </p:txBody>
+      </p:sp>
+      <p:sp>
+        <p:nvSpPr>
+          <p:cNvPr id="10" name="case-row-3">
+            <a:extLst xmlns:a="http://schemas.openxmlformats.org/drawingml/2006/main">
+              <a:ext uri="{FF2B5EF4-FFF2-40B4-BE49-F238E27FC236}">
+                <a16:creationId xmlns:a16="http://schemas.microsoft.com/office/drawing/2014/main" id="{2393ECA4-2DE6-4922-A02A-479B3D933F0E}"/>
+              </a:ext>
+            </a:extLst>
+          </p:cNvPr>
+          <p:cNvSpPr>
+            <a:spLocks xmlns:a="http://schemas.openxmlformats.org/drawingml/2006/main" noGrp="1"/>
+          </p:cNvSpPr>
+          <p:nvPr/>
+        </p:nvSpPr>
+        <p:spPr>
+          <a:xfrm xmlns:a="http://schemas.openxmlformats.org/drawingml/2006/main">
+            <a:off x="4286250" y="3924300"/>
+            <a:ext cx="6534150" cy="514350"/>
+          </a:xfrm>
+          <a:prstGeom xmlns:a="http://schemas.openxmlformats.org/drawingml/2006/main" prst="roundRect">
+            <a:avLst>
+              <a:gd name="adj" fmla="val 24074"/>
             </a:avLst>
           </a:prstGeom>
           <a:solidFill xmlns:a="http://schemas.openxmlformats.org/drawingml/2006/main">
@@ -10308,14 +10500,14 @@
           </a:solidFill>
           <a:ln xmlns:a="http://schemas.openxmlformats.org/drawingml/2006/main" w="9525">
             <a:solidFill>
-              <a:srgbClr val="E5783F"/>
+              <a:srgbClr val="9A3F16"/>
             </a:solidFill>
             <a:prstDash val="solid"/>
           </a:ln>
         </p:spPr>
         <p:txBody>
           <a:bodyPr xmlns:a="http://schemas.openxmlformats.org/drawingml/2006/main" lIns="152400" tIns="133350" rIns="152400" bIns="133350" anchor="ctr">
-            <a:normAutofit fontScale="100000"/>
+            <a:normAutofit fontScale="72956"/>
           </a:bodyPr>
           <a:lstStyle xmlns:a="http://schemas.openxmlformats.org/drawingml/2006/main"/>
           <a:p xmlns:a="http://schemas.openxmlformats.org/drawingml/2006/main">
@@ -10338,17 +10530,17 @@
                 <a:ea typeface="PingFang SC"/>
                 <a:cs typeface="PingFang SC"/>
               </a:rPr>
-              <a:t>边界｜它只做信息说明和材料预检查，不承诺一定通过；存在家庭、土地或经营资格争议时转承办人员</a:t>
-            </a:r>
-          </a:p>
-        </p:txBody>
-      </p:sp>
-      <p:sp>
-        <p:nvSpPr>
-          <p:cNvPr id="9" name="s9-takeaway-rule">
-            <a:extLst xmlns:a="http://schemas.openxmlformats.org/drawingml/2006/main">
-              <a:ext uri="{FF2B5EF4-FFF2-40B4-BE49-F238E27FC236}">
-                <a16:creationId xmlns:a16="http://schemas.microsoft.com/office/drawing/2014/main" id="{6D9255FB-1F53-4DC6-95DB-0C165B84E5E4}"/>
+              <a:t>纠错｜正式受理结果与助手提示不一致时，记录差异，由责任部门更新规则或补充例外样本</a:t>
+            </a:r>
+          </a:p>
+        </p:txBody>
+      </p:sp>
+      <p:sp>
+        <p:nvSpPr>
+          <p:cNvPr id="11" name="s9-takeaway-rule">
+            <a:extLst xmlns:a="http://schemas.openxmlformats.org/drawingml/2006/main">
+              <a:ext uri="{FF2B5EF4-FFF2-40B4-BE49-F238E27FC236}">
+                <a16:creationId xmlns:a16="http://schemas.microsoft.com/office/drawing/2014/main" id="{30233BF5-81D8-4EF3-89A7-4BF75F6153CC}"/>
               </a:ext>
             </a:extLst>
           </p:cNvPr>
@@ -10378,10 +10570,10 @@
       </p:sp>
       <p:sp>
         <p:nvSpPr>
-          <p:cNvPr id="10" name="s9-takeaway">
-            <a:extLst xmlns:a="http://schemas.openxmlformats.org/drawingml/2006/main">
-              <a:ext uri="{FF2B5EF4-FFF2-40B4-BE49-F238E27FC236}">
-                <a16:creationId xmlns:a16="http://schemas.microsoft.com/office/drawing/2014/main" id="{59A33724-A22F-4EFD-82FE-123AE250C8C1}"/>
+          <p:cNvPr id="12" name="s9-takeaway">
+            <a:extLst xmlns:a="http://schemas.openxmlformats.org/drawingml/2006/main">
+              <a:ext uri="{FF2B5EF4-FFF2-40B4-BE49-F238E27FC236}">
+                <a16:creationId xmlns:a16="http://schemas.microsoft.com/office/drawing/2014/main" id="{E774C3C8-792E-47C6-9BF7-E29A979E6BF7}"/>
               </a:ext>
             </a:extLst>
           </p:cNvPr>
@@ -10429,7 +10621,7 @@
                 <a:ea typeface="PingFang SC"/>
                 <a:cs typeface="PingFang SC"/>
               </a:rPr>
-              <a:t>惠农政策材料助手必须经过边界验证</a:t>
+              <a:t>政策助手只能解释与预检，不能承诺审批</a:t>
             </a:r>
           </a:p>
         </p:txBody>
@@ -10437,7 +10629,7 @@
     </p:spTree>
     <p:extLst>
       <p:ext uri="{BB962C8B-B14F-4D97-AF65-F5344CB8AC3E}">
-        <p14:creationId xmlns:p14="http://schemas.microsoft.com/office/powerpoint/2010/main" val="241271371"/>
+        <p14:creationId xmlns:p14="http://schemas.microsoft.com/office/powerpoint/2010/main" val="485745536"/>
       </p:ext>
     </p:extLst>
   </p:cSld>

--- a/docs/public/course-assets/course-pptx/in-003.pptx
+++ b/docs/public/course-assets/course-pptx/in-003.pptx
@@ -2,25 +2,25 @@
 <file path=ppt/presentation.xml><?xml version="1.0" encoding="utf-8"?>
 <p:presentation xmlns:p="http://schemas.openxmlformats.org/presentationml/2006/main">
   <p:sldMasterIdLst>
-    <p:sldMasterId xmlns:r="http://schemas.openxmlformats.org/officeDocument/2006/relationships" id="2147483648" r:id="Ra5af5ef11fa94025"/>
+    <p:sldMasterId xmlns:r="http://schemas.openxmlformats.org/officeDocument/2006/relationships" id="2147483648" r:id="R0686a2f4e60d4410"/>
   </p:sldMasterIdLst>
   <p:notesMasterIdLst>
-    <p:notesMasterId xmlns:r="http://schemas.openxmlformats.org/officeDocument/2006/relationships" r:id="Rca6a54f338634d1f"/>
+    <p:notesMasterId xmlns:r="http://schemas.openxmlformats.org/officeDocument/2006/relationships" r:id="R83863e0e9b3d459d"/>
   </p:notesMasterIdLst>
   <p:sldIdLst>
-    <p:sldId xmlns:r="http://schemas.openxmlformats.org/officeDocument/2006/relationships" id="256" r:id="Rd3ca2aa0a8ab4382"/>
-    <p:sldId xmlns:r="http://schemas.openxmlformats.org/officeDocument/2006/relationships" id="257" r:id="Rd5dccd90a7ec4a6d"/>
-    <p:sldId xmlns:r="http://schemas.openxmlformats.org/officeDocument/2006/relationships" id="258" r:id="R369b4e5e676744aa"/>
-    <p:sldId xmlns:r="http://schemas.openxmlformats.org/officeDocument/2006/relationships" id="259" r:id="R10b606af57034958"/>
-    <p:sldId xmlns:r="http://schemas.openxmlformats.org/officeDocument/2006/relationships" id="260" r:id="R8ec38436481846bb"/>
-    <p:sldId xmlns:r="http://schemas.openxmlformats.org/officeDocument/2006/relationships" id="261" r:id="R99456c59fa274a28"/>
-    <p:sldId xmlns:r="http://schemas.openxmlformats.org/officeDocument/2006/relationships" id="262" r:id="Rbef9d66b95fc47ec"/>
-    <p:sldId xmlns:r="http://schemas.openxmlformats.org/officeDocument/2006/relationships" id="263" r:id="R2b4c1520b4c14617"/>
-    <p:sldId xmlns:r="http://schemas.openxmlformats.org/officeDocument/2006/relationships" id="264" r:id="Re103542d15ac49ad"/>
-    <p:sldId xmlns:r="http://schemas.openxmlformats.org/officeDocument/2006/relationships" id="265" r:id="R7d1cedddafb94e87"/>
-    <p:sldId xmlns:r="http://schemas.openxmlformats.org/officeDocument/2006/relationships" id="266" r:id="R3fb6d96949484001"/>
-    <p:sldId xmlns:r="http://schemas.openxmlformats.org/officeDocument/2006/relationships" id="267" r:id="R666fb1879a3842dd"/>
-    <p:sldId xmlns:r="http://schemas.openxmlformats.org/officeDocument/2006/relationships" id="268" r:id="R9d3e60e5665d4b79"/>
+    <p:sldId xmlns:r="http://schemas.openxmlformats.org/officeDocument/2006/relationships" id="256" r:id="R68cff85a298141c2"/>
+    <p:sldId xmlns:r="http://schemas.openxmlformats.org/officeDocument/2006/relationships" id="257" r:id="R6702e5cf34e24fcf"/>
+    <p:sldId xmlns:r="http://schemas.openxmlformats.org/officeDocument/2006/relationships" id="258" r:id="R4505cf194f8842c0"/>
+    <p:sldId xmlns:r="http://schemas.openxmlformats.org/officeDocument/2006/relationships" id="259" r:id="Rde6ca80fb126415d"/>
+    <p:sldId xmlns:r="http://schemas.openxmlformats.org/officeDocument/2006/relationships" id="260" r:id="R667425a1a36d4cc8"/>
+    <p:sldId xmlns:r="http://schemas.openxmlformats.org/officeDocument/2006/relationships" id="261" r:id="R99e04fb3367548be"/>
+    <p:sldId xmlns:r="http://schemas.openxmlformats.org/officeDocument/2006/relationships" id="262" r:id="R7f2da41975eb4ab9"/>
+    <p:sldId xmlns:r="http://schemas.openxmlformats.org/officeDocument/2006/relationships" id="263" r:id="Rbe149aece7924af5"/>
+    <p:sldId xmlns:r="http://schemas.openxmlformats.org/officeDocument/2006/relationships" id="264" r:id="Ra1a823fe492e4bed"/>
+    <p:sldId xmlns:r="http://schemas.openxmlformats.org/officeDocument/2006/relationships" id="265" r:id="R1512e1a406704a88"/>
+    <p:sldId xmlns:r="http://schemas.openxmlformats.org/officeDocument/2006/relationships" id="266" r:id="R3d02018e76e74b8f"/>
+    <p:sldId xmlns:r="http://schemas.openxmlformats.org/officeDocument/2006/relationships" id="267" r:id="R2bccb9933c79479e"/>
+    <p:sldId xmlns:r="http://schemas.openxmlformats.org/officeDocument/2006/relationships" id="268" r:id="Rfbb99c0706354401"/>
   </p:sldIdLst>
   <p:sldSz cx="12192000" cy="6858000"/>
   <p:notesSz cx="6858000" cy="9144000"/>
@@ -1405,7 +1405,7 @@
   </p:cSld>
   <p:clrMap bg1="lt1" tx1="dk1" bg2="lt2" tx2="dk2" accent1="accent1" accent2="accent2" accent3="accent3" accent4="accent4" accent5="accent5" accent6="accent6" hlink="hlink" folHlink="folHlink"/>
   <p:sldLayoutIdLst>
-    <p:sldLayoutId xmlns:r="http://schemas.openxmlformats.org/officeDocument/2006/relationships" id="2147483649" r:id="Rb0c160685dbc4ee0"/>
+    <p:sldLayoutId xmlns:r="http://schemas.openxmlformats.org/officeDocument/2006/relationships" id="2147483649" r:id="R2d484ad068274d61"/>
   </p:sldLayoutIdLst>
   <p:txStyles>
     <p:titleStyle>
@@ -1956,7 +1956,7 @@
           <p:cNvPr id="1" name="cover-rule">
             <a:extLst xmlns:a="http://schemas.openxmlformats.org/drawingml/2006/main">
               <a:ext uri="{FF2B5EF4-FFF2-40B4-BE49-F238E27FC236}">
-                <a16:creationId xmlns:a16="http://schemas.microsoft.com/office/drawing/2014/main" id="{6F6D6D1C-7E1E-407F-A445-491BA4351708}"/>
+                <a16:creationId xmlns:a16="http://schemas.microsoft.com/office/drawing/2014/main" id="{5BB2A88B-C9B0-4148-9ABA-0072EEDBB914}"/>
               </a:ext>
             </a:extLst>
           </p:cNvPr>
@@ -1989,7 +1989,7 @@
           <p:cNvPr id="2" name="cover-ring-1">
             <a:extLst xmlns:a="http://schemas.openxmlformats.org/drawingml/2006/main">
               <a:ext uri="{FF2B5EF4-FFF2-40B4-BE49-F238E27FC236}">
-                <a16:creationId xmlns:a16="http://schemas.microsoft.com/office/drawing/2014/main" id="{D413AC14-F16F-4B1F-ABEF-3A3C0E770917}"/>
+                <a16:creationId xmlns:a16="http://schemas.microsoft.com/office/drawing/2014/main" id="{4E0C5005-8E7B-469F-856D-CA8F5DA2D77B}"/>
               </a:ext>
             </a:extLst>
           </p:cNvPr>
@@ -2020,7 +2020,7 @@
           <p:cNvPr id="3" name="cover-ring-2">
             <a:extLst xmlns:a="http://schemas.openxmlformats.org/drawingml/2006/main">
               <a:ext uri="{FF2B5EF4-FFF2-40B4-BE49-F238E27FC236}">
-                <a16:creationId xmlns:a16="http://schemas.microsoft.com/office/drawing/2014/main" id="{71775081-54ED-4437-8A70-57D0C3E11CC9}"/>
+                <a16:creationId xmlns:a16="http://schemas.microsoft.com/office/drawing/2014/main" id="{4B3258E0-9E13-4095-A58A-2AB9A518F306}"/>
               </a:ext>
             </a:extLst>
           </p:cNvPr>
@@ -2051,7 +2051,7 @@
           <p:cNvPr id="4" name="cover-core">
             <a:extLst xmlns:a="http://schemas.openxmlformats.org/drawingml/2006/main">
               <a:ext uri="{FF2B5EF4-FFF2-40B4-BE49-F238E27FC236}">
-                <a16:creationId xmlns:a16="http://schemas.microsoft.com/office/drawing/2014/main" id="{DB27FDA3-F9FB-4528-83E3-BB0FB193C178}"/>
+                <a16:creationId xmlns:a16="http://schemas.microsoft.com/office/drawing/2014/main" id="{C940BB87-34CC-4AD0-9900-37D960BC381B}"/>
               </a:ext>
             </a:extLst>
           </p:cNvPr>
@@ -2084,7 +2084,7 @@
           <p:cNvPr id="5" name="cover-line-1">
             <a:extLst xmlns:a="http://schemas.openxmlformats.org/drawingml/2006/main">
               <a:ext uri="{FF2B5EF4-FFF2-40B4-BE49-F238E27FC236}">
-                <a16:creationId xmlns:a16="http://schemas.microsoft.com/office/drawing/2014/main" id="{50DA3100-FFA9-4AC5-80C3-DEA56011C439}"/>
+                <a16:creationId xmlns:a16="http://schemas.microsoft.com/office/drawing/2014/main" id="{10A8DC08-1D2E-427A-9E69-EF64DDAFABC1}"/>
               </a:ext>
             </a:extLst>
           </p:cNvPr>
@@ -2115,7 +2115,7 @@
           <p:cNvPr id="6" name="cover-line-2">
             <a:extLst xmlns:a="http://schemas.openxmlformats.org/drawingml/2006/main">
               <a:ext uri="{FF2B5EF4-FFF2-40B4-BE49-F238E27FC236}">
-                <a16:creationId xmlns:a16="http://schemas.microsoft.com/office/drawing/2014/main" id="{F383220A-4EAE-4663-B7C2-BC09C8DE6A9D}"/>
+                <a16:creationId xmlns:a16="http://schemas.microsoft.com/office/drawing/2014/main" id="{F9BFE8EF-2C22-4666-BFA1-F110BB9C1AA5}"/>
               </a:ext>
             </a:extLst>
           </p:cNvPr>
@@ -2146,7 +2146,7 @@
           <p:cNvPr id="7" name="cover-eyebrow">
             <a:extLst xmlns:a="http://schemas.openxmlformats.org/drawingml/2006/main">
               <a:ext uri="{FF2B5EF4-FFF2-40B4-BE49-F238E27FC236}">
-                <a16:creationId xmlns:a16="http://schemas.microsoft.com/office/drawing/2014/main" id="{5A6F3B86-5C2A-459F-9381-3D512F24943E}"/>
+                <a16:creationId xmlns:a16="http://schemas.microsoft.com/office/drawing/2014/main" id="{4596039D-C69A-4BDD-9F3F-649B132532AC}"/>
               </a:ext>
             </a:extLst>
           </p:cNvPr>
@@ -2204,7 +2204,7 @@
           <p:cNvPr id="8" name="cover-title">
             <a:extLst xmlns:a="http://schemas.openxmlformats.org/drawingml/2006/main">
               <a:ext uri="{FF2B5EF4-FFF2-40B4-BE49-F238E27FC236}">
-                <a16:creationId xmlns:a16="http://schemas.microsoft.com/office/drawing/2014/main" id="{AE5DFD2C-E711-481E-A966-1C0DDB3D200C}"/>
+                <a16:creationId xmlns:a16="http://schemas.microsoft.com/office/drawing/2014/main" id="{18C0614A-B0DD-4C9A-AB57-E40A310740EC}"/>
               </a:ext>
             </a:extLst>
           </p:cNvPr>
@@ -2262,7 +2262,7 @@
           <p:cNvPr id="9" name="cover-subtitle">
             <a:extLst xmlns:a="http://schemas.openxmlformats.org/drawingml/2006/main">
               <a:ext uri="{FF2B5EF4-FFF2-40B4-BE49-F238E27FC236}">
-                <a16:creationId xmlns:a16="http://schemas.microsoft.com/office/drawing/2014/main" id="{28DD87B0-0FA7-4D0C-B4A1-FB2B73F21346}"/>
+                <a16:creationId xmlns:a16="http://schemas.microsoft.com/office/drawing/2014/main" id="{06216A9F-E221-4D8C-9E23-B0308C060FAB}"/>
               </a:ext>
             </a:extLst>
           </p:cNvPr>
@@ -2324,7 +2324,7 @@
           <p:cNvPr id="10" name="cover-lead">
             <a:extLst xmlns:a="http://schemas.openxmlformats.org/drawingml/2006/main">
               <a:ext uri="{FF2B5EF4-FFF2-40B4-BE49-F238E27FC236}">
-                <a16:creationId xmlns:a16="http://schemas.microsoft.com/office/drawing/2014/main" id="{98F6FBF4-88D5-494B-97B4-3799671DEB78}"/>
+                <a16:creationId xmlns:a16="http://schemas.microsoft.com/office/drawing/2014/main" id="{C1436122-AB43-4054-A29D-3AAA6759E92C}"/>
               </a:ext>
             </a:extLst>
           </p:cNvPr>
@@ -2382,7 +2382,7 @@
           <p:cNvPr id="11" name="cover-course">
             <a:extLst xmlns:a="http://schemas.openxmlformats.org/drawingml/2006/main">
               <a:ext uri="{FF2B5EF4-FFF2-40B4-BE49-F238E27FC236}">
-                <a16:creationId xmlns:a16="http://schemas.microsoft.com/office/drawing/2014/main" id="{31BB7466-CF80-47B6-A82B-279D54033885}"/>
+                <a16:creationId xmlns:a16="http://schemas.microsoft.com/office/drawing/2014/main" id="{95B5BF07-751E-46AA-BAFC-67914D99677E}"/>
               </a:ext>
             </a:extLst>
           </p:cNvPr>
@@ -2440,7 +2440,7 @@
           <p:cNvPr id="12" name="cover-id">
             <a:extLst xmlns:a="http://schemas.openxmlformats.org/drawingml/2006/main">
               <a:ext uri="{FF2B5EF4-FFF2-40B4-BE49-F238E27FC236}">
-                <a16:creationId xmlns:a16="http://schemas.microsoft.com/office/drawing/2014/main" id="{D877C55E-BB7D-400D-BA92-75BA9D457F59}"/>
+                <a16:creationId xmlns:a16="http://schemas.microsoft.com/office/drawing/2014/main" id="{945F6816-10D7-4275-BEF4-9EE03716DE4C}"/>
               </a:ext>
             </a:extLst>
           </p:cNvPr>
@@ -2496,7 +2496,7 @@
     </p:spTree>
     <p:extLst>
       <p:ext uri="{BB962C8B-B14F-4D97-AF65-F5344CB8AC3E}">
-        <p14:creationId xmlns:p14="http://schemas.microsoft.com/office/powerpoint/2010/main" val="631022897"/>
+        <p14:creationId xmlns:p14="http://schemas.microsoft.com/office/powerpoint/2010/main" val="124086691"/>
       </p:ext>
     </p:extLst>
   </p:cSld>
@@ -2527,7 +2527,7 @@
           <p:cNvPr id="1" name="s10-rule">
             <a:extLst xmlns:a="http://schemas.openxmlformats.org/drawingml/2006/main">
               <a:ext uri="{FF2B5EF4-FFF2-40B4-BE49-F238E27FC236}">
-                <a16:creationId xmlns:a16="http://schemas.microsoft.com/office/drawing/2014/main" id="{8C4F8193-CDC7-4422-98FD-60E8BE475461}"/>
+                <a16:creationId xmlns:a16="http://schemas.microsoft.com/office/drawing/2014/main" id="{5608FC3E-8903-4EED-8F42-211711EB816B}"/>
               </a:ext>
             </a:extLst>
           </p:cNvPr>
@@ -2560,7 +2560,7 @@
           <p:cNvPr id="2" name="s10-eyebrow">
             <a:extLst xmlns:a="http://schemas.openxmlformats.org/drawingml/2006/main">
               <a:ext uri="{FF2B5EF4-FFF2-40B4-BE49-F238E27FC236}">
-                <a16:creationId xmlns:a16="http://schemas.microsoft.com/office/drawing/2014/main" id="{2BBB54B7-6EAB-42AA-8003-736E14E0DE1C}"/>
+                <a16:creationId xmlns:a16="http://schemas.microsoft.com/office/drawing/2014/main" id="{2876B0A6-F3C3-47EF-A3B6-95485ACA5DFA}"/>
               </a:ext>
             </a:extLst>
           </p:cNvPr>
@@ -2618,7 +2618,7 @@
           <p:cNvPr id="3" name="s10-title">
             <a:extLst xmlns:a="http://schemas.openxmlformats.org/drawingml/2006/main">
               <a:ext uri="{FF2B5EF4-FFF2-40B4-BE49-F238E27FC236}">
-                <a16:creationId xmlns:a16="http://schemas.microsoft.com/office/drawing/2014/main" id="{3B473629-BAD8-4BDC-A2F0-11ECA6386865}"/>
+                <a16:creationId xmlns:a16="http://schemas.microsoft.com/office/drawing/2014/main" id="{987ADA4F-F0DB-4F56-ADD7-F228E5787182}"/>
               </a:ext>
             </a:extLst>
           </p:cNvPr>
@@ -2676,7 +2676,7 @@
           <p:cNvPr id="4" name="s10-footer">
             <a:extLst xmlns:a="http://schemas.openxmlformats.org/drawingml/2006/main">
               <a:ext uri="{FF2B5EF4-FFF2-40B4-BE49-F238E27FC236}">
-                <a16:creationId xmlns:a16="http://schemas.microsoft.com/office/drawing/2014/main" id="{C2747FD6-E989-4948-A181-61C279779235}"/>
+                <a16:creationId xmlns:a16="http://schemas.microsoft.com/office/drawing/2014/main" id="{F445D4B3-34EB-4EDB-92BA-97A19DB419B6}"/>
               </a:ext>
             </a:extLst>
           </p:cNvPr>
@@ -2707,7 +2707,7 @@
           <p:cNvPr id="5" name="s10-identity">
             <a:extLst xmlns:a="http://schemas.openxmlformats.org/drawingml/2006/main">
               <a:ext uri="{FF2B5EF4-FFF2-40B4-BE49-F238E27FC236}">
-                <a16:creationId xmlns:a16="http://schemas.microsoft.com/office/drawing/2014/main" id="{CACAF826-6C79-4404-BE78-AD06B03CB0D3}"/>
+                <a16:creationId xmlns:a16="http://schemas.microsoft.com/office/drawing/2014/main" id="{8CE19EE1-4ADB-4253-8B74-26069F3308FC}"/>
               </a:ext>
             </a:extLst>
           </p:cNvPr>
@@ -2765,7 +2765,7 @@
           <p:cNvPr id="6" name="case-title">
             <a:extLst xmlns:a="http://schemas.openxmlformats.org/drawingml/2006/main">
               <a:ext uri="{FF2B5EF4-FFF2-40B4-BE49-F238E27FC236}">
-                <a16:creationId xmlns:a16="http://schemas.microsoft.com/office/drawing/2014/main" id="{730AD3E9-979F-4E43-BD53-F4F7D52EE9C4}"/>
+                <a16:creationId xmlns:a16="http://schemas.microsoft.com/office/drawing/2014/main" id="{8B21517B-2CA4-4F58-A47D-086E1B20D371}"/>
               </a:ext>
             </a:extLst>
           </p:cNvPr>
@@ -2829,7 +2829,7 @@
           <p:cNvPr id="7" name="case-row-0">
             <a:extLst xmlns:a="http://schemas.openxmlformats.org/drawingml/2006/main">
               <a:ext uri="{FF2B5EF4-FFF2-40B4-BE49-F238E27FC236}">
-                <a16:creationId xmlns:a16="http://schemas.microsoft.com/office/drawing/2014/main" id="{682FAE76-5F49-41D1-ACE4-8D9CD2AA812A}"/>
+                <a16:creationId xmlns:a16="http://schemas.microsoft.com/office/drawing/2014/main" id="{E4F0661B-35A5-4CF3-8DA0-2461C4D78B9A}"/>
               </a:ext>
             </a:extLst>
           </p:cNvPr>
@@ -2893,7 +2893,7 @@
           <p:cNvPr id="8" name="case-row-1">
             <a:extLst xmlns:a="http://schemas.openxmlformats.org/drawingml/2006/main">
               <a:ext uri="{FF2B5EF4-FFF2-40B4-BE49-F238E27FC236}">
-                <a16:creationId xmlns:a16="http://schemas.microsoft.com/office/drawing/2014/main" id="{BC2BE35F-D7F5-48FF-80EE-F57D17B35269}"/>
+                <a16:creationId xmlns:a16="http://schemas.microsoft.com/office/drawing/2014/main" id="{0424EEEE-A077-41AB-BA3B-66BFB8D014DD}"/>
               </a:ext>
             </a:extLst>
           </p:cNvPr>
@@ -2957,7 +2957,7 @@
           <p:cNvPr id="9" name="case-row-2">
             <a:extLst xmlns:a="http://schemas.openxmlformats.org/drawingml/2006/main">
               <a:ext uri="{FF2B5EF4-FFF2-40B4-BE49-F238E27FC236}">
-                <a16:creationId xmlns:a16="http://schemas.microsoft.com/office/drawing/2014/main" id="{49236130-2052-42E0-9A39-4BF14644A806}"/>
+                <a16:creationId xmlns:a16="http://schemas.microsoft.com/office/drawing/2014/main" id="{3F28838A-1F3B-432E-B037-984647E7317A}"/>
               </a:ext>
             </a:extLst>
           </p:cNvPr>
@@ -3021,7 +3021,7 @@
           <p:cNvPr id="10" name="s10-takeaway-rule">
             <a:extLst xmlns:a="http://schemas.openxmlformats.org/drawingml/2006/main">
               <a:ext uri="{FF2B5EF4-FFF2-40B4-BE49-F238E27FC236}">
-                <a16:creationId xmlns:a16="http://schemas.microsoft.com/office/drawing/2014/main" id="{375C1FCF-367E-41C5-84CF-C88081D08AF6}"/>
+                <a16:creationId xmlns:a16="http://schemas.microsoft.com/office/drawing/2014/main" id="{8E525F37-36DD-412F-8701-765ACBD7BC60}"/>
               </a:ext>
             </a:extLst>
           </p:cNvPr>
@@ -3054,7 +3054,7 @@
           <p:cNvPr id="11" name="s10-takeaway">
             <a:extLst xmlns:a="http://schemas.openxmlformats.org/drawingml/2006/main">
               <a:ext uri="{FF2B5EF4-FFF2-40B4-BE49-F238E27FC236}">
-                <a16:creationId xmlns:a16="http://schemas.microsoft.com/office/drawing/2014/main" id="{2CF4359A-7C28-41E1-B992-947D8FDAEB14}"/>
+                <a16:creationId xmlns:a16="http://schemas.microsoft.com/office/drawing/2014/main" id="{36891E02-98D9-48A6-9168-076074D1D497}"/>
               </a:ext>
             </a:extLst>
           </p:cNvPr>
@@ -3110,7 +3110,7 @@
     </p:spTree>
     <p:extLst>
       <p:ext uri="{BB962C8B-B14F-4D97-AF65-F5344CB8AC3E}">
-        <p14:creationId xmlns:p14="http://schemas.microsoft.com/office/powerpoint/2010/main" val="1561037286"/>
+        <p14:creationId xmlns:p14="http://schemas.microsoft.com/office/powerpoint/2010/main" val="273169362"/>
       </p:ext>
     </p:extLst>
   </p:cSld>
@@ -3141,7 +3141,7 @@
           <p:cNvPr id="1" name="s11-rule">
             <a:extLst xmlns:a="http://schemas.openxmlformats.org/drawingml/2006/main">
               <a:ext uri="{FF2B5EF4-FFF2-40B4-BE49-F238E27FC236}">
-                <a16:creationId xmlns:a16="http://schemas.microsoft.com/office/drawing/2014/main" id="{7C0D0E2C-9928-48DD-BD7F-C7B5F9602A27}"/>
+                <a16:creationId xmlns:a16="http://schemas.microsoft.com/office/drawing/2014/main" id="{3657A53C-164E-4F0F-871C-39E3815B43D3}"/>
               </a:ext>
             </a:extLst>
           </p:cNvPr>
@@ -3174,7 +3174,7 @@
           <p:cNvPr id="2" name="s11-eyebrow">
             <a:extLst xmlns:a="http://schemas.openxmlformats.org/drawingml/2006/main">
               <a:ext uri="{FF2B5EF4-FFF2-40B4-BE49-F238E27FC236}">
-                <a16:creationId xmlns:a16="http://schemas.microsoft.com/office/drawing/2014/main" id="{A9E6C206-5F34-4D70-9075-BE778A279927}"/>
+                <a16:creationId xmlns:a16="http://schemas.microsoft.com/office/drawing/2014/main" id="{790BE5C2-1D81-4307-A6F9-10B5BF1892EC}"/>
               </a:ext>
             </a:extLst>
           </p:cNvPr>
@@ -3232,7 +3232,7 @@
           <p:cNvPr id="3" name="s11-title">
             <a:extLst xmlns:a="http://schemas.openxmlformats.org/drawingml/2006/main">
               <a:ext uri="{FF2B5EF4-FFF2-40B4-BE49-F238E27FC236}">
-                <a16:creationId xmlns:a16="http://schemas.microsoft.com/office/drawing/2014/main" id="{FECB9136-76F0-4154-98EE-690FAF75E0DA}"/>
+                <a16:creationId xmlns:a16="http://schemas.microsoft.com/office/drawing/2014/main" id="{B0B796C7-3BB4-4BEB-BD8D-B002EDE20F46}"/>
               </a:ext>
             </a:extLst>
           </p:cNvPr>
@@ -3290,7 +3290,7 @@
           <p:cNvPr id="4" name="s11-footer">
             <a:extLst xmlns:a="http://schemas.openxmlformats.org/drawingml/2006/main">
               <a:ext uri="{FF2B5EF4-FFF2-40B4-BE49-F238E27FC236}">
-                <a16:creationId xmlns:a16="http://schemas.microsoft.com/office/drawing/2014/main" id="{F26C1F9B-ACB1-4BEB-B0C8-0D2666D9464B}"/>
+                <a16:creationId xmlns:a16="http://schemas.microsoft.com/office/drawing/2014/main" id="{55352F9F-6ED0-410A-A798-CC2AA75B6F41}"/>
               </a:ext>
             </a:extLst>
           </p:cNvPr>
@@ -3321,7 +3321,7 @@
           <p:cNvPr id="5" name="s11-identity">
             <a:extLst xmlns:a="http://schemas.openxmlformats.org/drawingml/2006/main">
               <a:ext uri="{FF2B5EF4-FFF2-40B4-BE49-F238E27FC236}">
-                <a16:creationId xmlns:a16="http://schemas.microsoft.com/office/drawing/2014/main" id="{3203AE69-CEAD-4682-9E09-67D13BFDB8BC}"/>
+                <a16:creationId xmlns:a16="http://schemas.microsoft.com/office/drawing/2014/main" id="{F237B231-72D3-440B-8B14-0DD8A6D174A0}"/>
               </a:ext>
             </a:extLst>
           </p:cNvPr>
@@ -3379,7 +3379,7 @@
           <p:cNvPr id="6" name="practice-circle-0">
             <a:extLst xmlns:a="http://schemas.openxmlformats.org/drawingml/2006/main">
               <a:ext uri="{FF2B5EF4-FFF2-40B4-BE49-F238E27FC236}">
-                <a16:creationId xmlns:a16="http://schemas.microsoft.com/office/drawing/2014/main" id="{37ACDAEC-F1AF-4469-A690-AC1DC1B54C76}"/>
+                <a16:creationId xmlns:a16="http://schemas.microsoft.com/office/drawing/2014/main" id="{F30E3CE8-463C-4B45-9A1E-A3477CCA8436}"/>
               </a:ext>
             </a:extLst>
           </p:cNvPr>
@@ -3412,7 +3412,7 @@
           <p:cNvPr id="7" name="practice-number-0">
             <a:extLst xmlns:a="http://schemas.openxmlformats.org/drawingml/2006/main">
               <a:ext uri="{FF2B5EF4-FFF2-40B4-BE49-F238E27FC236}">
-                <a16:creationId xmlns:a16="http://schemas.microsoft.com/office/drawing/2014/main" id="{9763A4E4-2F23-4DBC-98F9-7645CE9537BF}"/>
+                <a16:creationId xmlns:a16="http://schemas.microsoft.com/office/drawing/2014/main" id="{69792C39-4561-4A7C-A04F-649D14E41CBC}"/>
               </a:ext>
             </a:extLst>
           </p:cNvPr>
@@ -3470,7 +3470,7 @@
           <p:cNvPr id="8" name="practice-item-0">
             <a:extLst xmlns:a="http://schemas.openxmlformats.org/drawingml/2006/main">
               <a:ext uri="{FF2B5EF4-FFF2-40B4-BE49-F238E27FC236}">
-                <a16:creationId xmlns:a16="http://schemas.microsoft.com/office/drawing/2014/main" id="{28B939E4-900C-4F73-8F48-E5B4BDE72E29}"/>
+                <a16:creationId xmlns:a16="http://schemas.microsoft.com/office/drawing/2014/main" id="{4E83E315-874C-4727-A513-634EC050B821}"/>
               </a:ext>
             </a:extLst>
           </p:cNvPr>
@@ -3534,7 +3534,7 @@
           <p:cNvPr id="9" name="practice-connector-0">
             <a:extLst xmlns:a="http://schemas.openxmlformats.org/drawingml/2006/main">
               <a:ext uri="{FF2B5EF4-FFF2-40B4-BE49-F238E27FC236}">
-                <a16:creationId xmlns:a16="http://schemas.microsoft.com/office/drawing/2014/main" id="{994E3E98-16C1-4A1E-AA84-11B558A44A18}"/>
+                <a16:creationId xmlns:a16="http://schemas.microsoft.com/office/drawing/2014/main" id="{400CE791-20AC-407A-B004-8F311327B66B}"/>
               </a:ext>
             </a:extLst>
           </p:cNvPr>
@@ -3565,7 +3565,7 @@
           <p:cNvPr id="10" name="practice-circle-1">
             <a:extLst xmlns:a="http://schemas.openxmlformats.org/drawingml/2006/main">
               <a:ext uri="{FF2B5EF4-FFF2-40B4-BE49-F238E27FC236}">
-                <a16:creationId xmlns:a16="http://schemas.microsoft.com/office/drawing/2014/main" id="{1A9E6A83-30BB-477F-92F2-4E3F94A9CCF6}"/>
+                <a16:creationId xmlns:a16="http://schemas.microsoft.com/office/drawing/2014/main" id="{120A2607-10B7-421E-BC7E-7034BD0049B0}"/>
               </a:ext>
             </a:extLst>
           </p:cNvPr>
@@ -3598,7 +3598,7 @@
           <p:cNvPr id="11" name="practice-number-1">
             <a:extLst xmlns:a="http://schemas.openxmlformats.org/drawingml/2006/main">
               <a:ext uri="{FF2B5EF4-FFF2-40B4-BE49-F238E27FC236}">
-                <a16:creationId xmlns:a16="http://schemas.microsoft.com/office/drawing/2014/main" id="{842298DF-8945-4F26-881B-D3FF51EAF470}"/>
+                <a16:creationId xmlns:a16="http://schemas.microsoft.com/office/drawing/2014/main" id="{D57355A0-5F5A-4E77-94A9-EF0A881B0A9B}"/>
               </a:ext>
             </a:extLst>
           </p:cNvPr>
@@ -3656,7 +3656,7 @@
           <p:cNvPr id="12" name="practice-item-1">
             <a:extLst xmlns:a="http://schemas.openxmlformats.org/drawingml/2006/main">
               <a:ext uri="{FF2B5EF4-FFF2-40B4-BE49-F238E27FC236}">
-                <a16:creationId xmlns:a16="http://schemas.microsoft.com/office/drawing/2014/main" id="{9459A153-DFE6-460B-932E-CD24A04AFAB8}"/>
+                <a16:creationId xmlns:a16="http://schemas.microsoft.com/office/drawing/2014/main" id="{D45C4954-B4CD-43D9-A6D5-42628B6DD7DB}"/>
               </a:ext>
             </a:extLst>
           </p:cNvPr>
@@ -3720,7 +3720,7 @@
           <p:cNvPr id="13" name="practice-connector-1">
             <a:extLst xmlns:a="http://schemas.openxmlformats.org/drawingml/2006/main">
               <a:ext uri="{FF2B5EF4-FFF2-40B4-BE49-F238E27FC236}">
-                <a16:creationId xmlns:a16="http://schemas.microsoft.com/office/drawing/2014/main" id="{AFAD9561-C908-459C-BB75-C64F2E397CB6}"/>
+                <a16:creationId xmlns:a16="http://schemas.microsoft.com/office/drawing/2014/main" id="{0E8A35B4-7DDE-4EAD-A27A-4EAD8C743A9D}"/>
               </a:ext>
             </a:extLst>
           </p:cNvPr>
@@ -3751,7 +3751,7 @@
           <p:cNvPr id="14" name="practice-circle-2">
             <a:extLst xmlns:a="http://schemas.openxmlformats.org/drawingml/2006/main">
               <a:ext uri="{FF2B5EF4-FFF2-40B4-BE49-F238E27FC236}">
-                <a16:creationId xmlns:a16="http://schemas.microsoft.com/office/drawing/2014/main" id="{A3C703CB-32FE-45E5-87D2-CCFE7DA33977}"/>
+                <a16:creationId xmlns:a16="http://schemas.microsoft.com/office/drawing/2014/main" id="{0E8930F8-4337-4E70-AE02-39AE932BA36A}"/>
               </a:ext>
             </a:extLst>
           </p:cNvPr>
@@ -3784,7 +3784,7 @@
           <p:cNvPr id="15" name="practice-number-2">
             <a:extLst xmlns:a="http://schemas.openxmlformats.org/drawingml/2006/main">
               <a:ext uri="{FF2B5EF4-FFF2-40B4-BE49-F238E27FC236}">
-                <a16:creationId xmlns:a16="http://schemas.microsoft.com/office/drawing/2014/main" id="{22E9F71D-F021-452E-8FDD-19AA4E8F0301}"/>
+                <a16:creationId xmlns:a16="http://schemas.microsoft.com/office/drawing/2014/main" id="{4B5E429B-CA2B-49FB-808A-3BDBCD40AB53}"/>
               </a:ext>
             </a:extLst>
           </p:cNvPr>
@@ -3842,7 +3842,7 @@
           <p:cNvPr id="16" name="practice-item-2">
             <a:extLst xmlns:a="http://schemas.openxmlformats.org/drawingml/2006/main">
               <a:ext uri="{FF2B5EF4-FFF2-40B4-BE49-F238E27FC236}">
-                <a16:creationId xmlns:a16="http://schemas.microsoft.com/office/drawing/2014/main" id="{43B3B583-5AAB-4754-8417-137D08E61A9E}"/>
+                <a16:creationId xmlns:a16="http://schemas.microsoft.com/office/drawing/2014/main" id="{3A947CE2-BDF1-4337-B082-C3A8838446A5}"/>
               </a:ext>
             </a:extLst>
           </p:cNvPr>
@@ -3904,7 +3904,7 @@
     </p:spTree>
     <p:extLst>
       <p:ext uri="{BB962C8B-B14F-4D97-AF65-F5344CB8AC3E}">
-        <p14:creationId xmlns:p14="http://schemas.microsoft.com/office/powerpoint/2010/main" val="1464592716"/>
+        <p14:creationId xmlns:p14="http://schemas.microsoft.com/office/powerpoint/2010/main" val="167863641"/>
       </p:ext>
     </p:extLst>
   </p:cSld>
@@ -3935,7 +3935,7 @@
           <p:cNvPr id="1" name="s12-rule">
             <a:extLst xmlns:a="http://schemas.openxmlformats.org/drawingml/2006/main">
               <a:ext uri="{FF2B5EF4-FFF2-40B4-BE49-F238E27FC236}">
-                <a16:creationId xmlns:a16="http://schemas.microsoft.com/office/drawing/2014/main" id="{76DCBAE3-7637-496C-918E-F312C2E75E54}"/>
+                <a16:creationId xmlns:a16="http://schemas.microsoft.com/office/drawing/2014/main" id="{331E78BF-3599-4B1C-B821-21332EA4D06B}"/>
               </a:ext>
             </a:extLst>
           </p:cNvPr>
@@ -3968,7 +3968,7 @@
           <p:cNvPr id="2" name="s12-eyebrow">
             <a:extLst xmlns:a="http://schemas.openxmlformats.org/drawingml/2006/main">
               <a:ext uri="{FF2B5EF4-FFF2-40B4-BE49-F238E27FC236}">
-                <a16:creationId xmlns:a16="http://schemas.microsoft.com/office/drawing/2014/main" id="{F1DA37A7-1F61-4D91-9998-25EA799D555F}"/>
+                <a16:creationId xmlns:a16="http://schemas.microsoft.com/office/drawing/2014/main" id="{37078227-2BAC-458F-A0CA-67527CE2AE53}"/>
               </a:ext>
             </a:extLst>
           </p:cNvPr>
@@ -4026,7 +4026,7 @@
           <p:cNvPr id="3" name="s12-title">
             <a:extLst xmlns:a="http://schemas.openxmlformats.org/drawingml/2006/main">
               <a:ext uri="{FF2B5EF4-FFF2-40B4-BE49-F238E27FC236}">
-                <a16:creationId xmlns:a16="http://schemas.microsoft.com/office/drawing/2014/main" id="{D7B76E76-46BB-4B72-9C46-DAEFC1B178DA}"/>
+                <a16:creationId xmlns:a16="http://schemas.microsoft.com/office/drawing/2014/main" id="{5F657E24-8DE0-4127-AFE2-A81AE6D6DB69}"/>
               </a:ext>
             </a:extLst>
           </p:cNvPr>
@@ -4084,7 +4084,7 @@
           <p:cNvPr id="4" name="s12-footer">
             <a:extLst xmlns:a="http://schemas.openxmlformats.org/drawingml/2006/main">
               <a:ext uri="{FF2B5EF4-FFF2-40B4-BE49-F238E27FC236}">
-                <a16:creationId xmlns:a16="http://schemas.microsoft.com/office/drawing/2014/main" id="{6AC4A730-A4CB-480D-BDD8-4D9BD0B6CDB8}"/>
+                <a16:creationId xmlns:a16="http://schemas.microsoft.com/office/drawing/2014/main" id="{F413EE81-C72F-423F-A3CA-D3542413C142}"/>
               </a:ext>
             </a:extLst>
           </p:cNvPr>
@@ -4115,7 +4115,7 @@
           <p:cNvPr id="5" name="s12-identity">
             <a:extLst xmlns:a="http://schemas.openxmlformats.org/drawingml/2006/main">
               <a:ext uri="{FF2B5EF4-FFF2-40B4-BE49-F238E27FC236}">
-                <a16:creationId xmlns:a16="http://schemas.microsoft.com/office/drawing/2014/main" id="{A7BBD15A-2FF0-40C0-88AF-8E1A1C1636DE}"/>
+                <a16:creationId xmlns:a16="http://schemas.microsoft.com/office/drawing/2014/main" id="{D2407972-E55A-44C4-AA05-8D76A1C42BCC}"/>
               </a:ext>
             </a:extLst>
           </p:cNvPr>
@@ -4173,7 +4173,7 @@
           <p:cNvPr id="6" name="recap-circle-0">
             <a:extLst xmlns:a="http://schemas.openxmlformats.org/drawingml/2006/main">
               <a:ext uri="{FF2B5EF4-FFF2-40B4-BE49-F238E27FC236}">
-                <a16:creationId xmlns:a16="http://schemas.microsoft.com/office/drawing/2014/main" id="{6980B21D-6B06-4BE6-9201-8F4724D9CEB7}"/>
+                <a16:creationId xmlns:a16="http://schemas.microsoft.com/office/drawing/2014/main" id="{1EE069B7-9A2B-4F40-BA4C-BF0071068265}"/>
               </a:ext>
             </a:extLst>
           </p:cNvPr>
@@ -4206,7 +4206,7 @@
           <p:cNvPr id="7" name="recap-number-0">
             <a:extLst xmlns:a="http://schemas.openxmlformats.org/drawingml/2006/main">
               <a:ext uri="{FF2B5EF4-FFF2-40B4-BE49-F238E27FC236}">
-                <a16:creationId xmlns:a16="http://schemas.microsoft.com/office/drawing/2014/main" id="{C9F79967-D3B9-484D-876B-DCA58819964B}"/>
+                <a16:creationId xmlns:a16="http://schemas.microsoft.com/office/drawing/2014/main" id="{C7A3B605-877E-433C-B80B-1E44A4E596D3}"/>
               </a:ext>
             </a:extLst>
           </p:cNvPr>
@@ -4264,7 +4264,7 @@
           <p:cNvPr id="8" name="recap-item-0">
             <a:extLst xmlns:a="http://schemas.openxmlformats.org/drawingml/2006/main">
               <a:ext uri="{FF2B5EF4-FFF2-40B4-BE49-F238E27FC236}">
-                <a16:creationId xmlns:a16="http://schemas.microsoft.com/office/drawing/2014/main" id="{C3129829-9FC9-478E-8877-0F0213FD8F11}"/>
+                <a16:creationId xmlns:a16="http://schemas.microsoft.com/office/drawing/2014/main" id="{CB5C96CA-68D2-47B9-B7F6-2D987826EED8}"/>
               </a:ext>
             </a:extLst>
           </p:cNvPr>
@@ -4328,7 +4328,7 @@
           <p:cNvPr id="9" name="recap-connector-0">
             <a:extLst xmlns:a="http://schemas.openxmlformats.org/drawingml/2006/main">
               <a:ext uri="{FF2B5EF4-FFF2-40B4-BE49-F238E27FC236}">
-                <a16:creationId xmlns:a16="http://schemas.microsoft.com/office/drawing/2014/main" id="{70058150-4F50-407C-8059-A1E73C52E11D}"/>
+                <a16:creationId xmlns:a16="http://schemas.microsoft.com/office/drawing/2014/main" id="{336D8F52-E134-44AA-8264-B54924A600D8}"/>
               </a:ext>
             </a:extLst>
           </p:cNvPr>
@@ -4359,7 +4359,7 @@
           <p:cNvPr id="10" name="recap-circle-1">
             <a:extLst xmlns:a="http://schemas.openxmlformats.org/drawingml/2006/main">
               <a:ext uri="{FF2B5EF4-FFF2-40B4-BE49-F238E27FC236}">
-                <a16:creationId xmlns:a16="http://schemas.microsoft.com/office/drawing/2014/main" id="{4F091E61-1DF2-461A-AC9E-A566811FAC97}"/>
+                <a16:creationId xmlns:a16="http://schemas.microsoft.com/office/drawing/2014/main" id="{B29A0436-65BA-446F-AFD0-BC0C5772DAB3}"/>
               </a:ext>
             </a:extLst>
           </p:cNvPr>
@@ -4392,7 +4392,7 @@
           <p:cNvPr id="11" name="recap-number-1">
             <a:extLst xmlns:a="http://schemas.openxmlformats.org/drawingml/2006/main">
               <a:ext uri="{FF2B5EF4-FFF2-40B4-BE49-F238E27FC236}">
-                <a16:creationId xmlns:a16="http://schemas.microsoft.com/office/drawing/2014/main" id="{06206BFD-D020-4EB2-907C-9F09AE26D80F}"/>
+                <a16:creationId xmlns:a16="http://schemas.microsoft.com/office/drawing/2014/main" id="{7995000B-3339-4E9D-BCC7-7C5B2B199E9E}"/>
               </a:ext>
             </a:extLst>
           </p:cNvPr>
@@ -4450,7 +4450,7 @@
           <p:cNvPr id="12" name="recap-item-1">
             <a:extLst xmlns:a="http://schemas.openxmlformats.org/drawingml/2006/main">
               <a:ext uri="{FF2B5EF4-FFF2-40B4-BE49-F238E27FC236}">
-                <a16:creationId xmlns:a16="http://schemas.microsoft.com/office/drawing/2014/main" id="{AC1702C8-D8E1-4863-8352-8CC05FC1DD43}"/>
+                <a16:creationId xmlns:a16="http://schemas.microsoft.com/office/drawing/2014/main" id="{C25E7113-2FC6-4F12-853E-9BFD6702DB1E}"/>
               </a:ext>
             </a:extLst>
           </p:cNvPr>
@@ -4514,7 +4514,7 @@
           <p:cNvPr id="13" name="recap-connector-1">
             <a:extLst xmlns:a="http://schemas.openxmlformats.org/drawingml/2006/main">
               <a:ext uri="{FF2B5EF4-FFF2-40B4-BE49-F238E27FC236}">
-                <a16:creationId xmlns:a16="http://schemas.microsoft.com/office/drawing/2014/main" id="{473BF552-540B-4159-854B-EF27A950646A}"/>
+                <a16:creationId xmlns:a16="http://schemas.microsoft.com/office/drawing/2014/main" id="{B30BC572-E089-4801-8AD5-02B3947BD785}"/>
               </a:ext>
             </a:extLst>
           </p:cNvPr>
@@ -4545,7 +4545,7 @@
           <p:cNvPr id="14" name="recap-circle-2">
             <a:extLst xmlns:a="http://schemas.openxmlformats.org/drawingml/2006/main">
               <a:ext uri="{FF2B5EF4-FFF2-40B4-BE49-F238E27FC236}">
-                <a16:creationId xmlns:a16="http://schemas.microsoft.com/office/drawing/2014/main" id="{A8959990-F359-42EF-964A-A825A1620AF7}"/>
+                <a16:creationId xmlns:a16="http://schemas.microsoft.com/office/drawing/2014/main" id="{957B0D5F-0AAE-49BE-82B6-071DD4AA03E7}"/>
               </a:ext>
             </a:extLst>
           </p:cNvPr>
@@ -4578,7 +4578,7 @@
           <p:cNvPr id="15" name="recap-number-2">
             <a:extLst xmlns:a="http://schemas.openxmlformats.org/drawingml/2006/main">
               <a:ext uri="{FF2B5EF4-FFF2-40B4-BE49-F238E27FC236}">
-                <a16:creationId xmlns:a16="http://schemas.microsoft.com/office/drawing/2014/main" id="{85F46B4E-4B6F-4402-9FDD-6EC4C7EF3848}"/>
+                <a16:creationId xmlns:a16="http://schemas.microsoft.com/office/drawing/2014/main" id="{BBDE846C-448C-4BC1-95F3-36A463E62E1B}"/>
               </a:ext>
             </a:extLst>
           </p:cNvPr>
@@ -4636,7 +4636,7 @@
           <p:cNvPr id="16" name="recap-item-2">
             <a:extLst xmlns:a="http://schemas.openxmlformats.org/drawingml/2006/main">
               <a:ext uri="{FF2B5EF4-FFF2-40B4-BE49-F238E27FC236}">
-                <a16:creationId xmlns:a16="http://schemas.microsoft.com/office/drawing/2014/main" id="{18736C25-73D5-4CC9-873E-FBA187E08C74}"/>
+                <a16:creationId xmlns:a16="http://schemas.microsoft.com/office/drawing/2014/main" id="{1771E3E0-A4B2-4299-BED9-845F1011F597}"/>
               </a:ext>
             </a:extLst>
           </p:cNvPr>
@@ -4698,7 +4698,7 @@
     </p:spTree>
     <p:extLst>
       <p:ext uri="{BB962C8B-B14F-4D97-AF65-F5344CB8AC3E}">
-        <p14:creationId xmlns:p14="http://schemas.microsoft.com/office/powerpoint/2010/main" val="446621760"/>
+        <p14:creationId xmlns:p14="http://schemas.microsoft.com/office/powerpoint/2010/main" val="379680054"/>
       </p:ext>
     </p:extLst>
   </p:cSld>
@@ -4729,7 +4729,7 @@
           <p:cNvPr id="1" name="s13-rule">
             <a:extLst xmlns:a="http://schemas.openxmlformats.org/drawingml/2006/main">
               <a:ext uri="{FF2B5EF4-FFF2-40B4-BE49-F238E27FC236}">
-                <a16:creationId xmlns:a16="http://schemas.microsoft.com/office/drawing/2014/main" id="{9AFD8C17-C27C-446D-888F-1585EF4B3EC6}"/>
+                <a16:creationId xmlns:a16="http://schemas.microsoft.com/office/drawing/2014/main" id="{55B568CD-5BB5-4875-BD8F-F2175398AA40}"/>
               </a:ext>
             </a:extLst>
           </p:cNvPr>
@@ -4762,7 +4762,7 @@
           <p:cNvPr id="2" name="s13-eyebrow">
             <a:extLst xmlns:a="http://schemas.openxmlformats.org/drawingml/2006/main">
               <a:ext uri="{FF2B5EF4-FFF2-40B4-BE49-F238E27FC236}">
-                <a16:creationId xmlns:a16="http://schemas.microsoft.com/office/drawing/2014/main" id="{51583F4F-7164-4C1C-AD9B-5CFC7574A930}"/>
+                <a16:creationId xmlns:a16="http://schemas.microsoft.com/office/drawing/2014/main" id="{B4591C79-D611-4A5E-80F6-D0C62709EC67}"/>
               </a:ext>
             </a:extLst>
           </p:cNvPr>
@@ -4820,7 +4820,7 @@
           <p:cNvPr id="3" name="s13-title">
             <a:extLst xmlns:a="http://schemas.openxmlformats.org/drawingml/2006/main">
               <a:ext uri="{FF2B5EF4-FFF2-40B4-BE49-F238E27FC236}">
-                <a16:creationId xmlns:a16="http://schemas.microsoft.com/office/drawing/2014/main" id="{C5E50EA0-F6BB-411E-8010-CAB7564AC04C}"/>
+                <a16:creationId xmlns:a16="http://schemas.microsoft.com/office/drawing/2014/main" id="{ABD5C420-0D75-47B5-A452-AEC79C629E17}"/>
               </a:ext>
             </a:extLst>
           </p:cNvPr>
@@ -4878,7 +4878,7 @@
           <p:cNvPr id="4" name="s13-footer">
             <a:extLst xmlns:a="http://schemas.openxmlformats.org/drawingml/2006/main">
               <a:ext uri="{FF2B5EF4-FFF2-40B4-BE49-F238E27FC236}">
-                <a16:creationId xmlns:a16="http://schemas.microsoft.com/office/drawing/2014/main" id="{4AE935B7-CD6C-432A-A74B-914952C40833}"/>
+                <a16:creationId xmlns:a16="http://schemas.microsoft.com/office/drawing/2014/main" id="{0B32F0D8-F55C-4153-8423-FCCD0CE56B37}"/>
               </a:ext>
             </a:extLst>
           </p:cNvPr>
@@ -4909,7 +4909,7 @@
           <p:cNvPr id="5" name="s13-identity">
             <a:extLst xmlns:a="http://schemas.openxmlformats.org/drawingml/2006/main">
               <a:ext uri="{FF2B5EF4-FFF2-40B4-BE49-F238E27FC236}">
-                <a16:creationId xmlns:a16="http://schemas.microsoft.com/office/drawing/2014/main" id="{29B23F26-27F7-4549-BEDD-9F2D70C1FBD3}"/>
+                <a16:creationId xmlns:a16="http://schemas.microsoft.com/office/drawing/2014/main" id="{C625202E-4695-470B-862C-259DAC2C56CE}"/>
               </a:ext>
             </a:extLst>
           </p:cNvPr>
@@ -4967,7 +4967,7 @@
           <p:cNvPr id="6" name="source-0">
             <a:extLst xmlns:a="http://schemas.openxmlformats.org/drawingml/2006/main">
               <a:ext uri="{FF2B5EF4-FFF2-40B4-BE49-F238E27FC236}">
-                <a16:creationId xmlns:a16="http://schemas.microsoft.com/office/drawing/2014/main" id="{8200E478-E2C3-44E1-9092-7C5C81208359}"/>
+                <a16:creationId xmlns:a16="http://schemas.microsoft.com/office/drawing/2014/main" id="{0C46823D-866B-4D39-97DB-DDC61B3E26B2}"/>
               </a:ext>
             </a:extLst>
           </p:cNvPr>
@@ -5031,7 +5031,7 @@
           <p:cNvPr id="7" name="source-1">
             <a:extLst xmlns:a="http://schemas.openxmlformats.org/drawingml/2006/main">
               <a:ext uri="{FF2B5EF4-FFF2-40B4-BE49-F238E27FC236}">
-                <a16:creationId xmlns:a16="http://schemas.microsoft.com/office/drawing/2014/main" id="{84BE1E97-8B8E-41E8-A1AF-DF58C77ED8A8}"/>
+                <a16:creationId xmlns:a16="http://schemas.microsoft.com/office/drawing/2014/main" id="{FB8562FB-AD78-4F4C-A223-55E44829A529}"/>
               </a:ext>
             </a:extLst>
           </p:cNvPr>
@@ -5095,7 +5095,7 @@
           <p:cNvPr id="8" name="source-2">
             <a:extLst xmlns:a="http://schemas.openxmlformats.org/drawingml/2006/main">
               <a:ext uri="{FF2B5EF4-FFF2-40B4-BE49-F238E27FC236}">
-                <a16:creationId xmlns:a16="http://schemas.microsoft.com/office/drawing/2014/main" id="{81E72562-1C56-40EC-B087-FCC778747BE4}"/>
+                <a16:creationId xmlns:a16="http://schemas.microsoft.com/office/drawing/2014/main" id="{D0839522-E010-4D3E-8521-18E6C7991C79}"/>
               </a:ext>
             </a:extLst>
           </p:cNvPr>
@@ -5159,7 +5159,7 @@
           <p:cNvPr id="9" name="source-3">
             <a:extLst xmlns:a="http://schemas.openxmlformats.org/drawingml/2006/main">
               <a:ext uri="{FF2B5EF4-FFF2-40B4-BE49-F238E27FC236}">
-                <a16:creationId xmlns:a16="http://schemas.microsoft.com/office/drawing/2014/main" id="{6411E286-E0E2-4174-B2FE-023AB187D3A4}"/>
+                <a16:creationId xmlns:a16="http://schemas.microsoft.com/office/drawing/2014/main" id="{B2627B5C-A15A-4F37-A331-5389D1A0846B}"/>
               </a:ext>
             </a:extLst>
           </p:cNvPr>
@@ -5223,7 +5223,7 @@
           <p:cNvPr id="10" name="source-4">
             <a:extLst xmlns:a="http://schemas.openxmlformats.org/drawingml/2006/main">
               <a:ext uri="{FF2B5EF4-FFF2-40B4-BE49-F238E27FC236}">
-                <a16:creationId xmlns:a16="http://schemas.microsoft.com/office/drawing/2014/main" id="{9A17B227-8F1D-4C2A-9E8D-1D6C7419D7CE}"/>
+                <a16:creationId xmlns:a16="http://schemas.microsoft.com/office/drawing/2014/main" id="{298D9497-182E-4570-B8A6-F6B20E76C53C}"/>
               </a:ext>
             </a:extLst>
           </p:cNvPr>
@@ -5287,7 +5287,7 @@
           <p:cNvPr id="11" name="s13-takeaway-rule">
             <a:extLst xmlns:a="http://schemas.openxmlformats.org/drawingml/2006/main">
               <a:ext uri="{FF2B5EF4-FFF2-40B4-BE49-F238E27FC236}">
-                <a16:creationId xmlns:a16="http://schemas.microsoft.com/office/drawing/2014/main" id="{63A4C1ED-7422-431F-B99F-94185C012C77}"/>
+                <a16:creationId xmlns:a16="http://schemas.microsoft.com/office/drawing/2014/main" id="{7397DEF7-5AAF-4B74-93F1-4835FD92F404}"/>
               </a:ext>
             </a:extLst>
           </p:cNvPr>
@@ -5320,7 +5320,7 @@
           <p:cNvPr id="12" name="s13-takeaway">
             <a:extLst xmlns:a="http://schemas.openxmlformats.org/drawingml/2006/main">
               <a:ext uri="{FF2B5EF4-FFF2-40B4-BE49-F238E27FC236}">
-                <a16:creationId xmlns:a16="http://schemas.microsoft.com/office/drawing/2014/main" id="{E85C5F03-C6E8-48D6-B76E-581C78F02F6A}"/>
+                <a16:creationId xmlns:a16="http://schemas.microsoft.com/office/drawing/2014/main" id="{574657F8-A76B-4CB1-BA99-9A9027909D6C}"/>
               </a:ext>
             </a:extLst>
           </p:cNvPr>
@@ -5345,7 +5345,7 @@
         </p:spPr>
         <p:txBody>
           <a:bodyPr xmlns:a="http://schemas.openxmlformats.org/drawingml/2006/main" lIns="0" tIns="0" rIns="0" bIns="0" anchor="ctr">
-            <a:normAutofit fontScale="100000"/>
+            <a:normAutofit fontScale="95911"/>
           </a:bodyPr>
           <a:lstStyle xmlns:a="http://schemas.openxmlformats.org/drawingml/2006/main"/>
           <a:p xmlns:a="http://schemas.openxmlformats.org/drawingml/2006/main">
@@ -5368,7 +5368,7 @@
                 <a:ea typeface="PingFang SC"/>
                 <a:cs typeface="PingFang SC"/>
               </a:rPr>
-              <a:t>公开幻灯片只使用课程原创文字与原生图形；完整论证、链接和事实边界请见本节讲义。</a:t>
+              <a:t>课程精编页用于讲授主线；播放器中的“原课件”模式保留团队 PowerPoint 精选页、真实图片和可播放视频。</a:t>
             </a:r>
           </a:p>
         </p:txBody>
@@ -5376,7 +5376,7 @@
     </p:spTree>
     <p:extLst>
       <p:ext uri="{BB962C8B-B14F-4D97-AF65-F5344CB8AC3E}">
-        <p14:creationId xmlns:p14="http://schemas.microsoft.com/office/powerpoint/2010/main" val="626310611"/>
+        <p14:creationId xmlns:p14="http://schemas.microsoft.com/office/powerpoint/2010/main" val="1758853799"/>
       </p:ext>
     </p:extLst>
   </p:cSld>
@@ -5407,7 +5407,7 @@
           <p:cNvPr id="1" name="s2-rule">
             <a:extLst xmlns:a="http://schemas.openxmlformats.org/drawingml/2006/main">
               <a:ext uri="{FF2B5EF4-FFF2-40B4-BE49-F238E27FC236}">
-                <a16:creationId xmlns:a16="http://schemas.microsoft.com/office/drawing/2014/main" id="{774EB95D-3D9E-43F6-A59E-38913FA0CC1E}"/>
+                <a16:creationId xmlns:a16="http://schemas.microsoft.com/office/drawing/2014/main" id="{A642AE39-1993-4BEB-96A0-5FECBF8CDAF9}"/>
               </a:ext>
             </a:extLst>
           </p:cNvPr>
@@ -5440,7 +5440,7 @@
           <p:cNvPr id="2" name="s2-eyebrow">
             <a:extLst xmlns:a="http://schemas.openxmlformats.org/drawingml/2006/main">
               <a:ext uri="{FF2B5EF4-FFF2-40B4-BE49-F238E27FC236}">
-                <a16:creationId xmlns:a16="http://schemas.microsoft.com/office/drawing/2014/main" id="{B87EF38A-2FD8-40DC-9A38-449130610B50}"/>
+                <a16:creationId xmlns:a16="http://schemas.microsoft.com/office/drawing/2014/main" id="{D26F51F6-AB0E-4E6E-844B-DB29DAB3D3D0}"/>
               </a:ext>
             </a:extLst>
           </p:cNvPr>
@@ -5498,7 +5498,7 @@
           <p:cNvPr id="3" name="s2-title">
             <a:extLst xmlns:a="http://schemas.openxmlformats.org/drawingml/2006/main">
               <a:ext uri="{FF2B5EF4-FFF2-40B4-BE49-F238E27FC236}">
-                <a16:creationId xmlns:a16="http://schemas.microsoft.com/office/drawing/2014/main" id="{356174DA-D3C2-4D14-ACF6-41B99EF944B6}"/>
+                <a16:creationId xmlns:a16="http://schemas.microsoft.com/office/drawing/2014/main" id="{C32DFBEC-64CA-4D1F-BE37-5FE66CEE8289}"/>
               </a:ext>
             </a:extLst>
           </p:cNvPr>
@@ -5556,7 +5556,7 @@
           <p:cNvPr id="4" name="s2-footer">
             <a:extLst xmlns:a="http://schemas.openxmlformats.org/drawingml/2006/main">
               <a:ext uri="{FF2B5EF4-FFF2-40B4-BE49-F238E27FC236}">
-                <a16:creationId xmlns:a16="http://schemas.microsoft.com/office/drawing/2014/main" id="{B09571B8-DCDF-4872-A24C-4E9FE2060E00}"/>
+                <a16:creationId xmlns:a16="http://schemas.microsoft.com/office/drawing/2014/main" id="{F304548F-B32A-4434-A075-8A17E774F7BB}"/>
               </a:ext>
             </a:extLst>
           </p:cNvPr>
@@ -5587,7 +5587,7 @@
           <p:cNvPr id="5" name="s2-identity">
             <a:extLst xmlns:a="http://schemas.openxmlformats.org/drawingml/2006/main">
               <a:ext uri="{FF2B5EF4-FFF2-40B4-BE49-F238E27FC236}">
-                <a16:creationId xmlns:a16="http://schemas.microsoft.com/office/drawing/2014/main" id="{6A55B4DD-E327-423C-811F-EC5E1B8A57FD}"/>
+                <a16:creationId xmlns:a16="http://schemas.microsoft.com/office/drawing/2014/main" id="{D3CF688B-DD4C-4660-99BA-264334BE3C30}"/>
               </a:ext>
             </a:extLst>
           </p:cNvPr>
@@ -5645,7 +5645,7 @@
           <p:cNvPr id="6" name="objective-1">
             <a:extLst xmlns:a="http://schemas.openxmlformats.org/drawingml/2006/main">
               <a:ext uri="{FF2B5EF4-FFF2-40B4-BE49-F238E27FC236}">
-                <a16:creationId xmlns:a16="http://schemas.microsoft.com/office/drawing/2014/main" id="{CCE82602-26F0-4568-91B7-B97F45591453}"/>
+                <a16:creationId xmlns:a16="http://schemas.microsoft.com/office/drawing/2014/main" id="{FDB76091-D8EE-4AC8-B4E5-0A0E00397B01}"/>
               </a:ext>
             </a:extLst>
           </p:cNvPr>
@@ -5732,7 +5732,7 @@
           <p:cNvPr id="7" name="objective-2">
             <a:extLst xmlns:a="http://schemas.openxmlformats.org/drawingml/2006/main">
               <a:ext uri="{FF2B5EF4-FFF2-40B4-BE49-F238E27FC236}">
-                <a16:creationId xmlns:a16="http://schemas.microsoft.com/office/drawing/2014/main" id="{8061B243-01B0-4A0B-8D54-A6EF28EA7E43}"/>
+                <a16:creationId xmlns:a16="http://schemas.microsoft.com/office/drawing/2014/main" id="{FF6EDA49-ACB2-4D97-B1CB-F655A4B52157}"/>
               </a:ext>
             </a:extLst>
           </p:cNvPr>
@@ -5819,7 +5819,7 @@
           <p:cNvPr id="8" name="objective-3">
             <a:extLst xmlns:a="http://schemas.openxmlformats.org/drawingml/2006/main">
               <a:ext uri="{FF2B5EF4-FFF2-40B4-BE49-F238E27FC236}">
-                <a16:creationId xmlns:a16="http://schemas.microsoft.com/office/drawing/2014/main" id="{604D553C-720D-4B4B-AEA5-44127FAAB46A}"/>
+                <a16:creationId xmlns:a16="http://schemas.microsoft.com/office/drawing/2014/main" id="{EBB2AA2C-5A25-4170-90D5-2B300343577B}"/>
               </a:ext>
             </a:extLst>
           </p:cNvPr>
@@ -5906,7 +5906,7 @@
           <p:cNvPr id="9" name="objective-4">
             <a:extLst xmlns:a="http://schemas.openxmlformats.org/drawingml/2006/main">
               <a:ext uri="{FF2B5EF4-FFF2-40B4-BE49-F238E27FC236}">
-                <a16:creationId xmlns:a16="http://schemas.microsoft.com/office/drawing/2014/main" id="{28F5E6DC-6099-475B-B54A-0525AE231582}"/>
+                <a16:creationId xmlns:a16="http://schemas.microsoft.com/office/drawing/2014/main" id="{B58A70E2-F7C5-404C-A765-A2B331C76422}"/>
               </a:ext>
             </a:extLst>
           </p:cNvPr>
@@ -5991,7 +5991,7 @@
     </p:spTree>
     <p:extLst>
       <p:ext uri="{BB962C8B-B14F-4D97-AF65-F5344CB8AC3E}">
-        <p14:creationId xmlns:p14="http://schemas.microsoft.com/office/powerpoint/2010/main" val="1543394843"/>
+        <p14:creationId xmlns:p14="http://schemas.microsoft.com/office/powerpoint/2010/main" val="658063286"/>
       </p:ext>
     </p:extLst>
   </p:cSld>
@@ -6022,7 +6022,7 @@
           <p:cNvPr id="1" name="s3-rule">
             <a:extLst xmlns:a="http://schemas.openxmlformats.org/drawingml/2006/main">
               <a:ext uri="{FF2B5EF4-FFF2-40B4-BE49-F238E27FC236}">
-                <a16:creationId xmlns:a16="http://schemas.microsoft.com/office/drawing/2014/main" id="{85D1004D-85E2-49E9-995F-BCBA4D307325}"/>
+                <a16:creationId xmlns:a16="http://schemas.microsoft.com/office/drawing/2014/main" id="{27B4FC80-C8AF-45AB-8C6F-1493A3DB70FF}"/>
               </a:ext>
             </a:extLst>
           </p:cNvPr>
@@ -6055,7 +6055,7 @@
           <p:cNvPr id="2" name="s3-eyebrow">
             <a:extLst xmlns:a="http://schemas.openxmlformats.org/drawingml/2006/main">
               <a:ext uri="{FF2B5EF4-FFF2-40B4-BE49-F238E27FC236}">
-                <a16:creationId xmlns:a16="http://schemas.microsoft.com/office/drawing/2014/main" id="{227CFCC5-4C26-4A87-B13A-75456CC26C4A}"/>
+                <a16:creationId xmlns:a16="http://schemas.microsoft.com/office/drawing/2014/main" id="{3E1AF2CF-4F22-40DC-B13C-92E241719AB6}"/>
               </a:ext>
             </a:extLst>
           </p:cNvPr>
@@ -6113,7 +6113,7 @@
           <p:cNvPr id="3" name="s3-title">
             <a:extLst xmlns:a="http://schemas.openxmlformats.org/drawingml/2006/main">
               <a:ext uri="{FF2B5EF4-FFF2-40B4-BE49-F238E27FC236}">
-                <a16:creationId xmlns:a16="http://schemas.microsoft.com/office/drawing/2014/main" id="{B7F30B0F-14A0-4980-BCD2-16D8A4A8013C}"/>
+                <a16:creationId xmlns:a16="http://schemas.microsoft.com/office/drawing/2014/main" id="{0FB69DB2-3F88-4E52-9062-798943976AF8}"/>
               </a:ext>
             </a:extLst>
           </p:cNvPr>
@@ -6171,7 +6171,7 @@
           <p:cNvPr id="4" name="s3-footer">
             <a:extLst xmlns:a="http://schemas.openxmlformats.org/drawingml/2006/main">
               <a:ext uri="{FF2B5EF4-FFF2-40B4-BE49-F238E27FC236}">
-                <a16:creationId xmlns:a16="http://schemas.microsoft.com/office/drawing/2014/main" id="{5AB4F16E-F891-428C-9D64-6DC4F8854324}"/>
+                <a16:creationId xmlns:a16="http://schemas.microsoft.com/office/drawing/2014/main" id="{E95F60B2-6559-4819-A2F6-63947EA4D5F1}"/>
               </a:ext>
             </a:extLst>
           </p:cNvPr>
@@ -6202,7 +6202,7 @@
           <p:cNvPr id="5" name="s3-identity">
             <a:extLst xmlns:a="http://schemas.openxmlformats.org/drawingml/2006/main">
               <a:ext uri="{FF2B5EF4-FFF2-40B4-BE49-F238E27FC236}">
-                <a16:creationId xmlns:a16="http://schemas.microsoft.com/office/drawing/2014/main" id="{FE25270B-7B76-4573-AA5B-1E9809F5DB93}"/>
+                <a16:creationId xmlns:a16="http://schemas.microsoft.com/office/drawing/2014/main" id="{C0F90918-E806-4705-BB1E-46499E628C5A}"/>
               </a:ext>
             </a:extLst>
           </p:cNvPr>
@@ -6260,7 +6260,7 @@
           <p:cNvPr id="6" name="core-no-0">
             <a:extLst xmlns:a="http://schemas.openxmlformats.org/drawingml/2006/main">
               <a:ext uri="{FF2B5EF4-FFF2-40B4-BE49-F238E27FC236}">
-                <a16:creationId xmlns:a16="http://schemas.microsoft.com/office/drawing/2014/main" id="{06107D68-B34E-4344-942B-F273226C574A}"/>
+                <a16:creationId xmlns:a16="http://schemas.microsoft.com/office/drawing/2014/main" id="{3E9EE767-9225-4C2B-B219-99D48483B7E6}"/>
               </a:ext>
             </a:extLst>
           </p:cNvPr>
@@ -6318,7 +6318,7 @@
           <p:cNvPr id="7" name="core-label-0">
             <a:extLst xmlns:a="http://schemas.openxmlformats.org/drawingml/2006/main">
               <a:ext uri="{FF2B5EF4-FFF2-40B4-BE49-F238E27FC236}">
-                <a16:creationId xmlns:a16="http://schemas.microsoft.com/office/drawing/2014/main" id="{5EC48D9C-6F5D-4251-ADB5-FE0D0F3CADA4}"/>
+                <a16:creationId xmlns:a16="http://schemas.microsoft.com/office/drawing/2014/main" id="{8323F7EE-402E-4E1D-877B-B2DA935F612E}"/>
               </a:ext>
             </a:extLst>
           </p:cNvPr>
@@ -6376,7 +6376,7 @@
           <p:cNvPr id="8" name="core-body-0">
             <a:extLst xmlns:a="http://schemas.openxmlformats.org/drawingml/2006/main">
               <a:ext uri="{FF2B5EF4-FFF2-40B4-BE49-F238E27FC236}">
-                <a16:creationId xmlns:a16="http://schemas.microsoft.com/office/drawing/2014/main" id="{70A9D5AD-7E6F-48EF-A5B5-DD9DC21BB500}"/>
+                <a16:creationId xmlns:a16="http://schemas.microsoft.com/office/drawing/2014/main" id="{FBFCF927-7750-43C9-9B4C-7E34B2855158}"/>
               </a:ext>
             </a:extLst>
           </p:cNvPr>
@@ -6440,7 +6440,7 @@
           <p:cNvPr id="9" name="core-no-1">
             <a:extLst xmlns:a="http://schemas.openxmlformats.org/drawingml/2006/main">
               <a:ext uri="{FF2B5EF4-FFF2-40B4-BE49-F238E27FC236}">
-                <a16:creationId xmlns:a16="http://schemas.microsoft.com/office/drawing/2014/main" id="{9A2E8DBB-68E8-4D53-804E-AD1F2FAF5EEB}"/>
+                <a16:creationId xmlns:a16="http://schemas.microsoft.com/office/drawing/2014/main" id="{8F1EEA52-9BB9-4C6E-99ED-3FCCACF7EB07}"/>
               </a:ext>
             </a:extLst>
           </p:cNvPr>
@@ -6498,7 +6498,7 @@
           <p:cNvPr id="10" name="core-body-1">
             <a:extLst xmlns:a="http://schemas.openxmlformats.org/drawingml/2006/main">
               <a:ext uri="{FF2B5EF4-FFF2-40B4-BE49-F238E27FC236}">
-                <a16:creationId xmlns:a16="http://schemas.microsoft.com/office/drawing/2014/main" id="{57CBEDA1-F70C-47CB-8D78-B3FE44F1779F}"/>
+                <a16:creationId xmlns:a16="http://schemas.microsoft.com/office/drawing/2014/main" id="{34BEE92C-EE56-4209-965F-B09C19550422}"/>
               </a:ext>
             </a:extLst>
           </p:cNvPr>
@@ -6562,7 +6562,7 @@
           <p:cNvPr id="11" name="s3-takeaway-rule">
             <a:extLst xmlns:a="http://schemas.openxmlformats.org/drawingml/2006/main">
               <a:ext uri="{FF2B5EF4-FFF2-40B4-BE49-F238E27FC236}">
-                <a16:creationId xmlns:a16="http://schemas.microsoft.com/office/drawing/2014/main" id="{5F0561C7-FB30-48BD-8E6D-6ACCA8DC4D94}"/>
+                <a16:creationId xmlns:a16="http://schemas.microsoft.com/office/drawing/2014/main" id="{9F8ED50D-A653-4C6C-ACEE-5C9DD2AD7238}"/>
               </a:ext>
             </a:extLst>
           </p:cNvPr>
@@ -6595,7 +6595,7 @@
           <p:cNvPr id="12" name="s3-takeaway">
             <a:extLst xmlns:a="http://schemas.openxmlformats.org/drawingml/2006/main">
               <a:ext uri="{FF2B5EF4-FFF2-40B4-BE49-F238E27FC236}">
-                <a16:creationId xmlns:a16="http://schemas.microsoft.com/office/drawing/2014/main" id="{7B673C98-24D2-4FD3-B079-F0C46EEB31B8}"/>
+                <a16:creationId xmlns:a16="http://schemas.microsoft.com/office/drawing/2014/main" id="{5C23CFB5-B6A1-4A8A-A52D-E237DEE5B181}"/>
               </a:ext>
             </a:extLst>
           </p:cNvPr>
@@ -6651,7 +6651,7 @@
     </p:spTree>
     <p:extLst>
       <p:ext uri="{BB962C8B-B14F-4D97-AF65-F5344CB8AC3E}">
-        <p14:creationId xmlns:p14="http://schemas.microsoft.com/office/powerpoint/2010/main" val="778093711"/>
+        <p14:creationId xmlns:p14="http://schemas.microsoft.com/office/powerpoint/2010/main" val="1943356855"/>
       </p:ext>
     </p:extLst>
   </p:cSld>
@@ -6682,7 +6682,7 @@
           <p:cNvPr id="1" name="s4-rule">
             <a:extLst xmlns:a="http://schemas.openxmlformats.org/drawingml/2006/main">
               <a:ext uri="{FF2B5EF4-FFF2-40B4-BE49-F238E27FC236}">
-                <a16:creationId xmlns:a16="http://schemas.microsoft.com/office/drawing/2014/main" id="{B9238FC6-4748-4271-9748-C8A33F39AF21}"/>
+                <a16:creationId xmlns:a16="http://schemas.microsoft.com/office/drawing/2014/main" id="{08224A1D-7200-45FF-80F3-503E9D28464C}"/>
               </a:ext>
             </a:extLst>
           </p:cNvPr>
@@ -6715,7 +6715,7 @@
           <p:cNvPr id="2" name="s4-eyebrow">
             <a:extLst xmlns:a="http://schemas.openxmlformats.org/drawingml/2006/main">
               <a:ext uri="{FF2B5EF4-FFF2-40B4-BE49-F238E27FC236}">
-                <a16:creationId xmlns:a16="http://schemas.microsoft.com/office/drawing/2014/main" id="{33BD6F35-70B8-465E-B874-9615C62F3660}"/>
+                <a16:creationId xmlns:a16="http://schemas.microsoft.com/office/drawing/2014/main" id="{54767778-BA7F-47B1-9939-6132D4DB95D6}"/>
               </a:ext>
             </a:extLst>
           </p:cNvPr>
@@ -6773,7 +6773,7 @@
           <p:cNvPr id="3" name="s4-title">
             <a:extLst xmlns:a="http://schemas.openxmlformats.org/drawingml/2006/main">
               <a:ext uri="{FF2B5EF4-FFF2-40B4-BE49-F238E27FC236}">
-                <a16:creationId xmlns:a16="http://schemas.microsoft.com/office/drawing/2014/main" id="{CAD72286-39C2-4707-9141-C4BC99ABC8D9}"/>
+                <a16:creationId xmlns:a16="http://schemas.microsoft.com/office/drawing/2014/main" id="{7A6C6EB7-F6A3-4FF2-B886-13F69A2DA4A4}"/>
               </a:ext>
             </a:extLst>
           </p:cNvPr>
@@ -6831,7 +6831,7 @@
           <p:cNvPr id="4" name="s4-footer">
             <a:extLst xmlns:a="http://schemas.openxmlformats.org/drawingml/2006/main">
               <a:ext uri="{FF2B5EF4-FFF2-40B4-BE49-F238E27FC236}">
-                <a16:creationId xmlns:a16="http://schemas.microsoft.com/office/drawing/2014/main" id="{F59C2DEE-A71F-4852-A4B9-66C9BCAF46BB}"/>
+                <a16:creationId xmlns:a16="http://schemas.microsoft.com/office/drawing/2014/main" id="{D9AA72F6-7005-4090-B094-8A473BC7BE36}"/>
               </a:ext>
             </a:extLst>
           </p:cNvPr>
@@ -6862,7 +6862,7 @@
           <p:cNvPr id="5" name="s4-identity">
             <a:extLst xmlns:a="http://schemas.openxmlformats.org/drawingml/2006/main">
               <a:ext uri="{FF2B5EF4-FFF2-40B4-BE49-F238E27FC236}">
-                <a16:creationId xmlns:a16="http://schemas.microsoft.com/office/drawing/2014/main" id="{1E44EDDF-9720-4E3B-A192-9819BC12B56A}"/>
+                <a16:creationId xmlns:a16="http://schemas.microsoft.com/office/drawing/2014/main" id="{19241235-C39F-4E68-8523-402ECFF47204}"/>
               </a:ext>
             </a:extLst>
           </p:cNvPr>
@@ -6920,7 +6920,7 @@
           <p:cNvPr id="6" name="core-no-0">
             <a:extLst xmlns:a="http://schemas.openxmlformats.org/drawingml/2006/main">
               <a:ext uri="{FF2B5EF4-FFF2-40B4-BE49-F238E27FC236}">
-                <a16:creationId xmlns:a16="http://schemas.microsoft.com/office/drawing/2014/main" id="{44C2F8DF-FDF1-45DA-8107-4813A31EEE80}"/>
+                <a16:creationId xmlns:a16="http://schemas.microsoft.com/office/drawing/2014/main" id="{6772F788-268F-46F9-B80C-F9A006EE122C}"/>
               </a:ext>
             </a:extLst>
           </p:cNvPr>
@@ -6978,7 +6978,7 @@
           <p:cNvPr id="7" name="core-label-0">
             <a:extLst xmlns:a="http://schemas.openxmlformats.org/drawingml/2006/main">
               <a:ext uri="{FF2B5EF4-FFF2-40B4-BE49-F238E27FC236}">
-                <a16:creationId xmlns:a16="http://schemas.microsoft.com/office/drawing/2014/main" id="{21283EA0-15CC-4DC6-B3AE-6F01B9A04B17}"/>
+                <a16:creationId xmlns:a16="http://schemas.microsoft.com/office/drawing/2014/main" id="{214DC829-06EE-4544-97B7-BCA5BCB473A6}"/>
               </a:ext>
             </a:extLst>
           </p:cNvPr>
@@ -7036,7 +7036,7 @@
           <p:cNvPr id="8" name="core-body-0">
             <a:extLst xmlns:a="http://schemas.openxmlformats.org/drawingml/2006/main">
               <a:ext uri="{FF2B5EF4-FFF2-40B4-BE49-F238E27FC236}">
-                <a16:creationId xmlns:a16="http://schemas.microsoft.com/office/drawing/2014/main" id="{32FD68F4-BD66-47B5-A344-A038D6AF11CF}"/>
+                <a16:creationId xmlns:a16="http://schemas.microsoft.com/office/drawing/2014/main" id="{28D711A0-53AA-4538-BF1B-6C5832F69614}"/>
               </a:ext>
             </a:extLst>
           </p:cNvPr>
@@ -7100,7 +7100,7 @@
           <p:cNvPr id="9" name="core-no-1">
             <a:extLst xmlns:a="http://schemas.openxmlformats.org/drawingml/2006/main">
               <a:ext uri="{FF2B5EF4-FFF2-40B4-BE49-F238E27FC236}">
-                <a16:creationId xmlns:a16="http://schemas.microsoft.com/office/drawing/2014/main" id="{12A89023-C2FA-413D-8491-8230A038030D}"/>
+                <a16:creationId xmlns:a16="http://schemas.microsoft.com/office/drawing/2014/main" id="{F1D4FD2D-65E9-417E-81D7-D7746B8ABA47}"/>
               </a:ext>
             </a:extLst>
           </p:cNvPr>
@@ -7158,7 +7158,7 @@
           <p:cNvPr id="10" name="core-body-1">
             <a:extLst xmlns:a="http://schemas.openxmlformats.org/drawingml/2006/main">
               <a:ext uri="{FF2B5EF4-FFF2-40B4-BE49-F238E27FC236}">
-                <a16:creationId xmlns:a16="http://schemas.microsoft.com/office/drawing/2014/main" id="{64F6EDCA-6433-40CE-B7B7-CE3CB2196BFC}"/>
+                <a16:creationId xmlns:a16="http://schemas.microsoft.com/office/drawing/2014/main" id="{B12E3866-9BBF-459E-AE0D-6ED948A31EE4}"/>
               </a:ext>
             </a:extLst>
           </p:cNvPr>
@@ -7222,7 +7222,7 @@
           <p:cNvPr id="11" name="s4-takeaway-rule">
             <a:extLst xmlns:a="http://schemas.openxmlformats.org/drawingml/2006/main">
               <a:ext uri="{FF2B5EF4-FFF2-40B4-BE49-F238E27FC236}">
-                <a16:creationId xmlns:a16="http://schemas.microsoft.com/office/drawing/2014/main" id="{994FA743-99DD-4F7A-9476-409F99EFEA55}"/>
+                <a16:creationId xmlns:a16="http://schemas.microsoft.com/office/drawing/2014/main" id="{7D7BE7D7-A717-4292-B863-4ECF3FBA0B05}"/>
               </a:ext>
             </a:extLst>
           </p:cNvPr>
@@ -7255,7 +7255,7 @@
           <p:cNvPr id="12" name="s4-takeaway">
             <a:extLst xmlns:a="http://schemas.openxmlformats.org/drawingml/2006/main">
               <a:ext uri="{FF2B5EF4-FFF2-40B4-BE49-F238E27FC236}">
-                <a16:creationId xmlns:a16="http://schemas.microsoft.com/office/drawing/2014/main" id="{AF9FFC6C-BB7C-40DE-9B38-35F0B82F9858}"/>
+                <a16:creationId xmlns:a16="http://schemas.microsoft.com/office/drawing/2014/main" id="{9A505900-64BE-4C22-90CC-A9162688DDE3}"/>
               </a:ext>
             </a:extLst>
           </p:cNvPr>
@@ -7311,7 +7311,7 @@
     </p:spTree>
     <p:extLst>
       <p:ext uri="{BB962C8B-B14F-4D97-AF65-F5344CB8AC3E}">
-        <p14:creationId xmlns:p14="http://schemas.microsoft.com/office/powerpoint/2010/main" val="1811688498"/>
+        <p14:creationId xmlns:p14="http://schemas.microsoft.com/office/powerpoint/2010/main" val="943498006"/>
       </p:ext>
     </p:extLst>
   </p:cSld>
@@ -7342,7 +7342,7 @@
           <p:cNvPr id="1" name="s5-rule">
             <a:extLst xmlns:a="http://schemas.openxmlformats.org/drawingml/2006/main">
               <a:ext uri="{FF2B5EF4-FFF2-40B4-BE49-F238E27FC236}">
-                <a16:creationId xmlns:a16="http://schemas.microsoft.com/office/drawing/2014/main" id="{8EC6712B-E6F2-40F3-9038-419E2DB6E93A}"/>
+                <a16:creationId xmlns:a16="http://schemas.microsoft.com/office/drawing/2014/main" id="{4EAC4F5E-0068-4E78-8D49-E03A7636E9CD}"/>
               </a:ext>
             </a:extLst>
           </p:cNvPr>
@@ -7375,7 +7375,7 @@
           <p:cNvPr id="2" name="s5-eyebrow">
             <a:extLst xmlns:a="http://schemas.openxmlformats.org/drawingml/2006/main">
               <a:ext uri="{FF2B5EF4-FFF2-40B4-BE49-F238E27FC236}">
-                <a16:creationId xmlns:a16="http://schemas.microsoft.com/office/drawing/2014/main" id="{21D2E8A9-605B-426C-9992-97353348E99D}"/>
+                <a16:creationId xmlns:a16="http://schemas.microsoft.com/office/drawing/2014/main" id="{09389617-4765-4C94-90CD-115D196032E9}"/>
               </a:ext>
             </a:extLst>
           </p:cNvPr>
@@ -7433,7 +7433,7 @@
           <p:cNvPr id="3" name="s5-title">
             <a:extLst xmlns:a="http://schemas.openxmlformats.org/drawingml/2006/main">
               <a:ext uri="{FF2B5EF4-FFF2-40B4-BE49-F238E27FC236}">
-                <a16:creationId xmlns:a16="http://schemas.microsoft.com/office/drawing/2014/main" id="{299AE4B7-3F8D-4EE6-9EBE-1D6DA9DFF585}"/>
+                <a16:creationId xmlns:a16="http://schemas.microsoft.com/office/drawing/2014/main" id="{D41A81A6-2945-4724-AC59-63E8FD0312F5}"/>
               </a:ext>
             </a:extLst>
           </p:cNvPr>
@@ -7491,7 +7491,7 @@
           <p:cNvPr id="4" name="s5-footer">
             <a:extLst xmlns:a="http://schemas.openxmlformats.org/drawingml/2006/main">
               <a:ext uri="{FF2B5EF4-FFF2-40B4-BE49-F238E27FC236}">
-                <a16:creationId xmlns:a16="http://schemas.microsoft.com/office/drawing/2014/main" id="{9D63D41D-F3AB-4D83-81C6-580FE77431A3}"/>
+                <a16:creationId xmlns:a16="http://schemas.microsoft.com/office/drawing/2014/main" id="{F26020EA-1B40-44AE-9ACA-645C6ABD4CBD}"/>
               </a:ext>
             </a:extLst>
           </p:cNvPr>
@@ -7522,7 +7522,7 @@
           <p:cNvPr id="5" name="s5-identity">
             <a:extLst xmlns:a="http://schemas.openxmlformats.org/drawingml/2006/main">
               <a:ext uri="{FF2B5EF4-FFF2-40B4-BE49-F238E27FC236}">
-                <a16:creationId xmlns:a16="http://schemas.microsoft.com/office/drawing/2014/main" id="{C8B89016-B8F8-4A95-BD02-38A99E0FB939}"/>
+                <a16:creationId xmlns:a16="http://schemas.microsoft.com/office/drawing/2014/main" id="{B37FE9DB-7122-4CF4-B13B-A8D9F6909E3C}"/>
               </a:ext>
             </a:extLst>
           </p:cNvPr>
@@ -7580,7 +7580,7 @@
           <p:cNvPr id="6" name="core-no-0">
             <a:extLst xmlns:a="http://schemas.openxmlformats.org/drawingml/2006/main">
               <a:ext uri="{FF2B5EF4-FFF2-40B4-BE49-F238E27FC236}">
-                <a16:creationId xmlns:a16="http://schemas.microsoft.com/office/drawing/2014/main" id="{EB4FA9AB-4FE9-4A05-8542-B7FBB16CD0FA}"/>
+                <a16:creationId xmlns:a16="http://schemas.microsoft.com/office/drawing/2014/main" id="{BC0ADB4C-F533-48FD-B1C3-8E61DE360B35}"/>
               </a:ext>
             </a:extLst>
           </p:cNvPr>
@@ -7638,7 +7638,7 @@
           <p:cNvPr id="7" name="core-label-0">
             <a:extLst xmlns:a="http://schemas.openxmlformats.org/drawingml/2006/main">
               <a:ext uri="{FF2B5EF4-FFF2-40B4-BE49-F238E27FC236}">
-                <a16:creationId xmlns:a16="http://schemas.microsoft.com/office/drawing/2014/main" id="{3C88987B-DBE7-4B34-99BF-4B4157724164}"/>
+                <a16:creationId xmlns:a16="http://schemas.microsoft.com/office/drawing/2014/main" id="{E137D105-B294-4460-AB04-98C85691AB50}"/>
               </a:ext>
             </a:extLst>
           </p:cNvPr>
@@ -7696,7 +7696,7 @@
           <p:cNvPr id="8" name="core-body-0">
             <a:extLst xmlns:a="http://schemas.openxmlformats.org/drawingml/2006/main">
               <a:ext uri="{FF2B5EF4-FFF2-40B4-BE49-F238E27FC236}">
-                <a16:creationId xmlns:a16="http://schemas.microsoft.com/office/drawing/2014/main" id="{B75E265D-F3BF-4880-8A7B-37D4FEF63621}"/>
+                <a16:creationId xmlns:a16="http://schemas.microsoft.com/office/drawing/2014/main" id="{FFEFDD90-8255-464F-85B6-B0CD6E63424E}"/>
               </a:ext>
             </a:extLst>
           </p:cNvPr>
@@ -7760,7 +7760,7 @@
           <p:cNvPr id="9" name="core-no-1">
             <a:extLst xmlns:a="http://schemas.openxmlformats.org/drawingml/2006/main">
               <a:ext uri="{FF2B5EF4-FFF2-40B4-BE49-F238E27FC236}">
-                <a16:creationId xmlns:a16="http://schemas.microsoft.com/office/drawing/2014/main" id="{998E276A-A956-497E-BC9E-465F2C28C57A}"/>
+                <a16:creationId xmlns:a16="http://schemas.microsoft.com/office/drawing/2014/main" id="{1F3602CE-2865-4118-B1D3-96AF63A94035}"/>
               </a:ext>
             </a:extLst>
           </p:cNvPr>
@@ -7818,7 +7818,7 @@
           <p:cNvPr id="10" name="core-body-1">
             <a:extLst xmlns:a="http://schemas.openxmlformats.org/drawingml/2006/main">
               <a:ext uri="{FF2B5EF4-FFF2-40B4-BE49-F238E27FC236}">
-                <a16:creationId xmlns:a16="http://schemas.microsoft.com/office/drawing/2014/main" id="{1626484E-C695-4090-842C-12BDA8CBAD95}"/>
+                <a16:creationId xmlns:a16="http://schemas.microsoft.com/office/drawing/2014/main" id="{E4BF0C3E-016E-4EBC-94D7-66348815A5F4}"/>
               </a:ext>
             </a:extLst>
           </p:cNvPr>
@@ -7882,7 +7882,7 @@
           <p:cNvPr id="11" name="s5-takeaway-rule">
             <a:extLst xmlns:a="http://schemas.openxmlformats.org/drawingml/2006/main">
               <a:ext uri="{FF2B5EF4-FFF2-40B4-BE49-F238E27FC236}">
-                <a16:creationId xmlns:a16="http://schemas.microsoft.com/office/drawing/2014/main" id="{C88C2539-3074-418D-B21D-FE1D766FC206}"/>
+                <a16:creationId xmlns:a16="http://schemas.microsoft.com/office/drawing/2014/main" id="{2CD7A377-FFAB-4A8C-9013-BC6C70A3D3AC}"/>
               </a:ext>
             </a:extLst>
           </p:cNvPr>
@@ -7915,7 +7915,7 @@
           <p:cNvPr id="12" name="s5-takeaway">
             <a:extLst xmlns:a="http://schemas.openxmlformats.org/drawingml/2006/main">
               <a:ext uri="{FF2B5EF4-FFF2-40B4-BE49-F238E27FC236}">
-                <a16:creationId xmlns:a16="http://schemas.microsoft.com/office/drawing/2014/main" id="{8751F8D2-A5AF-4FDA-81B8-A5E29CCE99C6}"/>
+                <a16:creationId xmlns:a16="http://schemas.microsoft.com/office/drawing/2014/main" id="{3745B7FB-2B46-4493-B947-4957271A4D3D}"/>
               </a:ext>
             </a:extLst>
           </p:cNvPr>
@@ -7971,7 +7971,7 @@
     </p:spTree>
     <p:extLst>
       <p:ext uri="{BB962C8B-B14F-4D97-AF65-F5344CB8AC3E}">
-        <p14:creationId xmlns:p14="http://schemas.microsoft.com/office/powerpoint/2010/main" val="914731533"/>
+        <p14:creationId xmlns:p14="http://schemas.microsoft.com/office/powerpoint/2010/main" val="627070014"/>
       </p:ext>
     </p:extLst>
   </p:cSld>
@@ -8002,7 +8002,7 @@
           <p:cNvPr id="1" name="s6-rule">
             <a:extLst xmlns:a="http://schemas.openxmlformats.org/drawingml/2006/main">
               <a:ext uri="{FF2B5EF4-FFF2-40B4-BE49-F238E27FC236}">
-                <a16:creationId xmlns:a16="http://schemas.microsoft.com/office/drawing/2014/main" id="{0F602AD6-D515-4C7D-A601-0EF7683FBFDF}"/>
+                <a16:creationId xmlns:a16="http://schemas.microsoft.com/office/drawing/2014/main" id="{9CF1B1DE-5B2A-45EA-AD8E-923A07479C87}"/>
               </a:ext>
             </a:extLst>
           </p:cNvPr>
@@ -8035,7 +8035,7 @@
           <p:cNvPr id="2" name="s6-eyebrow">
             <a:extLst xmlns:a="http://schemas.openxmlformats.org/drawingml/2006/main">
               <a:ext uri="{FF2B5EF4-FFF2-40B4-BE49-F238E27FC236}">
-                <a16:creationId xmlns:a16="http://schemas.microsoft.com/office/drawing/2014/main" id="{C451E5F4-EDE0-4DDD-AE4D-ACE2D476EEE4}"/>
+                <a16:creationId xmlns:a16="http://schemas.microsoft.com/office/drawing/2014/main" id="{8767205E-EA9E-4CD2-8D22-840E571B91C7}"/>
               </a:ext>
             </a:extLst>
           </p:cNvPr>
@@ -8093,7 +8093,7 @@
           <p:cNvPr id="3" name="s6-title">
             <a:extLst xmlns:a="http://schemas.openxmlformats.org/drawingml/2006/main">
               <a:ext uri="{FF2B5EF4-FFF2-40B4-BE49-F238E27FC236}">
-                <a16:creationId xmlns:a16="http://schemas.microsoft.com/office/drawing/2014/main" id="{D538D922-EF85-4C96-861A-A29F32685180}"/>
+                <a16:creationId xmlns:a16="http://schemas.microsoft.com/office/drawing/2014/main" id="{1D0AA0EB-C45E-41C2-9EFD-F4D8C309EAAD}"/>
               </a:ext>
             </a:extLst>
           </p:cNvPr>
@@ -8151,7 +8151,7 @@
           <p:cNvPr id="4" name="s6-footer">
             <a:extLst xmlns:a="http://schemas.openxmlformats.org/drawingml/2006/main">
               <a:ext uri="{FF2B5EF4-FFF2-40B4-BE49-F238E27FC236}">
-                <a16:creationId xmlns:a16="http://schemas.microsoft.com/office/drawing/2014/main" id="{0E0B0041-8D6A-4C1F-B21E-0D0E49392E00}"/>
+                <a16:creationId xmlns:a16="http://schemas.microsoft.com/office/drawing/2014/main" id="{BFA3C083-E458-463F-A759-D803AFACC017}"/>
               </a:ext>
             </a:extLst>
           </p:cNvPr>
@@ -8182,7 +8182,7 @@
           <p:cNvPr id="5" name="s6-identity">
             <a:extLst xmlns:a="http://schemas.openxmlformats.org/drawingml/2006/main">
               <a:ext uri="{FF2B5EF4-FFF2-40B4-BE49-F238E27FC236}">
-                <a16:creationId xmlns:a16="http://schemas.microsoft.com/office/drawing/2014/main" id="{E9E4A791-8B25-4CC9-B74B-41885AA0619D}"/>
+                <a16:creationId xmlns:a16="http://schemas.microsoft.com/office/drawing/2014/main" id="{957DB8D3-3657-4945-A492-82FF6817EF70}"/>
               </a:ext>
             </a:extLst>
           </p:cNvPr>
@@ -8240,7 +8240,7 @@
           <p:cNvPr id="6" name="core-no-0">
             <a:extLst xmlns:a="http://schemas.openxmlformats.org/drawingml/2006/main">
               <a:ext uri="{FF2B5EF4-FFF2-40B4-BE49-F238E27FC236}">
-                <a16:creationId xmlns:a16="http://schemas.microsoft.com/office/drawing/2014/main" id="{A0237ECC-8BA5-4F38-9853-6066BE439BD2}"/>
+                <a16:creationId xmlns:a16="http://schemas.microsoft.com/office/drawing/2014/main" id="{26FCB7D1-F447-44A7-B71B-483512B94EAD}"/>
               </a:ext>
             </a:extLst>
           </p:cNvPr>
@@ -8298,7 +8298,7 @@
           <p:cNvPr id="7" name="core-label-0">
             <a:extLst xmlns:a="http://schemas.openxmlformats.org/drawingml/2006/main">
               <a:ext uri="{FF2B5EF4-FFF2-40B4-BE49-F238E27FC236}">
-                <a16:creationId xmlns:a16="http://schemas.microsoft.com/office/drawing/2014/main" id="{EF36F3B5-A61D-4DDC-9B76-ED6B0F86A1AB}"/>
+                <a16:creationId xmlns:a16="http://schemas.microsoft.com/office/drawing/2014/main" id="{487660F8-4A39-4772-A5B6-6812B5559A85}"/>
               </a:ext>
             </a:extLst>
           </p:cNvPr>
@@ -8356,7 +8356,7 @@
           <p:cNvPr id="8" name="core-body-0">
             <a:extLst xmlns:a="http://schemas.openxmlformats.org/drawingml/2006/main">
               <a:ext uri="{FF2B5EF4-FFF2-40B4-BE49-F238E27FC236}">
-                <a16:creationId xmlns:a16="http://schemas.microsoft.com/office/drawing/2014/main" id="{911D4BD1-0152-4000-AE64-3F65B0DA2905}"/>
+                <a16:creationId xmlns:a16="http://schemas.microsoft.com/office/drawing/2014/main" id="{395CE71F-554B-4F0E-8ED1-7127C787F768}"/>
               </a:ext>
             </a:extLst>
           </p:cNvPr>
@@ -8420,7 +8420,7 @@
           <p:cNvPr id="9" name="core-no-1">
             <a:extLst xmlns:a="http://schemas.openxmlformats.org/drawingml/2006/main">
               <a:ext uri="{FF2B5EF4-FFF2-40B4-BE49-F238E27FC236}">
-                <a16:creationId xmlns:a16="http://schemas.microsoft.com/office/drawing/2014/main" id="{6DCA8A06-27D0-48F3-96DD-CB0E6B13BAA1}"/>
+                <a16:creationId xmlns:a16="http://schemas.microsoft.com/office/drawing/2014/main" id="{10D8E6D2-A16B-431A-82FA-828CB88CCC08}"/>
               </a:ext>
             </a:extLst>
           </p:cNvPr>
@@ -8478,7 +8478,7 @@
           <p:cNvPr id="10" name="core-body-1">
             <a:extLst xmlns:a="http://schemas.openxmlformats.org/drawingml/2006/main">
               <a:ext uri="{FF2B5EF4-FFF2-40B4-BE49-F238E27FC236}">
-                <a16:creationId xmlns:a16="http://schemas.microsoft.com/office/drawing/2014/main" id="{DEDB98A6-45B2-4818-940A-49E47A0F02CC}"/>
+                <a16:creationId xmlns:a16="http://schemas.microsoft.com/office/drawing/2014/main" id="{88EF9DB4-2262-4098-9AE7-0A5371A96995}"/>
               </a:ext>
             </a:extLst>
           </p:cNvPr>
@@ -8542,7 +8542,7 @@
           <p:cNvPr id="11" name="s6-takeaway-rule">
             <a:extLst xmlns:a="http://schemas.openxmlformats.org/drawingml/2006/main">
               <a:ext uri="{FF2B5EF4-FFF2-40B4-BE49-F238E27FC236}">
-                <a16:creationId xmlns:a16="http://schemas.microsoft.com/office/drawing/2014/main" id="{36B1D902-48C1-4A09-91D1-887F90F17B76}"/>
+                <a16:creationId xmlns:a16="http://schemas.microsoft.com/office/drawing/2014/main" id="{9839DB78-FE51-405E-BC51-D13387E8F3F9}"/>
               </a:ext>
             </a:extLst>
           </p:cNvPr>
@@ -8575,7 +8575,7 @@
           <p:cNvPr id="12" name="s6-takeaway">
             <a:extLst xmlns:a="http://schemas.openxmlformats.org/drawingml/2006/main">
               <a:ext uri="{FF2B5EF4-FFF2-40B4-BE49-F238E27FC236}">
-                <a16:creationId xmlns:a16="http://schemas.microsoft.com/office/drawing/2014/main" id="{40212D52-0336-4605-96F4-E53625029E9D}"/>
+                <a16:creationId xmlns:a16="http://schemas.microsoft.com/office/drawing/2014/main" id="{76549E94-702A-4AB5-AB04-3EB5EC3E7D4E}"/>
               </a:ext>
             </a:extLst>
           </p:cNvPr>
@@ -8631,7 +8631,7 @@
     </p:spTree>
     <p:extLst>
       <p:ext uri="{BB962C8B-B14F-4D97-AF65-F5344CB8AC3E}">
-        <p14:creationId xmlns:p14="http://schemas.microsoft.com/office/powerpoint/2010/main" val="1900964565"/>
+        <p14:creationId xmlns:p14="http://schemas.microsoft.com/office/powerpoint/2010/main" val="1739442698"/>
       </p:ext>
     </p:extLst>
   </p:cSld>
@@ -8662,7 +8662,7 @@
           <p:cNvPr id="1" name="s7-rule">
             <a:extLst xmlns:a="http://schemas.openxmlformats.org/drawingml/2006/main">
               <a:ext uri="{FF2B5EF4-FFF2-40B4-BE49-F238E27FC236}">
-                <a16:creationId xmlns:a16="http://schemas.microsoft.com/office/drawing/2014/main" id="{D316B0A7-3A3B-462B-840B-888E1B246EE7}"/>
+                <a16:creationId xmlns:a16="http://schemas.microsoft.com/office/drawing/2014/main" id="{4C57E0A8-93C8-4479-BBB3-CE201D34D1BC}"/>
               </a:ext>
             </a:extLst>
           </p:cNvPr>
@@ -8695,7 +8695,7 @@
           <p:cNvPr id="2" name="s7-eyebrow">
             <a:extLst xmlns:a="http://schemas.openxmlformats.org/drawingml/2006/main">
               <a:ext uri="{FF2B5EF4-FFF2-40B4-BE49-F238E27FC236}">
-                <a16:creationId xmlns:a16="http://schemas.microsoft.com/office/drawing/2014/main" id="{838DA2E8-4B60-40A4-A0E0-C8298B3BADD1}"/>
+                <a16:creationId xmlns:a16="http://schemas.microsoft.com/office/drawing/2014/main" id="{99950D47-997A-4D31-BDAA-5468653CA028}"/>
               </a:ext>
             </a:extLst>
           </p:cNvPr>
@@ -8753,7 +8753,7 @@
           <p:cNvPr id="3" name="s7-title">
             <a:extLst xmlns:a="http://schemas.openxmlformats.org/drawingml/2006/main">
               <a:ext uri="{FF2B5EF4-FFF2-40B4-BE49-F238E27FC236}">
-                <a16:creationId xmlns:a16="http://schemas.microsoft.com/office/drawing/2014/main" id="{044034BB-82BF-408C-A072-DC1D294ED135}"/>
+                <a16:creationId xmlns:a16="http://schemas.microsoft.com/office/drawing/2014/main" id="{164F3F65-E56F-49CD-A594-56FF1789065D}"/>
               </a:ext>
             </a:extLst>
           </p:cNvPr>
@@ -8811,7 +8811,7 @@
           <p:cNvPr id="4" name="s7-footer">
             <a:extLst xmlns:a="http://schemas.openxmlformats.org/drawingml/2006/main">
               <a:ext uri="{FF2B5EF4-FFF2-40B4-BE49-F238E27FC236}">
-                <a16:creationId xmlns:a16="http://schemas.microsoft.com/office/drawing/2014/main" id="{48A75579-F7A9-45C0-859C-FB1D44F9D501}"/>
+                <a16:creationId xmlns:a16="http://schemas.microsoft.com/office/drawing/2014/main" id="{62635134-7FE0-43A5-A53D-C5AF78F66711}"/>
               </a:ext>
             </a:extLst>
           </p:cNvPr>
@@ -8842,7 +8842,7 @@
           <p:cNvPr id="5" name="s7-identity">
             <a:extLst xmlns:a="http://schemas.openxmlformats.org/drawingml/2006/main">
               <a:ext uri="{FF2B5EF4-FFF2-40B4-BE49-F238E27FC236}">
-                <a16:creationId xmlns:a16="http://schemas.microsoft.com/office/drawing/2014/main" id="{6680F156-733E-4BDB-AEC2-DA8594845350}"/>
+                <a16:creationId xmlns:a16="http://schemas.microsoft.com/office/drawing/2014/main" id="{96DA1DCF-D360-4BB4-AE80-798906ED9152}"/>
               </a:ext>
             </a:extLst>
           </p:cNvPr>
@@ -8900,7 +8900,7 @@
           <p:cNvPr id="6" name="core-no-0">
             <a:extLst xmlns:a="http://schemas.openxmlformats.org/drawingml/2006/main">
               <a:ext uri="{FF2B5EF4-FFF2-40B4-BE49-F238E27FC236}">
-                <a16:creationId xmlns:a16="http://schemas.microsoft.com/office/drawing/2014/main" id="{AC7DD5D8-C751-4361-AF8A-993F99560D11}"/>
+                <a16:creationId xmlns:a16="http://schemas.microsoft.com/office/drawing/2014/main" id="{96DC3251-D9A2-4BDD-B17B-A5383E31A64A}"/>
               </a:ext>
             </a:extLst>
           </p:cNvPr>
@@ -8958,7 +8958,7 @@
           <p:cNvPr id="7" name="core-label-0">
             <a:extLst xmlns:a="http://schemas.openxmlformats.org/drawingml/2006/main">
               <a:ext uri="{FF2B5EF4-FFF2-40B4-BE49-F238E27FC236}">
-                <a16:creationId xmlns:a16="http://schemas.microsoft.com/office/drawing/2014/main" id="{2BAC4D84-A5ED-4A5B-8BBF-BA8948984215}"/>
+                <a16:creationId xmlns:a16="http://schemas.microsoft.com/office/drawing/2014/main" id="{FA59E678-D445-434A-B00F-0045ADB15E32}"/>
               </a:ext>
             </a:extLst>
           </p:cNvPr>
@@ -9016,7 +9016,7 @@
           <p:cNvPr id="8" name="core-body-0">
             <a:extLst xmlns:a="http://schemas.openxmlformats.org/drawingml/2006/main">
               <a:ext uri="{FF2B5EF4-FFF2-40B4-BE49-F238E27FC236}">
-                <a16:creationId xmlns:a16="http://schemas.microsoft.com/office/drawing/2014/main" id="{20BDF4F7-5C8F-4EE8-A573-AE1D1674EC98}"/>
+                <a16:creationId xmlns:a16="http://schemas.microsoft.com/office/drawing/2014/main" id="{B64ACB5D-CDC2-4191-8A11-4E7FD14984EC}"/>
               </a:ext>
             </a:extLst>
           </p:cNvPr>
@@ -9080,7 +9080,7 @@
           <p:cNvPr id="9" name="core-no-1">
             <a:extLst xmlns:a="http://schemas.openxmlformats.org/drawingml/2006/main">
               <a:ext uri="{FF2B5EF4-FFF2-40B4-BE49-F238E27FC236}">
-                <a16:creationId xmlns:a16="http://schemas.microsoft.com/office/drawing/2014/main" id="{2E579BC1-A923-4FED-AC91-EAB2DC259687}"/>
+                <a16:creationId xmlns:a16="http://schemas.microsoft.com/office/drawing/2014/main" id="{B535BB83-425F-4511-939F-982FDD95DEF7}"/>
               </a:ext>
             </a:extLst>
           </p:cNvPr>
@@ -9138,7 +9138,7 @@
           <p:cNvPr id="10" name="core-body-1">
             <a:extLst xmlns:a="http://schemas.openxmlformats.org/drawingml/2006/main">
               <a:ext uri="{FF2B5EF4-FFF2-40B4-BE49-F238E27FC236}">
-                <a16:creationId xmlns:a16="http://schemas.microsoft.com/office/drawing/2014/main" id="{2513D5FB-7E8D-4DDC-AB84-DC44AA8376B5}"/>
+                <a16:creationId xmlns:a16="http://schemas.microsoft.com/office/drawing/2014/main" id="{2718C761-B01D-4FE6-ACC8-CCF573BF9629}"/>
               </a:ext>
             </a:extLst>
           </p:cNvPr>
@@ -9202,7 +9202,7 @@
           <p:cNvPr id="11" name="s7-takeaway-rule">
             <a:extLst xmlns:a="http://schemas.openxmlformats.org/drawingml/2006/main">
               <a:ext uri="{FF2B5EF4-FFF2-40B4-BE49-F238E27FC236}">
-                <a16:creationId xmlns:a16="http://schemas.microsoft.com/office/drawing/2014/main" id="{90135161-CF97-4AE8-AFBC-B726E90D86F8}"/>
+                <a16:creationId xmlns:a16="http://schemas.microsoft.com/office/drawing/2014/main" id="{D2A8DD6B-D095-470B-ACC0-74FAC996191F}"/>
               </a:ext>
             </a:extLst>
           </p:cNvPr>
@@ -9235,7 +9235,7 @@
           <p:cNvPr id="12" name="s7-takeaway">
             <a:extLst xmlns:a="http://schemas.openxmlformats.org/drawingml/2006/main">
               <a:ext uri="{FF2B5EF4-FFF2-40B4-BE49-F238E27FC236}">
-                <a16:creationId xmlns:a16="http://schemas.microsoft.com/office/drawing/2014/main" id="{B5299724-8570-445D-A9EB-6A24853B659D}"/>
+                <a16:creationId xmlns:a16="http://schemas.microsoft.com/office/drawing/2014/main" id="{90426AF1-1B0B-4733-8DA9-602E3AFD1B1E}"/>
               </a:ext>
             </a:extLst>
           </p:cNvPr>
@@ -9291,7 +9291,7 @@
     </p:spTree>
     <p:extLst>
       <p:ext uri="{BB962C8B-B14F-4D97-AF65-F5344CB8AC3E}">
-        <p14:creationId xmlns:p14="http://schemas.microsoft.com/office/powerpoint/2010/main" val="781455126"/>
+        <p14:creationId xmlns:p14="http://schemas.microsoft.com/office/powerpoint/2010/main" val="2039880332"/>
       </p:ext>
     </p:extLst>
   </p:cSld>
@@ -9322,7 +9322,7 @@
           <p:cNvPr id="1" name="s8-rule">
             <a:extLst xmlns:a="http://schemas.openxmlformats.org/drawingml/2006/main">
               <a:ext uri="{FF2B5EF4-FFF2-40B4-BE49-F238E27FC236}">
-                <a16:creationId xmlns:a16="http://schemas.microsoft.com/office/drawing/2014/main" id="{630F0E54-F287-4EE6-9D31-BEBD44C3EC7B}"/>
+                <a16:creationId xmlns:a16="http://schemas.microsoft.com/office/drawing/2014/main" id="{758F4D8C-E2B7-4F4F-8E83-652BC6B67D0B}"/>
               </a:ext>
             </a:extLst>
           </p:cNvPr>
@@ -9355,7 +9355,7 @@
           <p:cNvPr id="2" name="s8-eyebrow">
             <a:extLst xmlns:a="http://schemas.openxmlformats.org/drawingml/2006/main">
               <a:ext uri="{FF2B5EF4-FFF2-40B4-BE49-F238E27FC236}">
-                <a16:creationId xmlns:a16="http://schemas.microsoft.com/office/drawing/2014/main" id="{8B050091-9743-4889-B916-03DA1F23E93C}"/>
+                <a16:creationId xmlns:a16="http://schemas.microsoft.com/office/drawing/2014/main" id="{84CED1B9-916C-42A7-831C-C610DE3E2BB3}"/>
               </a:ext>
             </a:extLst>
           </p:cNvPr>
@@ -9413,7 +9413,7 @@
           <p:cNvPr id="3" name="s8-title">
             <a:extLst xmlns:a="http://schemas.openxmlformats.org/drawingml/2006/main">
               <a:ext uri="{FF2B5EF4-FFF2-40B4-BE49-F238E27FC236}">
-                <a16:creationId xmlns:a16="http://schemas.microsoft.com/office/drawing/2014/main" id="{80328FA4-75D3-4460-ACD2-19918565C367}"/>
+                <a16:creationId xmlns:a16="http://schemas.microsoft.com/office/drawing/2014/main" id="{14320204-5224-4050-B9CB-855DB8A03D91}"/>
               </a:ext>
             </a:extLst>
           </p:cNvPr>
@@ -9471,7 +9471,7 @@
           <p:cNvPr id="4" name="s8-footer">
             <a:extLst xmlns:a="http://schemas.openxmlformats.org/drawingml/2006/main">
               <a:ext uri="{FF2B5EF4-FFF2-40B4-BE49-F238E27FC236}">
-                <a16:creationId xmlns:a16="http://schemas.microsoft.com/office/drawing/2014/main" id="{57DB8A07-47A8-4DA5-947E-DAB4E8706AF9}"/>
+                <a16:creationId xmlns:a16="http://schemas.microsoft.com/office/drawing/2014/main" id="{B5E09FEC-3D23-48DB-AAF0-686A69E894DF}"/>
               </a:ext>
             </a:extLst>
           </p:cNvPr>
@@ -9502,7 +9502,7 @@
           <p:cNvPr id="5" name="s8-identity">
             <a:extLst xmlns:a="http://schemas.openxmlformats.org/drawingml/2006/main">
               <a:ext uri="{FF2B5EF4-FFF2-40B4-BE49-F238E27FC236}">
-                <a16:creationId xmlns:a16="http://schemas.microsoft.com/office/drawing/2014/main" id="{9D9E9686-9774-4145-87C4-CF424C765820}"/>
+                <a16:creationId xmlns:a16="http://schemas.microsoft.com/office/drawing/2014/main" id="{68A56522-7E14-4DF3-9DFC-323149F4AFA6}"/>
               </a:ext>
             </a:extLst>
           </p:cNvPr>
@@ -9560,7 +9560,7 @@
           <p:cNvPr id="6" name="core-no-0">
             <a:extLst xmlns:a="http://schemas.openxmlformats.org/drawingml/2006/main">
               <a:ext uri="{FF2B5EF4-FFF2-40B4-BE49-F238E27FC236}">
-                <a16:creationId xmlns:a16="http://schemas.microsoft.com/office/drawing/2014/main" id="{69692317-D098-4B2D-A071-3BC9B9E01527}"/>
+                <a16:creationId xmlns:a16="http://schemas.microsoft.com/office/drawing/2014/main" id="{95CD51B2-D341-4CB4-81A2-25918F7993AB}"/>
               </a:ext>
             </a:extLst>
           </p:cNvPr>
@@ -9618,7 +9618,7 @@
           <p:cNvPr id="7" name="core-label-0">
             <a:extLst xmlns:a="http://schemas.openxmlformats.org/drawingml/2006/main">
               <a:ext uri="{FF2B5EF4-FFF2-40B4-BE49-F238E27FC236}">
-                <a16:creationId xmlns:a16="http://schemas.microsoft.com/office/drawing/2014/main" id="{FF67AF4D-6A4C-4F1C-BA04-D886FF307CB6}"/>
+                <a16:creationId xmlns:a16="http://schemas.microsoft.com/office/drawing/2014/main" id="{6084F8F1-A8B6-4341-9D4F-EED7F9DA4560}"/>
               </a:ext>
             </a:extLst>
           </p:cNvPr>
@@ -9676,7 +9676,7 @@
           <p:cNvPr id="8" name="core-body-0">
             <a:extLst xmlns:a="http://schemas.openxmlformats.org/drawingml/2006/main">
               <a:ext uri="{FF2B5EF4-FFF2-40B4-BE49-F238E27FC236}">
-                <a16:creationId xmlns:a16="http://schemas.microsoft.com/office/drawing/2014/main" id="{CE19A9F1-C141-4B24-B5CB-533E0DC3670B}"/>
+                <a16:creationId xmlns:a16="http://schemas.microsoft.com/office/drawing/2014/main" id="{B04D4601-1E5F-40A9-BF54-CEB803CACF66}"/>
               </a:ext>
             </a:extLst>
           </p:cNvPr>
@@ -9740,7 +9740,7 @@
           <p:cNvPr id="9" name="core-no-1">
             <a:extLst xmlns:a="http://schemas.openxmlformats.org/drawingml/2006/main">
               <a:ext uri="{FF2B5EF4-FFF2-40B4-BE49-F238E27FC236}">
-                <a16:creationId xmlns:a16="http://schemas.microsoft.com/office/drawing/2014/main" id="{148373F4-602E-4219-B789-0B3F25F19564}"/>
+                <a16:creationId xmlns:a16="http://schemas.microsoft.com/office/drawing/2014/main" id="{ECCC4F4B-F4A6-4FCC-A16F-A7E7C71F90ED}"/>
               </a:ext>
             </a:extLst>
           </p:cNvPr>
@@ -9798,7 +9798,7 @@
           <p:cNvPr id="10" name="core-body-1">
             <a:extLst xmlns:a="http://schemas.openxmlformats.org/drawingml/2006/main">
               <a:ext uri="{FF2B5EF4-FFF2-40B4-BE49-F238E27FC236}">
-                <a16:creationId xmlns:a16="http://schemas.microsoft.com/office/drawing/2014/main" id="{98A6AFA3-3B75-443B-9DC3-0311445769FC}"/>
+                <a16:creationId xmlns:a16="http://schemas.microsoft.com/office/drawing/2014/main" id="{F8B1489E-125C-4F2D-B7C0-D474EE35BAA6}"/>
               </a:ext>
             </a:extLst>
           </p:cNvPr>
@@ -9862,7 +9862,7 @@
           <p:cNvPr id="11" name="s8-takeaway-rule">
             <a:extLst xmlns:a="http://schemas.openxmlformats.org/drawingml/2006/main">
               <a:ext uri="{FF2B5EF4-FFF2-40B4-BE49-F238E27FC236}">
-                <a16:creationId xmlns:a16="http://schemas.microsoft.com/office/drawing/2014/main" id="{4E5297A1-F0AB-4848-8618-773364E4877C}"/>
+                <a16:creationId xmlns:a16="http://schemas.microsoft.com/office/drawing/2014/main" id="{9D58A82B-0F7F-45E5-B492-2C69792B1D1D}"/>
               </a:ext>
             </a:extLst>
           </p:cNvPr>
@@ -9895,7 +9895,7 @@
           <p:cNvPr id="12" name="s8-takeaway">
             <a:extLst xmlns:a="http://schemas.openxmlformats.org/drawingml/2006/main">
               <a:ext uri="{FF2B5EF4-FFF2-40B4-BE49-F238E27FC236}">
-                <a16:creationId xmlns:a16="http://schemas.microsoft.com/office/drawing/2014/main" id="{F12A8253-FB0C-4D7E-AB9B-D11A09FEB86D}"/>
+                <a16:creationId xmlns:a16="http://schemas.microsoft.com/office/drawing/2014/main" id="{3A5CF60E-9D7E-4CCE-A3A7-07A4CCCE1544}"/>
               </a:ext>
             </a:extLst>
           </p:cNvPr>
@@ -9951,7 +9951,7 @@
     </p:spTree>
     <p:extLst>
       <p:ext uri="{BB962C8B-B14F-4D97-AF65-F5344CB8AC3E}">
-        <p14:creationId xmlns:p14="http://schemas.microsoft.com/office/powerpoint/2010/main" val="200065566"/>
+        <p14:creationId xmlns:p14="http://schemas.microsoft.com/office/powerpoint/2010/main" val="252121385"/>
       </p:ext>
     </p:extLst>
   </p:cSld>
@@ -9982,7 +9982,7 @@
           <p:cNvPr id="1" name="s9-rule">
             <a:extLst xmlns:a="http://schemas.openxmlformats.org/drawingml/2006/main">
               <a:ext uri="{FF2B5EF4-FFF2-40B4-BE49-F238E27FC236}">
-                <a16:creationId xmlns:a16="http://schemas.microsoft.com/office/drawing/2014/main" id="{C056FD4D-38B1-4F0A-BF38-94F2FE796019}"/>
+                <a16:creationId xmlns:a16="http://schemas.microsoft.com/office/drawing/2014/main" id="{E4261CC7-F28B-40D9-903B-C829D49EC1E2}"/>
               </a:ext>
             </a:extLst>
           </p:cNvPr>
@@ -10015,7 +10015,7 @@
           <p:cNvPr id="2" name="s9-eyebrow">
             <a:extLst xmlns:a="http://schemas.openxmlformats.org/drawingml/2006/main">
               <a:ext uri="{FF2B5EF4-FFF2-40B4-BE49-F238E27FC236}">
-                <a16:creationId xmlns:a16="http://schemas.microsoft.com/office/drawing/2014/main" id="{A75DBEC2-155B-4E0E-A6FD-6325C067BA56}"/>
+                <a16:creationId xmlns:a16="http://schemas.microsoft.com/office/drawing/2014/main" id="{56BEC542-8DC3-41D3-AEFF-FD9E1F65EFF5}"/>
               </a:ext>
             </a:extLst>
           </p:cNvPr>
@@ -10073,7 +10073,7 @@
           <p:cNvPr id="3" name="s9-title">
             <a:extLst xmlns:a="http://schemas.openxmlformats.org/drawingml/2006/main">
               <a:ext uri="{FF2B5EF4-FFF2-40B4-BE49-F238E27FC236}">
-                <a16:creationId xmlns:a16="http://schemas.microsoft.com/office/drawing/2014/main" id="{22A99B5F-4B8F-437C-87A6-AD4CD280C240}"/>
+                <a16:creationId xmlns:a16="http://schemas.microsoft.com/office/drawing/2014/main" id="{1C22F807-4580-46E4-A020-52470B8B3DE0}"/>
               </a:ext>
             </a:extLst>
           </p:cNvPr>
@@ -10131,7 +10131,7 @@
           <p:cNvPr id="4" name="s9-footer">
             <a:extLst xmlns:a="http://schemas.openxmlformats.org/drawingml/2006/main">
               <a:ext uri="{FF2B5EF4-FFF2-40B4-BE49-F238E27FC236}">
-                <a16:creationId xmlns:a16="http://schemas.microsoft.com/office/drawing/2014/main" id="{0D87FA56-84D8-48C4-B0B2-D2842708277D}"/>
+                <a16:creationId xmlns:a16="http://schemas.microsoft.com/office/drawing/2014/main" id="{E1276166-7B22-43AC-8EB6-E1FD8A8A71E8}"/>
               </a:ext>
             </a:extLst>
           </p:cNvPr>
@@ -10162,7 +10162,7 @@
           <p:cNvPr id="5" name="s9-identity">
             <a:extLst xmlns:a="http://schemas.openxmlformats.org/drawingml/2006/main">
               <a:ext uri="{FF2B5EF4-FFF2-40B4-BE49-F238E27FC236}">
-                <a16:creationId xmlns:a16="http://schemas.microsoft.com/office/drawing/2014/main" id="{BF1A0005-250D-4D66-A513-CF1AB261461B}"/>
+                <a16:creationId xmlns:a16="http://schemas.microsoft.com/office/drawing/2014/main" id="{9D4C8AA5-7590-494D-90F5-C3BDBA5F7EF8}"/>
               </a:ext>
             </a:extLst>
           </p:cNvPr>
@@ -10220,7 +10220,7 @@
           <p:cNvPr id="6" name="case-title">
             <a:extLst xmlns:a="http://schemas.openxmlformats.org/drawingml/2006/main">
               <a:ext uri="{FF2B5EF4-FFF2-40B4-BE49-F238E27FC236}">
-                <a16:creationId xmlns:a16="http://schemas.microsoft.com/office/drawing/2014/main" id="{E9324422-888A-4322-838C-7B877D876BE9}"/>
+                <a16:creationId xmlns:a16="http://schemas.microsoft.com/office/drawing/2014/main" id="{B587288B-5B9B-4EAE-91A7-4C4944AD8214}"/>
               </a:ext>
             </a:extLst>
           </p:cNvPr>
@@ -10284,7 +10284,7 @@
           <p:cNvPr id="7" name="case-row-0">
             <a:extLst xmlns:a="http://schemas.openxmlformats.org/drawingml/2006/main">
               <a:ext uri="{FF2B5EF4-FFF2-40B4-BE49-F238E27FC236}">
-                <a16:creationId xmlns:a16="http://schemas.microsoft.com/office/drawing/2014/main" id="{AAD0E3CE-984F-40C5-819B-507D0E404D87}"/>
+                <a16:creationId xmlns:a16="http://schemas.microsoft.com/office/drawing/2014/main" id="{1CC557B4-78C9-4F66-98B7-E4F5648BC36B}"/>
               </a:ext>
             </a:extLst>
           </p:cNvPr>
@@ -10348,7 +10348,7 @@
           <p:cNvPr id="8" name="case-row-1">
             <a:extLst xmlns:a="http://schemas.openxmlformats.org/drawingml/2006/main">
               <a:ext uri="{FF2B5EF4-FFF2-40B4-BE49-F238E27FC236}">
-                <a16:creationId xmlns:a16="http://schemas.microsoft.com/office/drawing/2014/main" id="{83EFF8AF-9E01-49D2-BF8F-866FD93F18A2}"/>
+                <a16:creationId xmlns:a16="http://schemas.microsoft.com/office/drawing/2014/main" id="{19784D97-9036-4890-81BA-F81D2C0D81F7}"/>
               </a:ext>
             </a:extLst>
           </p:cNvPr>
@@ -10412,7 +10412,7 @@
           <p:cNvPr id="9" name="case-row-2">
             <a:extLst xmlns:a="http://schemas.openxmlformats.org/drawingml/2006/main">
               <a:ext uri="{FF2B5EF4-FFF2-40B4-BE49-F238E27FC236}">
-                <a16:creationId xmlns:a16="http://schemas.microsoft.com/office/drawing/2014/main" id="{0AC24E08-D18A-4497-A36C-25EB145F573D}"/>
+                <a16:creationId xmlns:a16="http://schemas.microsoft.com/office/drawing/2014/main" id="{118F0E3C-993C-440A-8395-83C371F04B01}"/>
               </a:ext>
             </a:extLst>
           </p:cNvPr>
@@ -10476,7 +10476,7 @@
           <p:cNvPr id="10" name="case-row-3">
             <a:extLst xmlns:a="http://schemas.openxmlformats.org/drawingml/2006/main">
               <a:ext uri="{FF2B5EF4-FFF2-40B4-BE49-F238E27FC236}">
-                <a16:creationId xmlns:a16="http://schemas.microsoft.com/office/drawing/2014/main" id="{2393ECA4-2DE6-4922-A02A-479B3D933F0E}"/>
+                <a16:creationId xmlns:a16="http://schemas.microsoft.com/office/drawing/2014/main" id="{E72415B1-1ED7-45CB-818C-A5D0E21C92B3}"/>
               </a:ext>
             </a:extLst>
           </p:cNvPr>
@@ -10540,7 +10540,7 @@
           <p:cNvPr id="11" name="s9-takeaway-rule">
             <a:extLst xmlns:a="http://schemas.openxmlformats.org/drawingml/2006/main">
               <a:ext uri="{FF2B5EF4-FFF2-40B4-BE49-F238E27FC236}">
-                <a16:creationId xmlns:a16="http://schemas.microsoft.com/office/drawing/2014/main" id="{30233BF5-81D8-4EF3-89A7-4BF75F6153CC}"/>
+                <a16:creationId xmlns:a16="http://schemas.microsoft.com/office/drawing/2014/main" id="{4E078353-0269-48B7-AC46-CC4E8B46C1B5}"/>
               </a:ext>
             </a:extLst>
           </p:cNvPr>
@@ -10573,7 +10573,7 @@
           <p:cNvPr id="12" name="s9-takeaway">
             <a:extLst xmlns:a="http://schemas.openxmlformats.org/drawingml/2006/main">
               <a:ext uri="{FF2B5EF4-FFF2-40B4-BE49-F238E27FC236}">
-                <a16:creationId xmlns:a16="http://schemas.microsoft.com/office/drawing/2014/main" id="{E774C3C8-792E-47C6-9BF7-E29A979E6BF7}"/>
+                <a16:creationId xmlns:a16="http://schemas.microsoft.com/office/drawing/2014/main" id="{32C9FFCA-4D9D-4A62-A50D-731D71ADD6E4}"/>
               </a:ext>
             </a:extLst>
           </p:cNvPr>
@@ -10629,7 +10629,7 @@
     </p:spTree>
     <p:extLst>
       <p:ext uri="{BB962C8B-B14F-4D97-AF65-F5344CB8AC3E}">
-        <p14:creationId xmlns:p14="http://schemas.microsoft.com/office/powerpoint/2010/main" val="485745536"/>
+        <p14:creationId xmlns:p14="http://schemas.microsoft.com/office/powerpoint/2010/main" val="951557188"/>
       </p:ext>
     </p:extLst>
   </p:cSld>

--- a/docs/public/course-assets/course-pptx/in-003.pptx
+++ b/docs/public/course-assets/course-pptx/in-003.pptx
@@ -2,25 +2,25 @@
 <file path=ppt/presentation.xml><?xml version="1.0" encoding="utf-8"?>
 <p:presentation xmlns:p="http://schemas.openxmlformats.org/presentationml/2006/main">
   <p:sldMasterIdLst>
-    <p:sldMasterId xmlns:r="http://schemas.openxmlformats.org/officeDocument/2006/relationships" id="2147483648" r:id="R0686a2f4e60d4410"/>
+    <p:sldMasterId xmlns:r="http://schemas.openxmlformats.org/officeDocument/2006/relationships" id="2147483648" r:id="Rb99e6409d2e8474f"/>
   </p:sldMasterIdLst>
   <p:notesMasterIdLst>
-    <p:notesMasterId xmlns:r="http://schemas.openxmlformats.org/officeDocument/2006/relationships" r:id="R83863e0e9b3d459d"/>
+    <p:notesMasterId xmlns:r="http://schemas.openxmlformats.org/officeDocument/2006/relationships" r:id="Rc94a7edf718643c6"/>
   </p:notesMasterIdLst>
   <p:sldIdLst>
-    <p:sldId xmlns:r="http://schemas.openxmlformats.org/officeDocument/2006/relationships" id="256" r:id="R68cff85a298141c2"/>
-    <p:sldId xmlns:r="http://schemas.openxmlformats.org/officeDocument/2006/relationships" id="257" r:id="R6702e5cf34e24fcf"/>
-    <p:sldId xmlns:r="http://schemas.openxmlformats.org/officeDocument/2006/relationships" id="258" r:id="R4505cf194f8842c0"/>
-    <p:sldId xmlns:r="http://schemas.openxmlformats.org/officeDocument/2006/relationships" id="259" r:id="Rde6ca80fb126415d"/>
-    <p:sldId xmlns:r="http://schemas.openxmlformats.org/officeDocument/2006/relationships" id="260" r:id="R667425a1a36d4cc8"/>
-    <p:sldId xmlns:r="http://schemas.openxmlformats.org/officeDocument/2006/relationships" id="261" r:id="R99e04fb3367548be"/>
-    <p:sldId xmlns:r="http://schemas.openxmlformats.org/officeDocument/2006/relationships" id="262" r:id="R7f2da41975eb4ab9"/>
-    <p:sldId xmlns:r="http://schemas.openxmlformats.org/officeDocument/2006/relationships" id="263" r:id="Rbe149aece7924af5"/>
-    <p:sldId xmlns:r="http://schemas.openxmlformats.org/officeDocument/2006/relationships" id="264" r:id="Ra1a823fe492e4bed"/>
-    <p:sldId xmlns:r="http://schemas.openxmlformats.org/officeDocument/2006/relationships" id="265" r:id="R1512e1a406704a88"/>
-    <p:sldId xmlns:r="http://schemas.openxmlformats.org/officeDocument/2006/relationships" id="266" r:id="R3d02018e76e74b8f"/>
-    <p:sldId xmlns:r="http://schemas.openxmlformats.org/officeDocument/2006/relationships" id="267" r:id="R2bccb9933c79479e"/>
-    <p:sldId xmlns:r="http://schemas.openxmlformats.org/officeDocument/2006/relationships" id="268" r:id="Rfbb99c0706354401"/>
+    <p:sldId xmlns:r="http://schemas.openxmlformats.org/officeDocument/2006/relationships" id="256" r:id="R18517cd6c044422f"/>
+    <p:sldId xmlns:r="http://schemas.openxmlformats.org/officeDocument/2006/relationships" id="257" r:id="R22854ca00d5247c5"/>
+    <p:sldId xmlns:r="http://schemas.openxmlformats.org/officeDocument/2006/relationships" id="258" r:id="R55a689874d054ecb"/>
+    <p:sldId xmlns:r="http://schemas.openxmlformats.org/officeDocument/2006/relationships" id="259" r:id="R511cd37df6df48bc"/>
+    <p:sldId xmlns:r="http://schemas.openxmlformats.org/officeDocument/2006/relationships" id="260" r:id="Rd62ea25ae7f04b87"/>
+    <p:sldId xmlns:r="http://schemas.openxmlformats.org/officeDocument/2006/relationships" id="261" r:id="R76cdbac9b47d4118"/>
+    <p:sldId xmlns:r="http://schemas.openxmlformats.org/officeDocument/2006/relationships" id="262" r:id="R0c0f1dd4eaf54301"/>
+    <p:sldId xmlns:r="http://schemas.openxmlformats.org/officeDocument/2006/relationships" id="263" r:id="R7d2c35565d484fe1"/>
+    <p:sldId xmlns:r="http://schemas.openxmlformats.org/officeDocument/2006/relationships" id="264" r:id="R2aa7f54b0a1140ce"/>
+    <p:sldId xmlns:r="http://schemas.openxmlformats.org/officeDocument/2006/relationships" id="265" r:id="Re2abcc49c4344ba8"/>
+    <p:sldId xmlns:r="http://schemas.openxmlformats.org/officeDocument/2006/relationships" id="266" r:id="Ra79b37cee0a24ca6"/>
+    <p:sldId xmlns:r="http://schemas.openxmlformats.org/officeDocument/2006/relationships" id="267" r:id="Rebc7718841a447b1"/>
+    <p:sldId xmlns:r="http://schemas.openxmlformats.org/officeDocument/2006/relationships" id="268" r:id="R628ddc879d414cb9"/>
   </p:sldIdLst>
   <p:sldSz cx="12192000" cy="6858000"/>
   <p:notesSz cx="6858000" cy="9144000"/>
@@ -1405,7 +1405,7 @@
   </p:cSld>
   <p:clrMap bg1="lt1" tx1="dk1" bg2="lt2" tx2="dk2" accent1="accent1" accent2="accent2" accent3="accent3" accent4="accent4" accent5="accent5" accent6="accent6" hlink="hlink" folHlink="folHlink"/>
   <p:sldLayoutIdLst>
-    <p:sldLayoutId xmlns:r="http://schemas.openxmlformats.org/officeDocument/2006/relationships" id="2147483649" r:id="R2d484ad068274d61"/>
+    <p:sldLayoutId xmlns:r="http://schemas.openxmlformats.org/officeDocument/2006/relationships" id="2147483649" r:id="R3303413be4e14c71"/>
   </p:sldLayoutIdLst>
   <p:txStyles>
     <p:titleStyle>
@@ -1956,7 +1956,7 @@
           <p:cNvPr id="1" name="cover-rule">
             <a:extLst xmlns:a="http://schemas.openxmlformats.org/drawingml/2006/main">
               <a:ext uri="{FF2B5EF4-FFF2-40B4-BE49-F238E27FC236}">
-                <a16:creationId xmlns:a16="http://schemas.microsoft.com/office/drawing/2014/main" id="{5BB2A88B-C9B0-4148-9ABA-0072EEDBB914}"/>
+                <a16:creationId xmlns:a16="http://schemas.microsoft.com/office/drawing/2014/main" id="{74A334D8-6B73-4E76-92AC-3E3712BC03D7}"/>
               </a:ext>
             </a:extLst>
           </p:cNvPr>
@@ -1989,7 +1989,7 @@
           <p:cNvPr id="2" name="cover-ring-1">
             <a:extLst xmlns:a="http://schemas.openxmlformats.org/drawingml/2006/main">
               <a:ext uri="{FF2B5EF4-FFF2-40B4-BE49-F238E27FC236}">
-                <a16:creationId xmlns:a16="http://schemas.microsoft.com/office/drawing/2014/main" id="{4E0C5005-8E7B-469F-856D-CA8F5DA2D77B}"/>
+                <a16:creationId xmlns:a16="http://schemas.microsoft.com/office/drawing/2014/main" id="{67E0BE8D-E6F6-4EAD-8122-7048DDD7EAEF}"/>
               </a:ext>
             </a:extLst>
           </p:cNvPr>
@@ -2020,7 +2020,7 @@
           <p:cNvPr id="3" name="cover-ring-2">
             <a:extLst xmlns:a="http://schemas.openxmlformats.org/drawingml/2006/main">
               <a:ext uri="{FF2B5EF4-FFF2-40B4-BE49-F238E27FC236}">
-                <a16:creationId xmlns:a16="http://schemas.microsoft.com/office/drawing/2014/main" id="{4B3258E0-9E13-4095-A58A-2AB9A518F306}"/>
+                <a16:creationId xmlns:a16="http://schemas.microsoft.com/office/drawing/2014/main" id="{092DC97F-587A-41C8-990E-02C580055424}"/>
               </a:ext>
             </a:extLst>
           </p:cNvPr>
@@ -2051,7 +2051,7 @@
           <p:cNvPr id="4" name="cover-core">
             <a:extLst xmlns:a="http://schemas.openxmlformats.org/drawingml/2006/main">
               <a:ext uri="{FF2B5EF4-FFF2-40B4-BE49-F238E27FC236}">
-                <a16:creationId xmlns:a16="http://schemas.microsoft.com/office/drawing/2014/main" id="{C940BB87-34CC-4AD0-9900-37D960BC381B}"/>
+                <a16:creationId xmlns:a16="http://schemas.microsoft.com/office/drawing/2014/main" id="{A20EDD64-9737-4FC2-88FE-833F8C4524DF}"/>
               </a:ext>
             </a:extLst>
           </p:cNvPr>
@@ -2084,7 +2084,7 @@
           <p:cNvPr id="5" name="cover-line-1">
             <a:extLst xmlns:a="http://schemas.openxmlformats.org/drawingml/2006/main">
               <a:ext uri="{FF2B5EF4-FFF2-40B4-BE49-F238E27FC236}">
-                <a16:creationId xmlns:a16="http://schemas.microsoft.com/office/drawing/2014/main" id="{10A8DC08-1D2E-427A-9E69-EF64DDAFABC1}"/>
+                <a16:creationId xmlns:a16="http://schemas.microsoft.com/office/drawing/2014/main" id="{E3D6203C-23A9-4F8D-88C1-293CC964D2D5}"/>
               </a:ext>
             </a:extLst>
           </p:cNvPr>
@@ -2115,7 +2115,7 @@
           <p:cNvPr id="6" name="cover-line-2">
             <a:extLst xmlns:a="http://schemas.openxmlformats.org/drawingml/2006/main">
               <a:ext uri="{FF2B5EF4-FFF2-40B4-BE49-F238E27FC236}">
-                <a16:creationId xmlns:a16="http://schemas.microsoft.com/office/drawing/2014/main" id="{F9BFE8EF-2C22-4666-BFA1-F110BB9C1AA5}"/>
+                <a16:creationId xmlns:a16="http://schemas.microsoft.com/office/drawing/2014/main" id="{1DFD0205-B5F7-46DA-943D-8FB6FC10F7EB}"/>
               </a:ext>
             </a:extLst>
           </p:cNvPr>
@@ -2146,7 +2146,7 @@
           <p:cNvPr id="7" name="cover-eyebrow">
             <a:extLst xmlns:a="http://schemas.openxmlformats.org/drawingml/2006/main">
               <a:ext uri="{FF2B5EF4-FFF2-40B4-BE49-F238E27FC236}">
-                <a16:creationId xmlns:a16="http://schemas.microsoft.com/office/drawing/2014/main" id="{4596039D-C69A-4BDD-9F3F-649B132532AC}"/>
+                <a16:creationId xmlns:a16="http://schemas.microsoft.com/office/drawing/2014/main" id="{E2D9AFEA-EF7E-4E39-960B-8CB323357017}"/>
               </a:ext>
             </a:extLst>
           </p:cNvPr>
@@ -2204,7 +2204,7 @@
           <p:cNvPr id="8" name="cover-title">
             <a:extLst xmlns:a="http://schemas.openxmlformats.org/drawingml/2006/main">
               <a:ext uri="{FF2B5EF4-FFF2-40B4-BE49-F238E27FC236}">
-                <a16:creationId xmlns:a16="http://schemas.microsoft.com/office/drawing/2014/main" id="{18C0614A-B0DD-4C9A-AB57-E40A310740EC}"/>
+                <a16:creationId xmlns:a16="http://schemas.microsoft.com/office/drawing/2014/main" id="{6E22A5E6-C475-4983-9D4D-60C29182D850}"/>
               </a:ext>
             </a:extLst>
           </p:cNvPr>
@@ -2262,7 +2262,7 @@
           <p:cNvPr id="9" name="cover-subtitle">
             <a:extLst xmlns:a="http://schemas.openxmlformats.org/drawingml/2006/main">
               <a:ext uri="{FF2B5EF4-FFF2-40B4-BE49-F238E27FC236}">
-                <a16:creationId xmlns:a16="http://schemas.microsoft.com/office/drawing/2014/main" id="{06216A9F-E221-4D8C-9E23-B0308C060FAB}"/>
+                <a16:creationId xmlns:a16="http://schemas.microsoft.com/office/drawing/2014/main" id="{24862A53-E6F3-43A8-B313-92EE17ABAB44}"/>
               </a:ext>
             </a:extLst>
           </p:cNvPr>
@@ -2324,7 +2324,7 @@
           <p:cNvPr id="10" name="cover-lead">
             <a:extLst xmlns:a="http://schemas.openxmlformats.org/drawingml/2006/main">
               <a:ext uri="{FF2B5EF4-FFF2-40B4-BE49-F238E27FC236}">
-                <a16:creationId xmlns:a16="http://schemas.microsoft.com/office/drawing/2014/main" id="{C1436122-AB43-4054-A29D-3AAA6759E92C}"/>
+                <a16:creationId xmlns:a16="http://schemas.microsoft.com/office/drawing/2014/main" id="{6B471126-125F-49DF-8235-6BC2DABA3EE6}"/>
               </a:ext>
             </a:extLst>
           </p:cNvPr>
@@ -2382,7 +2382,7 @@
           <p:cNvPr id="11" name="cover-course">
             <a:extLst xmlns:a="http://schemas.openxmlformats.org/drawingml/2006/main">
               <a:ext uri="{FF2B5EF4-FFF2-40B4-BE49-F238E27FC236}">
-                <a16:creationId xmlns:a16="http://schemas.microsoft.com/office/drawing/2014/main" id="{95B5BF07-751E-46AA-BAFC-67914D99677E}"/>
+                <a16:creationId xmlns:a16="http://schemas.microsoft.com/office/drawing/2014/main" id="{AB2BCD8F-FEAA-416C-BF22-A63ECCF4E73B}"/>
               </a:ext>
             </a:extLst>
           </p:cNvPr>
@@ -2440,7 +2440,7 @@
           <p:cNvPr id="12" name="cover-id">
             <a:extLst xmlns:a="http://schemas.openxmlformats.org/drawingml/2006/main">
               <a:ext uri="{FF2B5EF4-FFF2-40B4-BE49-F238E27FC236}">
-                <a16:creationId xmlns:a16="http://schemas.microsoft.com/office/drawing/2014/main" id="{945F6816-10D7-4275-BEF4-9EE03716DE4C}"/>
+                <a16:creationId xmlns:a16="http://schemas.microsoft.com/office/drawing/2014/main" id="{D9B7158F-1323-487F-92BD-5E72C029E9B7}"/>
               </a:ext>
             </a:extLst>
           </p:cNvPr>
@@ -2496,7 +2496,7 @@
     </p:spTree>
     <p:extLst>
       <p:ext uri="{BB962C8B-B14F-4D97-AF65-F5344CB8AC3E}">
-        <p14:creationId xmlns:p14="http://schemas.microsoft.com/office/powerpoint/2010/main" val="124086691"/>
+        <p14:creationId xmlns:p14="http://schemas.microsoft.com/office/powerpoint/2010/main" val="1459322406"/>
       </p:ext>
     </p:extLst>
   </p:cSld>
@@ -2527,7 +2527,7 @@
           <p:cNvPr id="1" name="s10-rule">
             <a:extLst xmlns:a="http://schemas.openxmlformats.org/drawingml/2006/main">
               <a:ext uri="{FF2B5EF4-FFF2-40B4-BE49-F238E27FC236}">
-                <a16:creationId xmlns:a16="http://schemas.microsoft.com/office/drawing/2014/main" id="{5608FC3E-8903-4EED-8F42-211711EB816B}"/>
+                <a16:creationId xmlns:a16="http://schemas.microsoft.com/office/drawing/2014/main" id="{F1892BAD-A10B-428F-9CC1-6863F384E19B}"/>
               </a:ext>
             </a:extLst>
           </p:cNvPr>
@@ -2560,7 +2560,7 @@
           <p:cNvPr id="2" name="s10-eyebrow">
             <a:extLst xmlns:a="http://schemas.openxmlformats.org/drawingml/2006/main">
               <a:ext uri="{FF2B5EF4-FFF2-40B4-BE49-F238E27FC236}">
-                <a16:creationId xmlns:a16="http://schemas.microsoft.com/office/drawing/2014/main" id="{2876B0A6-F3C3-47EF-A3B6-95485ACA5DFA}"/>
+                <a16:creationId xmlns:a16="http://schemas.microsoft.com/office/drawing/2014/main" id="{357526E9-AF07-4403-847F-8FA56CDB72B6}"/>
               </a:ext>
             </a:extLst>
           </p:cNvPr>
@@ -2618,7 +2618,7 @@
           <p:cNvPr id="3" name="s10-title">
             <a:extLst xmlns:a="http://schemas.openxmlformats.org/drawingml/2006/main">
               <a:ext uri="{FF2B5EF4-FFF2-40B4-BE49-F238E27FC236}">
-                <a16:creationId xmlns:a16="http://schemas.microsoft.com/office/drawing/2014/main" id="{987ADA4F-F0DB-4F56-ADD7-F228E5787182}"/>
+                <a16:creationId xmlns:a16="http://schemas.microsoft.com/office/drawing/2014/main" id="{D1B05FD4-9179-4177-8D07-E4B97E084CCD}"/>
               </a:ext>
             </a:extLst>
           </p:cNvPr>
@@ -2676,7 +2676,7 @@
           <p:cNvPr id="4" name="s10-footer">
             <a:extLst xmlns:a="http://schemas.openxmlformats.org/drawingml/2006/main">
               <a:ext uri="{FF2B5EF4-FFF2-40B4-BE49-F238E27FC236}">
-                <a16:creationId xmlns:a16="http://schemas.microsoft.com/office/drawing/2014/main" id="{F445D4B3-34EB-4EDB-92BA-97A19DB419B6}"/>
+                <a16:creationId xmlns:a16="http://schemas.microsoft.com/office/drawing/2014/main" id="{6805E0B8-D958-4BA2-B6A8-30FC5FDA7598}"/>
               </a:ext>
             </a:extLst>
           </p:cNvPr>
@@ -2707,7 +2707,7 @@
           <p:cNvPr id="5" name="s10-identity">
             <a:extLst xmlns:a="http://schemas.openxmlformats.org/drawingml/2006/main">
               <a:ext uri="{FF2B5EF4-FFF2-40B4-BE49-F238E27FC236}">
-                <a16:creationId xmlns:a16="http://schemas.microsoft.com/office/drawing/2014/main" id="{8CE19EE1-4ADB-4253-8B74-26069F3308FC}"/>
+                <a16:creationId xmlns:a16="http://schemas.microsoft.com/office/drawing/2014/main" id="{64545BD1-E323-4077-ADF5-D22476181E4C}"/>
               </a:ext>
             </a:extLst>
           </p:cNvPr>
@@ -2765,7 +2765,7 @@
           <p:cNvPr id="6" name="case-title">
             <a:extLst xmlns:a="http://schemas.openxmlformats.org/drawingml/2006/main">
               <a:ext uri="{FF2B5EF4-FFF2-40B4-BE49-F238E27FC236}">
-                <a16:creationId xmlns:a16="http://schemas.microsoft.com/office/drawing/2014/main" id="{8B21517B-2CA4-4F58-A47D-086E1B20D371}"/>
+                <a16:creationId xmlns:a16="http://schemas.microsoft.com/office/drawing/2014/main" id="{2BCD2716-3AD8-4CFB-BDC7-72BA052E2B1B}"/>
               </a:ext>
             </a:extLst>
           </p:cNvPr>
@@ -2829,7 +2829,7 @@
           <p:cNvPr id="7" name="case-row-0">
             <a:extLst xmlns:a="http://schemas.openxmlformats.org/drawingml/2006/main">
               <a:ext uri="{FF2B5EF4-FFF2-40B4-BE49-F238E27FC236}">
-                <a16:creationId xmlns:a16="http://schemas.microsoft.com/office/drawing/2014/main" id="{E4F0661B-35A5-4CF3-8DA0-2461C4D78B9A}"/>
+                <a16:creationId xmlns:a16="http://schemas.microsoft.com/office/drawing/2014/main" id="{33C1A3B4-AB13-4B6E-8CB4-05F7CEDDECFE}"/>
               </a:ext>
             </a:extLst>
           </p:cNvPr>
@@ -2893,7 +2893,7 @@
           <p:cNvPr id="8" name="case-row-1">
             <a:extLst xmlns:a="http://schemas.openxmlformats.org/drawingml/2006/main">
               <a:ext uri="{FF2B5EF4-FFF2-40B4-BE49-F238E27FC236}">
-                <a16:creationId xmlns:a16="http://schemas.microsoft.com/office/drawing/2014/main" id="{0424EEEE-A077-41AB-BA3B-66BFB8D014DD}"/>
+                <a16:creationId xmlns:a16="http://schemas.microsoft.com/office/drawing/2014/main" id="{F3628A61-499B-42DF-B941-68E0F4448022}"/>
               </a:ext>
             </a:extLst>
           </p:cNvPr>
@@ -2957,7 +2957,7 @@
           <p:cNvPr id="9" name="case-row-2">
             <a:extLst xmlns:a="http://schemas.openxmlformats.org/drawingml/2006/main">
               <a:ext uri="{FF2B5EF4-FFF2-40B4-BE49-F238E27FC236}">
-                <a16:creationId xmlns:a16="http://schemas.microsoft.com/office/drawing/2014/main" id="{3F28838A-1F3B-432E-B037-984647E7317A}"/>
+                <a16:creationId xmlns:a16="http://schemas.microsoft.com/office/drawing/2014/main" id="{96A7C9DF-8A8B-4A71-998A-7CB5129CD82F}"/>
               </a:ext>
             </a:extLst>
           </p:cNvPr>
@@ -3021,7 +3021,7 @@
           <p:cNvPr id="10" name="s10-takeaway-rule">
             <a:extLst xmlns:a="http://schemas.openxmlformats.org/drawingml/2006/main">
               <a:ext uri="{FF2B5EF4-FFF2-40B4-BE49-F238E27FC236}">
-                <a16:creationId xmlns:a16="http://schemas.microsoft.com/office/drawing/2014/main" id="{8E525F37-36DD-412F-8701-765ACBD7BC60}"/>
+                <a16:creationId xmlns:a16="http://schemas.microsoft.com/office/drawing/2014/main" id="{602F845A-CDEC-44E5-8588-C8F671EC5240}"/>
               </a:ext>
             </a:extLst>
           </p:cNvPr>
@@ -3054,7 +3054,7 @@
           <p:cNvPr id="11" name="s10-takeaway">
             <a:extLst xmlns:a="http://schemas.openxmlformats.org/drawingml/2006/main">
               <a:ext uri="{FF2B5EF4-FFF2-40B4-BE49-F238E27FC236}">
-                <a16:creationId xmlns:a16="http://schemas.microsoft.com/office/drawing/2014/main" id="{36891E02-98D9-48A6-9168-076074D1D497}"/>
+                <a16:creationId xmlns:a16="http://schemas.microsoft.com/office/drawing/2014/main" id="{92F0FEB4-FACC-4608-B2CF-89CFE268106D}"/>
               </a:ext>
             </a:extLst>
           </p:cNvPr>
@@ -3110,7 +3110,7 @@
     </p:spTree>
     <p:extLst>
       <p:ext uri="{BB962C8B-B14F-4D97-AF65-F5344CB8AC3E}">
-        <p14:creationId xmlns:p14="http://schemas.microsoft.com/office/powerpoint/2010/main" val="273169362"/>
+        <p14:creationId xmlns:p14="http://schemas.microsoft.com/office/powerpoint/2010/main" val="1791866591"/>
       </p:ext>
     </p:extLst>
   </p:cSld>
@@ -3141,7 +3141,7 @@
           <p:cNvPr id="1" name="s11-rule">
             <a:extLst xmlns:a="http://schemas.openxmlformats.org/drawingml/2006/main">
               <a:ext uri="{FF2B5EF4-FFF2-40B4-BE49-F238E27FC236}">
-                <a16:creationId xmlns:a16="http://schemas.microsoft.com/office/drawing/2014/main" id="{3657A53C-164E-4F0F-871C-39E3815B43D3}"/>
+                <a16:creationId xmlns:a16="http://schemas.microsoft.com/office/drawing/2014/main" id="{ADEADD79-BA11-47ED-B49B-0D8CF0622942}"/>
               </a:ext>
             </a:extLst>
           </p:cNvPr>
@@ -3174,7 +3174,7 @@
           <p:cNvPr id="2" name="s11-eyebrow">
             <a:extLst xmlns:a="http://schemas.openxmlformats.org/drawingml/2006/main">
               <a:ext uri="{FF2B5EF4-FFF2-40B4-BE49-F238E27FC236}">
-                <a16:creationId xmlns:a16="http://schemas.microsoft.com/office/drawing/2014/main" id="{790BE5C2-1D81-4307-A6F9-10B5BF1892EC}"/>
+                <a16:creationId xmlns:a16="http://schemas.microsoft.com/office/drawing/2014/main" id="{D7F6EFB9-C6E6-4DE7-AEBA-9C5D90B32A63}"/>
               </a:ext>
             </a:extLst>
           </p:cNvPr>
@@ -3232,7 +3232,7 @@
           <p:cNvPr id="3" name="s11-title">
             <a:extLst xmlns:a="http://schemas.openxmlformats.org/drawingml/2006/main">
               <a:ext uri="{FF2B5EF4-FFF2-40B4-BE49-F238E27FC236}">
-                <a16:creationId xmlns:a16="http://schemas.microsoft.com/office/drawing/2014/main" id="{B0B796C7-3BB4-4BEB-BD8D-B002EDE20F46}"/>
+                <a16:creationId xmlns:a16="http://schemas.microsoft.com/office/drawing/2014/main" id="{137787BE-3A79-4E54-8D9D-EE3CC7CEAA95}"/>
               </a:ext>
             </a:extLst>
           </p:cNvPr>
@@ -3290,7 +3290,7 @@
           <p:cNvPr id="4" name="s11-footer">
             <a:extLst xmlns:a="http://schemas.openxmlformats.org/drawingml/2006/main">
               <a:ext uri="{FF2B5EF4-FFF2-40B4-BE49-F238E27FC236}">
-                <a16:creationId xmlns:a16="http://schemas.microsoft.com/office/drawing/2014/main" id="{55352F9F-6ED0-410A-A798-CC2AA75B6F41}"/>
+                <a16:creationId xmlns:a16="http://schemas.microsoft.com/office/drawing/2014/main" id="{FF846CCD-340D-480A-970E-45F1A21E1355}"/>
               </a:ext>
             </a:extLst>
           </p:cNvPr>
@@ -3321,7 +3321,7 @@
           <p:cNvPr id="5" name="s11-identity">
             <a:extLst xmlns:a="http://schemas.openxmlformats.org/drawingml/2006/main">
               <a:ext uri="{FF2B5EF4-FFF2-40B4-BE49-F238E27FC236}">
-                <a16:creationId xmlns:a16="http://schemas.microsoft.com/office/drawing/2014/main" id="{F237B231-72D3-440B-8B14-0DD8A6D174A0}"/>
+                <a16:creationId xmlns:a16="http://schemas.microsoft.com/office/drawing/2014/main" id="{F2108AB9-598A-4AFC-B34A-409182AEC34F}"/>
               </a:ext>
             </a:extLst>
           </p:cNvPr>
@@ -3379,7 +3379,7 @@
           <p:cNvPr id="6" name="practice-circle-0">
             <a:extLst xmlns:a="http://schemas.openxmlformats.org/drawingml/2006/main">
               <a:ext uri="{FF2B5EF4-FFF2-40B4-BE49-F238E27FC236}">
-                <a16:creationId xmlns:a16="http://schemas.microsoft.com/office/drawing/2014/main" id="{F30E3CE8-463C-4B45-9A1E-A3477CCA8436}"/>
+                <a16:creationId xmlns:a16="http://schemas.microsoft.com/office/drawing/2014/main" id="{4DE28001-1AE0-4B45-BC2A-56B19194010B}"/>
               </a:ext>
             </a:extLst>
           </p:cNvPr>
@@ -3412,7 +3412,7 @@
           <p:cNvPr id="7" name="practice-number-0">
             <a:extLst xmlns:a="http://schemas.openxmlformats.org/drawingml/2006/main">
               <a:ext uri="{FF2B5EF4-FFF2-40B4-BE49-F238E27FC236}">
-                <a16:creationId xmlns:a16="http://schemas.microsoft.com/office/drawing/2014/main" id="{69792C39-4561-4A7C-A04F-649D14E41CBC}"/>
+                <a16:creationId xmlns:a16="http://schemas.microsoft.com/office/drawing/2014/main" id="{4534D9E0-1123-453C-B241-C9A576E1EF5B}"/>
               </a:ext>
             </a:extLst>
           </p:cNvPr>
@@ -3470,7 +3470,7 @@
           <p:cNvPr id="8" name="practice-item-0">
             <a:extLst xmlns:a="http://schemas.openxmlformats.org/drawingml/2006/main">
               <a:ext uri="{FF2B5EF4-FFF2-40B4-BE49-F238E27FC236}">
-                <a16:creationId xmlns:a16="http://schemas.microsoft.com/office/drawing/2014/main" id="{4E83E315-874C-4727-A513-634EC050B821}"/>
+                <a16:creationId xmlns:a16="http://schemas.microsoft.com/office/drawing/2014/main" id="{CAD6CD62-3A73-4089-8EC6-7BD5573757F9}"/>
               </a:ext>
             </a:extLst>
           </p:cNvPr>
@@ -3534,7 +3534,7 @@
           <p:cNvPr id="9" name="practice-connector-0">
             <a:extLst xmlns:a="http://schemas.openxmlformats.org/drawingml/2006/main">
               <a:ext uri="{FF2B5EF4-FFF2-40B4-BE49-F238E27FC236}">
-                <a16:creationId xmlns:a16="http://schemas.microsoft.com/office/drawing/2014/main" id="{400CE791-20AC-407A-B004-8F311327B66B}"/>
+                <a16:creationId xmlns:a16="http://schemas.microsoft.com/office/drawing/2014/main" id="{A08713EF-94B5-4ACD-BBF5-F44E06D7E111}"/>
               </a:ext>
             </a:extLst>
           </p:cNvPr>
@@ -3565,7 +3565,7 @@
           <p:cNvPr id="10" name="practice-circle-1">
             <a:extLst xmlns:a="http://schemas.openxmlformats.org/drawingml/2006/main">
               <a:ext uri="{FF2B5EF4-FFF2-40B4-BE49-F238E27FC236}">
-                <a16:creationId xmlns:a16="http://schemas.microsoft.com/office/drawing/2014/main" id="{120A2607-10B7-421E-BC7E-7034BD0049B0}"/>
+                <a16:creationId xmlns:a16="http://schemas.microsoft.com/office/drawing/2014/main" id="{0E144715-865C-438C-A013-4EAC8354E79D}"/>
               </a:ext>
             </a:extLst>
           </p:cNvPr>
@@ -3598,7 +3598,7 @@
           <p:cNvPr id="11" name="practice-number-1">
             <a:extLst xmlns:a="http://schemas.openxmlformats.org/drawingml/2006/main">
               <a:ext uri="{FF2B5EF4-FFF2-40B4-BE49-F238E27FC236}">
-                <a16:creationId xmlns:a16="http://schemas.microsoft.com/office/drawing/2014/main" id="{D57355A0-5F5A-4E77-94A9-EF0A881B0A9B}"/>
+                <a16:creationId xmlns:a16="http://schemas.microsoft.com/office/drawing/2014/main" id="{538B58BD-DAA3-43AF-B660-8F65DFD678C1}"/>
               </a:ext>
             </a:extLst>
           </p:cNvPr>
@@ -3656,7 +3656,7 @@
           <p:cNvPr id="12" name="practice-item-1">
             <a:extLst xmlns:a="http://schemas.openxmlformats.org/drawingml/2006/main">
               <a:ext uri="{FF2B5EF4-FFF2-40B4-BE49-F238E27FC236}">
-                <a16:creationId xmlns:a16="http://schemas.microsoft.com/office/drawing/2014/main" id="{D45C4954-B4CD-43D9-A6D5-42628B6DD7DB}"/>
+                <a16:creationId xmlns:a16="http://schemas.microsoft.com/office/drawing/2014/main" id="{89931BEC-7128-43F1-9291-88A33C8E15A9}"/>
               </a:ext>
             </a:extLst>
           </p:cNvPr>
@@ -3720,7 +3720,7 @@
           <p:cNvPr id="13" name="practice-connector-1">
             <a:extLst xmlns:a="http://schemas.openxmlformats.org/drawingml/2006/main">
               <a:ext uri="{FF2B5EF4-FFF2-40B4-BE49-F238E27FC236}">
-                <a16:creationId xmlns:a16="http://schemas.microsoft.com/office/drawing/2014/main" id="{0E8A35B4-7DDE-4EAD-A27A-4EAD8C743A9D}"/>
+                <a16:creationId xmlns:a16="http://schemas.microsoft.com/office/drawing/2014/main" id="{41A0D7E0-3B75-47B6-B2D3-3A77BB5927D4}"/>
               </a:ext>
             </a:extLst>
           </p:cNvPr>
@@ -3751,7 +3751,7 @@
           <p:cNvPr id="14" name="practice-circle-2">
             <a:extLst xmlns:a="http://schemas.openxmlformats.org/drawingml/2006/main">
               <a:ext uri="{FF2B5EF4-FFF2-40B4-BE49-F238E27FC236}">
-                <a16:creationId xmlns:a16="http://schemas.microsoft.com/office/drawing/2014/main" id="{0E8930F8-4337-4E70-AE02-39AE932BA36A}"/>
+                <a16:creationId xmlns:a16="http://schemas.microsoft.com/office/drawing/2014/main" id="{1EE6C307-3378-4D14-B0C3-3553579DEF1E}"/>
               </a:ext>
             </a:extLst>
           </p:cNvPr>
@@ -3784,7 +3784,7 @@
           <p:cNvPr id="15" name="practice-number-2">
             <a:extLst xmlns:a="http://schemas.openxmlformats.org/drawingml/2006/main">
               <a:ext uri="{FF2B5EF4-FFF2-40B4-BE49-F238E27FC236}">
-                <a16:creationId xmlns:a16="http://schemas.microsoft.com/office/drawing/2014/main" id="{4B5E429B-CA2B-49FB-808A-3BDBCD40AB53}"/>
+                <a16:creationId xmlns:a16="http://schemas.microsoft.com/office/drawing/2014/main" id="{25CE0679-3893-4324-99CB-7C2BBF61AA9A}"/>
               </a:ext>
             </a:extLst>
           </p:cNvPr>
@@ -3842,7 +3842,7 @@
           <p:cNvPr id="16" name="practice-item-2">
             <a:extLst xmlns:a="http://schemas.openxmlformats.org/drawingml/2006/main">
               <a:ext uri="{FF2B5EF4-FFF2-40B4-BE49-F238E27FC236}">
-                <a16:creationId xmlns:a16="http://schemas.microsoft.com/office/drawing/2014/main" id="{3A947CE2-BDF1-4337-B082-C3A8838446A5}"/>
+                <a16:creationId xmlns:a16="http://schemas.microsoft.com/office/drawing/2014/main" id="{25763DA4-CBB7-467A-9CD5-96ADA5680CEB}"/>
               </a:ext>
             </a:extLst>
           </p:cNvPr>
@@ -3904,7 +3904,7 @@
     </p:spTree>
     <p:extLst>
       <p:ext uri="{BB962C8B-B14F-4D97-AF65-F5344CB8AC3E}">
-        <p14:creationId xmlns:p14="http://schemas.microsoft.com/office/powerpoint/2010/main" val="167863641"/>
+        <p14:creationId xmlns:p14="http://schemas.microsoft.com/office/powerpoint/2010/main" val="1255679173"/>
       </p:ext>
     </p:extLst>
   </p:cSld>
@@ -3935,7 +3935,7 @@
           <p:cNvPr id="1" name="s12-rule">
             <a:extLst xmlns:a="http://schemas.openxmlformats.org/drawingml/2006/main">
               <a:ext uri="{FF2B5EF4-FFF2-40B4-BE49-F238E27FC236}">
-                <a16:creationId xmlns:a16="http://schemas.microsoft.com/office/drawing/2014/main" id="{331E78BF-3599-4B1C-B821-21332EA4D06B}"/>
+                <a16:creationId xmlns:a16="http://schemas.microsoft.com/office/drawing/2014/main" id="{AC3D9577-8F88-40E4-9CD4-CB14B6A3FBB2}"/>
               </a:ext>
             </a:extLst>
           </p:cNvPr>
@@ -3968,7 +3968,7 @@
           <p:cNvPr id="2" name="s12-eyebrow">
             <a:extLst xmlns:a="http://schemas.openxmlformats.org/drawingml/2006/main">
               <a:ext uri="{FF2B5EF4-FFF2-40B4-BE49-F238E27FC236}">
-                <a16:creationId xmlns:a16="http://schemas.microsoft.com/office/drawing/2014/main" id="{37078227-2BAC-458F-A0CA-67527CE2AE53}"/>
+                <a16:creationId xmlns:a16="http://schemas.microsoft.com/office/drawing/2014/main" id="{BEAE4044-7B4F-42CC-ACAB-3B847F1AF4B4}"/>
               </a:ext>
             </a:extLst>
           </p:cNvPr>
@@ -4026,7 +4026,7 @@
           <p:cNvPr id="3" name="s12-title">
             <a:extLst xmlns:a="http://schemas.openxmlformats.org/drawingml/2006/main">
               <a:ext uri="{FF2B5EF4-FFF2-40B4-BE49-F238E27FC236}">
-                <a16:creationId xmlns:a16="http://schemas.microsoft.com/office/drawing/2014/main" id="{5F657E24-8DE0-4127-AFE2-A81AE6D6DB69}"/>
+                <a16:creationId xmlns:a16="http://schemas.microsoft.com/office/drawing/2014/main" id="{41ADD9B1-2D51-4B90-A337-34ED21E3A43C}"/>
               </a:ext>
             </a:extLst>
           </p:cNvPr>
@@ -4084,7 +4084,7 @@
           <p:cNvPr id="4" name="s12-footer">
             <a:extLst xmlns:a="http://schemas.openxmlformats.org/drawingml/2006/main">
               <a:ext uri="{FF2B5EF4-FFF2-40B4-BE49-F238E27FC236}">
-                <a16:creationId xmlns:a16="http://schemas.microsoft.com/office/drawing/2014/main" id="{F413EE81-C72F-423F-A3CA-D3542413C142}"/>
+                <a16:creationId xmlns:a16="http://schemas.microsoft.com/office/drawing/2014/main" id="{E1C5D007-800A-4FBB-BFA1-2BBBED730655}"/>
               </a:ext>
             </a:extLst>
           </p:cNvPr>
@@ -4115,7 +4115,7 @@
           <p:cNvPr id="5" name="s12-identity">
             <a:extLst xmlns:a="http://schemas.openxmlformats.org/drawingml/2006/main">
               <a:ext uri="{FF2B5EF4-FFF2-40B4-BE49-F238E27FC236}">
-                <a16:creationId xmlns:a16="http://schemas.microsoft.com/office/drawing/2014/main" id="{D2407972-E55A-44C4-AA05-8D76A1C42BCC}"/>
+                <a16:creationId xmlns:a16="http://schemas.microsoft.com/office/drawing/2014/main" id="{E8E630E9-E7A6-41C8-8A03-3A3C5ABEAE18}"/>
               </a:ext>
             </a:extLst>
           </p:cNvPr>
@@ -4173,7 +4173,7 @@
           <p:cNvPr id="6" name="recap-circle-0">
             <a:extLst xmlns:a="http://schemas.openxmlformats.org/drawingml/2006/main">
               <a:ext uri="{FF2B5EF4-FFF2-40B4-BE49-F238E27FC236}">
-                <a16:creationId xmlns:a16="http://schemas.microsoft.com/office/drawing/2014/main" id="{1EE069B7-9A2B-4F40-BA4C-BF0071068265}"/>
+                <a16:creationId xmlns:a16="http://schemas.microsoft.com/office/drawing/2014/main" id="{786FCFFF-9DC6-42E9-998B-5B3FACFFD462}"/>
               </a:ext>
             </a:extLst>
           </p:cNvPr>
@@ -4206,7 +4206,7 @@
           <p:cNvPr id="7" name="recap-number-0">
             <a:extLst xmlns:a="http://schemas.openxmlformats.org/drawingml/2006/main">
               <a:ext uri="{FF2B5EF4-FFF2-40B4-BE49-F238E27FC236}">
-                <a16:creationId xmlns:a16="http://schemas.microsoft.com/office/drawing/2014/main" id="{C7A3B605-877E-433C-B80B-1E44A4E596D3}"/>
+                <a16:creationId xmlns:a16="http://schemas.microsoft.com/office/drawing/2014/main" id="{3858B941-70B2-4397-BDB0-7A131FB8CC40}"/>
               </a:ext>
             </a:extLst>
           </p:cNvPr>
@@ -4264,7 +4264,7 @@
           <p:cNvPr id="8" name="recap-item-0">
             <a:extLst xmlns:a="http://schemas.openxmlformats.org/drawingml/2006/main">
               <a:ext uri="{FF2B5EF4-FFF2-40B4-BE49-F238E27FC236}">
-                <a16:creationId xmlns:a16="http://schemas.microsoft.com/office/drawing/2014/main" id="{CB5C96CA-68D2-47B9-B7F6-2D987826EED8}"/>
+                <a16:creationId xmlns:a16="http://schemas.microsoft.com/office/drawing/2014/main" id="{FE061B5B-D9B7-4F5F-B0B9-413593F74495}"/>
               </a:ext>
             </a:extLst>
           </p:cNvPr>
@@ -4328,7 +4328,7 @@
           <p:cNvPr id="9" name="recap-connector-0">
             <a:extLst xmlns:a="http://schemas.openxmlformats.org/drawingml/2006/main">
               <a:ext uri="{FF2B5EF4-FFF2-40B4-BE49-F238E27FC236}">
-                <a16:creationId xmlns:a16="http://schemas.microsoft.com/office/drawing/2014/main" id="{336D8F52-E134-44AA-8264-B54924A600D8}"/>
+                <a16:creationId xmlns:a16="http://schemas.microsoft.com/office/drawing/2014/main" id="{E4D428CA-33A8-40F8-B655-69678A1C42AD}"/>
               </a:ext>
             </a:extLst>
           </p:cNvPr>
@@ -4359,7 +4359,7 @@
           <p:cNvPr id="10" name="recap-circle-1">
             <a:extLst xmlns:a="http://schemas.openxmlformats.org/drawingml/2006/main">
               <a:ext uri="{FF2B5EF4-FFF2-40B4-BE49-F238E27FC236}">
-                <a16:creationId xmlns:a16="http://schemas.microsoft.com/office/drawing/2014/main" id="{B29A0436-65BA-446F-AFD0-BC0C5772DAB3}"/>
+                <a16:creationId xmlns:a16="http://schemas.microsoft.com/office/drawing/2014/main" id="{24799E1E-3DFC-45F2-BB89-83B93DD89EE8}"/>
               </a:ext>
             </a:extLst>
           </p:cNvPr>
@@ -4392,7 +4392,7 @@
           <p:cNvPr id="11" name="recap-number-1">
             <a:extLst xmlns:a="http://schemas.openxmlformats.org/drawingml/2006/main">
               <a:ext uri="{FF2B5EF4-FFF2-40B4-BE49-F238E27FC236}">
-                <a16:creationId xmlns:a16="http://schemas.microsoft.com/office/drawing/2014/main" id="{7995000B-3339-4E9D-BCC7-7C5B2B199E9E}"/>
+                <a16:creationId xmlns:a16="http://schemas.microsoft.com/office/drawing/2014/main" id="{646A7ED3-53EB-4E4F-978F-864EB75D4D98}"/>
               </a:ext>
             </a:extLst>
           </p:cNvPr>
@@ -4450,7 +4450,7 @@
           <p:cNvPr id="12" name="recap-item-1">
             <a:extLst xmlns:a="http://schemas.openxmlformats.org/drawingml/2006/main">
               <a:ext uri="{FF2B5EF4-FFF2-40B4-BE49-F238E27FC236}">
-                <a16:creationId xmlns:a16="http://schemas.microsoft.com/office/drawing/2014/main" id="{C25E7113-2FC6-4F12-853E-9BFD6702DB1E}"/>
+                <a16:creationId xmlns:a16="http://schemas.microsoft.com/office/drawing/2014/main" id="{AD1C99DB-5062-4F21-A0ED-D093D5B33F6D}"/>
               </a:ext>
             </a:extLst>
           </p:cNvPr>
@@ -4514,7 +4514,7 @@
           <p:cNvPr id="13" name="recap-connector-1">
             <a:extLst xmlns:a="http://schemas.openxmlformats.org/drawingml/2006/main">
               <a:ext uri="{FF2B5EF4-FFF2-40B4-BE49-F238E27FC236}">
-                <a16:creationId xmlns:a16="http://schemas.microsoft.com/office/drawing/2014/main" id="{B30BC572-E089-4801-8AD5-02B3947BD785}"/>
+                <a16:creationId xmlns:a16="http://schemas.microsoft.com/office/drawing/2014/main" id="{11849AAE-2045-4B7D-9A4F-86C48527B402}"/>
               </a:ext>
             </a:extLst>
           </p:cNvPr>
@@ -4545,7 +4545,7 @@
           <p:cNvPr id="14" name="recap-circle-2">
             <a:extLst xmlns:a="http://schemas.openxmlformats.org/drawingml/2006/main">
               <a:ext uri="{FF2B5EF4-FFF2-40B4-BE49-F238E27FC236}">
-                <a16:creationId xmlns:a16="http://schemas.microsoft.com/office/drawing/2014/main" id="{957B0D5F-0AAE-49BE-82B6-071DD4AA03E7}"/>
+                <a16:creationId xmlns:a16="http://schemas.microsoft.com/office/drawing/2014/main" id="{DEE2BDF3-DC9E-4DE1-971A-FBE17007265D}"/>
               </a:ext>
             </a:extLst>
           </p:cNvPr>
@@ -4578,7 +4578,7 @@
           <p:cNvPr id="15" name="recap-number-2">
             <a:extLst xmlns:a="http://schemas.openxmlformats.org/drawingml/2006/main">
               <a:ext uri="{FF2B5EF4-FFF2-40B4-BE49-F238E27FC236}">
-                <a16:creationId xmlns:a16="http://schemas.microsoft.com/office/drawing/2014/main" id="{BBDE846C-448C-4BC1-95F3-36A463E62E1B}"/>
+                <a16:creationId xmlns:a16="http://schemas.microsoft.com/office/drawing/2014/main" id="{94C4CA4F-46A6-4C8B-AEBA-74F031212C09}"/>
               </a:ext>
             </a:extLst>
           </p:cNvPr>
@@ -4636,7 +4636,7 @@
           <p:cNvPr id="16" name="recap-item-2">
             <a:extLst xmlns:a="http://schemas.openxmlformats.org/drawingml/2006/main">
               <a:ext uri="{FF2B5EF4-FFF2-40B4-BE49-F238E27FC236}">
-                <a16:creationId xmlns:a16="http://schemas.microsoft.com/office/drawing/2014/main" id="{1771E3E0-A4B2-4299-BED9-845F1011F597}"/>
+                <a16:creationId xmlns:a16="http://schemas.microsoft.com/office/drawing/2014/main" id="{13355D28-2AC3-4B14-8DAE-1CD3A387BB81}"/>
               </a:ext>
             </a:extLst>
           </p:cNvPr>
@@ -4698,7 +4698,7 @@
     </p:spTree>
     <p:extLst>
       <p:ext uri="{BB962C8B-B14F-4D97-AF65-F5344CB8AC3E}">
-        <p14:creationId xmlns:p14="http://schemas.microsoft.com/office/powerpoint/2010/main" val="379680054"/>
+        <p14:creationId xmlns:p14="http://schemas.microsoft.com/office/powerpoint/2010/main" val="915088478"/>
       </p:ext>
     </p:extLst>
   </p:cSld>
@@ -4729,7 +4729,7 @@
           <p:cNvPr id="1" name="s13-rule">
             <a:extLst xmlns:a="http://schemas.openxmlformats.org/drawingml/2006/main">
               <a:ext uri="{FF2B5EF4-FFF2-40B4-BE49-F238E27FC236}">
-                <a16:creationId xmlns:a16="http://schemas.microsoft.com/office/drawing/2014/main" id="{55B568CD-5BB5-4875-BD8F-F2175398AA40}"/>
+                <a16:creationId xmlns:a16="http://schemas.microsoft.com/office/drawing/2014/main" id="{B5516F27-E924-44FB-868D-61DBBCE3D7BA}"/>
               </a:ext>
             </a:extLst>
           </p:cNvPr>
@@ -4762,7 +4762,7 @@
           <p:cNvPr id="2" name="s13-eyebrow">
             <a:extLst xmlns:a="http://schemas.openxmlformats.org/drawingml/2006/main">
               <a:ext uri="{FF2B5EF4-FFF2-40B4-BE49-F238E27FC236}">
-                <a16:creationId xmlns:a16="http://schemas.microsoft.com/office/drawing/2014/main" id="{B4591C79-D611-4A5E-80F6-D0C62709EC67}"/>
+                <a16:creationId xmlns:a16="http://schemas.microsoft.com/office/drawing/2014/main" id="{4E0B4F7E-8094-4A32-96D2-DECA69C77D00}"/>
               </a:ext>
             </a:extLst>
           </p:cNvPr>
@@ -4820,7 +4820,7 @@
           <p:cNvPr id="3" name="s13-title">
             <a:extLst xmlns:a="http://schemas.openxmlformats.org/drawingml/2006/main">
               <a:ext uri="{FF2B5EF4-FFF2-40B4-BE49-F238E27FC236}">
-                <a16:creationId xmlns:a16="http://schemas.microsoft.com/office/drawing/2014/main" id="{ABD5C420-0D75-47B5-A452-AEC79C629E17}"/>
+                <a16:creationId xmlns:a16="http://schemas.microsoft.com/office/drawing/2014/main" id="{4AD2BED9-2961-4E9D-829E-79AD8B3C019D}"/>
               </a:ext>
             </a:extLst>
           </p:cNvPr>
@@ -4878,7 +4878,7 @@
           <p:cNvPr id="4" name="s13-footer">
             <a:extLst xmlns:a="http://schemas.openxmlformats.org/drawingml/2006/main">
               <a:ext uri="{FF2B5EF4-FFF2-40B4-BE49-F238E27FC236}">
-                <a16:creationId xmlns:a16="http://schemas.microsoft.com/office/drawing/2014/main" id="{0B32F0D8-F55C-4153-8423-FCCD0CE56B37}"/>
+                <a16:creationId xmlns:a16="http://schemas.microsoft.com/office/drawing/2014/main" id="{15115FAD-7F49-4ADE-8212-EFBA23746E3B}"/>
               </a:ext>
             </a:extLst>
           </p:cNvPr>
@@ -4909,7 +4909,7 @@
           <p:cNvPr id="5" name="s13-identity">
             <a:extLst xmlns:a="http://schemas.openxmlformats.org/drawingml/2006/main">
               <a:ext uri="{FF2B5EF4-FFF2-40B4-BE49-F238E27FC236}">
-                <a16:creationId xmlns:a16="http://schemas.microsoft.com/office/drawing/2014/main" id="{C625202E-4695-470B-862C-259DAC2C56CE}"/>
+                <a16:creationId xmlns:a16="http://schemas.microsoft.com/office/drawing/2014/main" id="{AC3EDA5E-6007-4A89-A7CA-1FD37133FCED}"/>
               </a:ext>
             </a:extLst>
           </p:cNvPr>
@@ -4967,7 +4967,7 @@
           <p:cNvPr id="6" name="source-0">
             <a:extLst xmlns:a="http://schemas.openxmlformats.org/drawingml/2006/main">
               <a:ext uri="{FF2B5EF4-FFF2-40B4-BE49-F238E27FC236}">
-                <a16:creationId xmlns:a16="http://schemas.microsoft.com/office/drawing/2014/main" id="{0C46823D-866B-4D39-97DB-DDC61B3E26B2}"/>
+                <a16:creationId xmlns:a16="http://schemas.microsoft.com/office/drawing/2014/main" id="{51EC618A-AB05-4570-A515-1D2E05B669D4}"/>
               </a:ext>
             </a:extLst>
           </p:cNvPr>
@@ -5031,7 +5031,7 @@
           <p:cNvPr id="7" name="source-1">
             <a:extLst xmlns:a="http://schemas.openxmlformats.org/drawingml/2006/main">
               <a:ext uri="{FF2B5EF4-FFF2-40B4-BE49-F238E27FC236}">
-                <a16:creationId xmlns:a16="http://schemas.microsoft.com/office/drawing/2014/main" id="{FB8562FB-AD78-4F4C-A223-55E44829A529}"/>
+                <a16:creationId xmlns:a16="http://schemas.microsoft.com/office/drawing/2014/main" id="{AF9C5CC7-2DDE-4B3C-B38C-07F0EB6DE0AB}"/>
               </a:ext>
             </a:extLst>
           </p:cNvPr>
@@ -5095,7 +5095,7 @@
           <p:cNvPr id="8" name="source-2">
             <a:extLst xmlns:a="http://schemas.openxmlformats.org/drawingml/2006/main">
               <a:ext uri="{FF2B5EF4-FFF2-40B4-BE49-F238E27FC236}">
-                <a16:creationId xmlns:a16="http://schemas.microsoft.com/office/drawing/2014/main" id="{D0839522-E010-4D3E-8521-18E6C7991C79}"/>
+                <a16:creationId xmlns:a16="http://schemas.microsoft.com/office/drawing/2014/main" id="{87F3688B-5F32-4C27-881B-ACE49143E167}"/>
               </a:ext>
             </a:extLst>
           </p:cNvPr>
@@ -5159,7 +5159,7 @@
           <p:cNvPr id="9" name="source-3">
             <a:extLst xmlns:a="http://schemas.openxmlformats.org/drawingml/2006/main">
               <a:ext uri="{FF2B5EF4-FFF2-40B4-BE49-F238E27FC236}">
-                <a16:creationId xmlns:a16="http://schemas.microsoft.com/office/drawing/2014/main" id="{B2627B5C-A15A-4F37-A331-5389D1A0846B}"/>
+                <a16:creationId xmlns:a16="http://schemas.microsoft.com/office/drawing/2014/main" id="{365994C7-0D04-4F3E-9B57-8DAF11FE6C3F}"/>
               </a:ext>
             </a:extLst>
           </p:cNvPr>
@@ -5223,7 +5223,7 @@
           <p:cNvPr id="10" name="source-4">
             <a:extLst xmlns:a="http://schemas.openxmlformats.org/drawingml/2006/main">
               <a:ext uri="{FF2B5EF4-FFF2-40B4-BE49-F238E27FC236}">
-                <a16:creationId xmlns:a16="http://schemas.microsoft.com/office/drawing/2014/main" id="{298D9497-182E-4570-B8A6-F6B20E76C53C}"/>
+                <a16:creationId xmlns:a16="http://schemas.microsoft.com/office/drawing/2014/main" id="{C0B4C357-E858-42BC-B823-C68E02739F6D}"/>
               </a:ext>
             </a:extLst>
           </p:cNvPr>
@@ -5287,7 +5287,7 @@
           <p:cNvPr id="11" name="s13-takeaway-rule">
             <a:extLst xmlns:a="http://schemas.openxmlformats.org/drawingml/2006/main">
               <a:ext uri="{FF2B5EF4-FFF2-40B4-BE49-F238E27FC236}">
-                <a16:creationId xmlns:a16="http://schemas.microsoft.com/office/drawing/2014/main" id="{7397DEF7-5AAF-4B74-93F1-4835FD92F404}"/>
+                <a16:creationId xmlns:a16="http://schemas.microsoft.com/office/drawing/2014/main" id="{F90E1BBE-624E-4EC0-9CC1-06391E740637}"/>
               </a:ext>
             </a:extLst>
           </p:cNvPr>
@@ -5320,7 +5320,7 @@
           <p:cNvPr id="12" name="s13-takeaway">
             <a:extLst xmlns:a="http://schemas.openxmlformats.org/drawingml/2006/main">
               <a:ext uri="{FF2B5EF4-FFF2-40B4-BE49-F238E27FC236}">
-                <a16:creationId xmlns:a16="http://schemas.microsoft.com/office/drawing/2014/main" id="{574657F8-A76B-4CB1-BA99-9A9027909D6C}"/>
+                <a16:creationId xmlns:a16="http://schemas.microsoft.com/office/drawing/2014/main" id="{8C1A449A-5609-4AE4-8E98-399DB31CFAC7}"/>
               </a:ext>
             </a:extLst>
           </p:cNvPr>
@@ -5345,7 +5345,7 @@
         </p:spPr>
         <p:txBody>
           <a:bodyPr xmlns:a="http://schemas.openxmlformats.org/drawingml/2006/main" lIns="0" tIns="0" rIns="0" bIns="0" anchor="ctr">
-            <a:normAutofit fontScale="95911"/>
+            <a:normAutofit fontScale="100000"/>
           </a:bodyPr>
           <a:lstStyle xmlns:a="http://schemas.openxmlformats.org/drawingml/2006/main"/>
           <a:p xmlns:a="http://schemas.openxmlformats.org/drawingml/2006/main">
@@ -5368,7 +5368,7 @@
                 <a:ea typeface="PingFang SC"/>
                 <a:cs typeface="PingFang SC"/>
               </a:rPr>
-              <a:t>课程精编页用于讲授主线；播放器中的“原课件”模式保留团队 PowerPoint 精选页、真实图片和可播放视频。</a:t>
+              <a:t>课程正文与幻灯片共享同一知识主线，图片和视频用于帮助理解本节概念与案例。</a:t>
             </a:r>
           </a:p>
         </p:txBody>
@@ -5376,7 +5376,7 @@
     </p:spTree>
     <p:extLst>
       <p:ext uri="{BB962C8B-B14F-4D97-AF65-F5344CB8AC3E}">
-        <p14:creationId xmlns:p14="http://schemas.microsoft.com/office/powerpoint/2010/main" val="1758853799"/>
+        <p14:creationId xmlns:p14="http://schemas.microsoft.com/office/powerpoint/2010/main" val="431058651"/>
       </p:ext>
     </p:extLst>
   </p:cSld>
@@ -5407,7 +5407,7 @@
           <p:cNvPr id="1" name="s2-rule">
             <a:extLst xmlns:a="http://schemas.openxmlformats.org/drawingml/2006/main">
               <a:ext uri="{FF2B5EF4-FFF2-40B4-BE49-F238E27FC236}">
-                <a16:creationId xmlns:a16="http://schemas.microsoft.com/office/drawing/2014/main" id="{A642AE39-1993-4BEB-96A0-5FECBF8CDAF9}"/>
+                <a16:creationId xmlns:a16="http://schemas.microsoft.com/office/drawing/2014/main" id="{0939303C-1F07-4F1D-AF1C-B0D0CABD9A06}"/>
               </a:ext>
             </a:extLst>
           </p:cNvPr>
@@ -5440,7 +5440,7 @@
           <p:cNvPr id="2" name="s2-eyebrow">
             <a:extLst xmlns:a="http://schemas.openxmlformats.org/drawingml/2006/main">
               <a:ext uri="{FF2B5EF4-FFF2-40B4-BE49-F238E27FC236}">
-                <a16:creationId xmlns:a16="http://schemas.microsoft.com/office/drawing/2014/main" id="{D26F51F6-AB0E-4E6E-844B-DB29DAB3D3D0}"/>
+                <a16:creationId xmlns:a16="http://schemas.microsoft.com/office/drawing/2014/main" id="{E457141F-A126-4D9E-A581-C48A359C5647}"/>
               </a:ext>
             </a:extLst>
           </p:cNvPr>
@@ -5498,7 +5498,7 @@
           <p:cNvPr id="3" name="s2-title">
             <a:extLst xmlns:a="http://schemas.openxmlformats.org/drawingml/2006/main">
               <a:ext uri="{FF2B5EF4-FFF2-40B4-BE49-F238E27FC236}">
-                <a16:creationId xmlns:a16="http://schemas.microsoft.com/office/drawing/2014/main" id="{C32DFBEC-64CA-4D1F-BE37-5FE66CEE8289}"/>
+                <a16:creationId xmlns:a16="http://schemas.microsoft.com/office/drawing/2014/main" id="{A8803082-BD79-41D8-986E-8325805FBBA7}"/>
               </a:ext>
             </a:extLst>
           </p:cNvPr>
@@ -5556,7 +5556,7 @@
           <p:cNvPr id="4" name="s2-footer">
             <a:extLst xmlns:a="http://schemas.openxmlformats.org/drawingml/2006/main">
               <a:ext uri="{FF2B5EF4-FFF2-40B4-BE49-F238E27FC236}">
-                <a16:creationId xmlns:a16="http://schemas.microsoft.com/office/drawing/2014/main" id="{F304548F-B32A-4434-A075-8A17E774F7BB}"/>
+                <a16:creationId xmlns:a16="http://schemas.microsoft.com/office/drawing/2014/main" id="{0245B95A-1453-4B14-B74F-DDA45458A5EB}"/>
               </a:ext>
             </a:extLst>
           </p:cNvPr>
@@ -5587,7 +5587,7 @@
           <p:cNvPr id="5" name="s2-identity">
             <a:extLst xmlns:a="http://schemas.openxmlformats.org/drawingml/2006/main">
               <a:ext uri="{FF2B5EF4-FFF2-40B4-BE49-F238E27FC236}">
-                <a16:creationId xmlns:a16="http://schemas.microsoft.com/office/drawing/2014/main" id="{D3CF688B-DD4C-4660-99BA-264334BE3C30}"/>
+                <a16:creationId xmlns:a16="http://schemas.microsoft.com/office/drawing/2014/main" id="{A6D67A74-5C59-4A4F-ACD0-EB202F7A0704}"/>
               </a:ext>
             </a:extLst>
           </p:cNvPr>
@@ -5645,7 +5645,7 @@
           <p:cNvPr id="6" name="objective-1">
             <a:extLst xmlns:a="http://schemas.openxmlformats.org/drawingml/2006/main">
               <a:ext uri="{FF2B5EF4-FFF2-40B4-BE49-F238E27FC236}">
-                <a16:creationId xmlns:a16="http://schemas.microsoft.com/office/drawing/2014/main" id="{FDB76091-D8EE-4AC8-B4E5-0A0E00397B01}"/>
+                <a16:creationId xmlns:a16="http://schemas.microsoft.com/office/drawing/2014/main" id="{2D5980AA-954C-4418-A97A-6AD9528E4B9D}"/>
               </a:ext>
             </a:extLst>
           </p:cNvPr>
@@ -5732,7 +5732,7 @@
           <p:cNvPr id="7" name="objective-2">
             <a:extLst xmlns:a="http://schemas.openxmlformats.org/drawingml/2006/main">
               <a:ext uri="{FF2B5EF4-FFF2-40B4-BE49-F238E27FC236}">
-                <a16:creationId xmlns:a16="http://schemas.microsoft.com/office/drawing/2014/main" id="{FF6EDA49-ACB2-4D97-B1CB-F655A4B52157}"/>
+                <a16:creationId xmlns:a16="http://schemas.microsoft.com/office/drawing/2014/main" id="{D070A54A-2336-4808-B7F6-E246CC45ED86}"/>
               </a:ext>
             </a:extLst>
           </p:cNvPr>
@@ -5819,7 +5819,7 @@
           <p:cNvPr id="8" name="objective-3">
             <a:extLst xmlns:a="http://schemas.openxmlformats.org/drawingml/2006/main">
               <a:ext uri="{FF2B5EF4-FFF2-40B4-BE49-F238E27FC236}">
-                <a16:creationId xmlns:a16="http://schemas.microsoft.com/office/drawing/2014/main" id="{EBB2AA2C-5A25-4170-90D5-2B300343577B}"/>
+                <a16:creationId xmlns:a16="http://schemas.microsoft.com/office/drawing/2014/main" id="{5982A0D8-1A56-477B-BAE6-71B52461DB34}"/>
               </a:ext>
             </a:extLst>
           </p:cNvPr>
@@ -5906,7 +5906,7 @@
           <p:cNvPr id="9" name="objective-4">
             <a:extLst xmlns:a="http://schemas.openxmlformats.org/drawingml/2006/main">
               <a:ext uri="{FF2B5EF4-FFF2-40B4-BE49-F238E27FC236}">
-                <a16:creationId xmlns:a16="http://schemas.microsoft.com/office/drawing/2014/main" id="{B58A70E2-F7C5-404C-A765-A2B331C76422}"/>
+                <a16:creationId xmlns:a16="http://schemas.microsoft.com/office/drawing/2014/main" id="{029F0A36-5DFE-4231-B2AE-F2401F090F66}"/>
               </a:ext>
             </a:extLst>
           </p:cNvPr>
@@ -5991,7 +5991,7 @@
     </p:spTree>
     <p:extLst>
       <p:ext uri="{BB962C8B-B14F-4D97-AF65-F5344CB8AC3E}">
-        <p14:creationId xmlns:p14="http://schemas.microsoft.com/office/powerpoint/2010/main" val="658063286"/>
+        <p14:creationId xmlns:p14="http://schemas.microsoft.com/office/powerpoint/2010/main" val="610292024"/>
       </p:ext>
     </p:extLst>
   </p:cSld>
@@ -6022,7 +6022,7 @@
           <p:cNvPr id="1" name="s3-rule">
             <a:extLst xmlns:a="http://schemas.openxmlformats.org/drawingml/2006/main">
               <a:ext uri="{FF2B5EF4-FFF2-40B4-BE49-F238E27FC236}">
-                <a16:creationId xmlns:a16="http://schemas.microsoft.com/office/drawing/2014/main" id="{27B4FC80-C8AF-45AB-8C6F-1493A3DB70FF}"/>
+                <a16:creationId xmlns:a16="http://schemas.microsoft.com/office/drawing/2014/main" id="{B6695577-6DCA-4432-9FF0-73E94545D8DE}"/>
               </a:ext>
             </a:extLst>
           </p:cNvPr>
@@ -6055,7 +6055,7 @@
           <p:cNvPr id="2" name="s3-eyebrow">
             <a:extLst xmlns:a="http://schemas.openxmlformats.org/drawingml/2006/main">
               <a:ext uri="{FF2B5EF4-FFF2-40B4-BE49-F238E27FC236}">
-                <a16:creationId xmlns:a16="http://schemas.microsoft.com/office/drawing/2014/main" id="{3E1AF2CF-4F22-40DC-B13C-92E241719AB6}"/>
+                <a16:creationId xmlns:a16="http://schemas.microsoft.com/office/drawing/2014/main" id="{B1E3E368-792D-4BF2-8DBF-625085434E1F}"/>
               </a:ext>
             </a:extLst>
           </p:cNvPr>
@@ -6113,7 +6113,7 @@
           <p:cNvPr id="3" name="s3-title">
             <a:extLst xmlns:a="http://schemas.openxmlformats.org/drawingml/2006/main">
               <a:ext uri="{FF2B5EF4-FFF2-40B4-BE49-F238E27FC236}">
-                <a16:creationId xmlns:a16="http://schemas.microsoft.com/office/drawing/2014/main" id="{0FB69DB2-3F88-4E52-9062-798943976AF8}"/>
+                <a16:creationId xmlns:a16="http://schemas.microsoft.com/office/drawing/2014/main" id="{8C85C254-42E8-48E5-93A4-62BCED76416A}"/>
               </a:ext>
             </a:extLst>
           </p:cNvPr>
@@ -6171,7 +6171,7 @@
           <p:cNvPr id="4" name="s3-footer">
             <a:extLst xmlns:a="http://schemas.openxmlformats.org/drawingml/2006/main">
               <a:ext uri="{FF2B5EF4-FFF2-40B4-BE49-F238E27FC236}">
-                <a16:creationId xmlns:a16="http://schemas.microsoft.com/office/drawing/2014/main" id="{E95F60B2-6559-4819-A2F6-63947EA4D5F1}"/>
+                <a16:creationId xmlns:a16="http://schemas.microsoft.com/office/drawing/2014/main" id="{57EE7EE2-C5A8-408C-BB61-0A04062680E7}"/>
               </a:ext>
             </a:extLst>
           </p:cNvPr>
@@ -6202,7 +6202,7 @@
           <p:cNvPr id="5" name="s3-identity">
             <a:extLst xmlns:a="http://schemas.openxmlformats.org/drawingml/2006/main">
               <a:ext uri="{FF2B5EF4-FFF2-40B4-BE49-F238E27FC236}">
-                <a16:creationId xmlns:a16="http://schemas.microsoft.com/office/drawing/2014/main" id="{C0F90918-E806-4705-BB1E-46499E628C5A}"/>
+                <a16:creationId xmlns:a16="http://schemas.microsoft.com/office/drawing/2014/main" id="{CE41CDA8-AE39-4348-ADC8-C5C156007314}"/>
               </a:ext>
             </a:extLst>
           </p:cNvPr>
@@ -6260,7 +6260,7 @@
           <p:cNvPr id="6" name="core-no-0">
             <a:extLst xmlns:a="http://schemas.openxmlformats.org/drawingml/2006/main">
               <a:ext uri="{FF2B5EF4-FFF2-40B4-BE49-F238E27FC236}">
-                <a16:creationId xmlns:a16="http://schemas.microsoft.com/office/drawing/2014/main" id="{3E9EE767-9225-4C2B-B219-99D48483B7E6}"/>
+                <a16:creationId xmlns:a16="http://schemas.microsoft.com/office/drawing/2014/main" id="{76541DD7-5BAE-4F2D-90EB-1A713E7BD9D1}"/>
               </a:ext>
             </a:extLst>
           </p:cNvPr>
@@ -6318,7 +6318,7 @@
           <p:cNvPr id="7" name="core-label-0">
             <a:extLst xmlns:a="http://schemas.openxmlformats.org/drawingml/2006/main">
               <a:ext uri="{FF2B5EF4-FFF2-40B4-BE49-F238E27FC236}">
-                <a16:creationId xmlns:a16="http://schemas.microsoft.com/office/drawing/2014/main" id="{8323F7EE-402E-4E1D-877B-B2DA935F612E}"/>
+                <a16:creationId xmlns:a16="http://schemas.microsoft.com/office/drawing/2014/main" id="{7308B6E6-F8EA-453C-A907-6FF45BDBC3E7}"/>
               </a:ext>
             </a:extLst>
           </p:cNvPr>
@@ -6376,7 +6376,7 @@
           <p:cNvPr id="8" name="core-body-0">
             <a:extLst xmlns:a="http://schemas.openxmlformats.org/drawingml/2006/main">
               <a:ext uri="{FF2B5EF4-FFF2-40B4-BE49-F238E27FC236}">
-                <a16:creationId xmlns:a16="http://schemas.microsoft.com/office/drawing/2014/main" id="{FBFCF927-7750-43C9-9B4C-7E34B2855158}"/>
+                <a16:creationId xmlns:a16="http://schemas.microsoft.com/office/drawing/2014/main" id="{D73036EA-1FCA-44FB-A4CE-0E5DFF0543A3}"/>
               </a:ext>
             </a:extLst>
           </p:cNvPr>
@@ -6440,7 +6440,7 @@
           <p:cNvPr id="9" name="core-no-1">
             <a:extLst xmlns:a="http://schemas.openxmlformats.org/drawingml/2006/main">
               <a:ext uri="{FF2B5EF4-FFF2-40B4-BE49-F238E27FC236}">
-                <a16:creationId xmlns:a16="http://schemas.microsoft.com/office/drawing/2014/main" id="{8F1EEA52-9BB9-4C6E-99ED-3FCCACF7EB07}"/>
+                <a16:creationId xmlns:a16="http://schemas.microsoft.com/office/drawing/2014/main" id="{9A25B518-C5B7-40E4-8397-2692696D3B81}"/>
               </a:ext>
             </a:extLst>
           </p:cNvPr>
@@ -6498,7 +6498,7 @@
           <p:cNvPr id="10" name="core-body-1">
             <a:extLst xmlns:a="http://schemas.openxmlformats.org/drawingml/2006/main">
               <a:ext uri="{FF2B5EF4-FFF2-40B4-BE49-F238E27FC236}">
-                <a16:creationId xmlns:a16="http://schemas.microsoft.com/office/drawing/2014/main" id="{34BEE92C-EE56-4209-965F-B09C19550422}"/>
+                <a16:creationId xmlns:a16="http://schemas.microsoft.com/office/drawing/2014/main" id="{315596A1-E3FC-4C56-9285-E6A4A0CACD26}"/>
               </a:ext>
             </a:extLst>
           </p:cNvPr>
@@ -6562,7 +6562,7 @@
           <p:cNvPr id="11" name="s3-takeaway-rule">
             <a:extLst xmlns:a="http://schemas.openxmlformats.org/drawingml/2006/main">
               <a:ext uri="{FF2B5EF4-FFF2-40B4-BE49-F238E27FC236}">
-                <a16:creationId xmlns:a16="http://schemas.microsoft.com/office/drawing/2014/main" id="{9F8ED50D-A653-4C6C-ACEE-5C9DD2AD7238}"/>
+                <a16:creationId xmlns:a16="http://schemas.microsoft.com/office/drawing/2014/main" id="{41708314-D1B5-4B98-8B9A-C9482C5CAB26}"/>
               </a:ext>
             </a:extLst>
           </p:cNvPr>
@@ -6595,7 +6595,7 @@
           <p:cNvPr id="12" name="s3-takeaway">
             <a:extLst xmlns:a="http://schemas.openxmlformats.org/drawingml/2006/main">
               <a:ext uri="{FF2B5EF4-FFF2-40B4-BE49-F238E27FC236}">
-                <a16:creationId xmlns:a16="http://schemas.microsoft.com/office/drawing/2014/main" id="{5C23CFB5-B6A1-4A8A-A52D-E237DEE5B181}"/>
+                <a16:creationId xmlns:a16="http://schemas.microsoft.com/office/drawing/2014/main" id="{ECD1CAE3-26B2-401F-A095-B7EF76BFEA87}"/>
               </a:ext>
             </a:extLst>
           </p:cNvPr>
@@ -6651,7 +6651,7 @@
     </p:spTree>
     <p:extLst>
       <p:ext uri="{BB962C8B-B14F-4D97-AF65-F5344CB8AC3E}">
-        <p14:creationId xmlns:p14="http://schemas.microsoft.com/office/powerpoint/2010/main" val="1943356855"/>
+        <p14:creationId xmlns:p14="http://schemas.microsoft.com/office/powerpoint/2010/main" val="1508686868"/>
       </p:ext>
     </p:extLst>
   </p:cSld>
@@ -6682,7 +6682,7 @@
           <p:cNvPr id="1" name="s4-rule">
             <a:extLst xmlns:a="http://schemas.openxmlformats.org/drawingml/2006/main">
               <a:ext uri="{FF2B5EF4-FFF2-40B4-BE49-F238E27FC236}">
-                <a16:creationId xmlns:a16="http://schemas.microsoft.com/office/drawing/2014/main" id="{08224A1D-7200-45FF-80F3-503E9D28464C}"/>
+                <a16:creationId xmlns:a16="http://schemas.microsoft.com/office/drawing/2014/main" id="{313917AA-9703-4FA9-BD24-2637879C6CC9}"/>
               </a:ext>
             </a:extLst>
           </p:cNvPr>
@@ -6715,7 +6715,7 @@
           <p:cNvPr id="2" name="s4-eyebrow">
             <a:extLst xmlns:a="http://schemas.openxmlformats.org/drawingml/2006/main">
               <a:ext uri="{FF2B5EF4-FFF2-40B4-BE49-F238E27FC236}">
-                <a16:creationId xmlns:a16="http://schemas.microsoft.com/office/drawing/2014/main" id="{54767778-BA7F-47B1-9939-6132D4DB95D6}"/>
+                <a16:creationId xmlns:a16="http://schemas.microsoft.com/office/drawing/2014/main" id="{49695D54-0980-4B59-A905-222EC3426F16}"/>
               </a:ext>
             </a:extLst>
           </p:cNvPr>
@@ -6773,7 +6773,7 @@
           <p:cNvPr id="3" name="s4-title">
             <a:extLst xmlns:a="http://schemas.openxmlformats.org/drawingml/2006/main">
               <a:ext uri="{FF2B5EF4-FFF2-40B4-BE49-F238E27FC236}">
-                <a16:creationId xmlns:a16="http://schemas.microsoft.com/office/drawing/2014/main" id="{7A6C6EB7-F6A3-4FF2-B886-13F69A2DA4A4}"/>
+                <a16:creationId xmlns:a16="http://schemas.microsoft.com/office/drawing/2014/main" id="{AD785362-2295-4653-AEBF-9D644207E533}"/>
               </a:ext>
             </a:extLst>
           </p:cNvPr>
@@ -6831,7 +6831,7 @@
           <p:cNvPr id="4" name="s4-footer">
             <a:extLst xmlns:a="http://schemas.openxmlformats.org/drawingml/2006/main">
               <a:ext uri="{FF2B5EF4-FFF2-40B4-BE49-F238E27FC236}">
-                <a16:creationId xmlns:a16="http://schemas.microsoft.com/office/drawing/2014/main" id="{D9AA72F6-7005-4090-B094-8A473BC7BE36}"/>
+                <a16:creationId xmlns:a16="http://schemas.microsoft.com/office/drawing/2014/main" id="{AC417446-887A-44D9-9730-80D72395195D}"/>
               </a:ext>
             </a:extLst>
           </p:cNvPr>
@@ -6862,7 +6862,7 @@
           <p:cNvPr id="5" name="s4-identity">
             <a:extLst xmlns:a="http://schemas.openxmlformats.org/drawingml/2006/main">
               <a:ext uri="{FF2B5EF4-FFF2-40B4-BE49-F238E27FC236}">
-                <a16:creationId xmlns:a16="http://schemas.microsoft.com/office/drawing/2014/main" id="{19241235-C39F-4E68-8523-402ECFF47204}"/>
+                <a16:creationId xmlns:a16="http://schemas.microsoft.com/office/drawing/2014/main" id="{8FE621E1-C450-4E35-85C4-51FEEEF2AE48}"/>
               </a:ext>
             </a:extLst>
           </p:cNvPr>
@@ -6920,7 +6920,7 @@
           <p:cNvPr id="6" name="core-no-0">
             <a:extLst xmlns:a="http://schemas.openxmlformats.org/drawingml/2006/main">
               <a:ext uri="{FF2B5EF4-FFF2-40B4-BE49-F238E27FC236}">
-                <a16:creationId xmlns:a16="http://schemas.microsoft.com/office/drawing/2014/main" id="{6772F788-268F-46F9-B80C-F9A006EE122C}"/>
+                <a16:creationId xmlns:a16="http://schemas.microsoft.com/office/drawing/2014/main" id="{BB8CEEC7-9625-4212-BEDC-597C2E479125}"/>
               </a:ext>
             </a:extLst>
           </p:cNvPr>
@@ -6978,7 +6978,7 @@
           <p:cNvPr id="7" name="core-label-0">
             <a:extLst xmlns:a="http://schemas.openxmlformats.org/drawingml/2006/main">
               <a:ext uri="{FF2B5EF4-FFF2-40B4-BE49-F238E27FC236}">
-                <a16:creationId xmlns:a16="http://schemas.microsoft.com/office/drawing/2014/main" id="{214DC829-06EE-4544-97B7-BCA5BCB473A6}"/>
+                <a16:creationId xmlns:a16="http://schemas.microsoft.com/office/drawing/2014/main" id="{D09FA560-1AAB-4443-A7A7-6086F65B2E70}"/>
               </a:ext>
             </a:extLst>
           </p:cNvPr>
@@ -7036,7 +7036,7 @@
           <p:cNvPr id="8" name="core-body-0">
             <a:extLst xmlns:a="http://schemas.openxmlformats.org/drawingml/2006/main">
               <a:ext uri="{FF2B5EF4-FFF2-40B4-BE49-F238E27FC236}">
-                <a16:creationId xmlns:a16="http://schemas.microsoft.com/office/drawing/2014/main" id="{28D711A0-53AA-4538-BF1B-6C5832F69614}"/>
+                <a16:creationId xmlns:a16="http://schemas.microsoft.com/office/drawing/2014/main" id="{20E8A0C7-4D96-433A-8A9A-0A29F6962878}"/>
               </a:ext>
             </a:extLst>
           </p:cNvPr>
@@ -7100,7 +7100,7 @@
           <p:cNvPr id="9" name="core-no-1">
             <a:extLst xmlns:a="http://schemas.openxmlformats.org/drawingml/2006/main">
               <a:ext uri="{FF2B5EF4-FFF2-40B4-BE49-F238E27FC236}">
-                <a16:creationId xmlns:a16="http://schemas.microsoft.com/office/drawing/2014/main" id="{F1D4FD2D-65E9-417E-81D7-D7746B8ABA47}"/>
+                <a16:creationId xmlns:a16="http://schemas.microsoft.com/office/drawing/2014/main" id="{9ABFCF87-9C6D-434D-885B-E774BD596851}"/>
               </a:ext>
             </a:extLst>
           </p:cNvPr>
@@ -7158,7 +7158,7 @@
           <p:cNvPr id="10" name="core-body-1">
             <a:extLst xmlns:a="http://schemas.openxmlformats.org/drawingml/2006/main">
               <a:ext uri="{FF2B5EF4-FFF2-40B4-BE49-F238E27FC236}">
-                <a16:creationId xmlns:a16="http://schemas.microsoft.com/office/drawing/2014/main" id="{B12E3866-9BBF-459E-AE0D-6ED948A31EE4}"/>
+                <a16:creationId xmlns:a16="http://schemas.microsoft.com/office/drawing/2014/main" id="{25551116-D10A-4E2A-B1F2-68C109A10001}"/>
               </a:ext>
             </a:extLst>
           </p:cNvPr>
@@ -7222,7 +7222,7 @@
           <p:cNvPr id="11" name="s4-takeaway-rule">
             <a:extLst xmlns:a="http://schemas.openxmlformats.org/drawingml/2006/main">
               <a:ext uri="{FF2B5EF4-FFF2-40B4-BE49-F238E27FC236}">
-                <a16:creationId xmlns:a16="http://schemas.microsoft.com/office/drawing/2014/main" id="{7D7BE7D7-A717-4292-B863-4ECF3FBA0B05}"/>
+                <a16:creationId xmlns:a16="http://schemas.microsoft.com/office/drawing/2014/main" id="{2B61A61F-8BB9-4E9D-8CE3-AC7332A71FAE}"/>
               </a:ext>
             </a:extLst>
           </p:cNvPr>
@@ -7255,7 +7255,7 @@
           <p:cNvPr id="12" name="s4-takeaway">
             <a:extLst xmlns:a="http://schemas.openxmlformats.org/drawingml/2006/main">
               <a:ext uri="{FF2B5EF4-FFF2-40B4-BE49-F238E27FC236}">
-                <a16:creationId xmlns:a16="http://schemas.microsoft.com/office/drawing/2014/main" id="{9A505900-64BE-4C22-90CC-A9162688DDE3}"/>
+                <a16:creationId xmlns:a16="http://schemas.microsoft.com/office/drawing/2014/main" id="{0EC43DDF-9033-41B0-AE37-20033A3D4B35}"/>
               </a:ext>
             </a:extLst>
           </p:cNvPr>
@@ -7311,7 +7311,7 @@
     </p:spTree>
     <p:extLst>
       <p:ext uri="{BB962C8B-B14F-4D97-AF65-F5344CB8AC3E}">
-        <p14:creationId xmlns:p14="http://schemas.microsoft.com/office/powerpoint/2010/main" val="943498006"/>
+        <p14:creationId xmlns:p14="http://schemas.microsoft.com/office/powerpoint/2010/main" val="192231340"/>
       </p:ext>
     </p:extLst>
   </p:cSld>
@@ -7342,7 +7342,7 @@
           <p:cNvPr id="1" name="s5-rule">
             <a:extLst xmlns:a="http://schemas.openxmlformats.org/drawingml/2006/main">
               <a:ext uri="{FF2B5EF4-FFF2-40B4-BE49-F238E27FC236}">
-                <a16:creationId xmlns:a16="http://schemas.microsoft.com/office/drawing/2014/main" id="{4EAC4F5E-0068-4E78-8D49-E03A7636E9CD}"/>
+                <a16:creationId xmlns:a16="http://schemas.microsoft.com/office/drawing/2014/main" id="{6EE6F61C-CBA8-4C98-918D-63B2E1934C67}"/>
               </a:ext>
             </a:extLst>
           </p:cNvPr>
@@ -7375,7 +7375,7 @@
           <p:cNvPr id="2" name="s5-eyebrow">
             <a:extLst xmlns:a="http://schemas.openxmlformats.org/drawingml/2006/main">
               <a:ext uri="{FF2B5EF4-FFF2-40B4-BE49-F238E27FC236}">
-                <a16:creationId xmlns:a16="http://schemas.microsoft.com/office/drawing/2014/main" id="{09389617-4765-4C94-90CD-115D196032E9}"/>
+                <a16:creationId xmlns:a16="http://schemas.microsoft.com/office/drawing/2014/main" id="{813C23D5-0589-40D2-B105-769684CB4DE7}"/>
               </a:ext>
             </a:extLst>
           </p:cNvPr>
@@ -7433,7 +7433,7 @@
           <p:cNvPr id="3" name="s5-title">
             <a:extLst xmlns:a="http://schemas.openxmlformats.org/drawingml/2006/main">
               <a:ext uri="{FF2B5EF4-FFF2-40B4-BE49-F238E27FC236}">
-                <a16:creationId xmlns:a16="http://schemas.microsoft.com/office/drawing/2014/main" id="{D41A81A6-2945-4724-AC59-63E8FD0312F5}"/>
+                <a16:creationId xmlns:a16="http://schemas.microsoft.com/office/drawing/2014/main" id="{D69AE49E-4A9E-47A0-A297-A021BA1684C4}"/>
               </a:ext>
             </a:extLst>
           </p:cNvPr>
@@ -7491,7 +7491,7 @@
           <p:cNvPr id="4" name="s5-footer">
             <a:extLst xmlns:a="http://schemas.openxmlformats.org/drawingml/2006/main">
               <a:ext uri="{FF2B5EF4-FFF2-40B4-BE49-F238E27FC236}">
-                <a16:creationId xmlns:a16="http://schemas.microsoft.com/office/drawing/2014/main" id="{F26020EA-1B40-44AE-9ACA-645C6ABD4CBD}"/>
+                <a16:creationId xmlns:a16="http://schemas.microsoft.com/office/drawing/2014/main" id="{A490A6BD-BB5E-4C5D-943C-31A847C3272A}"/>
               </a:ext>
             </a:extLst>
           </p:cNvPr>
@@ -7522,7 +7522,7 @@
           <p:cNvPr id="5" name="s5-identity">
             <a:extLst xmlns:a="http://schemas.openxmlformats.org/drawingml/2006/main">
               <a:ext uri="{FF2B5EF4-FFF2-40B4-BE49-F238E27FC236}">
-                <a16:creationId xmlns:a16="http://schemas.microsoft.com/office/drawing/2014/main" id="{B37FE9DB-7122-4CF4-B13B-A8D9F6909E3C}"/>
+                <a16:creationId xmlns:a16="http://schemas.microsoft.com/office/drawing/2014/main" id="{691E5FAB-B1BE-44B2-9096-DC540986E5B6}"/>
               </a:ext>
             </a:extLst>
           </p:cNvPr>
@@ -7580,7 +7580,7 @@
           <p:cNvPr id="6" name="core-no-0">
             <a:extLst xmlns:a="http://schemas.openxmlformats.org/drawingml/2006/main">
               <a:ext uri="{FF2B5EF4-FFF2-40B4-BE49-F238E27FC236}">
-                <a16:creationId xmlns:a16="http://schemas.microsoft.com/office/drawing/2014/main" id="{BC0ADB4C-F533-48FD-B1C3-8E61DE360B35}"/>
+                <a16:creationId xmlns:a16="http://schemas.microsoft.com/office/drawing/2014/main" id="{0BAA3232-0DD8-4F2C-AFC8-B8F5DCAC98EE}"/>
               </a:ext>
             </a:extLst>
           </p:cNvPr>
@@ -7638,7 +7638,7 @@
           <p:cNvPr id="7" name="core-label-0">
             <a:extLst xmlns:a="http://schemas.openxmlformats.org/drawingml/2006/main">
               <a:ext uri="{FF2B5EF4-FFF2-40B4-BE49-F238E27FC236}">
-                <a16:creationId xmlns:a16="http://schemas.microsoft.com/office/drawing/2014/main" id="{E137D105-B294-4460-AB04-98C85691AB50}"/>
+                <a16:creationId xmlns:a16="http://schemas.microsoft.com/office/drawing/2014/main" id="{C9625053-02F9-4992-991A-4D9C27F85593}"/>
               </a:ext>
             </a:extLst>
           </p:cNvPr>
@@ -7696,7 +7696,7 @@
           <p:cNvPr id="8" name="core-body-0">
             <a:extLst xmlns:a="http://schemas.openxmlformats.org/drawingml/2006/main">
               <a:ext uri="{FF2B5EF4-FFF2-40B4-BE49-F238E27FC236}">
-                <a16:creationId xmlns:a16="http://schemas.microsoft.com/office/drawing/2014/main" id="{FFEFDD90-8255-464F-85B6-B0CD6E63424E}"/>
+                <a16:creationId xmlns:a16="http://schemas.microsoft.com/office/drawing/2014/main" id="{0CC39641-E5FB-41ED-B33E-6C3E689AD3F0}"/>
               </a:ext>
             </a:extLst>
           </p:cNvPr>
@@ -7760,7 +7760,7 @@
           <p:cNvPr id="9" name="core-no-1">
             <a:extLst xmlns:a="http://schemas.openxmlformats.org/drawingml/2006/main">
               <a:ext uri="{FF2B5EF4-FFF2-40B4-BE49-F238E27FC236}">
-                <a16:creationId xmlns:a16="http://schemas.microsoft.com/office/drawing/2014/main" id="{1F3602CE-2865-4118-B1D3-96AF63A94035}"/>
+                <a16:creationId xmlns:a16="http://schemas.microsoft.com/office/drawing/2014/main" id="{C70DB420-5E29-4BB4-B134-2108D19A640D}"/>
               </a:ext>
             </a:extLst>
           </p:cNvPr>
@@ -7818,7 +7818,7 @@
           <p:cNvPr id="10" name="core-body-1">
             <a:extLst xmlns:a="http://schemas.openxmlformats.org/drawingml/2006/main">
               <a:ext uri="{FF2B5EF4-FFF2-40B4-BE49-F238E27FC236}">
-                <a16:creationId xmlns:a16="http://schemas.microsoft.com/office/drawing/2014/main" id="{E4BF0C3E-016E-4EBC-94D7-66348815A5F4}"/>
+                <a16:creationId xmlns:a16="http://schemas.microsoft.com/office/drawing/2014/main" id="{F913D2A6-8895-4D7D-B0A8-E7DDD8D47F99}"/>
               </a:ext>
             </a:extLst>
           </p:cNvPr>
@@ -7882,7 +7882,7 @@
           <p:cNvPr id="11" name="s5-takeaway-rule">
             <a:extLst xmlns:a="http://schemas.openxmlformats.org/drawingml/2006/main">
               <a:ext uri="{FF2B5EF4-FFF2-40B4-BE49-F238E27FC236}">
-                <a16:creationId xmlns:a16="http://schemas.microsoft.com/office/drawing/2014/main" id="{2CD7A377-FFAB-4A8C-9013-BC6C70A3D3AC}"/>
+                <a16:creationId xmlns:a16="http://schemas.microsoft.com/office/drawing/2014/main" id="{4CA2E7F1-D596-4C6B-B9E7-D60C231D0574}"/>
               </a:ext>
             </a:extLst>
           </p:cNvPr>
@@ -7915,7 +7915,7 @@
           <p:cNvPr id="12" name="s5-takeaway">
             <a:extLst xmlns:a="http://schemas.openxmlformats.org/drawingml/2006/main">
               <a:ext uri="{FF2B5EF4-FFF2-40B4-BE49-F238E27FC236}">
-                <a16:creationId xmlns:a16="http://schemas.microsoft.com/office/drawing/2014/main" id="{3745B7FB-2B46-4493-B947-4957271A4D3D}"/>
+                <a16:creationId xmlns:a16="http://schemas.microsoft.com/office/drawing/2014/main" id="{A37F3E8C-86D5-4642-AA04-B4E912558AB2}"/>
               </a:ext>
             </a:extLst>
           </p:cNvPr>
@@ -7971,7 +7971,7 @@
     </p:spTree>
     <p:extLst>
       <p:ext uri="{BB962C8B-B14F-4D97-AF65-F5344CB8AC3E}">
-        <p14:creationId xmlns:p14="http://schemas.microsoft.com/office/powerpoint/2010/main" val="627070014"/>
+        <p14:creationId xmlns:p14="http://schemas.microsoft.com/office/powerpoint/2010/main" val="792429558"/>
       </p:ext>
     </p:extLst>
   </p:cSld>
@@ -8002,7 +8002,7 @@
           <p:cNvPr id="1" name="s6-rule">
             <a:extLst xmlns:a="http://schemas.openxmlformats.org/drawingml/2006/main">
               <a:ext uri="{FF2B5EF4-FFF2-40B4-BE49-F238E27FC236}">
-                <a16:creationId xmlns:a16="http://schemas.microsoft.com/office/drawing/2014/main" id="{9CF1B1DE-5B2A-45EA-AD8E-923A07479C87}"/>
+                <a16:creationId xmlns:a16="http://schemas.microsoft.com/office/drawing/2014/main" id="{69E24973-DBD4-4A94-9EFA-E545371AF068}"/>
               </a:ext>
             </a:extLst>
           </p:cNvPr>
@@ -8035,7 +8035,7 @@
           <p:cNvPr id="2" name="s6-eyebrow">
             <a:extLst xmlns:a="http://schemas.openxmlformats.org/drawingml/2006/main">
               <a:ext uri="{FF2B5EF4-FFF2-40B4-BE49-F238E27FC236}">
-                <a16:creationId xmlns:a16="http://schemas.microsoft.com/office/drawing/2014/main" id="{8767205E-EA9E-4CD2-8D22-840E571B91C7}"/>
+                <a16:creationId xmlns:a16="http://schemas.microsoft.com/office/drawing/2014/main" id="{2458E7B1-CBE7-4CDB-9A4A-A0EC9EC5B46B}"/>
               </a:ext>
             </a:extLst>
           </p:cNvPr>
@@ -8093,7 +8093,7 @@
           <p:cNvPr id="3" name="s6-title">
             <a:extLst xmlns:a="http://schemas.openxmlformats.org/drawingml/2006/main">
               <a:ext uri="{FF2B5EF4-FFF2-40B4-BE49-F238E27FC236}">
-                <a16:creationId xmlns:a16="http://schemas.microsoft.com/office/drawing/2014/main" id="{1D0AA0EB-C45E-41C2-9EFD-F4D8C309EAAD}"/>
+                <a16:creationId xmlns:a16="http://schemas.microsoft.com/office/drawing/2014/main" id="{AAD9113E-BEB8-43E6-B861-CC80A681BCEA}"/>
               </a:ext>
             </a:extLst>
           </p:cNvPr>
@@ -8151,7 +8151,7 @@
           <p:cNvPr id="4" name="s6-footer">
             <a:extLst xmlns:a="http://schemas.openxmlformats.org/drawingml/2006/main">
               <a:ext uri="{FF2B5EF4-FFF2-40B4-BE49-F238E27FC236}">
-                <a16:creationId xmlns:a16="http://schemas.microsoft.com/office/drawing/2014/main" id="{BFA3C083-E458-463F-A759-D803AFACC017}"/>
+                <a16:creationId xmlns:a16="http://schemas.microsoft.com/office/drawing/2014/main" id="{72FBF935-8DBC-4AEF-B3DE-15C77BA1B042}"/>
               </a:ext>
             </a:extLst>
           </p:cNvPr>
@@ -8182,7 +8182,7 @@
           <p:cNvPr id="5" name="s6-identity">
             <a:extLst xmlns:a="http://schemas.openxmlformats.org/drawingml/2006/main">
               <a:ext uri="{FF2B5EF4-FFF2-40B4-BE49-F238E27FC236}">
-                <a16:creationId xmlns:a16="http://schemas.microsoft.com/office/drawing/2014/main" id="{957DB8D3-3657-4945-A492-82FF6817EF70}"/>
+                <a16:creationId xmlns:a16="http://schemas.microsoft.com/office/drawing/2014/main" id="{5BC311C4-943C-46E2-8EBC-2BAFB4B98354}"/>
               </a:ext>
             </a:extLst>
           </p:cNvPr>
@@ -8240,7 +8240,7 @@
           <p:cNvPr id="6" name="core-no-0">
             <a:extLst xmlns:a="http://schemas.openxmlformats.org/drawingml/2006/main">
               <a:ext uri="{FF2B5EF4-FFF2-40B4-BE49-F238E27FC236}">
-                <a16:creationId xmlns:a16="http://schemas.microsoft.com/office/drawing/2014/main" id="{26FCB7D1-F447-44A7-B71B-483512B94EAD}"/>
+                <a16:creationId xmlns:a16="http://schemas.microsoft.com/office/drawing/2014/main" id="{E1AD5473-7963-477A-99A2-3178E149FE06}"/>
               </a:ext>
             </a:extLst>
           </p:cNvPr>
@@ -8298,7 +8298,7 @@
           <p:cNvPr id="7" name="core-label-0">
             <a:extLst xmlns:a="http://schemas.openxmlformats.org/drawingml/2006/main">
               <a:ext uri="{FF2B5EF4-FFF2-40B4-BE49-F238E27FC236}">
-                <a16:creationId xmlns:a16="http://schemas.microsoft.com/office/drawing/2014/main" id="{487660F8-4A39-4772-A5B6-6812B5559A85}"/>
+                <a16:creationId xmlns:a16="http://schemas.microsoft.com/office/drawing/2014/main" id="{08C33F64-C4C0-4A24-BD46-6F1DBECE1121}"/>
               </a:ext>
             </a:extLst>
           </p:cNvPr>
@@ -8356,7 +8356,7 @@
           <p:cNvPr id="8" name="core-body-0">
             <a:extLst xmlns:a="http://schemas.openxmlformats.org/drawingml/2006/main">
               <a:ext uri="{FF2B5EF4-FFF2-40B4-BE49-F238E27FC236}">
-                <a16:creationId xmlns:a16="http://schemas.microsoft.com/office/drawing/2014/main" id="{395CE71F-554B-4F0E-8ED1-7127C787F768}"/>
+                <a16:creationId xmlns:a16="http://schemas.microsoft.com/office/drawing/2014/main" id="{45A5F881-099E-4D63-8673-8B931EDC9E58}"/>
               </a:ext>
             </a:extLst>
           </p:cNvPr>
@@ -8420,7 +8420,7 @@
           <p:cNvPr id="9" name="core-no-1">
             <a:extLst xmlns:a="http://schemas.openxmlformats.org/drawingml/2006/main">
               <a:ext uri="{FF2B5EF4-FFF2-40B4-BE49-F238E27FC236}">
-                <a16:creationId xmlns:a16="http://schemas.microsoft.com/office/drawing/2014/main" id="{10D8E6D2-A16B-431A-82FA-828CB88CCC08}"/>
+                <a16:creationId xmlns:a16="http://schemas.microsoft.com/office/drawing/2014/main" id="{72273AAC-053D-4CB9-8B72-FA6EF262C985}"/>
               </a:ext>
             </a:extLst>
           </p:cNvPr>
@@ -8478,7 +8478,7 @@
           <p:cNvPr id="10" name="core-body-1">
             <a:extLst xmlns:a="http://schemas.openxmlformats.org/drawingml/2006/main">
               <a:ext uri="{FF2B5EF4-FFF2-40B4-BE49-F238E27FC236}">
-                <a16:creationId xmlns:a16="http://schemas.microsoft.com/office/drawing/2014/main" id="{88EF9DB4-2262-4098-9AE7-0A5371A96995}"/>
+                <a16:creationId xmlns:a16="http://schemas.microsoft.com/office/drawing/2014/main" id="{EFDE881C-6D2F-4529-81A0-84314D482B87}"/>
               </a:ext>
             </a:extLst>
           </p:cNvPr>
@@ -8542,7 +8542,7 @@
           <p:cNvPr id="11" name="s6-takeaway-rule">
             <a:extLst xmlns:a="http://schemas.openxmlformats.org/drawingml/2006/main">
               <a:ext uri="{FF2B5EF4-FFF2-40B4-BE49-F238E27FC236}">
-                <a16:creationId xmlns:a16="http://schemas.microsoft.com/office/drawing/2014/main" id="{9839DB78-FE51-405E-BC51-D13387E8F3F9}"/>
+                <a16:creationId xmlns:a16="http://schemas.microsoft.com/office/drawing/2014/main" id="{C5EF7210-FA00-49F2-A042-DD3B9B816D51}"/>
               </a:ext>
             </a:extLst>
           </p:cNvPr>
@@ -8575,7 +8575,7 @@
           <p:cNvPr id="12" name="s6-takeaway">
             <a:extLst xmlns:a="http://schemas.openxmlformats.org/drawingml/2006/main">
               <a:ext uri="{FF2B5EF4-FFF2-40B4-BE49-F238E27FC236}">
-                <a16:creationId xmlns:a16="http://schemas.microsoft.com/office/drawing/2014/main" id="{76549E94-702A-4AB5-AB04-3EB5EC3E7D4E}"/>
+                <a16:creationId xmlns:a16="http://schemas.microsoft.com/office/drawing/2014/main" id="{E6F0FBCC-F2DB-4C6F-B6E0-C12846B980A4}"/>
               </a:ext>
             </a:extLst>
           </p:cNvPr>
@@ -8631,7 +8631,7 @@
     </p:spTree>
     <p:extLst>
       <p:ext uri="{BB962C8B-B14F-4D97-AF65-F5344CB8AC3E}">
-        <p14:creationId xmlns:p14="http://schemas.microsoft.com/office/powerpoint/2010/main" val="1739442698"/>
+        <p14:creationId xmlns:p14="http://schemas.microsoft.com/office/powerpoint/2010/main" val="614759936"/>
       </p:ext>
     </p:extLst>
   </p:cSld>
@@ -8662,7 +8662,7 @@
           <p:cNvPr id="1" name="s7-rule">
             <a:extLst xmlns:a="http://schemas.openxmlformats.org/drawingml/2006/main">
               <a:ext uri="{FF2B5EF4-FFF2-40B4-BE49-F238E27FC236}">
-                <a16:creationId xmlns:a16="http://schemas.microsoft.com/office/drawing/2014/main" id="{4C57E0A8-93C8-4479-BBB3-CE201D34D1BC}"/>
+                <a16:creationId xmlns:a16="http://schemas.microsoft.com/office/drawing/2014/main" id="{93B8C0B9-724E-4DA8-8CCC-5BCEF3C71A04}"/>
               </a:ext>
             </a:extLst>
           </p:cNvPr>
@@ -8695,7 +8695,7 @@
           <p:cNvPr id="2" name="s7-eyebrow">
             <a:extLst xmlns:a="http://schemas.openxmlformats.org/drawingml/2006/main">
               <a:ext uri="{FF2B5EF4-FFF2-40B4-BE49-F238E27FC236}">
-                <a16:creationId xmlns:a16="http://schemas.microsoft.com/office/drawing/2014/main" id="{99950D47-997A-4D31-BDAA-5468653CA028}"/>
+                <a16:creationId xmlns:a16="http://schemas.microsoft.com/office/drawing/2014/main" id="{EC536773-0313-486F-81BD-8E88C5537456}"/>
               </a:ext>
             </a:extLst>
           </p:cNvPr>
@@ -8753,7 +8753,7 @@
           <p:cNvPr id="3" name="s7-title">
             <a:extLst xmlns:a="http://schemas.openxmlformats.org/drawingml/2006/main">
               <a:ext uri="{FF2B5EF4-FFF2-40B4-BE49-F238E27FC236}">
-                <a16:creationId xmlns:a16="http://schemas.microsoft.com/office/drawing/2014/main" id="{164F3F65-E56F-49CD-A594-56FF1789065D}"/>
+                <a16:creationId xmlns:a16="http://schemas.microsoft.com/office/drawing/2014/main" id="{E39B1CDD-33CF-4690-91D4-A23D25B635A9}"/>
               </a:ext>
             </a:extLst>
           </p:cNvPr>
@@ -8811,7 +8811,7 @@
           <p:cNvPr id="4" name="s7-footer">
             <a:extLst xmlns:a="http://schemas.openxmlformats.org/drawingml/2006/main">
               <a:ext uri="{FF2B5EF4-FFF2-40B4-BE49-F238E27FC236}">
-                <a16:creationId xmlns:a16="http://schemas.microsoft.com/office/drawing/2014/main" id="{62635134-7FE0-43A5-A53D-C5AF78F66711}"/>
+                <a16:creationId xmlns:a16="http://schemas.microsoft.com/office/drawing/2014/main" id="{EB133A26-D7AA-4BC9-A504-DF72C7DAF442}"/>
               </a:ext>
             </a:extLst>
           </p:cNvPr>
@@ -8842,7 +8842,7 @@
           <p:cNvPr id="5" name="s7-identity">
             <a:extLst xmlns:a="http://schemas.openxmlformats.org/drawingml/2006/main">
               <a:ext uri="{FF2B5EF4-FFF2-40B4-BE49-F238E27FC236}">
-                <a16:creationId xmlns:a16="http://schemas.microsoft.com/office/drawing/2014/main" id="{96DA1DCF-D360-4BB4-AE80-798906ED9152}"/>
+                <a16:creationId xmlns:a16="http://schemas.microsoft.com/office/drawing/2014/main" id="{4E4089EC-F5C5-4C71-A8FD-7B223A1075EF}"/>
               </a:ext>
             </a:extLst>
           </p:cNvPr>
@@ -8900,7 +8900,7 @@
           <p:cNvPr id="6" name="core-no-0">
             <a:extLst xmlns:a="http://schemas.openxmlformats.org/drawingml/2006/main">
               <a:ext uri="{FF2B5EF4-FFF2-40B4-BE49-F238E27FC236}">
-                <a16:creationId xmlns:a16="http://schemas.microsoft.com/office/drawing/2014/main" id="{96DC3251-D9A2-4BDD-B17B-A5383E31A64A}"/>
+                <a16:creationId xmlns:a16="http://schemas.microsoft.com/office/drawing/2014/main" id="{6859DE98-A03C-4A16-9DF1-E7110BBD4429}"/>
               </a:ext>
             </a:extLst>
           </p:cNvPr>
@@ -8958,7 +8958,7 @@
           <p:cNvPr id="7" name="core-label-0">
             <a:extLst xmlns:a="http://schemas.openxmlformats.org/drawingml/2006/main">
               <a:ext uri="{FF2B5EF4-FFF2-40B4-BE49-F238E27FC236}">
-                <a16:creationId xmlns:a16="http://schemas.microsoft.com/office/drawing/2014/main" id="{FA59E678-D445-434A-B00F-0045ADB15E32}"/>
+                <a16:creationId xmlns:a16="http://schemas.microsoft.com/office/drawing/2014/main" id="{B24A9AAD-42EE-4379-9EC5-89C311F7864B}"/>
               </a:ext>
             </a:extLst>
           </p:cNvPr>
@@ -9016,7 +9016,7 @@
           <p:cNvPr id="8" name="core-body-0">
             <a:extLst xmlns:a="http://schemas.openxmlformats.org/drawingml/2006/main">
               <a:ext uri="{FF2B5EF4-FFF2-40B4-BE49-F238E27FC236}">
-                <a16:creationId xmlns:a16="http://schemas.microsoft.com/office/drawing/2014/main" id="{B64ACB5D-CDC2-4191-8A11-4E7FD14984EC}"/>
+                <a16:creationId xmlns:a16="http://schemas.microsoft.com/office/drawing/2014/main" id="{063E8EDB-A11A-4648-B667-BE2E7BF53B22}"/>
               </a:ext>
             </a:extLst>
           </p:cNvPr>
@@ -9080,7 +9080,7 @@
           <p:cNvPr id="9" name="core-no-1">
             <a:extLst xmlns:a="http://schemas.openxmlformats.org/drawingml/2006/main">
               <a:ext uri="{FF2B5EF4-FFF2-40B4-BE49-F238E27FC236}">
-                <a16:creationId xmlns:a16="http://schemas.microsoft.com/office/drawing/2014/main" id="{B535BB83-425F-4511-939F-982FDD95DEF7}"/>
+                <a16:creationId xmlns:a16="http://schemas.microsoft.com/office/drawing/2014/main" id="{5B68EF3C-5B8B-457E-8BB7-1F38B97B19AD}"/>
               </a:ext>
             </a:extLst>
           </p:cNvPr>
@@ -9138,7 +9138,7 @@
           <p:cNvPr id="10" name="core-body-1">
             <a:extLst xmlns:a="http://schemas.openxmlformats.org/drawingml/2006/main">
               <a:ext uri="{FF2B5EF4-FFF2-40B4-BE49-F238E27FC236}">
-                <a16:creationId xmlns:a16="http://schemas.microsoft.com/office/drawing/2014/main" id="{2718C761-B01D-4FE6-ACC8-CCF573BF9629}"/>
+                <a16:creationId xmlns:a16="http://schemas.microsoft.com/office/drawing/2014/main" id="{C699C4B2-11BC-4FCE-8048-E5AE29C054F0}"/>
               </a:ext>
             </a:extLst>
           </p:cNvPr>
@@ -9202,7 +9202,7 @@
           <p:cNvPr id="11" name="s7-takeaway-rule">
             <a:extLst xmlns:a="http://schemas.openxmlformats.org/drawingml/2006/main">
               <a:ext uri="{FF2B5EF4-FFF2-40B4-BE49-F238E27FC236}">
-                <a16:creationId xmlns:a16="http://schemas.microsoft.com/office/drawing/2014/main" id="{D2A8DD6B-D095-470B-ACC0-74FAC996191F}"/>
+                <a16:creationId xmlns:a16="http://schemas.microsoft.com/office/drawing/2014/main" id="{3F87311C-FF21-4735-9C48-498BE6D13D7B}"/>
               </a:ext>
             </a:extLst>
           </p:cNvPr>
@@ -9235,7 +9235,7 @@
           <p:cNvPr id="12" name="s7-takeaway">
             <a:extLst xmlns:a="http://schemas.openxmlformats.org/drawingml/2006/main">
               <a:ext uri="{FF2B5EF4-FFF2-40B4-BE49-F238E27FC236}">
-                <a16:creationId xmlns:a16="http://schemas.microsoft.com/office/drawing/2014/main" id="{90426AF1-1B0B-4733-8DA9-602E3AFD1B1E}"/>
+                <a16:creationId xmlns:a16="http://schemas.microsoft.com/office/drawing/2014/main" id="{3FE2B621-D1A8-4E90-BE6F-7EA724B430DE}"/>
               </a:ext>
             </a:extLst>
           </p:cNvPr>
@@ -9291,7 +9291,7 @@
     </p:spTree>
     <p:extLst>
       <p:ext uri="{BB962C8B-B14F-4D97-AF65-F5344CB8AC3E}">
-        <p14:creationId xmlns:p14="http://schemas.microsoft.com/office/powerpoint/2010/main" val="2039880332"/>
+        <p14:creationId xmlns:p14="http://schemas.microsoft.com/office/powerpoint/2010/main" val="1575371676"/>
       </p:ext>
     </p:extLst>
   </p:cSld>
@@ -9322,7 +9322,7 @@
           <p:cNvPr id="1" name="s8-rule">
             <a:extLst xmlns:a="http://schemas.openxmlformats.org/drawingml/2006/main">
               <a:ext uri="{FF2B5EF4-FFF2-40B4-BE49-F238E27FC236}">
-                <a16:creationId xmlns:a16="http://schemas.microsoft.com/office/drawing/2014/main" id="{758F4D8C-E2B7-4F4F-8E83-652BC6B67D0B}"/>
+                <a16:creationId xmlns:a16="http://schemas.microsoft.com/office/drawing/2014/main" id="{1995FD10-9B76-448D-BE0F-08BCAA3BB071}"/>
               </a:ext>
             </a:extLst>
           </p:cNvPr>
@@ -9355,7 +9355,7 @@
           <p:cNvPr id="2" name="s8-eyebrow">
             <a:extLst xmlns:a="http://schemas.openxmlformats.org/drawingml/2006/main">
               <a:ext uri="{FF2B5EF4-FFF2-40B4-BE49-F238E27FC236}">
-                <a16:creationId xmlns:a16="http://schemas.microsoft.com/office/drawing/2014/main" id="{84CED1B9-916C-42A7-831C-C610DE3E2BB3}"/>
+                <a16:creationId xmlns:a16="http://schemas.microsoft.com/office/drawing/2014/main" id="{CBF98698-B78D-4228-8125-666C4F531002}"/>
               </a:ext>
             </a:extLst>
           </p:cNvPr>
@@ -9413,7 +9413,7 @@
           <p:cNvPr id="3" name="s8-title">
             <a:extLst xmlns:a="http://schemas.openxmlformats.org/drawingml/2006/main">
               <a:ext uri="{FF2B5EF4-FFF2-40B4-BE49-F238E27FC236}">
-                <a16:creationId xmlns:a16="http://schemas.microsoft.com/office/drawing/2014/main" id="{14320204-5224-4050-B9CB-855DB8A03D91}"/>
+                <a16:creationId xmlns:a16="http://schemas.microsoft.com/office/drawing/2014/main" id="{4170ED24-E7B4-4264-A8A4-5311ACBAED00}"/>
               </a:ext>
             </a:extLst>
           </p:cNvPr>
@@ -9471,7 +9471,7 @@
           <p:cNvPr id="4" name="s8-footer">
             <a:extLst xmlns:a="http://schemas.openxmlformats.org/drawingml/2006/main">
               <a:ext uri="{FF2B5EF4-FFF2-40B4-BE49-F238E27FC236}">
-                <a16:creationId xmlns:a16="http://schemas.microsoft.com/office/drawing/2014/main" id="{B5E09FEC-3D23-48DB-AAF0-686A69E894DF}"/>
+                <a16:creationId xmlns:a16="http://schemas.microsoft.com/office/drawing/2014/main" id="{02C87522-BE75-4AE0-9803-D97E3C3CEF2B}"/>
               </a:ext>
             </a:extLst>
           </p:cNvPr>
@@ -9502,7 +9502,7 @@
           <p:cNvPr id="5" name="s8-identity">
             <a:extLst xmlns:a="http://schemas.openxmlformats.org/drawingml/2006/main">
               <a:ext uri="{FF2B5EF4-FFF2-40B4-BE49-F238E27FC236}">
-                <a16:creationId xmlns:a16="http://schemas.microsoft.com/office/drawing/2014/main" id="{68A56522-7E14-4DF3-9DFC-323149F4AFA6}"/>
+                <a16:creationId xmlns:a16="http://schemas.microsoft.com/office/drawing/2014/main" id="{F635261A-A681-4717-A9D6-26A358AB1275}"/>
               </a:ext>
             </a:extLst>
           </p:cNvPr>
@@ -9560,7 +9560,7 @@
           <p:cNvPr id="6" name="core-no-0">
             <a:extLst xmlns:a="http://schemas.openxmlformats.org/drawingml/2006/main">
               <a:ext uri="{FF2B5EF4-FFF2-40B4-BE49-F238E27FC236}">
-                <a16:creationId xmlns:a16="http://schemas.microsoft.com/office/drawing/2014/main" id="{95CD51B2-D341-4CB4-81A2-25918F7993AB}"/>
+                <a16:creationId xmlns:a16="http://schemas.microsoft.com/office/drawing/2014/main" id="{48C4CF8A-645E-4BD0-9D8F-5A5F0962D915}"/>
               </a:ext>
             </a:extLst>
           </p:cNvPr>
@@ -9618,7 +9618,7 @@
           <p:cNvPr id="7" name="core-label-0">
             <a:extLst xmlns:a="http://schemas.openxmlformats.org/drawingml/2006/main">
               <a:ext uri="{FF2B5EF4-FFF2-40B4-BE49-F238E27FC236}">
-                <a16:creationId xmlns:a16="http://schemas.microsoft.com/office/drawing/2014/main" id="{6084F8F1-A8B6-4341-9D4F-EED7F9DA4560}"/>
+                <a16:creationId xmlns:a16="http://schemas.microsoft.com/office/drawing/2014/main" id="{85C6619F-41B9-4D1A-8628-D01FC3A6F4F6}"/>
               </a:ext>
             </a:extLst>
           </p:cNvPr>
@@ -9676,7 +9676,7 @@
           <p:cNvPr id="8" name="core-body-0">
             <a:extLst xmlns:a="http://schemas.openxmlformats.org/drawingml/2006/main">
               <a:ext uri="{FF2B5EF4-FFF2-40B4-BE49-F238E27FC236}">
-                <a16:creationId xmlns:a16="http://schemas.microsoft.com/office/drawing/2014/main" id="{B04D4601-1E5F-40A9-BF54-CEB803CACF66}"/>
+                <a16:creationId xmlns:a16="http://schemas.microsoft.com/office/drawing/2014/main" id="{EE8925B4-8EFE-4C1A-A7B4-F17CBA54759E}"/>
               </a:ext>
             </a:extLst>
           </p:cNvPr>
@@ -9740,7 +9740,7 @@
           <p:cNvPr id="9" name="core-no-1">
             <a:extLst xmlns:a="http://schemas.openxmlformats.org/drawingml/2006/main">
               <a:ext uri="{FF2B5EF4-FFF2-40B4-BE49-F238E27FC236}">
-                <a16:creationId xmlns:a16="http://schemas.microsoft.com/office/drawing/2014/main" id="{ECCC4F4B-F4A6-4FCC-A16F-A7E7C71F90ED}"/>
+                <a16:creationId xmlns:a16="http://schemas.microsoft.com/office/drawing/2014/main" id="{A92DD8B4-6B97-4542-B27D-9DF4B877CD95}"/>
               </a:ext>
             </a:extLst>
           </p:cNvPr>
@@ -9798,7 +9798,7 @@
           <p:cNvPr id="10" name="core-body-1">
             <a:extLst xmlns:a="http://schemas.openxmlformats.org/drawingml/2006/main">
               <a:ext uri="{FF2B5EF4-FFF2-40B4-BE49-F238E27FC236}">
-                <a16:creationId xmlns:a16="http://schemas.microsoft.com/office/drawing/2014/main" id="{F8B1489E-125C-4F2D-B7C0-D474EE35BAA6}"/>
+                <a16:creationId xmlns:a16="http://schemas.microsoft.com/office/drawing/2014/main" id="{FADD7848-3CEC-4167-B67F-78F3645D7019}"/>
               </a:ext>
             </a:extLst>
           </p:cNvPr>
@@ -9862,7 +9862,7 @@
           <p:cNvPr id="11" name="s8-takeaway-rule">
             <a:extLst xmlns:a="http://schemas.openxmlformats.org/drawingml/2006/main">
               <a:ext uri="{FF2B5EF4-FFF2-40B4-BE49-F238E27FC236}">
-                <a16:creationId xmlns:a16="http://schemas.microsoft.com/office/drawing/2014/main" id="{9D58A82B-0F7F-45E5-B492-2C69792B1D1D}"/>
+                <a16:creationId xmlns:a16="http://schemas.microsoft.com/office/drawing/2014/main" id="{A2C4AB7E-8DAA-461C-B4B7-2D5E47C9BC75}"/>
               </a:ext>
             </a:extLst>
           </p:cNvPr>
@@ -9895,7 +9895,7 @@
           <p:cNvPr id="12" name="s8-takeaway">
             <a:extLst xmlns:a="http://schemas.openxmlformats.org/drawingml/2006/main">
               <a:ext uri="{FF2B5EF4-FFF2-40B4-BE49-F238E27FC236}">
-                <a16:creationId xmlns:a16="http://schemas.microsoft.com/office/drawing/2014/main" id="{3A5CF60E-9D7E-4CCE-A3A7-07A4CCCE1544}"/>
+                <a16:creationId xmlns:a16="http://schemas.microsoft.com/office/drawing/2014/main" id="{7D80AA84-4B11-4BCF-AAD1-A6869EAC425A}"/>
               </a:ext>
             </a:extLst>
           </p:cNvPr>
@@ -9951,7 +9951,7 @@
     </p:spTree>
     <p:extLst>
       <p:ext uri="{BB962C8B-B14F-4D97-AF65-F5344CB8AC3E}">
-        <p14:creationId xmlns:p14="http://schemas.microsoft.com/office/powerpoint/2010/main" val="252121385"/>
+        <p14:creationId xmlns:p14="http://schemas.microsoft.com/office/powerpoint/2010/main" val="667633067"/>
       </p:ext>
     </p:extLst>
   </p:cSld>
@@ -9982,7 +9982,7 @@
           <p:cNvPr id="1" name="s9-rule">
             <a:extLst xmlns:a="http://schemas.openxmlformats.org/drawingml/2006/main">
               <a:ext uri="{FF2B5EF4-FFF2-40B4-BE49-F238E27FC236}">
-                <a16:creationId xmlns:a16="http://schemas.microsoft.com/office/drawing/2014/main" id="{E4261CC7-F28B-40D9-903B-C829D49EC1E2}"/>
+                <a16:creationId xmlns:a16="http://schemas.microsoft.com/office/drawing/2014/main" id="{6D87EBC6-DBE9-44D2-9FAB-6A01F553BAAA}"/>
               </a:ext>
             </a:extLst>
           </p:cNvPr>
@@ -10015,7 +10015,7 @@
           <p:cNvPr id="2" name="s9-eyebrow">
             <a:extLst xmlns:a="http://schemas.openxmlformats.org/drawingml/2006/main">
               <a:ext uri="{FF2B5EF4-FFF2-40B4-BE49-F238E27FC236}">
-                <a16:creationId xmlns:a16="http://schemas.microsoft.com/office/drawing/2014/main" id="{56BEC542-8DC3-41D3-AEFF-FD9E1F65EFF5}"/>
+                <a16:creationId xmlns:a16="http://schemas.microsoft.com/office/drawing/2014/main" id="{9A90D10B-4B5D-41AF-892A-392AAF26A534}"/>
               </a:ext>
             </a:extLst>
           </p:cNvPr>
@@ -10073,7 +10073,7 @@
           <p:cNvPr id="3" name="s9-title">
             <a:extLst xmlns:a="http://schemas.openxmlformats.org/drawingml/2006/main">
               <a:ext uri="{FF2B5EF4-FFF2-40B4-BE49-F238E27FC236}">
-                <a16:creationId xmlns:a16="http://schemas.microsoft.com/office/drawing/2014/main" id="{1C22F807-4580-46E4-A020-52470B8B3DE0}"/>
+                <a16:creationId xmlns:a16="http://schemas.microsoft.com/office/drawing/2014/main" id="{23ECD566-0CA4-43AE-9B32-B2AB3197093B}"/>
               </a:ext>
             </a:extLst>
           </p:cNvPr>
@@ -10131,7 +10131,7 @@
           <p:cNvPr id="4" name="s9-footer">
             <a:extLst xmlns:a="http://schemas.openxmlformats.org/drawingml/2006/main">
               <a:ext uri="{FF2B5EF4-FFF2-40B4-BE49-F238E27FC236}">
-                <a16:creationId xmlns:a16="http://schemas.microsoft.com/office/drawing/2014/main" id="{E1276166-7B22-43AC-8EB6-E1FD8A8A71E8}"/>
+                <a16:creationId xmlns:a16="http://schemas.microsoft.com/office/drawing/2014/main" id="{7411B798-24FB-4F3C-8DBD-F3D449FFCCBB}"/>
               </a:ext>
             </a:extLst>
           </p:cNvPr>
@@ -10162,7 +10162,7 @@
           <p:cNvPr id="5" name="s9-identity">
             <a:extLst xmlns:a="http://schemas.openxmlformats.org/drawingml/2006/main">
               <a:ext uri="{FF2B5EF4-FFF2-40B4-BE49-F238E27FC236}">
-                <a16:creationId xmlns:a16="http://schemas.microsoft.com/office/drawing/2014/main" id="{9D4C8AA5-7590-494D-90F5-C3BDBA5F7EF8}"/>
+                <a16:creationId xmlns:a16="http://schemas.microsoft.com/office/drawing/2014/main" id="{550EA84E-06A9-4DB2-9B2B-F5C0F9EAA568}"/>
               </a:ext>
             </a:extLst>
           </p:cNvPr>
@@ -10220,7 +10220,7 @@
           <p:cNvPr id="6" name="case-title">
             <a:extLst xmlns:a="http://schemas.openxmlformats.org/drawingml/2006/main">
               <a:ext uri="{FF2B5EF4-FFF2-40B4-BE49-F238E27FC236}">
-                <a16:creationId xmlns:a16="http://schemas.microsoft.com/office/drawing/2014/main" id="{B587288B-5B9B-4EAE-91A7-4C4944AD8214}"/>
+                <a16:creationId xmlns:a16="http://schemas.microsoft.com/office/drawing/2014/main" id="{942D92CB-5188-4120-AA4E-6889E815A3DA}"/>
               </a:ext>
             </a:extLst>
           </p:cNvPr>
@@ -10284,7 +10284,7 @@
           <p:cNvPr id="7" name="case-row-0">
             <a:extLst xmlns:a="http://schemas.openxmlformats.org/drawingml/2006/main">
               <a:ext uri="{FF2B5EF4-FFF2-40B4-BE49-F238E27FC236}">
-                <a16:creationId xmlns:a16="http://schemas.microsoft.com/office/drawing/2014/main" id="{1CC557B4-78C9-4F66-98B7-E4F5648BC36B}"/>
+                <a16:creationId xmlns:a16="http://schemas.microsoft.com/office/drawing/2014/main" id="{FCE8ED96-0166-4FC0-83C3-C575FC4BD4E1}"/>
               </a:ext>
             </a:extLst>
           </p:cNvPr>
@@ -10348,7 +10348,7 @@
           <p:cNvPr id="8" name="case-row-1">
             <a:extLst xmlns:a="http://schemas.openxmlformats.org/drawingml/2006/main">
               <a:ext uri="{FF2B5EF4-FFF2-40B4-BE49-F238E27FC236}">
-                <a16:creationId xmlns:a16="http://schemas.microsoft.com/office/drawing/2014/main" id="{19784D97-9036-4890-81BA-F81D2C0D81F7}"/>
+                <a16:creationId xmlns:a16="http://schemas.microsoft.com/office/drawing/2014/main" id="{2FE0FF5B-7336-4E93-8EC0-634415EC4820}"/>
               </a:ext>
             </a:extLst>
           </p:cNvPr>
@@ -10412,7 +10412,7 @@
           <p:cNvPr id="9" name="case-row-2">
             <a:extLst xmlns:a="http://schemas.openxmlformats.org/drawingml/2006/main">
               <a:ext uri="{FF2B5EF4-FFF2-40B4-BE49-F238E27FC236}">
-                <a16:creationId xmlns:a16="http://schemas.microsoft.com/office/drawing/2014/main" id="{118F0E3C-993C-440A-8395-83C371F04B01}"/>
+                <a16:creationId xmlns:a16="http://schemas.microsoft.com/office/drawing/2014/main" id="{745B6138-7156-4EED-968C-82F077A3B4DD}"/>
               </a:ext>
             </a:extLst>
           </p:cNvPr>
@@ -10476,7 +10476,7 @@
           <p:cNvPr id="10" name="case-row-3">
             <a:extLst xmlns:a="http://schemas.openxmlformats.org/drawingml/2006/main">
               <a:ext uri="{FF2B5EF4-FFF2-40B4-BE49-F238E27FC236}">
-                <a16:creationId xmlns:a16="http://schemas.microsoft.com/office/drawing/2014/main" id="{E72415B1-1ED7-45CB-818C-A5D0E21C92B3}"/>
+                <a16:creationId xmlns:a16="http://schemas.microsoft.com/office/drawing/2014/main" id="{F56532A6-4BCF-4600-8501-20C4F9387AFE}"/>
               </a:ext>
             </a:extLst>
           </p:cNvPr>
@@ -10540,7 +10540,7 @@
           <p:cNvPr id="11" name="s9-takeaway-rule">
             <a:extLst xmlns:a="http://schemas.openxmlformats.org/drawingml/2006/main">
               <a:ext uri="{FF2B5EF4-FFF2-40B4-BE49-F238E27FC236}">
-                <a16:creationId xmlns:a16="http://schemas.microsoft.com/office/drawing/2014/main" id="{4E078353-0269-48B7-AC46-CC4E8B46C1B5}"/>
+                <a16:creationId xmlns:a16="http://schemas.microsoft.com/office/drawing/2014/main" id="{244607B2-BBD9-4D0A-A5E9-2CB6500057B0}"/>
               </a:ext>
             </a:extLst>
           </p:cNvPr>
@@ -10573,7 +10573,7 @@
           <p:cNvPr id="12" name="s9-takeaway">
             <a:extLst xmlns:a="http://schemas.openxmlformats.org/drawingml/2006/main">
               <a:ext uri="{FF2B5EF4-FFF2-40B4-BE49-F238E27FC236}">
-                <a16:creationId xmlns:a16="http://schemas.microsoft.com/office/drawing/2014/main" id="{32C9FFCA-4D9D-4A62-A50D-731D71ADD6E4}"/>
+                <a16:creationId xmlns:a16="http://schemas.microsoft.com/office/drawing/2014/main" id="{40B7F0C0-A676-4602-9E43-EC65A6310F0C}"/>
               </a:ext>
             </a:extLst>
           </p:cNvPr>
@@ -10629,7 +10629,7 @@
     </p:spTree>
     <p:extLst>
       <p:ext uri="{BB962C8B-B14F-4D97-AF65-F5344CB8AC3E}">
-        <p14:creationId xmlns:p14="http://schemas.microsoft.com/office/powerpoint/2010/main" val="951557188"/>
+        <p14:creationId xmlns:p14="http://schemas.microsoft.com/office/powerpoint/2010/main" val="49054061"/>
       </p:ext>
     </p:extLst>
   </p:cSld>
